--- a/output/wordlabs-assist-3day.pptx
+++ b/output/wordlabs-assist-3day.pptx
@@ -6102,7 +6102,7 @@
                 <a:ea typeface="Calibri" pitchFamily="34" charset="-122"/>
                 <a:cs typeface="Calibri" pitchFamily="34" charset="-120"/>
               </a:rPr>
-              <a:t> to every student who was struggling with the science experiment.</a:t>
+              <a:t> to the new student on the first day of school.</a:t>
             </a:r>
             <a:endParaRPr lang="en-US" sz="1800" dirty="0"/>
           </a:p>
@@ -7972,7 +7972,7 @@
                 <a:ea typeface="Calibri" pitchFamily="34" charset="-122"/>
                 <a:cs typeface="Calibri" pitchFamily="34" charset="-120"/>
               </a:rPr>
-              <a:t>a person who does something</a:t>
+              <a:t>person who does something</a:t>
             </a:r>
             <a:endParaRPr lang="en-US" sz="850" dirty="0"/>
           </a:p>
@@ -8957,7 +8957,7 @@
                 <a:ea typeface="Calibri" pitchFamily="34" charset="-122"/>
                 <a:cs typeface="Calibri" pitchFamily="34" charset="-120"/>
               </a:rPr>
-              <a:t>a person who does something</a:t>
+              <a:t>person who does something</a:t>
             </a:r>
             <a:endParaRPr lang="en-US" sz="850" dirty="0"/>
           </a:p>
@@ -10179,7 +10179,7 @@
                 <a:ea typeface="Calibri" pitchFamily="34" charset="-122"/>
                 <a:cs typeface="Calibri" pitchFamily="34" charset="-120"/>
               </a:rPr>
-              <a:t>a person who does something</a:t>
+              <a:t>person who does something</a:t>
             </a:r>
             <a:endParaRPr lang="en-US" sz="850" dirty="0"/>
           </a:p>
@@ -12717,7 +12717,7 @@
                 <a:ea typeface="Calibri" pitchFamily="34" charset="-122"/>
                 <a:cs typeface="Calibri" pitchFamily="34" charset="-120"/>
               </a:rPr>
-              <a:t>the state or quality of</a:t>
+              <a:t>state or quality of</a:t>
             </a:r>
             <a:endParaRPr lang="en-US" sz="850" dirty="0"/>
           </a:p>
@@ -13702,7 +13702,7 @@
                 <a:ea typeface="Calibri" pitchFamily="34" charset="-122"/>
                 <a:cs typeface="Calibri" pitchFamily="34" charset="-120"/>
               </a:rPr>
-              <a:t>the state or quality of</a:t>
+              <a:t>state or quality of</a:t>
             </a:r>
             <a:endParaRPr lang="en-US" sz="850" dirty="0"/>
           </a:p>
@@ -15189,7 +15189,7 @@
                 <a:ea typeface="Calibri" pitchFamily="34" charset="-122"/>
                 <a:cs typeface="Calibri" pitchFamily="34" charset="-120"/>
               </a:rPr>
-              <a:t>the state or quality of</a:t>
+              <a:t>state or quality of</a:t>
             </a:r>
             <a:endParaRPr lang="en-US" sz="850" dirty="0"/>
           </a:p>
@@ -17126,7 +17126,7 @@
                 <a:ea typeface="Trebuchet MS" pitchFamily="34" charset="-122"/>
                 <a:cs typeface="Trebuchet MS" pitchFamily="34" charset="-120"/>
               </a:rPr>
-              <a:t>1</a:t>
+              <a:t>2</a:t>
             </a:r>
             <a:pPr algn="ctr" indent="0" marL="0">
               <a:buNone/>
@@ -17140,7 +17140,7 @@
                 <a:ea typeface="Trebuchet MS" pitchFamily="34" charset="-122"/>
                 <a:cs typeface="Trebuchet MS" pitchFamily="34" charset="-120"/>
               </a:rPr>
-              <a:t>  punctuation mark</a:t>
+              <a:t>  punctuation marks</a:t>
             </a:r>
             <a:endParaRPr lang="en-US" sz="2800" dirty="0"/>
           </a:p>
@@ -17544,7 +17544,7 @@
                 <a:ea typeface="Calibri" pitchFamily="34" charset="-122"/>
                 <a:cs typeface="Calibri" pitchFamily="34" charset="-120"/>
               </a:rPr>
-              <a:t>The </a:t>
+              <a:t>The teacher was </a:t>
             </a:r>
             <a:pPr algn="l" indent="0" marL="0">
               <a:buNone/>
@@ -17561,7 +17561,7 @@
                 <a:ea typeface="Calibri" pitchFamily="34" charset="-122"/>
                 <a:cs typeface="Calibri" pitchFamily="34" charset="-120"/>
               </a:rPr>
-              <a:t>assistive</a:t>
+              <a:t>assisted</a:t>
             </a:r>
             <a:pPr algn="l" indent="0" marL="0">
               <a:buNone/>
@@ -17575,7 +17575,7 @@
                 <a:ea typeface="Calibri" pitchFamily="34" charset="-122"/>
                 <a:cs typeface="Calibri" pitchFamily="34" charset="-120"/>
               </a:rPr>
-              <a:t> technology was </a:t>
+              <a:t> by a volunteer, and their </a:t>
             </a:r>
             <a:pPr algn="l" indent="0" marL="0">
               <a:buNone/>
@@ -17592,7 +17592,7 @@
                 <a:ea typeface="Calibri" pitchFamily="34" charset="-122"/>
                 <a:cs typeface="Calibri" pitchFamily="34" charset="-120"/>
               </a:rPr>
-              <a:t>unassisted</a:t>
+              <a:t>assistive</a:t>
             </a:r>
             <a:pPr algn="l" indent="0" marL="0">
               <a:buNone/>
@@ -17606,118 +17606,215 @@
                 <a:ea typeface="Calibri" pitchFamily="34" charset="-122"/>
                 <a:cs typeface="Calibri" pitchFamily="34" charset="-120"/>
               </a:rPr>
-              <a:t> by any teacher, yet it kept </a:t>
-            </a:r>
+              <a:t> tools helped every student in the room.</a:t>
+            </a:r>
+            <a:endParaRPr lang="en-US" sz="1800" dirty="0"/>
+          </a:p>
+        </p:txBody>
+      </p:sp>
+      <p:sp>
+        <p:nvSpPr>
+          <p:cNvPr id="13" name="Shape 11"/>
+          <p:cNvSpPr/>
+          <p:nvPr/>
+        </p:nvSpPr>
+        <p:spPr>
+          <a:xfrm>
+            <a:off x="365760" y="2852928"/>
+            <a:ext cx="8412480" cy="475488"/>
+          </a:xfrm>
+          <a:prstGeom prst="rect">
+            <a:avLst>
+              <a:gd name="adj" fmla="val 15385"/>
+            </a:avLst>
+          </a:prstGeom>
+          <a:solidFill>
+            <a:srgbClr val="CCFBF1"/>
+          </a:solidFill>
+          <a:ln w="12700">
+            <a:solidFill>
+              <a:srgbClr val="0D9488"/>
+            </a:solidFill>
+            <a:prstDash val="solid"/>
+          </a:ln>
+        </p:spPr>
+      </p:sp>
+      <p:sp>
+        <p:nvSpPr>
+          <p:cNvPr id="14" name="Text 12"/>
+          <p:cNvSpPr/>
+          <p:nvPr/>
+        </p:nvSpPr>
+        <p:spPr>
+          <a:xfrm>
+            <a:off x="502920" y="2852928"/>
+            <a:ext cx="8229600" cy="475488"/>
+          </a:xfrm>
+          <a:prstGeom prst="rect">
+            <a:avLst/>
+          </a:prstGeom>
+          <a:noFill/>
+          <a:ln/>
+        </p:spPr>
+        <p:txBody>
+          <a:bodyPr wrap="square" rtlCol="0" anchor="ctr"/>
+          <a:lstStyle/>
+          <a:p>
             <a:pPr algn="l" indent="0" marL="0">
               <a:buNone/>
             </a:pPr>
             <a:r>
-              <a:rPr lang="en-US" sz="1800" b="1" dirty="0">
-                <a:solidFill>
-                  <a:srgbClr val="0D9488"/>
-                </a:solidFill>
-                <a:highlight>
-                  <a:srgbClr val="CCFBF1"/>
-                </a:highlight>
+              <a:rPr lang="en-US" sz="1200" b="1" dirty="0">
+                <a:solidFill>
+                  <a:srgbClr val="0F766E"/>
+                </a:solidFill>
                 <a:latin typeface="Calibri" pitchFamily="34" charset="0"/>
                 <a:ea typeface="Calibri" pitchFamily="34" charset="-122"/>
                 <a:cs typeface="Calibri" pitchFamily="34" charset="-120"/>
               </a:rPr>
-              <a:t>assisting</a:t>
-            </a:r>
-            <a:pPr algn="l" indent="0" marL="0">
-              <a:buNone/>
-            </a:pPr>
-            <a:r>
-              <a:rPr lang="en-US" sz="1800" dirty="0">
-                <a:solidFill>
-                  <a:srgbClr val="0F172A"/>
+              <a:t>Now rewrite each focus word below with space between letters — leave room for your breakdown.</a:t>
+            </a:r>
+            <a:endParaRPr lang="en-US" sz="1200" dirty="0"/>
+          </a:p>
+        </p:txBody>
+      </p:sp>
+      <p:sp>
+        <p:nvSpPr>
+          <p:cNvPr id="15" name="Shape 13"/>
+          <p:cNvSpPr/>
+          <p:nvPr/>
+        </p:nvSpPr>
+        <p:spPr>
+          <a:xfrm>
+            <a:off x="411480" y="3456432"/>
+            <a:ext cx="2499360" cy="1005840"/>
+          </a:xfrm>
+          <a:prstGeom prst="rect">
+            <a:avLst>
+              <a:gd name="adj" fmla="val 7273"/>
+            </a:avLst>
+          </a:prstGeom>
+          <a:solidFill>
+            <a:srgbClr val="F8FAFC"/>
+          </a:solidFill>
+          <a:ln w="12700">
+            <a:solidFill>
+              <a:srgbClr val="E2E8F0"/>
+            </a:solidFill>
+            <a:prstDash val="solid"/>
+          </a:ln>
+        </p:spPr>
+      </p:sp>
+      <p:sp>
+        <p:nvSpPr>
+          <p:cNvPr id="16" name="Shape 14"/>
+          <p:cNvSpPr/>
+          <p:nvPr/>
+        </p:nvSpPr>
+        <p:spPr>
+          <a:xfrm>
+            <a:off x="411480" y="3977640"/>
+            <a:ext cx="2499360" cy="0"/>
+          </a:xfrm>
+          <a:prstGeom prst="line">
+            <a:avLst/>
+          </a:prstGeom>
+          <a:noFill/>
+          <a:ln w="12700">
+            <a:solidFill>
+              <a:srgbClr val="E2E8F0"/>
+            </a:solidFill>
+            <a:prstDash val="dash"/>
+          </a:ln>
+        </p:spPr>
+      </p:sp>
+      <p:sp>
+        <p:nvSpPr>
+          <p:cNvPr id="17" name="Text 15"/>
+          <p:cNvSpPr/>
+          <p:nvPr/>
+        </p:nvSpPr>
+        <p:spPr>
+          <a:xfrm>
+            <a:off x="411480" y="3456432"/>
+            <a:ext cx="2499360" cy="502920"/>
+          </a:xfrm>
+          <a:prstGeom prst="rect">
+            <a:avLst/>
+          </a:prstGeom>
+          <a:noFill/>
+          <a:ln/>
+        </p:spPr>
+        <p:txBody>
+          <a:bodyPr wrap="square" lIns="0" tIns="0" rIns="0" bIns="0" rtlCol="0" anchor="ctr"/>
+          <a:lstStyle/>
+          <a:p>
+            <a:pPr algn="ctr" indent="0" marL="0">
+              <a:buNone/>
+            </a:pPr>
+            <a:r>
+              <a:rPr lang="en-US" sz="1400" b="1" dirty="0">
+                <a:solidFill>
+                  <a:srgbClr val="0D9488"/>
+                </a:solidFill>
+                <a:latin typeface="Trebuchet MS" pitchFamily="34" charset="0"/>
+                <a:ea typeface="Trebuchet MS" pitchFamily="34" charset="-122"/>
+                <a:cs typeface="Trebuchet MS" pitchFamily="34" charset="-120"/>
+              </a:rPr>
+              <a:t>assisted</a:t>
+            </a:r>
+            <a:endParaRPr lang="en-US" sz="1400" dirty="0"/>
+          </a:p>
+        </p:txBody>
+      </p:sp>
+      <p:sp>
+        <p:nvSpPr>
+          <p:cNvPr id="18" name="Text 16"/>
+          <p:cNvSpPr/>
+          <p:nvPr/>
+        </p:nvSpPr>
+        <p:spPr>
+          <a:xfrm>
+            <a:off x="411480" y="4005072"/>
+            <a:ext cx="2499360" cy="457200"/>
+          </a:xfrm>
+          <a:prstGeom prst="rect">
+            <a:avLst/>
+          </a:prstGeom>
+          <a:noFill/>
+          <a:ln/>
+        </p:spPr>
+        <p:txBody>
+          <a:bodyPr wrap="square" lIns="0" tIns="0" rIns="0" bIns="0" rtlCol="0" anchor="ctr"/>
+          <a:lstStyle/>
+          <a:p>
+            <a:pPr algn="ctr" indent="0" marL="0">
+              <a:buNone/>
+            </a:pPr>
+            <a:r>
+              <a:rPr lang="en-US" sz="900" i="1" dirty="0">
+                <a:solidFill>
+                  <a:srgbClr val="475569"/>
                 </a:solidFill>
                 <a:latin typeface="Calibri" pitchFamily="34" charset="0"/>
                 <a:ea typeface="Calibri" pitchFamily="34" charset="-122"/>
                 <a:cs typeface="Calibri" pitchFamily="34" charset="-120"/>
               </a:rPr>
-              <a:t> the students throughout the whole school day.</a:t>
-            </a:r>
-            <a:endParaRPr lang="en-US" sz="1800" dirty="0"/>
-          </a:p>
-        </p:txBody>
-      </p:sp>
-      <p:sp>
-        <p:nvSpPr>
-          <p:cNvPr id="13" name="Shape 11"/>
-          <p:cNvSpPr/>
-          <p:nvPr/>
-        </p:nvSpPr>
-        <p:spPr>
-          <a:xfrm>
-            <a:off x="365760" y="2852928"/>
-            <a:ext cx="8412480" cy="475488"/>
-          </a:xfrm>
-          <a:prstGeom prst="rect">
-            <a:avLst>
-              <a:gd name="adj" fmla="val 15385"/>
-            </a:avLst>
-          </a:prstGeom>
-          <a:solidFill>
-            <a:srgbClr val="CCFBF1"/>
-          </a:solidFill>
-          <a:ln w="12700">
-            <a:solidFill>
-              <a:srgbClr val="0D9488"/>
-            </a:solidFill>
-            <a:prstDash val="solid"/>
-          </a:ln>
-        </p:spPr>
-      </p:sp>
-      <p:sp>
-        <p:nvSpPr>
-          <p:cNvPr id="14" name="Text 12"/>
-          <p:cNvSpPr/>
-          <p:nvPr/>
-        </p:nvSpPr>
-        <p:spPr>
-          <a:xfrm>
-            <a:off x="502920" y="2852928"/>
-            <a:ext cx="8229600" cy="475488"/>
-          </a:xfrm>
-          <a:prstGeom prst="rect">
-            <a:avLst/>
-          </a:prstGeom>
-          <a:noFill/>
-          <a:ln/>
-        </p:spPr>
-        <p:txBody>
-          <a:bodyPr wrap="square" rtlCol="0" anchor="ctr"/>
-          <a:lstStyle/>
-          <a:p>
-            <a:pPr algn="l" indent="0" marL="0">
-              <a:buNone/>
-            </a:pPr>
-            <a:r>
-              <a:rPr lang="en-US" sz="1200" b="1" dirty="0">
-                <a:solidFill>
-                  <a:srgbClr val="0F766E"/>
-                </a:solidFill>
-                <a:latin typeface="Calibri" pitchFamily="34" charset="0"/>
-                <a:ea typeface="Calibri" pitchFamily="34" charset="-122"/>
-                <a:cs typeface="Calibri" pitchFamily="34" charset="-120"/>
-              </a:rPr>
-              <a:t>Now rewrite each focus word below with space between letters — leave room for your breakdown.</a:t>
-            </a:r>
-            <a:endParaRPr lang="en-US" sz="1200" dirty="0"/>
-          </a:p>
-        </p:txBody>
-      </p:sp>
-      <p:sp>
-        <p:nvSpPr>
-          <p:cNvPr id="15" name="Shape 13"/>
-          <p:cNvSpPr/>
-          <p:nvPr/>
-        </p:nvSpPr>
-        <p:spPr>
-          <a:xfrm>
-            <a:off x="411480" y="3456432"/>
+              <a:t>write your breakdown below</a:t>
+            </a:r>
+            <a:endParaRPr lang="en-US" sz="900" dirty="0"/>
+          </a:p>
+        </p:txBody>
+      </p:sp>
+      <p:sp>
+        <p:nvSpPr>
+          <p:cNvPr id="19" name="Shape 17"/>
+          <p:cNvSpPr/>
+          <p:nvPr/>
+        </p:nvSpPr>
+        <p:spPr>
+          <a:xfrm>
+            <a:off x="3185160" y="3456432"/>
             <a:ext cx="2499360" cy="1005840"/>
           </a:xfrm>
           <a:prstGeom prst="rect">
@@ -17738,13 +17835,13 @@
       </p:sp>
       <p:sp>
         <p:nvSpPr>
-          <p:cNvPr id="16" name="Shape 14"/>
-          <p:cNvSpPr/>
-          <p:nvPr/>
-        </p:nvSpPr>
-        <p:spPr>
-          <a:xfrm>
-            <a:off x="411480" y="3977640"/>
+          <p:cNvPr id="20" name="Shape 18"/>
+          <p:cNvSpPr/>
+          <p:nvPr/>
+        </p:nvSpPr>
+        <p:spPr>
+          <a:xfrm>
+            <a:off x="3185160" y="3977640"/>
             <a:ext cx="2499360" cy="0"/>
           </a:xfrm>
           <a:prstGeom prst="line">
@@ -17761,13 +17858,13 @@
       </p:sp>
       <p:sp>
         <p:nvSpPr>
-          <p:cNvPr id="17" name="Text 15"/>
-          <p:cNvSpPr/>
-          <p:nvPr/>
-        </p:nvSpPr>
-        <p:spPr>
-          <a:xfrm>
-            <a:off x="411480" y="3456432"/>
+          <p:cNvPr id="21" name="Text 19"/>
+          <p:cNvSpPr/>
+          <p:nvPr/>
+        </p:nvSpPr>
+        <p:spPr>
+          <a:xfrm>
+            <a:off x="3185160" y="3456432"/>
             <a:ext cx="2499360" cy="502920"/>
           </a:xfrm>
           <a:prstGeom prst="rect">
@@ -17793,134 +17890,6 @@
                 <a:cs typeface="Trebuchet MS" pitchFamily="34" charset="-120"/>
               </a:rPr>
               <a:t>assistive</a:t>
-            </a:r>
-            <a:endParaRPr lang="en-US" sz="1400" dirty="0"/>
-          </a:p>
-        </p:txBody>
-      </p:sp>
-      <p:sp>
-        <p:nvSpPr>
-          <p:cNvPr id="18" name="Text 16"/>
-          <p:cNvSpPr/>
-          <p:nvPr/>
-        </p:nvSpPr>
-        <p:spPr>
-          <a:xfrm>
-            <a:off x="411480" y="4005072"/>
-            <a:ext cx="2499360" cy="457200"/>
-          </a:xfrm>
-          <a:prstGeom prst="rect">
-            <a:avLst/>
-          </a:prstGeom>
-          <a:noFill/>
-          <a:ln/>
-        </p:spPr>
-        <p:txBody>
-          <a:bodyPr wrap="square" lIns="0" tIns="0" rIns="0" bIns="0" rtlCol="0" anchor="ctr"/>
-          <a:lstStyle/>
-          <a:p>
-            <a:pPr algn="ctr" indent="0" marL="0">
-              <a:buNone/>
-            </a:pPr>
-            <a:r>
-              <a:rPr lang="en-US" sz="900" i="1" dirty="0">
-                <a:solidFill>
-                  <a:srgbClr val="475569"/>
-                </a:solidFill>
-                <a:latin typeface="Calibri" pitchFamily="34" charset="0"/>
-                <a:ea typeface="Calibri" pitchFamily="34" charset="-122"/>
-                <a:cs typeface="Calibri" pitchFamily="34" charset="-120"/>
-              </a:rPr>
-              <a:t>write your breakdown below</a:t>
-            </a:r>
-            <a:endParaRPr lang="en-US" sz="900" dirty="0"/>
-          </a:p>
-        </p:txBody>
-      </p:sp>
-      <p:sp>
-        <p:nvSpPr>
-          <p:cNvPr id="19" name="Shape 17"/>
-          <p:cNvSpPr/>
-          <p:nvPr/>
-        </p:nvSpPr>
-        <p:spPr>
-          <a:xfrm>
-            <a:off x="3185160" y="3456432"/>
-            <a:ext cx="2499360" cy="1005840"/>
-          </a:xfrm>
-          <a:prstGeom prst="rect">
-            <a:avLst>
-              <a:gd name="adj" fmla="val 7273"/>
-            </a:avLst>
-          </a:prstGeom>
-          <a:solidFill>
-            <a:srgbClr val="F8FAFC"/>
-          </a:solidFill>
-          <a:ln w="12700">
-            <a:solidFill>
-              <a:srgbClr val="E2E8F0"/>
-            </a:solidFill>
-            <a:prstDash val="solid"/>
-          </a:ln>
-        </p:spPr>
-      </p:sp>
-      <p:sp>
-        <p:nvSpPr>
-          <p:cNvPr id="20" name="Shape 18"/>
-          <p:cNvSpPr/>
-          <p:nvPr/>
-        </p:nvSpPr>
-        <p:spPr>
-          <a:xfrm>
-            <a:off x="3185160" y="3977640"/>
-            <a:ext cx="2499360" cy="0"/>
-          </a:xfrm>
-          <a:prstGeom prst="line">
-            <a:avLst/>
-          </a:prstGeom>
-          <a:noFill/>
-          <a:ln w="12700">
-            <a:solidFill>
-              <a:srgbClr val="E2E8F0"/>
-            </a:solidFill>
-            <a:prstDash val="dash"/>
-          </a:ln>
-        </p:spPr>
-      </p:sp>
-      <p:sp>
-        <p:nvSpPr>
-          <p:cNvPr id="21" name="Text 19"/>
-          <p:cNvSpPr/>
-          <p:nvPr/>
-        </p:nvSpPr>
-        <p:spPr>
-          <a:xfrm>
-            <a:off x="3185160" y="3456432"/>
-            <a:ext cx="2499360" cy="502920"/>
-          </a:xfrm>
-          <a:prstGeom prst="rect">
-            <a:avLst/>
-          </a:prstGeom>
-          <a:noFill/>
-          <a:ln/>
-        </p:spPr>
-        <p:txBody>
-          <a:bodyPr wrap="square" lIns="0" tIns="0" rIns="0" bIns="0" rtlCol="0" anchor="ctr"/>
-          <a:lstStyle/>
-          <a:p>
-            <a:pPr algn="ctr" indent="0" marL="0">
-              <a:buNone/>
-            </a:pPr>
-            <a:r>
-              <a:rPr lang="en-US" sz="1400" b="1" dirty="0">
-                <a:solidFill>
-                  <a:srgbClr val="0D9488"/>
-                </a:solidFill>
-                <a:latin typeface="Trebuchet MS" pitchFamily="34" charset="0"/>
-                <a:ea typeface="Trebuchet MS" pitchFamily="34" charset="-122"/>
-                <a:cs typeface="Trebuchet MS" pitchFamily="34" charset="-120"/>
-              </a:rPr>
-              <a:t>unassisted</a:t>
             </a:r>
             <a:endParaRPr lang="en-US" sz="1400" dirty="0"/>
           </a:p>
@@ -18518,7 +18487,7 @@
                 <a:ea typeface="Trebuchet MS" pitchFamily="34" charset="-122"/>
                 <a:cs typeface="Trebuchet MS" pitchFamily="34" charset="-120"/>
               </a:rPr>
-              <a:t>assistive</a:t>
+              <a:t>assisted</a:t>
             </a:r>
             <a:endParaRPr lang="en-US" sz="2800" dirty="0"/>
           </a:p>
@@ -19345,7 +19314,7 @@
                 <a:ea typeface="Trebuchet MS" pitchFamily="34" charset="-122"/>
                 <a:cs typeface="Trebuchet MS" pitchFamily="34" charset="-120"/>
               </a:rPr>
-              <a:t>assistive</a:t>
+              <a:t>assisted</a:t>
             </a:r>
             <a:endParaRPr lang="en-US" sz="2800" dirty="0"/>
           </a:p>
@@ -19596,7 +19565,7 @@
                 <a:ea typeface="Trebuchet MS" pitchFamily="34" charset="-122"/>
                 <a:cs typeface="Trebuchet MS" pitchFamily="34" charset="-120"/>
               </a:rPr>
-              <a:t>ive</a:t>
+              <a:t>ed</a:t>
             </a:r>
             <a:endParaRPr lang="en-US" sz="1300" dirty="0"/>
           </a:p>
@@ -19635,7 +19604,7 @@
                 <a:ea typeface="Calibri" pitchFamily="34" charset="-122"/>
                 <a:cs typeface="Calibri" pitchFamily="34" charset="-120"/>
               </a:rPr>
-              <a:t>having the quality of</a:t>
+              <a:t>past tense</a:t>
             </a:r>
             <a:endParaRPr lang="en-US" sz="850" dirty="0"/>
           </a:p>
@@ -20330,7 +20299,7 @@
                 <a:ea typeface="Trebuchet MS" pitchFamily="34" charset="-122"/>
                 <a:cs typeface="Trebuchet MS" pitchFamily="34" charset="-120"/>
               </a:rPr>
-              <a:t>assistive</a:t>
+              <a:t>assisted</a:t>
             </a:r>
             <a:endParaRPr lang="en-US" sz="2800" dirty="0"/>
           </a:p>
@@ -20581,7 +20550,7 @@
                 <a:ea typeface="Trebuchet MS" pitchFamily="34" charset="-122"/>
                 <a:cs typeface="Trebuchet MS" pitchFamily="34" charset="-120"/>
               </a:rPr>
-              <a:t>ive</a:t>
+              <a:t>ed</a:t>
             </a:r>
             <a:endParaRPr lang="en-US" sz="1300" dirty="0"/>
           </a:p>
@@ -20620,7 +20589,7 @@
                 <a:ea typeface="Calibri" pitchFamily="34" charset="-122"/>
                 <a:cs typeface="Calibri" pitchFamily="34" charset="-120"/>
               </a:rPr>
-              <a:t>having the quality of</a:t>
+              <a:t>past tense</a:t>
             </a:r>
             <a:endParaRPr lang="en-US" sz="850" dirty="0"/>
           </a:p>
@@ -20989,7 +20958,7 @@
                 <a:ea typeface="Trebuchet MS" pitchFamily="34" charset="-122"/>
                 <a:cs typeface="Trebuchet MS" pitchFamily="34" charset="-120"/>
               </a:rPr>
-              <a:t>tive</a:t>
+              <a:t>ted</a:t>
             </a:r>
             <a:endParaRPr lang="en-US" sz="1400" dirty="0"/>
           </a:p>
@@ -21552,7 +21521,7 @@
                 <a:ea typeface="Trebuchet MS" pitchFamily="34" charset="-122"/>
                 <a:cs typeface="Trebuchet MS" pitchFamily="34" charset="-120"/>
               </a:rPr>
-              <a:t>assistive</a:t>
+              <a:t>assisted</a:t>
             </a:r>
             <a:endParaRPr lang="en-US" sz="2800" dirty="0"/>
           </a:p>
@@ -21803,7 +21772,7 @@
                 <a:ea typeface="Trebuchet MS" pitchFamily="34" charset="-122"/>
                 <a:cs typeface="Trebuchet MS" pitchFamily="34" charset="-120"/>
               </a:rPr>
-              <a:t>ive</a:t>
+              <a:t>ed</a:t>
             </a:r>
             <a:endParaRPr lang="en-US" sz="1300" dirty="0"/>
           </a:p>
@@ -21842,7 +21811,7 @@
                 <a:ea typeface="Calibri" pitchFamily="34" charset="-122"/>
                 <a:cs typeface="Calibri" pitchFamily="34" charset="-120"/>
               </a:rPr>
-              <a:t>having the quality of</a:t>
+              <a:t>past tense</a:t>
             </a:r>
             <a:endParaRPr lang="en-US" sz="850" dirty="0"/>
           </a:p>
@@ -22211,7 +22180,7 @@
                 <a:ea typeface="Trebuchet MS" pitchFamily="34" charset="-122"/>
                 <a:cs typeface="Trebuchet MS" pitchFamily="34" charset="-120"/>
               </a:rPr>
-              <a:t>tive</a:t>
+              <a:t>ted</a:t>
             </a:r>
             <a:endParaRPr lang="en-US" sz="1400" dirty="0"/>
           </a:p>
@@ -22318,7 +22287,7 @@
         </p:nvSpPr>
         <p:spPr>
           <a:xfrm>
-            <a:off x="2023872" y="4169664"/>
+            <a:off x="2124837" y="4169664"/>
             <a:ext cx="685800" cy="475488"/>
           </a:xfrm>
           <a:prstGeom prst="rect">
@@ -22345,7 +22314,7 @@
         </p:nvSpPr>
         <p:spPr>
           <a:xfrm>
-            <a:off x="2023872" y="4169664"/>
+            <a:off x="2124837" y="4169664"/>
             <a:ext cx="685800" cy="475488"/>
           </a:xfrm>
           <a:prstGeom prst="rect">
@@ -22384,7 +22353,7 @@
         </p:nvSpPr>
         <p:spPr>
           <a:xfrm>
-            <a:off x="2831592" y="4169664"/>
+            <a:off x="3033522" y="4169664"/>
             <a:ext cx="685800" cy="475488"/>
           </a:xfrm>
           <a:prstGeom prst="rect">
@@ -22411,7 +22380,7 @@
         </p:nvSpPr>
         <p:spPr>
           <a:xfrm>
-            <a:off x="2831592" y="4169664"/>
+            <a:off x="3033522" y="4169664"/>
             <a:ext cx="685800" cy="475488"/>
           </a:xfrm>
           <a:prstGeom prst="rect">
@@ -22450,7 +22419,7 @@
         </p:nvSpPr>
         <p:spPr>
           <a:xfrm>
-            <a:off x="3639312" y="4169664"/>
+            <a:off x="3942207" y="4169664"/>
             <a:ext cx="685800" cy="475488"/>
           </a:xfrm>
           <a:prstGeom prst="rect">
@@ -22477,7 +22446,7 @@
         </p:nvSpPr>
         <p:spPr>
           <a:xfrm>
-            <a:off x="3639312" y="4169664"/>
+            <a:off x="3942207" y="4169664"/>
             <a:ext cx="685800" cy="475488"/>
           </a:xfrm>
           <a:prstGeom prst="rect">
@@ -22516,7 +22485,7 @@
         </p:nvSpPr>
         <p:spPr>
           <a:xfrm>
-            <a:off x="4447032" y="4169664"/>
+            <a:off x="4850892" y="4169664"/>
             <a:ext cx="685800" cy="475488"/>
           </a:xfrm>
           <a:prstGeom prst="rect">
@@ -22543,7 +22512,7 @@
         </p:nvSpPr>
         <p:spPr>
           <a:xfrm>
-            <a:off x="4447032" y="4169664"/>
+            <a:off x="4850892" y="4169664"/>
             <a:ext cx="685800" cy="475488"/>
           </a:xfrm>
           <a:prstGeom prst="rect">
@@ -22582,7 +22551,7 @@
         </p:nvSpPr>
         <p:spPr>
           <a:xfrm>
-            <a:off x="5254752" y="4169664"/>
+            <a:off x="5759577" y="4169664"/>
             <a:ext cx="685800" cy="475488"/>
           </a:xfrm>
           <a:prstGeom prst="rect">
@@ -22609,7 +22578,7 @@
         </p:nvSpPr>
         <p:spPr>
           <a:xfrm>
-            <a:off x="5254752" y="4169664"/>
+            <a:off x="5759577" y="4169664"/>
             <a:ext cx="685800" cy="475488"/>
           </a:xfrm>
           <a:prstGeom prst="rect">
@@ -22648,7 +22617,7 @@
         </p:nvSpPr>
         <p:spPr>
           <a:xfrm>
-            <a:off x="6062472" y="4169664"/>
+            <a:off x="6668262" y="4169664"/>
             <a:ext cx="685800" cy="475488"/>
           </a:xfrm>
           <a:prstGeom prst="rect">
@@ -22675,7 +22644,7 @@
         </p:nvSpPr>
         <p:spPr>
           <a:xfrm>
-            <a:off x="6062472" y="4169664"/>
+            <a:off x="6668262" y="4169664"/>
             <a:ext cx="685800" cy="475488"/>
           </a:xfrm>
           <a:prstGeom prst="rect">
@@ -22700,7 +22669,7 @@
                 <a:ea typeface="Trebuchet MS" pitchFamily="34" charset="-122"/>
                 <a:cs typeface="Trebuchet MS" pitchFamily="34" charset="-120"/>
               </a:rPr>
-              <a:t>i</a:t>
+              <a:t>e</a:t>
             </a:r>
             <a:endParaRPr lang="en-US" sz="900" dirty="0"/>
           </a:p>
@@ -22714,7 +22683,7 @@
         </p:nvSpPr>
         <p:spPr>
           <a:xfrm>
-            <a:off x="6870192" y="4169664"/>
+            <a:off x="7576947" y="4169664"/>
             <a:ext cx="685800" cy="475488"/>
           </a:xfrm>
           <a:prstGeom prst="rect">
@@ -22741,7 +22710,7 @@
         </p:nvSpPr>
         <p:spPr>
           <a:xfrm>
-            <a:off x="6870192" y="4169664"/>
+            <a:off x="7576947" y="4169664"/>
             <a:ext cx="685800" cy="475488"/>
           </a:xfrm>
           <a:prstGeom prst="rect">
@@ -22766,73 +22735,7 @@
                 <a:ea typeface="Trebuchet MS" pitchFamily="34" charset="-122"/>
                 <a:cs typeface="Trebuchet MS" pitchFamily="34" charset="-120"/>
               </a:rPr>
-              <a:t>v</a:t>
-            </a:r>
-            <a:endParaRPr lang="en-US" sz="900" dirty="0"/>
-          </a:p>
-        </p:txBody>
-      </p:sp>
-      <p:sp>
-        <p:nvSpPr>
-          <p:cNvPr id="50" name="Shape 48"/>
-          <p:cNvSpPr/>
-          <p:nvPr/>
-        </p:nvSpPr>
-        <p:spPr>
-          <a:xfrm>
-            <a:off x="7677912" y="4169664"/>
-            <a:ext cx="685800" cy="475488"/>
-          </a:xfrm>
-          <a:prstGeom prst="rect">
-            <a:avLst>
-              <a:gd name="adj" fmla="val 7692"/>
-            </a:avLst>
-          </a:prstGeom>
-          <a:solidFill>
-            <a:srgbClr val="FFFFFF"/>
-          </a:solidFill>
-          <a:ln w="12700">
-            <a:solidFill>
-              <a:srgbClr val="DB2777"/>
-            </a:solidFill>
-            <a:prstDash val="solid"/>
-          </a:ln>
-        </p:spPr>
-      </p:sp>
-      <p:sp>
-        <p:nvSpPr>
-          <p:cNvPr id="51" name="Text 49"/>
-          <p:cNvSpPr/>
-          <p:nvPr/>
-        </p:nvSpPr>
-        <p:spPr>
-          <a:xfrm>
-            <a:off x="7677912" y="4169664"/>
-            <a:ext cx="685800" cy="475488"/>
-          </a:xfrm>
-          <a:prstGeom prst="rect">
-            <a:avLst/>
-          </a:prstGeom>
-          <a:noFill/>
-          <a:ln/>
-        </p:spPr>
-        <p:txBody>
-          <a:bodyPr wrap="square" lIns="0" tIns="0" rIns="0" bIns="0" rtlCol="0" anchor="ctr"/>
-          <a:lstStyle/>
-          <a:p>
-            <a:pPr algn="ctr" indent="0" marL="0">
-              <a:buNone/>
-            </a:pPr>
-            <a:r>
-              <a:rPr lang="en-US" sz="900" b="1" dirty="0">
-                <a:solidFill>
-                  <a:srgbClr val="9D174D"/>
-                </a:solidFill>
-                <a:latin typeface="Trebuchet MS" pitchFamily="34" charset="0"/>
-                <a:ea typeface="Trebuchet MS" pitchFamily="34" charset="-122"/>
-                <a:cs typeface="Trebuchet MS" pitchFamily="34" charset="-120"/>
-              </a:rPr>
-              <a:t>e</a:t>
+              <a:t>d</a:t>
             </a:r>
             <a:endParaRPr lang="en-US" sz="900" dirty="0"/>
           </a:p>
@@ -23263,7 +23166,7 @@
                 <a:ea typeface="Trebuchet MS" pitchFamily="34" charset="-122"/>
                 <a:cs typeface="Trebuchet MS" pitchFamily="34" charset="-120"/>
               </a:rPr>
-              <a:t>unassisted</a:t>
+              <a:t>assistive</a:t>
             </a:r>
             <a:endParaRPr lang="en-US" sz="2800" dirty="0"/>
           </a:p>
@@ -24090,7 +23993,7 @@
                 <a:ea typeface="Trebuchet MS" pitchFamily="34" charset="-122"/>
                 <a:cs typeface="Trebuchet MS" pitchFamily="34" charset="-120"/>
               </a:rPr>
-              <a:t>unassisted</a:t>
+              <a:t>assistive</a:t>
             </a:r>
             <a:endParaRPr lang="en-US" sz="2800" dirty="0"/>
           </a:p>
@@ -24170,7 +24073,7 @@
         </p:nvSpPr>
         <p:spPr>
           <a:xfrm>
-            <a:off x="2221992" y="2258568"/>
+            <a:off x="2938272" y="2258568"/>
             <a:ext cx="1828800" cy="292608"/>
           </a:xfrm>
           <a:prstGeom prst="rect">
@@ -24179,11 +24082,11 @@
             </a:avLst>
           </a:prstGeom>
           <a:solidFill>
-            <a:srgbClr val="DDD6FE"/>
+            <a:srgbClr val="CCFBF1"/>
           </a:solidFill>
           <a:ln w="19050">
             <a:solidFill>
-              <a:srgbClr val="7C3AED"/>
+              <a:srgbClr val="0D9488"/>
             </a:solidFill>
             <a:prstDash val="solid"/>
           </a:ln>
@@ -24204,7 +24107,7 @@
         </p:nvSpPr>
         <p:spPr>
           <a:xfrm>
-            <a:off x="2221992" y="2258568"/>
+            <a:off x="2938272" y="2258568"/>
             <a:ext cx="1828800" cy="292608"/>
           </a:xfrm>
           <a:prstGeom prst="rect">
@@ -24223,13 +24126,13 @@
             <a:r>
               <a:rPr lang="en-US" sz="1300" b="1" dirty="0">
                 <a:solidFill>
-                  <a:srgbClr val="4C1D95"/>
+                  <a:srgbClr val="0F766E"/>
                 </a:solidFill>
                 <a:latin typeface="Trebuchet MS" pitchFamily="34" charset="0"/>
                 <a:ea typeface="Trebuchet MS" pitchFamily="34" charset="-122"/>
                 <a:cs typeface="Trebuchet MS" pitchFamily="34" charset="-120"/>
               </a:rPr>
-              <a:t>un</a:t>
+              <a:t>assist</a:t>
             </a:r>
             <a:endParaRPr lang="en-US" sz="1300" dirty="0"/>
           </a:p>
@@ -24243,7 +24146,7 @@
         </p:nvSpPr>
         <p:spPr>
           <a:xfrm>
-            <a:off x="2221992" y="2569464"/>
+            <a:off x="2938272" y="2569464"/>
             <a:ext cx="1828800" cy="201168"/>
           </a:xfrm>
           <a:prstGeom prst="rect">
@@ -24268,7 +24171,7 @@
                 <a:ea typeface="Calibri" pitchFamily="34" charset="-122"/>
                 <a:cs typeface="Calibri" pitchFamily="34" charset="-120"/>
               </a:rPr>
-              <a:t>not or without</a:t>
+              <a:t>to help or support</a:t>
             </a:r>
             <a:endParaRPr lang="en-US" sz="850" dirty="0"/>
           </a:p>
@@ -24282,7 +24185,7 @@
         </p:nvSpPr>
         <p:spPr>
           <a:xfrm>
-            <a:off x="4370832" y="2258568"/>
+            <a:off x="5803392" y="2258568"/>
             <a:ext cx="1828800" cy="292608"/>
           </a:xfrm>
           <a:prstGeom prst="rect">
@@ -24291,11 +24194,11 @@
             </a:avLst>
           </a:prstGeom>
           <a:solidFill>
-            <a:srgbClr val="CCFBF1"/>
+            <a:srgbClr val="FCE7F3"/>
           </a:solidFill>
           <a:ln w="19050">
             <a:solidFill>
-              <a:srgbClr val="0D9488"/>
+              <a:srgbClr val="DB2777"/>
             </a:solidFill>
             <a:prstDash val="solid"/>
           </a:ln>
@@ -24316,7 +24219,7 @@
         </p:nvSpPr>
         <p:spPr>
           <a:xfrm>
-            <a:off x="4370832" y="2258568"/>
+            <a:off x="5803392" y="2258568"/>
             <a:ext cx="1828800" cy="292608"/>
           </a:xfrm>
           <a:prstGeom prst="rect">
@@ -24335,13 +24238,13 @@
             <a:r>
               <a:rPr lang="en-US" sz="1300" b="1" dirty="0">
                 <a:solidFill>
-                  <a:srgbClr val="0F766E"/>
+                  <a:srgbClr val="9D174D"/>
                 </a:solidFill>
                 <a:latin typeface="Trebuchet MS" pitchFamily="34" charset="0"/>
                 <a:ea typeface="Trebuchet MS" pitchFamily="34" charset="-122"/>
                 <a:cs typeface="Trebuchet MS" pitchFamily="34" charset="-120"/>
               </a:rPr>
-              <a:t>assist</a:t>
+              <a:t>ive</a:t>
             </a:r>
             <a:endParaRPr lang="en-US" sz="1300" dirty="0"/>
           </a:p>
@@ -24355,7 +24258,7 @@
         </p:nvSpPr>
         <p:spPr>
           <a:xfrm>
-            <a:off x="4370832" y="2569464"/>
+            <a:off x="5803392" y="2569464"/>
             <a:ext cx="1828800" cy="201168"/>
           </a:xfrm>
           <a:prstGeom prst="rect">
@@ -24380,7 +24283,7 @@
                 <a:ea typeface="Calibri" pitchFamily="34" charset="-122"/>
                 <a:cs typeface="Calibri" pitchFamily="34" charset="-120"/>
               </a:rPr>
-              <a:t>to help or support</a:t>
+              <a:t>having the quality of</a:t>
             </a:r>
             <a:endParaRPr lang="en-US" sz="850" dirty="0"/>
           </a:p>
@@ -24394,30 +24297,23 @@
         </p:nvSpPr>
         <p:spPr>
           <a:xfrm>
-            <a:off x="6519672" y="2258568"/>
-            <a:ext cx="1828800" cy="292608"/>
+            <a:off x="365760" y="3273552"/>
+            <a:ext cx="1371600" cy="658368"/>
           </a:xfrm>
           <a:prstGeom prst="rect">
             <a:avLst>
-              <a:gd name="adj" fmla="val 25000"/>
+              <a:gd name="adj" fmla="val 8333"/>
             </a:avLst>
           </a:prstGeom>
           <a:solidFill>
-            <a:srgbClr val="FCE7F3"/>
-          </a:solidFill>
-          <a:ln w="19050">
-            <a:solidFill>
-              <a:srgbClr val="DB2777"/>
-            </a:solidFill>
-            <a:prstDash val="solid"/>
-          </a:ln>
-          <a:effectLst>
-            <a:outerShdw sx="100000" sy="100000" kx="0" ky="0" algn="bl" rotWithShape="0" blurRad="101600" dist="38100" dir="8100000">
-              <a:srgbClr val="000000">
-                <a:alpha val="12000"/>
-              </a:srgbClr>
-            </a:outerShdw>
-          </a:effectLst>
+            <a:srgbClr val="E2E8F0"/>
+          </a:solidFill>
+          <a:ln w="12700">
+            <a:solidFill>
+              <a:srgbClr val="E2E8F0"/>
+            </a:solidFill>
+            <a:prstDash val="solid"/>
+          </a:ln>
         </p:spPr>
       </p:sp>
       <p:sp>
@@ -24428,90 +24324,117 @@
         </p:nvSpPr>
         <p:spPr>
           <a:xfrm>
-            <a:off x="6519672" y="2258568"/>
-            <a:ext cx="1828800" cy="292608"/>
-          </a:xfrm>
-          <a:prstGeom prst="rect">
-            <a:avLst/>
-          </a:prstGeom>
-          <a:noFill/>
-          <a:ln/>
-        </p:spPr>
-        <p:txBody>
-          <a:bodyPr wrap="square" lIns="0" tIns="0" rIns="0" bIns="0" rtlCol="0" anchor="ctr"/>
-          <a:lstStyle/>
-          <a:p>
-            <a:pPr algn="ctr" indent="0" marL="0">
-              <a:buNone/>
-            </a:pPr>
-            <a:r>
-              <a:rPr lang="en-US" sz="1300" b="1" dirty="0">
-                <a:solidFill>
-                  <a:srgbClr val="9D174D"/>
+            <a:off x="365760" y="3273552"/>
+            <a:ext cx="1371600" cy="658368"/>
+          </a:xfrm>
+          <a:prstGeom prst="rect">
+            <a:avLst/>
+          </a:prstGeom>
+          <a:noFill/>
+          <a:ln/>
+        </p:spPr>
+        <p:txBody>
+          <a:bodyPr wrap="square" lIns="0" tIns="0" rIns="0" bIns="0" rtlCol="0" anchor="ctr"/>
+          <a:lstStyle/>
+          <a:p>
+            <a:pPr algn="ctr" indent="0" marL="0">
+              <a:buNone/>
+            </a:pPr>
+            <a:r>
+              <a:rPr lang="en-US" sz="1100" b="1" dirty="0">
+                <a:solidFill>
+                  <a:srgbClr val="475569"/>
                 </a:solidFill>
                 <a:latin typeface="Trebuchet MS" pitchFamily="34" charset="0"/>
                 <a:ea typeface="Trebuchet MS" pitchFamily="34" charset="-122"/>
                 <a:cs typeface="Trebuchet MS" pitchFamily="34" charset="-120"/>
               </a:rPr>
-              <a:t>ed</a:t>
-            </a:r>
-            <a:endParaRPr lang="en-US" sz="1300" dirty="0"/>
-          </a:p>
-        </p:txBody>
-      </p:sp>
-      <p:sp>
-        <p:nvSpPr>
-          <p:cNvPr id="24" name="Text 22"/>
-          <p:cNvSpPr/>
-          <p:nvPr/>
-        </p:nvSpPr>
-        <p:spPr>
-          <a:xfrm>
-            <a:off x="6519672" y="2569464"/>
-            <a:ext cx="1828800" cy="201168"/>
-          </a:xfrm>
-          <a:prstGeom prst="rect">
-            <a:avLst/>
-          </a:prstGeom>
-          <a:noFill/>
-          <a:ln/>
-        </p:spPr>
-        <p:txBody>
-          <a:bodyPr wrap="square" lIns="0" tIns="0" rIns="0" bIns="0" rtlCol="0" anchor="t"/>
-          <a:lstStyle/>
-          <a:p>
-            <a:pPr algn="ctr" indent="0" marL="0">
-              <a:buNone/>
-            </a:pPr>
-            <a:r>
-              <a:rPr lang="en-US" sz="850" dirty="0">
-                <a:solidFill>
-                  <a:srgbClr val="475569"/>
+              <a:t>Syllables</a:t>
+            </a:r>
+            <a:endParaRPr lang="en-US" sz="1100" dirty="0"/>
+          </a:p>
+        </p:txBody>
+      </p:sp>
+      <p:sp>
+        <p:nvSpPr>
+          <p:cNvPr id="24" name="Shape 22"/>
+          <p:cNvSpPr/>
+          <p:nvPr/>
+        </p:nvSpPr>
+        <p:spPr>
+          <a:xfrm>
+            <a:off x="1874520" y="3273552"/>
+            <a:ext cx="6903720" cy="658368"/>
+          </a:xfrm>
+          <a:prstGeom prst="rect">
+            <a:avLst>
+              <a:gd name="adj" fmla="val 8333"/>
+            </a:avLst>
+          </a:prstGeom>
+          <a:solidFill>
+            <a:srgbClr val="F8FAFC"/>
+          </a:solidFill>
+          <a:ln w="12700">
+            <a:solidFill>
+              <a:srgbClr val="E2E8F0"/>
+            </a:solidFill>
+            <a:prstDash val="dash"/>
+          </a:ln>
+        </p:spPr>
+      </p:sp>
+      <p:sp>
+        <p:nvSpPr>
+          <p:cNvPr id="25" name="Text 23"/>
+          <p:cNvSpPr/>
+          <p:nvPr/>
+        </p:nvSpPr>
+        <p:spPr>
+          <a:xfrm>
+            <a:off x="1874520" y="3273552"/>
+            <a:ext cx="6903720" cy="658368"/>
+          </a:xfrm>
+          <a:prstGeom prst="rect">
+            <a:avLst/>
+          </a:prstGeom>
+          <a:noFill/>
+          <a:ln/>
+        </p:spPr>
+        <p:txBody>
+          <a:bodyPr wrap="square" rtlCol="0" anchor="ctr"/>
+          <a:lstStyle/>
+          <a:p>
+            <a:pPr algn="ctr" indent="0" marL="0">
+              <a:buNone/>
+            </a:pPr>
+            <a:r>
+              <a:rPr lang="en-US" sz="1100" i="1" dirty="0">
+                <a:solidFill>
+                  <a:srgbClr val="CBD5E1"/>
                 </a:solidFill>
                 <a:latin typeface="Calibri" pitchFamily="34" charset="0"/>
                 <a:ea typeface="Calibri" pitchFamily="34" charset="-122"/>
                 <a:cs typeface="Calibri" pitchFamily="34" charset="-120"/>
               </a:rPr>
-              <a:t>past tense or done</a:t>
-            </a:r>
-            <a:endParaRPr lang="en-US" sz="850" dirty="0"/>
-          </a:p>
-        </p:txBody>
-      </p:sp>
-      <p:sp>
-        <p:nvSpPr>
-          <p:cNvPr id="25" name="Shape 23"/>
-          <p:cNvSpPr/>
-          <p:nvPr/>
-        </p:nvSpPr>
-        <p:spPr>
-          <a:xfrm>
-            <a:off x="365760" y="3273552"/>
-            <a:ext cx="1371600" cy="658368"/>
+              <a:t>Write here...</a:t>
+            </a:r>
+            <a:endParaRPr lang="en-US" sz="1100" dirty="0"/>
+          </a:p>
+        </p:txBody>
+      </p:sp>
+      <p:sp>
+        <p:nvSpPr>
+          <p:cNvPr id="26" name="Shape 24"/>
+          <p:cNvSpPr/>
+          <p:nvPr/>
+        </p:nvSpPr>
+        <p:spPr>
+          <a:xfrm>
+            <a:off x="365760" y="4096512"/>
+            <a:ext cx="1371600" cy="804672"/>
           </a:xfrm>
           <a:prstGeom prst="rect">
             <a:avLst>
-              <a:gd name="adj" fmla="val 8333"/>
+              <a:gd name="adj" fmla="val 6818"/>
             </a:avLst>
           </a:prstGeom>
           <a:solidFill>
@@ -24527,14 +24450,14 @@
       </p:sp>
       <p:sp>
         <p:nvSpPr>
-          <p:cNvPr id="26" name="Text 24"/>
-          <p:cNvSpPr/>
-          <p:nvPr/>
-        </p:nvSpPr>
-        <p:spPr>
-          <a:xfrm>
-            <a:off x="365760" y="3273552"/>
-            <a:ext cx="1371600" cy="658368"/>
+          <p:cNvPr id="27" name="Text 25"/>
+          <p:cNvSpPr/>
+          <p:nvPr/>
+        </p:nvSpPr>
+        <p:spPr>
+          <a:xfrm>
+            <a:off x="365760" y="4096512"/>
+            <a:ext cx="1371600" cy="804672"/>
           </a:xfrm>
           <a:prstGeom prst="rect">
             <a:avLst/>
@@ -24558,7 +24481,7 @@
                 <a:ea typeface="Trebuchet MS" pitchFamily="34" charset="-122"/>
                 <a:cs typeface="Trebuchet MS" pitchFamily="34" charset="-120"/>
               </a:rPr>
-              <a:t>Syllables</a:t>
+              <a:t>Phonemes</a:t>
             </a:r>
             <a:endParaRPr lang="en-US" sz="1100" dirty="0"/>
           </a:p>
@@ -24566,80 +24489,14 @@
       </p:sp>
       <p:sp>
         <p:nvSpPr>
-          <p:cNvPr id="27" name="Shape 25"/>
-          <p:cNvSpPr/>
-          <p:nvPr/>
-        </p:nvSpPr>
-        <p:spPr>
-          <a:xfrm>
-            <a:off x="1874520" y="3273552"/>
-            <a:ext cx="6903720" cy="658368"/>
-          </a:xfrm>
-          <a:prstGeom prst="rect">
-            <a:avLst>
-              <a:gd name="adj" fmla="val 8333"/>
-            </a:avLst>
-          </a:prstGeom>
-          <a:solidFill>
-            <a:srgbClr val="F8FAFC"/>
-          </a:solidFill>
-          <a:ln w="12700">
-            <a:solidFill>
-              <a:srgbClr val="E2E8F0"/>
-            </a:solidFill>
-            <a:prstDash val="dash"/>
-          </a:ln>
-        </p:spPr>
-      </p:sp>
-      <p:sp>
-        <p:nvSpPr>
-          <p:cNvPr id="28" name="Text 26"/>
-          <p:cNvSpPr/>
-          <p:nvPr/>
-        </p:nvSpPr>
-        <p:spPr>
-          <a:xfrm>
-            <a:off x="1874520" y="3273552"/>
-            <a:ext cx="6903720" cy="658368"/>
-          </a:xfrm>
-          <a:prstGeom prst="rect">
-            <a:avLst/>
-          </a:prstGeom>
-          <a:noFill/>
-          <a:ln/>
-        </p:spPr>
-        <p:txBody>
-          <a:bodyPr wrap="square" rtlCol="0" anchor="ctr"/>
-          <a:lstStyle/>
-          <a:p>
-            <a:pPr algn="ctr" indent="0" marL="0">
-              <a:buNone/>
-            </a:pPr>
-            <a:r>
-              <a:rPr lang="en-US" sz="1100" i="1" dirty="0">
-                <a:solidFill>
-                  <a:srgbClr val="CBD5E1"/>
-                </a:solidFill>
-                <a:latin typeface="Calibri" pitchFamily="34" charset="0"/>
-                <a:ea typeface="Calibri" pitchFamily="34" charset="-122"/>
-                <a:cs typeface="Calibri" pitchFamily="34" charset="-120"/>
-              </a:rPr>
-              <a:t>Write here...</a:t>
-            </a:r>
-            <a:endParaRPr lang="en-US" sz="1100" dirty="0"/>
-          </a:p>
-        </p:txBody>
-      </p:sp>
-      <p:sp>
-        <p:nvSpPr>
-          <p:cNvPr id="29" name="Shape 27"/>
-          <p:cNvSpPr/>
-          <p:nvPr/>
-        </p:nvSpPr>
-        <p:spPr>
-          <a:xfrm>
-            <a:off x="365760" y="4096512"/>
-            <a:ext cx="1371600" cy="804672"/>
+          <p:cNvPr id="28" name="Shape 26"/>
+          <p:cNvSpPr/>
+          <p:nvPr/>
+        </p:nvSpPr>
+        <p:spPr>
+          <a:xfrm>
+            <a:off x="1874520" y="4096512"/>
+            <a:ext cx="6903720" cy="804672"/>
           </a:xfrm>
           <a:prstGeom prst="rect">
             <a:avLst>
@@ -24647,85 +24504,19 @@
             </a:avLst>
           </a:prstGeom>
           <a:solidFill>
-            <a:srgbClr val="E2E8F0"/>
+            <a:srgbClr val="F8FAFC"/>
           </a:solidFill>
           <a:ln w="12700">
             <a:solidFill>
               <a:srgbClr val="E2E8F0"/>
             </a:solidFill>
-            <a:prstDash val="solid"/>
-          </a:ln>
-        </p:spPr>
-      </p:sp>
-      <p:sp>
-        <p:nvSpPr>
-          <p:cNvPr id="30" name="Text 28"/>
-          <p:cNvSpPr/>
-          <p:nvPr/>
-        </p:nvSpPr>
-        <p:spPr>
-          <a:xfrm>
-            <a:off x="365760" y="4096512"/>
-            <a:ext cx="1371600" cy="804672"/>
-          </a:xfrm>
-          <a:prstGeom prst="rect">
-            <a:avLst/>
-          </a:prstGeom>
-          <a:noFill/>
-          <a:ln/>
-        </p:spPr>
-        <p:txBody>
-          <a:bodyPr wrap="square" lIns="0" tIns="0" rIns="0" bIns="0" rtlCol="0" anchor="ctr"/>
-          <a:lstStyle/>
-          <a:p>
-            <a:pPr algn="ctr" indent="0" marL="0">
-              <a:buNone/>
-            </a:pPr>
-            <a:r>
-              <a:rPr lang="en-US" sz="1100" b="1" dirty="0">
-                <a:solidFill>
-                  <a:srgbClr val="475569"/>
-                </a:solidFill>
-                <a:latin typeface="Trebuchet MS" pitchFamily="34" charset="0"/>
-                <a:ea typeface="Trebuchet MS" pitchFamily="34" charset="-122"/>
-                <a:cs typeface="Trebuchet MS" pitchFamily="34" charset="-120"/>
-              </a:rPr>
-              <a:t>Phonemes</a:t>
-            </a:r>
-            <a:endParaRPr lang="en-US" sz="1100" dirty="0"/>
-          </a:p>
-        </p:txBody>
-      </p:sp>
-      <p:sp>
-        <p:nvSpPr>
-          <p:cNvPr id="31" name="Shape 29"/>
-          <p:cNvSpPr/>
-          <p:nvPr/>
-        </p:nvSpPr>
-        <p:spPr>
-          <a:xfrm>
-            <a:off x="1874520" y="4096512"/>
-            <a:ext cx="6903720" cy="804672"/>
-          </a:xfrm>
-          <a:prstGeom prst="rect">
-            <a:avLst>
-              <a:gd name="adj" fmla="val 6818"/>
-            </a:avLst>
-          </a:prstGeom>
-          <a:solidFill>
-            <a:srgbClr val="F8FAFC"/>
-          </a:solidFill>
-          <a:ln w="12700">
-            <a:solidFill>
-              <a:srgbClr val="E2E8F0"/>
-            </a:solidFill>
             <a:prstDash val="dash"/>
           </a:ln>
         </p:spPr>
       </p:sp>
       <p:sp>
         <p:nvSpPr>
-          <p:cNvPr id="32" name="Text 30"/>
+          <p:cNvPr id="29" name="Text 27"/>
           <p:cNvSpPr/>
           <p:nvPr/>
         </p:nvSpPr>
@@ -25906,7 +25697,7 @@
                 <a:ea typeface="Trebuchet MS" pitchFamily="34" charset="-122"/>
                 <a:cs typeface="Trebuchet MS" pitchFamily="34" charset="-120"/>
               </a:rPr>
-              <a:t>unassisted</a:t>
+              <a:t>assistive</a:t>
             </a:r>
             <a:endParaRPr lang="en-US" sz="2800" dirty="0"/>
           </a:p>
@@ -25986,7 +25777,7 @@
         </p:nvSpPr>
         <p:spPr>
           <a:xfrm>
-            <a:off x="2221992" y="2258568"/>
+            <a:off x="2938272" y="2258568"/>
             <a:ext cx="1828800" cy="292608"/>
           </a:xfrm>
           <a:prstGeom prst="rect">
@@ -25995,11 +25786,11 @@
             </a:avLst>
           </a:prstGeom>
           <a:solidFill>
-            <a:srgbClr val="DDD6FE"/>
+            <a:srgbClr val="CCFBF1"/>
           </a:solidFill>
           <a:ln w="19050">
             <a:solidFill>
-              <a:srgbClr val="7C3AED"/>
+              <a:srgbClr val="0D9488"/>
             </a:solidFill>
             <a:prstDash val="solid"/>
           </a:ln>
@@ -26020,7 +25811,7 @@
         </p:nvSpPr>
         <p:spPr>
           <a:xfrm>
-            <a:off x="2221992" y="2258568"/>
+            <a:off x="2938272" y="2258568"/>
             <a:ext cx="1828800" cy="292608"/>
           </a:xfrm>
           <a:prstGeom prst="rect">
@@ -26039,13 +25830,13 @@
             <a:r>
               <a:rPr lang="en-US" sz="1300" b="1" dirty="0">
                 <a:solidFill>
-                  <a:srgbClr val="4C1D95"/>
+                  <a:srgbClr val="0F766E"/>
                 </a:solidFill>
                 <a:latin typeface="Trebuchet MS" pitchFamily="34" charset="0"/>
                 <a:ea typeface="Trebuchet MS" pitchFamily="34" charset="-122"/>
                 <a:cs typeface="Trebuchet MS" pitchFamily="34" charset="-120"/>
               </a:rPr>
-              <a:t>un</a:t>
+              <a:t>assist</a:t>
             </a:r>
             <a:endParaRPr lang="en-US" sz="1300" dirty="0"/>
           </a:p>
@@ -26059,7 +25850,7 @@
         </p:nvSpPr>
         <p:spPr>
           <a:xfrm>
-            <a:off x="2221992" y="2569464"/>
+            <a:off x="2938272" y="2569464"/>
             <a:ext cx="1828800" cy="201168"/>
           </a:xfrm>
           <a:prstGeom prst="rect">
@@ -26084,7 +25875,7 @@
                 <a:ea typeface="Calibri" pitchFamily="34" charset="-122"/>
                 <a:cs typeface="Calibri" pitchFamily="34" charset="-120"/>
               </a:rPr>
-              <a:t>not or without</a:t>
+              <a:t>to help or support</a:t>
             </a:r>
             <a:endParaRPr lang="en-US" sz="850" dirty="0"/>
           </a:p>
@@ -26098,7 +25889,7 @@
         </p:nvSpPr>
         <p:spPr>
           <a:xfrm>
-            <a:off x="4370832" y="2258568"/>
+            <a:off x="5803392" y="2258568"/>
             <a:ext cx="1828800" cy="292608"/>
           </a:xfrm>
           <a:prstGeom prst="rect">
@@ -26107,11 +25898,11 @@
             </a:avLst>
           </a:prstGeom>
           <a:solidFill>
-            <a:srgbClr val="CCFBF1"/>
+            <a:srgbClr val="FCE7F3"/>
           </a:solidFill>
           <a:ln w="19050">
             <a:solidFill>
-              <a:srgbClr val="0D9488"/>
+              <a:srgbClr val="DB2777"/>
             </a:solidFill>
             <a:prstDash val="solid"/>
           </a:ln>
@@ -26132,7 +25923,7 @@
         </p:nvSpPr>
         <p:spPr>
           <a:xfrm>
-            <a:off x="4370832" y="2258568"/>
+            <a:off x="5803392" y="2258568"/>
             <a:ext cx="1828800" cy="292608"/>
           </a:xfrm>
           <a:prstGeom prst="rect">
@@ -26151,13 +25942,13 @@
             <a:r>
               <a:rPr lang="en-US" sz="1300" b="1" dirty="0">
                 <a:solidFill>
-                  <a:srgbClr val="0F766E"/>
+                  <a:srgbClr val="9D174D"/>
                 </a:solidFill>
                 <a:latin typeface="Trebuchet MS" pitchFamily="34" charset="0"/>
                 <a:ea typeface="Trebuchet MS" pitchFamily="34" charset="-122"/>
                 <a:cs typeface="Trebuchet MS" pitchFamily="34" charset="-120"/>
               </a:rPr>
-              <a:t>assist</a:t>
+              <a:t>ive</a:t>
             </a:r>
             <a:endParaRPr lang="en-US" sz="1300" dirty="0"/>
           </a:p>
@@ -26171,7 +25962,7 @@
         </p:nvSpPr>
         <p:spPr>
           <a:xfrm>
-            <a:off x="4370832" y="2569464"/>
+            <a:off x="5803392" y="2569464"/>
             <a:ext cx="1828800" cy="201168"/>
           </a:xfrm>
           <a:prstGeom prst="rect">
@@ -26196,7 +25987,7 @@
                 <a:ea typeface="Calibri" pitchFamily="34" charset="-122"/>
                 <a:cs typeface="Calibri" pitchFamily="34" charset="-120"/>
               </a:rPr>
-              <a:t>to help or support</a:t>
+              <a:t>having the quality of</a:t>
             </a:r>
             <a:endParaRPr lang="en-US" sz="850" dirty="0"/>
           </a:p>
@@ -26210,30 +26001,23 @@
         </p:nvSpPr>
         <p:spPr>
           <a:xfrm>
-            <a:off x="6519672" y="2258568"/>
-            <a:ext cx="1828800" cy="292608"/>
+            <a:off x="365760" y="3273552"/>
+            <a:ext cx="1371600" cy="658368"/>
           </a:xfrm>
           <a:prstGeom prst="rect">
             <a:avLst>
-              <a:gd name="adj" fmla="val 25000"/>
+              <a:gd name="adj" fmla="val 8333"/>
             </a:avLst>
           </a:prstGeom>
           <a:solidFill>
-            <a:srgbClr val="FCE7F3"/>
-          </a:solidFill>
-          <a:ln w="19050">
-            <a:solidFill>
-              <a:srgbClr val="DB2777"/>
-            </a:solidFill>
-            <a:prstDash val="solid"/>
-          </a:ln>
-          <a:effectLst>
-            <a:outerShdw sx="100000" sy="100000" kx="0" ky="0" algn="bl" rotWithShape="0" blurRad="101600" dist="38100" dir="8100000">
-              <a:srgbClr val="000000">
-                <a:alpha val="12000"/>
-              </a:srgbClr>
-            </a:outerShdw>
-          </a:effectLst>
+            <a:srgbClr val="E2E8F0"/>
+          </a:solidFill>
+          <a:ln w="12700">
+            <a:solidFill>
+              <a:srgbClr val="E2E8F0"/>
+            </a:solidFill>
+            <a:prstDash val="solid"/>
+          </a:ln>
         </p:spPr>
       </p:sp>
       <p:sp>
@@ -26244,86 +26028,47 @@
         </p:nvSpPr>
         <p:spPr>
           <a:xfrm>
-            <a:off x="6519672" y="2258568"/>
-            <a:ext cx="1828800" cy="292608"/>
-          </a:xfrm>
-          <a:prstGeom prst="rect">
-            <a:avLst/>
-          </a:prstGeom>
-          <a:noFill/>
-          <a:ln/>
-        </p:spPr>
-        <p:txBody>
-          <a:bodyPr wrap="square" lIns="0" tIns="0" rIns="0" bIns="0" rtlCol="0" anchor="ctr"/>
-          <a:lstStyle/>
-          <a:p>
-            <a:pPr algn="ctr" indent="0" marL="0">
-              <a:buNone/>
-            </a:pPr>
-            <a:r>
-              <a:rPr lang="en-US" sz="1300" b="1" dirty="0">
-                <a:solidFill>
-                  <a:srgbClr val="9D174D"/>
+            <a:off x="365760" y="3273552"/>
+            <a:ext cx="1371600" cy="658368"/>
+          </a:xfrm>
+          <a:prstGeom prst="rect">
+            <a:avLst/>
+          </a:prstGeom>
+          <a:noFill/>
+          <a:ln/>
+        </p:spPr>
+        <p:txBody>
+          <a:bodyPr wrap="square" lIns="0" tIns="0" rIns="0" bIns="0" rtlCol="0" anchor="ctr"/>
+          <a:lstStyle/>
+          <a:p>
+            <a:pPr algn="ctr" indent="0" marL="0">
+              <a:buNone/>
+            </a:pPr>
+            <a:r>
+              <a:rPr lang="en-US" sz="1100" b="1" dirty="0">
+                <a:solidFill>
+                  <a:srgbClr val="475569"/>
                 </a:solidFill>
                 <a:latin typeface="Trebuchet MS" pitchFamily="34" charset="0"/>
                 <a:ea typeface="Trebuchet MS" pitchFamily="34" charset="-122"/>
                 <a:cs typeface="Trebuchet MS" pitchFamily="34" charset="-120"/>
               </a:rPr>
-              <a:t>ed</a:t>
-            </a:r>
-            <a:endParaRPr lang="en-US" sz="1300" dirty="0"/>
-          </a:p>
-        </p:txBody>
-      </p:sp>
-      <p:sp>
-        <p:nvSpPr>
-          <p:cNvPr id="24" name="Text 22"/>
-          <p:cNvSpPr/>
-          <p:nvPr/>
-        </p:nvSpPr>
-        <p:spPr>
-          <a:xfrm>
-            <a:off x="6519672" y="2569464"/>
-            <a:ext cx="1828800" cy="201168"/>
-          </a:xfrm>
-          <a:prstGeom prst="rect">
-            <a:avLst/>
-          </a:prstGeom>
-          <a:noFill/>
-          <a:ln/>
-        </p:spPr>
-        <p:txBody>
-          <a:bodyPr wrap="square" lIns="0" tIns="0" rIns="0" bIns="0" rtlCol="0" anchor="t"/>
-          <a:lstStyle/>
-          <a:p>
-            <a:pPr algn="ctr" indent="0" marL="0">
-              <a:buNone/>
-            </a:pPr>
-            <a:r>
-              <a:rPr lang="en-US" sz="850" dirty="0">
-                <a:solidFill>
-                  <a:srgbClr val="475569"/>
-                </a:solidFill>
-                <a:latin typeface="Calibri" pitchFamily="34" charset="0"/>
-                <a:ea typeface="Calibri" pitchFamily="34" charset="-122"/>
-                <a:cs typeface="Calibri" pitchFamily="34" charset="-120"/>
-              </a:rPr>
-              <a:t>past tense or done</a:t>
-            </a:r>
-            <a:endParaRPr lang="en-US" sz="850" dirty="0"/>
-          </a:p>
-        </p:txBody>
-      </p:sp>
-      <p:sp>
-        <p:nvSpPr>
-          <p:cNvPr id="25" name="Shape 23"/>
-          <p:cNvSpPr/>
-          <p:nvPr/>
-        </p:nvSpPr>
-        <p:spPr>
-          <a:xfrm>
-            <a:off x="365760" y="3273552"/>
-            <a:ext cx="1371600" cy="658368"/>
+              <a:t>Syllables</a:t>
+            </a:r>
+            <a:endParaRPr lang="en-US" sz="1100" dirty="0"/>
+          </a:p>
+        </p:txBody>
+      </p:sp>
+      <p:sp>
+        <p:nvSpPr>
+          <p:cNvPr id="24" name="Shape 22"/>
+          <p:cNvSpPr/>
+          <p:nvPr/>
+        </p:nvSpPr>
+        <p:spPr>
+          <a:xfrm>
+            <a:off x="1874520" y="3273552"/>
+            <a:ext cx="6903720" cy="658368"/>
           </a:xfrm>
           <a:prstGeom prst="rect">
             <a:avLst>
@@ -26331,11 +26076,38 @@
             </a:avLst>
           </a:prstGeom>
           <a:solidFill>
-            <a:srgbClr val="E2E8F0"/>
-          </a:solidFill>
-          <a:ln w="12700">
-            <a:solidFill>
-              <a:srgbClr val="E2E8F0"/>
+            <a:srgbClr val="CCFBF1"/>
+          </a:solidFill>
+          <a:ln w="12700">
+            <a:solidFill>
+              <a:srgbClr val="0D9488"/>
+            </a:solidFill>
+            <a:prstDash val="solid"/>
+          </a:ln>
+        </p:spPr>
+      </p:sp>
+      <p:sp>
+        <p:nvSpPr>
+          <p:cNvPr id="25" name="Shape 23"/>
+          <p:cNvSpPr/>
+          <p:nvPr/>
+        </p:nvSpPr>
+        <p:spPr>
+          <a:xfrm>
+            <a:off x="2313432" y="3364992"/>
+            <a:ext cx="1645920" cy="475488"/>
+          </a:xfrm>
+          <a:prstGeom prst="rect">
+            <a:avLst>
+              <a:gd name="adj" fmla="val 9615"/>
+            </a:avLst>
+          </a:prstGeom>
+          <a:solidFill>
+            <a:srgbClr val="FFFFFF"/>
+          </a:solidFill>
+          <a:ln w="12700">
+            <a:solidFill>
+              <a:srgbClr val="0D9488"/>
             </a:solidFill>
             <a:prstDash val="solid"/>
           </a:ln>
@@ -26349,63 +26121,75 @@
         </p:nvSpPr>
         <p:spPr>
           <a:xfrm>
-            <a:off x="365760" y="3273552"/>
-            <a:ext cx="1371600" cy="658368"/>
-          </a:xfrm>
-          <a:prstGeom prst="rect">
-            <a:avLst/>
-          </a:prstGeom>
-          <a:noFill/>
-          <a:ln/>
-        </p:spPr>
-        <p:txBody>
-          <a:bodyPr wrap="square" lIns="0" tIns="0" rIns="0" bIns="0" rtlCol="0" anchor="ctr"/>
-          <a:lstStyle/>
-          <a:p>
-            <a:pPr algn="ctr" indent="0" marL="0">
-              <a:buNone/>
-            </a:pPr>
-            <a:r>
-              <a:rPr lang="en-US" sz="1100" b="1" dirty="0">
-                <a:solidFill>
-                  <a:srgbClr val="475569"/>
+            <a:off x="2313432" y="3364992"/>
+            <a:ext cx="1645920" cy="475488"/>
+          </a:xfrm>
+          <a:prstGeom prst="rect">
+            <a:avLst/>
+          </a:prstGeom>
+          <a:noFill/>
+          <a:ln/>
+        </p:spPr>
+        <p:txBody>
+          <a:bodyPr wrap="square" lIns="0" tIns="0" rIns="0" bIns="0" rtlCol="0" anchor="ctr"/>
+          <a:lstStyle/>
+          <a:p>
+            <a:pPr algn="ctr" indent="0" marL="0">
+              <a:buNone/>
+            </a:pPr>
+            <a:r>
+              <a:rPr lang="en-US" sz="1400" b="1" dirty="0">
+                <a:solidFill>
+                  <a:srgbClr val="0D9488"/>
                 </a:solidFill>
                 <a:latin typeface="Trebuchet MS" pitchFamily="34" charset="0"/>
                 <a:ea typeface="Trebuchet MS" pitchFamily="34" charset="-122"/>
                 <a:cs typeface="Trebuchet MS" pitchFamily="34" charset="-120"/>
               </a:rPr>
-              <a:t>Syllables</a:t>
-            </a:r>
-            <a:endParaRPr lang="en-US" sz="1100" dirty="0"/>
-          </a:p>
-        </p:txBody>
-      </p:sp>
-      <p:sp>
-        <p:nvSpPr>
-          <p:cNvPr id="27" name="Shape 25"/>
-          <p:cNvSpPr/>
-          <p:nvPr/>
-        </p:nvSpPr>
-        <p:spPr>
-          <a:xfrm>
-            <a:off x="1874520" y="3273552"/>
-            <a:ext cx="6903720" cy="658368"/>
-          </a:xfrm>
-          <a:prstGeom prst="rect">
-            <a:avLst>
-              <a:gd name="adj" fmla="val 8333"/>
-            </a:avLst>
-          </a:prstGeom>
-          <a:solidFill>
-            <a:srgbClr val="CCFBF1"/>
-          </a:solidFill>
-          <a:ln w="12700">
-            <a:solidFill>
-              <a:srgbClr val="0D9488"/>
-            </a:solidFill>
-            <a:prstDash val="solid"/>
-          </a:ln>
-        </p:spPr>
+              <a:t>as</a:t>
+            </a:r>
+            <a:endParaRPr lang="en-US" sz="1400" dirty="0"/>
+          </a:p>
+        </p:txBody>
+      </p:sp>
+      <p:sp>
+        <p:nvSpPr>
+          <p:cNvPr id="27" name="Text 25"/>
+          <p:cNvSpPr/>
+          <p:nvPr/>
+        </p:nvSpPr>
+        <p:spPr>
+          <a:xfrm>
+            <a:off x="3959352" y="3364992"/>
+            <a:ext cx="411480" cy="475488"/>
+          </a:xfrm>
+          <a:prstGeom prst="rect">
+            <a:avLst/>
+          </a:prstGeom>
+          <a:noFill/>
+          <a:ln/>
+        </p:spPr>
+        <p:txBody>
+          <a:bodyPr wrap="square" lIns="0" tIns="0" rIns="0" bIns="0" rtlCol="0" anchor="ctr"/>
+          <a:lstStyle/>
+          <a:p>
+            <a:pPr algn="ctr" indent="0" marL="0">
+              <a:buNone/>
+            </a:pPr>
+            <a:r>
+              <a:rPr lang="en-US" sz="1600" b="1" dirty="0">
+                <a:solidFill>
+                  <a:srgbClr val="0D9488"/>
+                </a:solidFill>
+                <a:latin typeface="Trebuchet MS" pitchFamily="34" charset="0"/>
+                <a:ea typeface="Trebuchet MS" pitchFamily="34" charset="-122"/>
+                <a:cs typeface="Trebuchet MS" pitchFamily="34" charset="-120"/>
+              </a:rPr>
+              <a:t>·</a:t>
+            </a:r>
+            <a:endParaRPr lang="en-US" sz="1600" dirty="0"/>
+          </a:p>
+        </p:txBody>
       </p:sp>
       <p:sp>
         <p:nvSpPr>
@@ -26415,8 +26199,8 @@
         </p:nvSpPr>
         <p:spPr>
           <a:xfrm>
-            <a:off x="1975104" y="3364992"/>
-            <a:ext cx="1554480" cy="475488"/>
+            <a:off x="4370832" y="3364992"/>
+            <a:ext cx="1645920" cy="475488"/>
           </a:xfrm>
           <a:prstGeom prst="rect">
             <a:avLst>
@@ -26442,8 +26226,8 @@
         </p:nvSpPr>
         <p:spPr>
           <a:xfrm>
-            <a:off x="1975104" y="3364992"/>
-            <a:ext cx="1554480" cy="475488"/>
+            <a:off x="4370832" y="3364992"/>
+            <a:ext cx="1645920" cy="475488"/>
           </a:xfrm>
           <a:prstGeom prst="rect">
             <a:avLst/>
@@ -26467,7 +26251,7 @@
                 <a:ea typeface="Trebuchet MS" pitchFamily="34" charset="-122"/>
                 <a:cs typeface="Trebuchet MS" pitchFamily="34" charset="-120"/>
               </a:rPr>
-              <a:t>un</a:t>
+              <a:t>sis</a:t>
             </a:r>
             <a:endParaRPr lang="en-US" sz="1400" dirty="0"/>
           </a:p>
@@ -26481,8 +26265,8 @@
         </p:nvSpPr>
         <p:spPr>
           <a:xfrm>
-            <a:off x="3529584" y="3364992"/>
-            <a:ext cx="73152" cy="475488"/>
+            <a:off x="6016752" y="3364992"/>
+            <a:ext cx="411480" cy="475488"/>
           </a:xfrm>
           <a:prstGeom prst="rect">
             <a:avLst/>
@@ -26520,8 +26304,8 @@
         </p:nvSpPr>
         <p:spPr>
           <a:xfrm>
-            <a:off x="3602736" y="3364992"/>
-            <a:ext cx="1554480" cy="475488"/>
+            <a:off x="6428232" y="3364992"/>
+            <a:ext cx="1645920" cy="475488"/>
           </a:xfrm>
           <a:prstGeom prst="rect">
             <a:avLst>
@@ -26547,8 +26331,8 @@
         </p:nvSpPr>
         <p:spPr>
           <a:xfrm>
-            <a:off x="3602736" y="3364992"/>
-            <a:ext cx="1554480" cy="475488"/>
+            <a:off x="6428232" y="3364992"/>
+            <a:ext cx="1645920" cy="475488"/>
           </a:xfrm>
           <a:prstGeom prst="rect">
             <a:avLst/>
@@ -26572,7 +26356,7 @@
                 <a:ea typeface="Trebuchet MS" pitchFamily="34" charset="-122"/>
                 <a:cs typeface="Trebuchet MS" pitchFamily="34" charset="-120"/>
               </a:rPr>
-              <a:t>as</a:t>
+              <a:t>tive</a:t>
             </a:r>
             <a:endParaRPr lang="en-US" sz="1400" dirty="0"/>
           </a:p>
@@ -26580,224 +26364,80 @@
       </p:sp>
       <p:sp>
         <p:nvSpPr>
-          <p:cNvPr id="33" name="Text 31"/>
-          <p:cNvSpPr/>
-          <p:nvPr/>
-        </p:nvSpPr>
-        <p:spPr>
-          <a:xfrm>
-            <a:off x="5157216" y="3364992"/>
-            <a:ext cx="73152" cy="475488"/>
-          </a:xfrm>
-          <a:prstGeom prst="rect">
-            <a:avLst/>
-          </a:prstGeom>
-          <a:noFill/>
-          <a:ln/>
-        </p:spPr>
-        <p:txBody>
-          <a:bodyPr wrap="square" lIns="0" tIns="0" rIns="0" bIns="0" rtlCol="0" anchor="ctr"/>
-          <a:lstStyle/>
-          <a:p>
-            <a:pPr algn="ctr" indent="0" marL="0">
-              <a:buNone/>
-            </a:pPr>
-            <a:r>
-              <a:rPr lang="en-US" sz="1600" b="1" dirty="0">
-                <a:solidFill>
-                  <a:srgbClr val="0D9488"/>
+          <p:cNvPr id="33" name="Shape 31"/>
+          <p:cNvSpPr/>
+          <p:nvPr/>
+        </p:nvSpPr>
+        <p:spPr>
+          <a:xfrm>
+            <a:off x="365760" y="4096512"/>
+            <a:ext cx="1371600" cy="804672"/>
+          </a:xfrm>
+          <a:prstGeom prst="rect">
+            <a:avLst>
+              <a:gd name="adj" fmla="val 6818"/>
+            </a:avLst>
+          </a:prstGeom>
+          <a:solidFill>
+            <a:srgbClr val="E2E8F0"/>
+          </a:solidFill>
+          <a:ln w="12700">
+            <a:solidFill>
+              <a:srgbClr val="E2E8F0"/>
+            </a:solidFill>
+            <a:prstDash val="solid"/>
+          </a:ln>
+        </p:spPr>
+      </p:sp>
+      <p:sp>
+        <p:nvSpPr>
+          <p:cNvPr id="34" name="Text 32"/>
+          <p:cNvSpPr/>
+          <p:nvPr/>
+        </p:nvSpPr>
+        <p:spPr>
+          <a:xfrm>
+            <a:off x="365760" y="4096512"/>
+            <a:ext cx="1371600" cy="804672"/>
+          </a:xfrm>
+          <a:prstGeom prst="rect">
+            <a:avLst/>
+          </a:prstGeom>
+          <a:noFill/>
+          <a:ln/>
+        </p:spPr>
+        <p:txBody>
+          <a:bodyPr wrap="square" lIns="0" tIns="0" rIns="0" bIns="0" rtlCol="0" anchor="ctr"/>
+          <a:lstStyle/>
+          <a:p>
+            <a:pPr algn="ctr" indent="0" marL="0">
+              <a:buNone/>
+            </a:pPr>
+            <a:r>
+              <a:rPr lang="en-US" sz="1100" b="1" dirty="0">
+                <a:solidFill>
+                  <a:srgbClr val="475569"/>
                 </a:solidFill>
                 <a:latin typeface="Trebuchet MS" pitchFamily="34" charset="0"/>
                 <a:ea typeface="Trebuchet MS" pitchFamily="34" charset="-122"/>
                 <a:cs typeface="Trebuchet MS" pitchFamily="34" charset="-120"/>
               </a:rPr>
-              <a:t>·</a:t>
-            </a:r>
-            <a:endParaRPr lang="en-US" sz="1600" dirty="0"/>
-          </a:p>
-        </p:txBody>
-      </p:sp>
-      <p:sp>
-        <p:nvSpPr>
-          <p:cNvPr id="34" name="Shape 32"/>
-          <p:cNvSpPr/>
-          <p:nvPr/>
-        </p:nvSpPr>
-        <p:spPr>
-          <a:xfrm>
-            <a:off x="5230368" y="3364992"/>
-            <a:ext cx="1554480" cy="475488"/>
-          </a:xfrm>
-          <a:prstGeom prst="rect">
-            <a:avLst>
-              <a:gd name="adj" fmla="val 9615"/>
-            </a:avLst>
-          </a:prstGeom>
-          <a:solidFill>
-            <a:srgbClr val="FFFFFF"/>
-          </a:solidFill>
-          <a:ln w="12700">
-            <a:solidFill>
-              <a:srgbClr val="0D9488"/>
-            </a:solidFill>
-            <a:prstDash val="solid"/>
-          </a:ln>
-        </p:spPr>
-      </p:sp>
-      <p:sp>
-        <p:nvSpPr>
-          <p:cNvPr id="35" name="Text 33"/>
-          <p:cNvSpPr/>
-          <p:nvPr/>
-        </p:nvSpPr>
-        <p:spPr>
-          <a:xfrm>
-            <a:off x="5230368" y="3364992"/>
-            <a:ext cx="1554480" cy="475488"/>
-          </a:xfrm>
-          <a:prstGeom prst="rect">
-            <a:avLst/>
-          </a:prstGeom>
-          <a:noFill/>
-          <a:ln/>
-        </p:spPr>
-        <p:txBody>
-          <a:bodyPr wrap="square" lIns="0" tIns="0" rIns="0" bIns="0" rtlCol="0" anchor="ctr"/>
-          <a:lstStyle/>
-          <a:p>
-            <a:pPr algn="ctr" indent="0" marL="0">
-              <a:buNone/>
-            </a:pPr>
-            <a:r>
-              <a:rPr lang="en-US" sz="1400" b="1" dirty="0">
-                <a:solidFill>
-                  <a:srgbClr val="0D9488"/>
-                </a:solidFill>
-                <a:latin typeface="Trebuchet MS" pitchFamily="34" charset="0"/>
-                <a:ea typeface="Trebuchet MS" pitchFamily="34" charset="-122"/>
-                <a:cs typeface="Trebuchet MS" pitchFamily="34" charset="-120"/>
-              </a:rPr>
-              <a:t>sis</a:t>
-            </a:r>
-            <a:endParaRPr lang="en-US" sz="1400" dirty="0"/>
-          </a:p>
-        </p:txBody>
-      </p:sp>
-      <p:sp>
-        <p:nvSpPr>
-          <p:cNvPr id="36" name="Text 34"/>
-          <p:cNvSpPr/>
-          <p:nvPr/>
-        </p:nvSpPr>
-        <p:spPr>
-          <a:xfrm>
-            <a:off x="6784848" y="3364992"/>
-            <a:ext cx="73152" cy="475488"/>
-          </a:xfrm>
-          <a:prstGeom prst="rect">
-            <a:avLst/>
-          </a:prstGeom>
-          <a:noFill/>
-          <a:ln/>
-        </p:spPr>
-        <p:txBody>
-          <a:bodyPr wrap="square" lIns="0" tIns="0" rIns="0" bIns="0" rtlCol="0" anchor="ctr"/>
-          <a:lstStyle/>
-          <a:p>
-            <a:pPr algn="ctr" indent="0" marL="0">
-              <a:buNone/>
-            </a:pPr>
-            <a:r>
-              <a:rPr lang="en-US" sz="1600" b="1" dirty="0">
-                <a:solidFill>
-                  <a:srgbClr val="0D9488"/>
-                </a:solidFill>
-                <a:latin typeface="Trebuchet MS" pitchFamily="34" charset="0"/>
-                <a:ea typeface="Trebuchet MS" pitchFamily="34" charset="-122"/>
-                <a:cs typeface="Trebuchet MS" pitchFamily="34" charset="-120"/>
-              </a:rPr>
-              <a:t>·</a:t>
-            </a:r>
-            <a:endParaRPr lang="en-US" sz="1600" dirty="0"/>
-          </a:p>
-        </p:txBody>
-      </p:sp>
-      <p:sp>
-        <p:nvSpPr>
-          <p:cNvPr id="37" name="Shape 35"/>
-          <p:cNvSpPr/>
-          <p:nvPr/>
-        </p:nvSpPr>
-        <p:spPr>
-          <a:xfrm>
-            <a:off x="6858000" y="3364992"/>
-            <a:ext cx="1554480" cy="475488"/>
-          </a:xfrm>
-          <a:prstGeom prst="rect">
-            <a:avLst>
-              <a:gd name="adj" fmla="val 9615"/>
-            </a:avLst>
-          </a:prstGeom>
-          <a:solidFill>
-            <a:srgbClr val="FFFFFF"/>
-          </a:solidFill>
-          <a:ln w="12700">
-            <a:solidFill>
-              <a:srgbClr val="0D9488"/>
-            </a:solidFill>
-            <a:prstDash val="solid"/>
-          </a:ln>
-        </p:spPr>
-      </p:sp>
-      <p:sp>
-        <p:nvSpPr>
-          <p:cNvPr id="38" name="Text 36"/>
-          <p:cNvSpPr/>
-          <p:nvPr/>
-        </p:nvSpPr>
-        <p:spPr>
-          <a:xfrm>
-            <a:off x="6858000" y="3364992"/>
-            <a:ext cx="1554480" cy="475488"/>
-          </a:xfrm>
-          <a:prstGeom prst="rect">
-            <a:avLst/>
-          </a:prstGeom>
-          <a:noFill/>
-          <a:ln/>
-        </p:spPr>
-        <p:txBody>
-          <a:bodyPr wrap="square" lIns="0" tIns="0" rIns="0" bIns="0" rtlCol="0" anchor="ctr"/>
-          <a:lstStyle/>
-          <a:p>
-            <a:pPr algn="ctr" indent="0" marL="0">
-              <a:buNone/>
-            </a:pPr>
-            <a:r>
-              <a:rPr lang="en-US" sz="1400" b="1" dirty="0">
-                <a:solidFill>
-                  <a:srgbClr val="0D9488"/>
-                </a:solidFill>
-                <a:latin typeface="Trebuchet MS" pitchFamily="34" charset="0"/>
-                <a:ea typeface="Trebuchet MS" pitchFamily="34" charset="-122"/>
-                <a:cs typeface="Trebuchet MS" pitchFamily="34" charset="-120"/>
-              </a:rPr>
-              <a:t>ted</a:t>
-            </a:r>
-            <a:endParaRPr lang="en-US" sz="1400" dirty="0"/>
-          </a:p>
-        </p:txBody>
-      </p:sp>
-      <p:sp>
-        <p:nvSpPr>
-          <p:cNvPr id="39" name="Shape 37"/>
-          <p:cNvSpPr/>
-          <p:nvPr/>
-        </p:nvSpPr>
-        <p:spPr>
-          <a:xfrm>
-            <a:off x="365760" y="4096512"/>
-            <a:ext cx="1371600" cy="804672"/>
+              <a:t>Phonemes</a:t>
+            </a:r>
+            <a:endParaRPr lang="en-US" sz="1100" dirty="0"/>
+          </a:p>
+        </p:txBody>
+      </p:sp>
+      <p:sp>
+        <p:nvSpPr>
+          <p:cNvPr id="35" name="Shape 33"/>
+          <p:cNvSpPr/>
+          <p:nvPr/>
+        </p:nvSpPr>
+        <p:spPr>
+          <a:xfrm>
+            <a:off x="1874520" y="4096512"/>
+            <a:ext cx="6903720" cy="804672"/>
           </a:xfrm>
           <a:prstGeom prst="rect">
             <a:avLst>
@@ -26805,85 +26445,19 @@
             </a:avLst>
           </a:prstGeom>
           <a:solidFill>
-            <a:srgbClr val="E2E8F0"/>
+            <a:srgbClr val="F8FAFC"/>
           </a:solidFill>
           <a:ln w="12700">
             <a:solidFill>
               <a:srgbClr val="E2E8F0"/>
             </a:solidFill>
-            <a:prstDash val="solid"/>
-          </a:ln>
-        </p:spPr>
-      </p:sp>
-      <p:sp>
-        <p:nvSpPr>
-          <p:cNvPr id="40" name="Text 38"/>
-          <p:cNvSpPr/>
-          <p:nvPr/>
-        </p:nvSpPr>
-        <p:spPr>
-          <a:xfrm>
-            <a:off x="365760" y="4096512"/>
-            <a:ext cx="1371600" cy="804672"/>
-          </a:xfrm>
-          <a:prstGeom prst="rect">
-            <a:avLst/>
-          </a:prstGeom>
-          <a:noFill/>
-          <a:ln/>
-        </p:spPr>
-        <p:txBody>
-          <a:bodyPr wrap="square" lIns="0" tIns="0" rIns="0" bIns="0" rtlCol="0" anchor="ctr"/>
-          <a:lstStyle/>
-          <a:p>
-            <a:pPr algn="ctr" indent="0" marL="0">
-              <a:buNone/>
-            </a:pPr>
-            <a:r>
-              <a:rPr lang="en-US" sz="1100" b="1" dirty="0">
-                <a:solidFill>
-                  <a:srgbClr val="475569"/>
-                </a:solidFill>
-                <a:latin typeface="Trebuchet MS" pitchFamily="34" charset="0"/>
-                <a:ea typeface="Trebuchet MS" pitchFamily="34" charset="-122"/>
-                <a:cs typeface="Trebuchet MS" pitchFamily="34" charset="-120"/>
-              </a:rPr>
-              <a:t>Phonemes</a:t>
-            </a:r>
-            <a:endParaRPr lang="en-US" sz="1100" dirty="0"/>
-          </a:p>
-        </p:txBody>
-      </p:sp>
-      <p:sp>
-        <p:nvSpPr>
-          <p:cNvPr id="41" name="Shape 39"/>
-          <p:cNvSpPr/>
-          <p:nvPr/>
-        </p:nvSpPr>
-        <p:spPr>
-          <a:xfrm>
-            <a:off x="1874520" y="4096512"/>
-            <a:ext cx="6903720" cy="804672"/>
-          </a:xfrm>
-          <a:prstGeom prst="rect">
-            <a:avLst>
-              <a:gd name="adj" fmla="val 6818"/>
-            </a:avLst>
-          </a:prstGeom>
-          <a:solidFill>
-            <a:srgbClr val="F8FAFC"/>
-          </a:solidFill>
-          <a:ln w="12700">
-            <a:solidFill>
-              <a:srgbClr val="E2E8F0"/>
-            </a:solidFill>
             <a:prstDash val="dash"/>
           </a:ln>
         </p:spPr>
       </p:sp>
       <p:sp>
         <p:nvSpPr>
-          <p:cNvPr id="42" name="Text 40"/>
+          <p:cNvPr id="36" name="Text 34"/>
           <p:cNvSpPr/>
           <p:nvPr/>
         </p:nvSpPr>
@@ -27345,7 +26919,7 @@
                 <a:ea typeface="Trebuchet MS" pitchFamily="34" charset="-122"/>
                 <a:cs typeface="Trebuchet MS" pitchFamily="34" charset="-120"/>
               </a:rPr>
-              <a:t>unassisted</a:t>
+              <a:t>assistive</a:t>
             </a:r>
             <a:endParaRPr lang="en-US" sz="2800" dirty="0"/>
           </a:p>
@@ -27425,7 +26999,7 @@
         </p:nvSpPr>
         <p:spPr>
           <a:xfrm>
-            <a:off x="2221992" y="2258568"/>
+            <a:off x="2938272" y="2258568"/>
             <a:ext cx="1828800" cy="292608"/>
           </a:xfrm>
           <a:prstGeom prst="rect">
@@ -27434,11 +27008,11 @@
             </a:avLst>
           </a:prstGeom>
           <a:solidFill>
-            <a:srgbClr val="DDD6FE"/>
+            <a:srgbClr val="CCFBF1"/>
           </a:solidFill>
           <a:ln w="19050">
             <a:solidFill>
-              <a:srgbClr val="7C3AED"/>
+              <a:srgbClr val="0D9488"/>
             </a:solidFill>
             <a:prstDash val="solid"/>
           </a:ln>
@@ -27459,7 +27033,7 @@
         </p:nvSpPr>
         <p:spPr>
           <a:xfrm>
-            <a:off x="2221992" y="2258568"/>
+            <a:off x="2938272" y="2258568"/>
             <a:ext cx="1828800" cy="292608"/>
           </a:xfrm>
           <a:prstGeom prst="rect">
@@ -27478,13 +27052,13 @@
             <a:r>
               <a:rPr lang="en-US" sz="1300" b="1" dirty="0">
                 <a:solidFill>
-                  <a:srgbClr val="4C1D95"/>
+                  <a:srgbClr val="0F766E"/>
                 </a:solidFill>
                 <a:latin typeface="Trebuchet MS" pitchFamily="34" charset="0"/>
                 <a:ea typeface="Trebuchet MS" pitchFamily="34" charset="-122"/>
                 <a:cs typeface="Trebuchet MS" pitchFamily="34" charset="-120"/>
               </a:rPr>
-              <a:t>un</a:t>
+              <a:t>assist</a:t>
             </a:r>
             <a:endParaRPr lang="en-US" sz="1300" dirty="0"/>
           </a:p>
@@ -27498,7 +27072,7 @@
         </p:nvSpPr>
         <p:spPr>
           <a:xfrm>
-            <a:off x="2221992" y="2569464"/>
+            <a:off x="2938272" y="2569464"/>
             <a:ext cx="1828800" cy="201168"/>
           </a:xfrm>
           <a:prstGeom prst="rect">
@@ -27523,7 +27097,7 @@
                 <a:ea typeface="Calibri" pitchFamily="34" charset="-122"/>
                 <a:cs typeface="Calibri" pitchFamily="34" charset="-120"/>
               </a:rPr>
-              <a:t>not or without</a:t>
+              <a:t>to help or support</a:t>
             </a:r>
             <a:endParaRPr lang="en-US" sz="850" dirty="0"/>
           </a:p>
@@ -27537,7 +27111,7 @@
         </p:nvSpPr>
         <p:spPr>
           <a:xfrm>
-            <a:off x="4370832" y="2258568"/>
+            <a:off x="5803392" y="2258568"/>
             <a:ext cx="1828800" cy="292608"/>
           </a:xfrm>
           <a:prstGeom prst="rect">
@@ -27546,11 +27120,11 @@
             </a:avLst>
           </a:prstGeom>
           <a:solidFill>
-            <a:srgbClr val="CCFBF1"/>
+            <a:srgbClr val="FCE7F3"/>
           </a:solidFill>
           <a:ln w="19050">
             <a:solidFill>
-              <a:srgbClr val="0D9488"/>
+              <a:srgbClr val="DB2777"/>
             </a:solidFill>
             <a:prstDash val="solid"/>
           </a:ln>
@@ -27571,7 +27145,7 @@
         </p:nvSpPr>
         <p:spPr>
           <a:xfrm>
-            <a:off x="4370832" y="2258568"/>
+            <a:off x="5803392" y="2258568"/>
             <a:ext cx="1828800" cy="292608"/>
           </a:xfrm>
           <a:prstGeom prst="rect">
@@ -27590,13 +27164,13 @@
             <a:r>
               <a:rPr lang="en-US" sz="1300" b="1" dirty="0">
                 <a:solidFill>
-                  <a:srgbClr val="0F766E"/>
+                  <a:srgbClr val="9D174D"/>
                 </a:solidFill>
                 <a:latin typeface="Trebuchet MS" pitchFamily="34" charset="0"/>
                 <a:ea typeface="Trebuchet MS" pitchFamily="34" charset="-122"/>
                 <a:cs typeface="Trebuchet MS" pitchFamily="34" charset="-120"/>
               </a:rPr>
-              <a:t>assist</a:t>
+              <a:t>ive</a:t>
             </a:r>
             <a:endParaRPr lang="en-US" sz="1300" dirty="0"/>
           </a:p>
@@ -27610,7 +27184,7 @@
         </p:nvSpPr>
         <p:spPr>
           <a:xfrm>
-            <a:off x="4370832" y="2569464"/>
+            <a:off x="5803392" y="2569464"/>
             <a:ext cx="1828800" cy="201168"/>
           </a:xfrm>
           <a:prstGeom prst="rect">
@@ -27635,7 +27209,7 @@
                 <a:ea typeface="Calibri" pitchFamily="34" charset="-122"/>
                 <a:cs typeface="Calibri" pitchFamily="34" charset="-120"/>
               </a:rPr>
-              <a:t>to help or support</a:t>
+              <a:t>having the quality of</a:t>
             </a:r>
             <a:endParaRPr lang="en-US" sz="850" dirty="0"/>
           </a:p>
@@ -27649,30 +27223,23 @@
         </p:nvSpPr>
         <p:spPr>
           <a:xfrm>
-            <a:off x="6519672" y="2258568"/>
-            <a:ext cx="1828800" cy="292608"/>
+            <a:off x="365760" y="3273552"/>
+            <a:ext cx="1371600" cy="658368"/>
           </a:xfrm>
           <a:prstGeom prst="rect">
             <a:avLst>
-              <a:gd name="adj" fmla="val 25000"/>
+              <a:gd name="adj" fmla="val 8333"/>
             </a:avLst>
           </a:prstGeom>
           <a:solidFill>
-            <a:srgbClr val="FCE7F3"/>
-          </a:solidFill>
-          <a:ln w="19050">
-            <a:solidFill>
-              <a:srgbClr val="DB2777"/>
-            </a:solidFill>
-            <a:prstDash val="solid"/>
-          </a:ln>
-          <a:effectLst>
-            <a:outerShdw sx="100000" sy="100000" kx="0" ky="0" algn="bl" rotWithShape="0" blurRad="101600" dist="38100" dir="8100000">
-              <a:srgbClr val="000000">
-                <a:alpha val="12000"/>
-              </a:srgbClr>
-            </a:outerShdw>
-          </a:effectLst>
+            <a:srgbClr val="E2E8F0"/>
+          </a:solidFill>
+          <a:ln w="12700">
+            <a:solidFill>
+              <a:srgbClr val="E2E8F0"/>
+            </a:solidFill>
+            <a:prstDash val="solid"/>
+          </a:ln>
         </p:spPr>
       </p:sp>
       <p:sp>
@@ -27683,86 +27250,47 @@
         </p:nvSpPr>
         <p:spPr>
           <a:xfrm>
-            <a:off x="6519672" y="2258568"/>
-            <a:ext cx="1828800" cy="292608"/>
-          </a:xfrm>
-          <a:prstGeom prst="rect">
-            <a:avLst/>
-          </a:prstGeom>
-          <a:noFill/>
-          <a:ln/>
-        </p:spPr>
-        <p:txBody>
-          <a:bodyPr wrap="square" lIns="0" tIns="0" rIns="0" bIns="0" rtlCol="0" anchor="ctr"/>
-          <a:lstStyle/>
-          <a:p>
-            <a:pPr algn="ctr" indent="0" marL="0">
-              <a:buNone/>
-            </a:pPr>
-            <a:r>
-              <a:rPr lang="en-US" sz="1300" b="1" dirty="0">
-                <a:solidFill>
-                  <a:srgbClr val="9D174D"/>
+            <a:off x="365760" y="3273552"/>
+            <a:ext cx="1371600" cy="658368"/>
+          </a:xfrm>
+          <a:prstGeom prst="rect">
+            <a:avLst/>
+          </a:prstGeom>
+          <a:noFill/>
+          <a:ln/>
+        </p:spPr>
+        <p:txBody>
+          <a:bodyPr wrap="square" lIns="0" tIns="0" rIns="0" bIns="0" rtlCol="0" anchor="ctr"/>
+          <a:lstStyle/>
+          <a:p>
+            <a:pPr algn="ctr" indent="0" marL="0">
+              <a:buNone/>
+            </a:pPr>
+            <a:r>
+              <a:rPr lang="en-US" sz="1100" b="1" dirty="0">
+                <a:solidFill>
+                  <a:srgbClr val="475569"/>
                 </a:solidFill>
                 <a:latin typeface="Trebuchet MS" pitchFamily="34" charset="0"/>
                 <a:ea typeface="Trebuchet MS" pitchFamily="34" charset="-122"/>
                 <a:cs typeface="Trebuchet MS" pitchFamily="34" charset="-120"/>
               </a:rPr>
-              <a:t>ed</a:t>
-            </a:r>
-            <a:endParaRPr lang="en-US" sz="1300" dirty="0"/>
-          </a:p>
-        </p:txBody>
-      </p:sp>
-      <p:sp>
-        <p:nvSpPr>
-          <p:cNvPr id="24" name="Text 22"/>
-          <p:cNvSpPr/>
-          <p:nvPr/>
-        </p:nvSpPr>
-        <p:spPr>
-          <a:xfrm>
-            <a:off x="6519672" y="2569464"/>
-            <a:ext cx="1828800" cy="201168"/>
-          </a:xfrm>
-          <a:prstGeom prst="rect">
-            <a:avLst/>
-          </a:prstGeom>
-          <a:noFill/>
-          <a:ln/>
-        </p:spPr>
-        <p:txBody>
-          <a:bodyPr wrap="square" lIns="0" tIns="0" rIns="0" bIns="0" rtlCol="0" anchor="t"/>
-          <a:lstStyle/>
-          <a:p>
-            <a:pPr algn="ctr" indent="0" marL="0">
-              <a:buNone/>
-            </a:pPr>
-            <a:r>
-              <a:rPr lang="en-US" sz="850" dirty="0">
-                <a:solidFill>
-                  <a:srgbClr val="475569"/>
-                </a:solidFill>
-                <a:latin typeface="Calibri" pitchFamily="34" charset="0"/>
-                <a:ea typeface="Calibri" pitchFamily="34" charset="-122"/>
-                <a:cs typeface="Calibri" pitchFamily="34" charset="-120"/>
-              </a:rPr>
-              <a:t>past tense or done</a:t>
-            </a:r>
-            <a:endParaRPr lang="en-US" sz="850" dirty="0"/>
-          </a:p>
-        </p:txBody>
-      </p:sp>
-      <p:sp>
-        <p:nvSpPr>
-          <p:cNvPr id="25" name="Shape 23"/>
-          <p:cNvSpPr/>
-          <p:nvPr/>
-        </p:nvSpPr>
-        <p:spPr>
-          <a:xfrm>
-            <a:off x="365760" y="3273552"/>
-            <a:ext cx="1371600" cy="658368"/>
+              <a:t>Syllables</a:t>
+            </a:r>
+            <a:endParaRPr lang="en-US" sz="1100" dirty="0"/>
+          </a:p>
+        </p:txBody>
+      </p:sp>
+      <p:sp>
+        <p:nvSpPr>
+          <p:cNvPr id="24" name="Shape 22"/>
+          <p:cNvSpPr/>
+          <p:nvPr/>
+        </p:nvSpPr>
+        <p:spPr>
+          <a:xfrm>
+            <a:off x="1874520" y="3273552"/>
+            <a:ext cx="6903720" cy="658368"/>
           </a:xfrm>
           <a:prstGeom prst="rect">
             <a:avLst>
@@ -27770,11 +27298,38 @@
             </a:avLst>
           </a:prstGeom>
           <a:solidFill>
-            <a:srgbClr val="E2E8F0"/>
-          </a:solidFill>
-          <a:ln w="12700">
-            <a:solidFill>
-              <a:srgbClr val="E2E8F0"/>
+            <a:srgbClr val="CCFBF1"/>
+          </a:solidFill>
+          <a:ln w="12700">
+            <a:solidFill>
+              <a:srgbClr val="0D9488"/>
+            </a:solidFill>
+            <a:prstDash val="solid"/>
+          </a:ln>
+        </p:spPr>
+      </p:sp>
+      <p:sp>
+        <p:nvSpPr>
+          <p:cNvPr id="25" name="Shape 23"/>
+          <p:cNvSpPr/>
+          <p:nvPr/>
+        </p:nvSpPr>
+        <p:spPr>
+          <a:xfrm>
+            <a:off x="2313432" y="3364992"/>
+            <a:ext cx="1645920" cy="475488"/>
+          </a:xfrm>
+          <a:prstGeom prst="rect">
+            <a:avLst>
+              <a:gd name="adj" fmla="val 9615"/>
+            </a:avLst>
+          </a:prstGeom>
+          <a:solidFill>
+            <a:srgbClr val="FFFFFF"/>
+          </a:solidFill>
+          <a:ln w="12700">
+            <a:solidFill>
+              <a:srgbClr val="0D9488"/>
             </a:solidFill>
             <a:prstDash val="solid"/>
           </a:ln>
@@ -27788,32 +27343,308 @@
         </p:nvSpPr>
         <p:spPr>
           <a:xfrm>
-            <a:off x="365760" y="3273552"/>
-            <a:ext cx="1371600" cy="658368"/>
-          </a:xfrm>
-          <a:prstGeom prst="rect">
-            <a:avLst/>
-          </a:prstGeom>
-          <a:noFill/>
-          <a:ln/>
-        </p:spPr>
-        <p:txBody>
-          <a:bodyPr wrap="square" lIns="0" tIns="0" rIns="0" bIns="0" rtlCol="0" anchor="ctr"/>
-          <a:lstStyle/>
-          <a:p>
-            <a:pPr algn="ctr" indent="0" marL="0">
-              <a:buNone/>
-            </a:pPr>
-            <a:r>
-              <a:rPr lang="en-US" sz="1100" b="1" dirty="0">
-                <a:solidFill>
-                  <a:srgbClr val="475569"/>
+            <a:off x="2313432" y="3364992"/>
+            <a:ext cx="1645920" cy="475488"/>
+          </a:xfrm>
+          <a:prstGeom prst="rect">
+            <a:avLst/>
+          </a:prstGeom>
+          <a:noFill/>
+          <a:ln/>
+        </p:spPr>
+        <p:txBody>
+          <a:bodyPr wrap="square" lIns="0" tIns="0" rIns="0" bIns="0" rtlCol="0" anchor="ctr"/>
+          <a:lstStyle/>
+          <a:p>
+            <a:pPr algn="ctr" indent="0" marL="0">
+              <a:buNone/>
+            </a:pPr>
+            <a:r>
+              <a:rPr lang="en-US" sz="1400" b="1" dirty="0">
+                <a:solidFill>
+                  <a:srgbClr val="0D9488"/>
                 </a:solidFill>
                 <a:latin typeface="Trebuchet MS" pitchFamily="34" charset="0"/>
                 <a:ea typeface="Trebuchet MS" pitchFamily="34" charset="-122"/>
                 <a:cs typeface="Trebuchet MS" pitchFamily="34" charset="-120"/>
               </a:rPr>
-              <a:t>Syllables</a:t>
+              <a:t>as</a:t>
+            </a:r>
+            <a:endParaRPr lang="en-US" sz="1400" dirty="0"/>
+          </a:p>
+        </p:txBody>
+      </p:sp>
+      <p:sp>
+        <p:nvSpPr>
+          <p:cNvPr id="27" name="Text 25"/>
+          <p:cNvSpPr/>
+          <p:nvPr/>
+        </p:nvSpPr>
+        <p:spPr>
+          <a:xfrm>
+            <a:off x="3959352" y="3364992"/>
+            <a:ext cx="411480" cy="475488"/>
+          </a:xfrm>
+          <a:prstGeom prst="rect">
+            <a:avLst/>
+          </a:prstGeom>
+          <a:noFill/>
+          <a:ln/>
+        </p:spPr>
+        <p:txBody>
+          <a:bodyPr wrap="square" lIns="0" tIns="0" rIns="0" bIns="0" rtlCol="0" anchor="ctr"/>
+          <a:lstStyle/>
+          <a:p>
+            <a:pPr algn="ctr" indent="0" marL="0">
+              <a:buNone/>
+            </a:pPr>
+            <a:r>
+              <a:rPr lang="en-US" sz="1600" b="1" dirty="0">
+                <a:solidFill>
+                  <a:srgbClr val="0D9488"/>
+                </a:solidFill>
+                <a:latin typeface="Trebuchet MS" pitchFamily="34" charset="0"/>
+                <a:ea typeface="Trebuchet MS" pitchFamily="34" charset="-122"/>
+                <a:cs typeface="Trebuchet MS" pitchFamily="34" charset="-120"/>
+              </a:rPr>
+              <a:t>·</a:t>
+            </a:r>
+            <a:endParaRPr lang="en-US" sz="1600" dirty="0"/>
+          </a:p>
+        </p:txBody>
+      </p:sp>
+      <p:sp>
+        <p:nvSpPr>
+          <p:cNvPr id="28" name="Shape 26"/>
+          <p:cNvSpPr/>
+          <p:nvPr/>
+        </p:nvSpPr>
+        <p:spPr>
+          <a:xfrm>
+            <a:off x="4370832" y="3364992"/>
+            <a:ext cx="1645920" cy="475488"/>
+          </a:xfrm>
+          <a:prstGeom prst="rect">
+            <a:avLst>
+              <a:gd name="adj" fmla="val 9615"/>
+            </a:avLst>
+          </a:prstGeom>
+          <a:solidFill>
+            <a:srgbClr val="FFFFFF"/>
+          </a:solidFill>
+          <a:ln w="12700">
+            <a:solidFill>
+              <a:srgbClr val="0D9488"/>
+            </a:solidFill>
+            <a:prstDash val="solid"/>
+          </a:ln>
+        </p:spPr>
+      </p:sp>
+      <p:sp>
+        <p:nvSpPr>
+          <p:cNvPr id="29" name="Text 27"/>
+          <p:cNvSpPr/>
+          <p:nvPr/>
+        </p:nvSpPr>
+        <p:spPr>
+          <a:xfrm>
+            <a:off x="4370832" y="3364992"/>
+            <a:ext cx="1645920" cy="475488"/>
+          </a:xfrm>
+          <a:prstGeom prst="rect">
+            <a:avLst/>
+          </a:prstGeom>
+          <a:noFill/>
+          <a:ln/>
+        </p:spPr>
+        <p:txBody>
+          <a:bodyPr wrap="square" lIns="0" tIns="0" rIns="0" bIns="0" rtlCol="0" anchor="ctr"/>
+          <a:lstStyle/>
+          <a:p>
+            <a:pPr algn="ctr" indent="0" marL="0">
+              <a:buNone/>
+            </a:pPr>
+            <a:r>
+              <a:rPr lang="en-US" sz="1400" b="1" dirty="0">
+                <a:solidFill>
+                  <a:srgbClr val="0D9488"/>
+                </a:solidFill>
+                <a:latin typeface="Trebuchet MS" pitchFamily="34" charset="0"/>
+                <a:ea typeface="Trebuchet MS" pitchFamily="34" charset="-122"/>
+                <a:cs typeface="Trebuchet MS" pitchFamily="34" charset="-120"/>
+              </a:rPr>
+              <a:t>sis</a:t>
+            </a:r>
+            <a:endParaRPr lang="en-US" sz="1400" dirty="0"/>
+          </a:p>
+        </p:txBody>
+      </p:sp>
+      <p:sp>
+        <p:nvSpPr>
+          <p:cNvPr id="30" name="Text 28"/>
+          <p:cNvSpPr/>
+          <p:nvPr/>
+        </p:nvSpPr>
+        <p:spPr>
+          <a:xfrm>
+            <a:off x="6016752" y="3364992"/>
+            <a:ext cx="411480" cy="475488"/>
+          </a:xfrm>
+          <a:prstGeom prst="rect">
+            <a:avLst/>
+          </a:prstGeom>
+          <a:noFill/>
+          <a:ln/>
+        </p:spPr>
+        <p:txBody>
+          <a:bodyPr wrap="square" lIns="0" tIns="0" rIns="0" bIns="0" rtlCol="0" anchor="ctr"/>
+          <a:lstStyle/>
+          <a:p>
+            <a:pPr algn="ctr" indent="0" marL="0">
+              <a:buNone/>
+            </a:pPr>
+            <a:r>
+              <a:rPr lang="en-US" sz="1600" b="1" dirty="0">
+                <a:solidFill>
+                  <a:srgbClr val="0D9488"/>
+                </a:solidFill>
+                <a:latin typeface="Trebuchet MS" pitchFamily="34" charset="0"/>
+                <a:ea typeface="Trebuchet MS" pitchFamily="34" charset="-122"/>
+                <a:cs typeface="Trebuchet MS" pitchFamily="34" charset="-120"/>
+              </a:rPr>
+              <a:t>·</a:t>
+            </a:r>
+            <a:endParaRPr lang="en-US" sz="1600" dirty="0"/>
+          </a:p>
+        </p:txBody>
+      </p:sp>
+      <p:sp>
+        <p:nvSpPr>
+          <p:cNvPr id="31" name="Shape 29"/>
+          <p:cNvSpPr/>
+          <p:nvPr/>
+        </p:nvSpPr>
+        <p:spPr>
+          <a:xfrm>
+            <a:off x="6428232" y="3364992"/>
+            <a:ext cx="1645920" cy="475488"/>
+          </a:xfrm>
+          <a:prstGeom prst="rect">
+            <a:avLst>
+              <a:gd name="adj" fmla="val 9615"/>
+            </a:avLst>
+          </a:prstGeom>
+          <a:solidFill>
+            <a:srgbClr val="FFFFFF"/>
+          </a:solidFill>
+          <a:ln w="12700">
+            <a:solidFill>
+              <a:srgbClr val="0D9488"/>
+            </a:solidFill>
+            <a:prstDash val="solid"/>
+          </a:ln>
+        </p:spPr>
+      </p:sp>
+      <p:sp>
+        <p:nvSpPr>
+          <p:cNvPr id="32" name="Text 30"/>
+          <p:cNvSpPr/>
+          <p:nvPr/>
+        </p:nvSpPr>
+        <p:spPr>
+          <a:xfrm>
+            <a:off x="6428232" y="3364992"/>
+            <a:ext cx="1645920" cy="475488"/>
+          </a:xfrm>
+          <a:prstGeom prst="rect">
+            <a:avLst/>
+          </a:prstGeom>
+          <a:noFill/>
+          <a:ln/>
+        </p:spPr>
+        <p:txBody>
+          <a:bodyPr wrap="square" lIns="0" tIns="0" rIns="0" bIns="0" rtlCol="0" anchor="ctr"/>
+          <a:lstStyle/>
+          <a:p>
+            <a:pPr algn="ctr" indent="0" marL="0">
+              <a:buNone/>
+            </a:pPr>
+            <a:r>
+              <a:rPr lang="en-US" sz="1400" b="1" dirty="0">
+                <a:solidFill>
+                  <a:srgbClr val="0D9488"/>
+                </a:solidFill>
+                <a:latin typeface="Trebuchet MS" pitchFamily="34" charset="0"/>
+                <a:ea typeface="Trebuchet MS" pitchFamily="34" charset="-122"/>
+                <a:cs typeface="Trebuchet MS" pitchFamily="34" charset="-120"/>
+              </a:rPr>
+              <a:t>tive</a:t>
+            </a:r>
+            <a:endParaRPr lang="en-US" sz="1400" dirty="0"/>
+          </a:p>
+        </p:txBody>
+      </p:sp>
+      <p:sp>
+        <p:nvSpPr>
+          <p:cNvPr id="33" name="Shape 31"/>
+          <p:cNvSpPr/>
+          <p:nvPr/>
+        </p:nvSpPr>
+        <p:spPr>
+          <a:xfrm>
+            <a:off x="365760" y="4096512"/>
+            <a:ext cx="1371600" cy="804672"/>
+          </a:xfrm>
+          <a:prstGeom prst="rect">
+            <a:avLst>
+              <a:gd name="adj" fmla="val 6818"/>
+            </a:avLst>
+          </a:prstGeom>
+          <a:solidFill>
+            <a:srgbClr val="E2E8F0"/>
+          </a:solidFill>
+          <a:ln w="12700">
+            <a:solidFill>
+              <a:srgbClr val="E2E8F0"/>
+            </a:solidFill>
+            <a:prstDash val="solid"/>
+          </a:ln>
+        </p:spPr>
+      </p:sp>
+      <p:sp>
+        <p:nvSpPr>
+          <p:cNvPr id="34" name="Text 32"/>
+          <p:cNvSpPr/>
+          <p:nvPr/>
+        </p:nvSpPr>
+        <p:spPr>
+          <a:xfrm>
+            <a:off x="365760" y="4096512"/>
+            <a:ext cx="1371600" cy="804672"/>
+          </a:xfrm>
+          <a:prstGeom prst="rect">
+            <a:avLst/>
+          </a:prstGeom>
+          <a:noFill/>
+          <a:ln/>
+        </p:spPr>
+        <p:txBody>
+          <a:bodyPr wrap="square" lIns="0" tIns="0" rIns="0" bIns="0" rtlCol="0" anchor="ctr"/>
+          <a:lstStyle/>
+          <a:p>
+            <a:pPr algn="ctr" indent="0" marL="0">
+              <a:buNone/>
+            </a:pPr>
+            <a:r>
+              <a:rPr lang="en-US" sz="1100" b="1" dirty="0">
+                <a:solidFill>
+                  <a:srgbClr val="475569"/>
+                </a:solidFill>
+                <a:latin typeface="Trebuchet MS" pitchFamily="34" charset="0"/>
+                <a:ea typeface="Trebuchet MS" pitchFamily="34" charset="-122"/>
+                <a:cs typeface="Trebuchet MS" pitchFamily="34" charset="-120"/>
+              </a:rPr>
+              <a:t>Phonemes</a:t>
             </a:r>
             <a:endParaRPr lang="en-US" sz="1100" dirty="0"/>
           </a:p>
@@ -27821,13 +27652,13 @@
       </p:sp>
       <p:sp>
         <p:nvSpPr>
-          <p:cNvPr id="27" name="Shape 25"/>
-          <p:cNvSpPr/>
-          <p:nvPr/>
-        </p:nvSpPr>
-        <p:spPr>
-          <a:xfrm>
-            <a:off x="1874520" y="3273552"/>
+          <p:cNvPr id="35" name="Shape 33"/>
+          <p:cNvSpPr/>
+          <p:nvPr/>
+        </p:nvSpPr>
+        <p:spPr>
+          <a:xfrm>
+            <a:off x="1874520" y="4096512"/>
             <a:ext cx="6903720" cy="658368"/>
           </a:xfrm>
           <a:prstGeom prst="rect">
@@ -27836,30 +27667,30 @@
             </a:avLst>
           </a:prstGeom>
           <a:solidFill>
-            <a:srgbClr val="CCFBF1"/>
-          </a:solidFill>
-          <a:ln w="12700">
-            <a:solidFill>
-              <a:srgbClr val="0D9488"/>
-            </a:solidFill>
-            <a:prstDash val="solid"/>
-          </a:ln>
-        </p:spPr>
-      </p:sp>
-      <p:sp>
-        <p:nvSpPr>
-          <p:cNvPr id="28" name="Shape 26"/>
-          <p:cNvSpPr/>
-          <p:nvPr/>
-        </p:nvSpPr>
-        <p:spPr>
-          <a:xfrm>
-            <a:off x="1975104" y="3364992"/>
-            <a:ext cx="1554480" cy="475488"/>
+            <a:srgbClr val="FCE7F3"/>
+          </a:solidFill>
+          <a:ln w="12700">
+            <a:solidFill>
+              <a:srgbClr val="DB2777"/>
+            </a:solidFill>
+            <a:prstDash val="solid"/>
+          </a:ln>
+        </p:spPr>
+      </p:sp>
+      <p:sp>
+        <p:nvSpPr>
+          <p:cNvPr id="36" name="Shape 34"/>
+          <p:cNvSpPr/>
+          <p:nvPr/>
+        </p:nvSpPr>
+        <p:spPr>
+          <a:xfrm>
+            <a:off x="2023872" y="4169664"/>
+            <a:ext cx="685800" cy="475488"/>
           </a:xfrm>
           <a:prstGeom prst="rect">
             <a:avLst>
-              <a:gd name="adj" fmla="val 9615"/>
+              <a:gd name="adj" fmla="val 7692"/>
             </a:avLst>
           </a:prstGeom>
           <a:solidFill>
@@ -27867,104 +27698,131 @@
           </a:solidFill>
           <a:ln w="12700">
             <a:solidFill>
-              <a:srgbClr val="0D9488"/>
-            </a:solidFill>
-            <a:prstDash val="solid"/>
-          </a:ln>
-        </p:spPr>
-      </p:sp>
-      <p:sp>
-        <p:nvSpPr>
-          <p:cNvPr id="29" name="Text 27"/>
-          <p:cNvSpPr/>
-          <p:nvPr/>
-        </p:nvSpPr>
-        <p:spPr>
-          <a:xfrm>
-            <a:off x="1975104" y="3364992"/>
-            <a:ext cx="1554480" cy="475488"/>
-          </a:xfrm>
-          <a:prstGeom prst="rect">
-            <a:avLst/>
-          </a:prstGeom>
-          <a:noFill/>
-          <a:ln/>
-        </p:spPr>
-        <p:txBody>
-          <a:bodyPr wrap="square" lIns="0" tIns="0" rIns="0" bIns="0" rtlCol="0" anchor="ctr"/>
-          <a:lstStyle/>
-          <a:p>
-            <a:pPr algn="ctr" indent="0" marL="0">
-              <a:buNone/>
-            </a:pPr>
-            <a:r>
-              <a:rPr lang="en-US" sz="1400" b="1" dirty="0">
-                <a:solidFill>
-                  <a:srgbClr val="0D9488"/>
+              <a:srgbClr val="DB2777"/>
+            </a:solidFill>
+            <a:prstDash val="solid"/>
+          </a:ln>
+        </p:spPr>
+      </p:sp>
+      <p:sp>
+        <p:nvSpPr>
+          <p:cNvPr id="37" name="Text 35"/>
+          <p:cNvSpPr/>
+          <p:nvPr/>
+        </p:nvSpPr>
+        <p:spPr>
+          <a:xfrm>
+            <a:off x="2023872" y="4169664"/>
+            <a:ext cx="685800" cy="475488"/>
+          </a:xfrm>
+          <a:prstGeom prst="rect">
+            <a:avLst/>
+          </a:prstGeom>
+          <a:noFill/>
+          <a:ln/>
+        </p:spPr>
+        <p:txBody>
+          <a:bodyPr wrap="square" lIns="0" tIns="0" rIns="0" bIns="0" rtlCol="0" anchor="ctr"/>
+          <a:lstStyle/>
+          <a:p>
+            <a:pPr algn="ctr" indent="0" marL="0">
+              <a:buNone/>
+            </a:pPr>
+            <a:r>
+              <a:rPr lang="en-US" sz="900" b="1" dirty="0">
+                <a:solidFill>
+                  <a:srgbClr val="9D174D"/>
                 </a:solidFill>
                 <a:latin typeface="Trebuchet MS" pitchFamily="34" charset="0"/>
                 <a:ea typeface="Trebuchet MS" pitchFamily="34" charset="-122"/>
                 <a:cs typeface="Trebuchet MS" pitchFamily="34" charset="-120"/>
               </a:rPr>
-              <a:t>un</a:t>
-            </a:r>
-            <a:endParaRPr lang="en-US" sz="1400" dirty="0"/>
-          </a:p>
-        </p:txBody>
-      </p:sp>
-      <p:sp>
-        <p:nvSpPr>
-          <p:cNvPr id="30" name="Text 28"/>
-          <p:cNvSpPr/>
-          <p:nvPr/>
-        </p:nvSpPr>
-        <p:spPr>
-          <a:xfrm>
-            <a:off x="3529584" y="3364992"/>
-            <a:ext cx="73152" cy="475488"/>
-          </a:xfrm>
-          <a:prstGeom prst="rect">
-            <a:avLst/>
-          </a:prstGeom>
-          <a:noFill/>
-          <a:ln/>
-        </p:spPr>
-        <p:txBody>
-          <a:bodyPr wrap="square" lIns="0" tIns="0" rIns="0" bIns="0" rtlCol="0" anchor="ctr"/>
-          <a:lstStyle/>
-          <a:p>
-            <a:pPr algn="ctr" indent="0" marL="0">
-              <a:buNone/>
-            </a:pPr>
-            <a:r>
-              <a:rPr lang="en-US" sz="1600" b="1" dirty="0">
-                <a:solidFill>
-                  <a:srgbClr val="0D9488"/>
+              <a:t>a</a:t>
+            </a:r>
+            <a:endParaRPr lang="en-US" sz="900" dirty="0"/>
+          </a:p>
+        </p:txBody>
+      </p:sp>
+      <p:sp>
+        <p:nvSpPr>
+          <p:cNvPr id="38" name="Shape 36"/>
+          <p:cNvSpPr/>
+          <p:nvPr/>
+        </p:nvSpPr>
+        <p:spPr>
+          <a:xfrm>
+            <a:off x="2831592" y="4169664"/>
+            <a:ext cx="685800" cy="475488"/>
+          </a:xfrm>
+          <a:prstGeom prst="rect">
+            <a:avLst>
+              <a:gd name="adj" fmla="val 7692"/>
+            </a:avLst>
+          </a:prstGeom>
+          <a:solidFill>
+            <a:srgbClr val="FFFFFF"/>
+          </a:solidFill>
+          <a:ln w="12700">
+            <a:solidFill>
+              <a:srgbClr val="DB2777"/>
+            </a:solidFill>
+            <a:prstDash val="solid"/>
+          </a:ln>
+        </p:spPr>
+      </p:sp>
+      <p:sp>
+        <p:nvSpPr>
+          <p:cNvPr id="39" name="Text 37"/>
+          <p:cNvSpPr/>
+          <p:nvPr/>
+        </p:nvSpPr>
+        <p:spPr>
+          <a:xfrm>
+            <a:off x="2831592" y="4169664"/>
+            <a:ext cx="685800" cy="475488"/>
+          </a:xfrm>
+          <a:prstGeom prst="rect">
+            <a:avLst/>
+          </a:prstGeom>
+          <a:noFill/>
+          <a:ln/>
+        </p:spPr>
+        <p:txBody>
+          <a:bodyPr wrap="square" lIns="0" tIns="0" rIns="0" bIns="0" rtlCol="0" anchor="ctr"/>
+          <a:lstStyle/>
+          <a:p>
+            <a:pPr algn="ctr" indent="0" marL="0">
+              <a:buNone/>
+            </a:pPr>
+            <a:r>
+              <a:rPr lang="en-US" sz="900" b="1" dirty="0">
+                <a:solidFill>
+                  <a:srgbClr val="9D174D"/>
                 </a:solidFill>
                 <a:latin typeface="Trebuchet MS" pitchFamily="34" charset="0"/>
                 <a:ea typeface="Trebuchet MS" pitchFamily="34" charset="-122"/>
                 <a:cs typeface="Trebuchet MS" pitchFamily="34" charset="-120"/>
               </a:rPr>
-              <a:t>·</a:t>
-            </a:r>
-            <a:endParaRPr lang="en-US" sz="1600" dirty="0"/>
-          </a:p>
-        </p:txBody>
-      </p:sp>
-      <p:sp>
-        <p:nvSpPr>
-          <p:cNvPr id="31" name="Shape 29"/>
-          <p:cNvSpPr/>
-          <p:nvPr/>
-        </p:nvSpPr>
-        <p:spPr>
-          <a:xfrm>
-            <a:off x="3602736" y="3364992"/>
-            <a:ext cx="1554480" cy="475488"/>
+              <a:t>ss</a:t>
+            </a:r>
+            <a:endParaRPr lang="en-US" sz="900" dirty="0"/>
+          </a:p>
+        </p:txBody>
+      </p:sp>
+      <p:sp>
+        <p:nvSpPr>
+          <p:cNvPr id="40" name="Shape 38"/>
+          <p:cNvSpPr/>
+          <p:nvPr/>
+        </p:nvSpPr>
+        <p:spPr>
+          <a:xfrm>
+            <a:off x="3639312" y="4169664"/>
+            <a:ext cx="685800" cy="475488"/>
           </a:xfrm>
           <a:prstGeom prst="rect">
             <a:avLst>
-              <a:gd name="adj" fmla="val 9615"/>
+              <a:gd name="adj" fmla="val 7692"/>
             </a:avLst>
           </a:prstGeom>
           <a:solidFill>
@@ -27972,104 +27830,131 @@
           </a:solidFill>
           <a:ln w="12700">
             <a:solidFill>
-              <a:srgbClr val="0D9488"/>
-            </a:solidFill>
-            <a:prstDash val="solid"/>
-          </a:ln>
-        </p:spPr>
-      </p:sp>
-      <p:sp>
-        <p:nvSpPr>
-          <p:cNvPr id="32" name="Text 30"/>
-          <p:cNvSpPr/>
-          <p:nvPr/>
-        </p:nvSpPr>
-        <p:spPr>
-          <a:xfrm>
-            <a:off x="3602736" y="3364992"/>
-            <a:ext cx="1554480" cy="475488"/>
-          </a:xfrm>
-          <a:prstGeom prst="rect">
-            <a:avLst/>
-          </a:prstGeom>
-          <a:noFill/>
-          <a:ln/>
-        </p:spPr>
-        <p:txBody>
-          <a:bodyPr wrap="square" lIns="0" tIns="0" rIns="0" bIns="0" rtlCol="0" anchor="ctr"/>
-          <a:lstStyle/>
-          <a:p>
-            <a:pPr algn="ctr" indent="0" marL="0">
-              <a:buNone/>
-            </a:pPr>
-            <a:r>
-              <a:rPr lang="en-US" sz="1400" b="1" dirty="0">
-                <a:solidFill>
-                  <a:srgbClr val="0D9488"/>
+              <a:srgbClr val="DB2777"/>
+            </a:solidFill>
+            <a:prstDash val="solid"/>
+          </a:ln>
+        </p:spPr>
+      </p:sp>
+      <p:sp>
+        <p:nvSpPr>
+          <p:cNvPr id="41" name="Text 39"/>
+          <p:cNvSpPr/>
+          <p:nvPr/>
+        </p:nvSpPr>
+        <p:spPr>
+          <a:xfrm>
+            <a:off x="3639312" y="4169664"/>
+            <a:ext cx="685800" cy="475488"/>
+          </a:xfrm>
+          <a:prstGeom prst="rect">
+            <a:avLst/>
+          </a:prstGeom>
+          <a:noFill/>
+          <a:ln/>
+        </p:spPr>
+        <p:txBody>
+          <a:bodyPr wrap="square" lIns="0" tIns="0" rIns="0" bIns="0" rtlCol="0" anchor="ctr"/>
+          <a:lstStyle/>
+          <a:p>
+            <a:pPr algn="ctr" indent="0" marL="0">
+              <a:buNone/>
+            </a:pPr>
+            <a:r>
+              <a:rPr lang="en-US" sz="900" b="1" dirty="0">
+                <a:solidFill>
+                  <a:srgbClr val="9D174D"/>
                 </a:solidFill>
                 <a:latin typeface="Trebuchet MS" pitchFamily="34" charset="0"/>
                 <a:ea typeface="Trebuchet MS" pitchFamily="34" charset="-122"/>
                 <a:cs typeface="Trebuchet MS" pitchFamily="34" charset="-120"/>
               </a:rPr>
-              <a:t>as</a:t>
-            </a:r>
-            <a:endParaRPr lang="en-US" sz="1400" dirty="0"/>
-          </a:p>
-        </p:txBody>
-      </p:sp>
-      <p:sp>
-        <p:nvSpPr>
-          <p:cNvPr id="33" name="Text 31"/>
-          <p:cNvSpPr/>
-          <p:nvPr/>
-        </p:nvSpPr>
-        <p:spPr>
-          <a:xfrm>
-            <a:off x="5157216" y="3364992"/>
-            <a:ext cx="73152" cy="475488"/>
-          </a:xfrm>
-          <a:prstGeom prst="rect">
-            <a:avLst/>
-          </a:prstGeom>
-          <a:noFill/>
-          <a:ln/>
-        </p:spPr>
-        <p:txBody>
-          <a:bodyPr wrap="square" lIns="0" tIns="0" rIns="0" bIns="0" rtlCol="0" anchor="ctr"/>
-          <a:lstStyle/>
-          <a:p>
-            <a:pPr algn="ctr" indent="0" marL="0">
-              <a:buNone/>
-            </a:pPr>
-            <a:r>
-              <a:rPr lang="en-US" sz="1600" b="1" dirty="0">
-                <a:solidFill>
-                  <a:srgbClr val="0D9488"/>
+              <a:t>i</a:t>
+            </a:r>
+            <a:endParaRPr lang="en-US" sz="900" dirty="0"/>
+          </a:p>
+        </p:txBody>
+      </p:sp>
+      <p:sp>
+        <p:nvSpPr>
+          <p:cNvPr id="42" name="Shape 40"/>
+          <p:cNvSpPr/>
+          <p:nvPr/>
+        </p:nvSpPr>
+        <p:spPr>
+          <a:xfrm>
+            <a:off x="4447032" y="4169664"/>
+            <a:ext cx="685800" cy="475488"/>
+          </a:xfrm>
+          <a:prstGeom prst="rect">
+            <a:avLst>
+              <a:gd name="adj" fmla="val 7692"/>
+            </a:avLst>
+          </a:prstGeom>
+          <a:solidFill>
+            <a:srgbClr val="FFFFFF"/>
+          </a:solidFill>
+          <a:ln w="12700">
+            <a:solidFill>
+              <a:srgbClr val="DB2777"/>
+            </a:solidFill>
+            <a:prstDash val="solid"/>
+          </a:ln>
+        </p:spPr>
+      </p:sp>
+      <p:sp>
+        <p:nvSpPr>
+          <p:cNvPr id="43" name="Text 41"/>
+          <p:cNvSpPr/>
+          <p:nvPr/>
+        </p:nvSpPr>
+        <p:spPr>
+          <a:xfrm>
+            <a:off x="4447032" y="4169664"/>
+            <a:ext cx="685800" cy="475488"/>
+          </a:xfrm>
+          <a:prstGeom prst="rect">
+            <a:avLst/>
+          </a:prstGeom>
+          <a:noFill/>
+          <a:ln/>
+        </p:spPr>
+        <p:txBody>
+          <a:bodyPr wrap="square" lIns="0" tIns="0" rIns="0" bIns="0" rtlCol="0" anchor="ctr"/>
+          <a:lstStyle/>
+          <a:p>
+            <a:pPr algn="ctr" indent="0" marL="0">
+              <a:buNone/>
+            </a:pPr>
+            <a:r>
+              <a:rPr lang="en-US" sz="900" b="1" dirty="0">
+                <a:solidFill>
+                  <a:srgbClr val="9D174D"/>
                 </a:solidFill>
                 <a:latin typeface="Trebuchet MS" pitchFamily="34" charset="0"/>
                 <a:ea typeface="Trebuchet MS" pitchFamily="34" charset="-122"/>
                 <a:cs typeface="Trebuchet MS" pitchFamily="34" charset="-120"/>
               </a:rPr>
-              <a:t>·</a:t>
-            </a:r>
-            <a:endParaRPr lang="en-US" sz="1600" dirty="0"/>
-          </a:p>
-        </p:txBody>
-      </p:sp>
-      <p:sp>
-        <p:nvSpPr>
-          <p:cNvPr id="34" name="Shape 32"/>
-          <p:cNvSpPr/>
-          <p:nvPr/>
-        </p:nvSpPr>
-        <p:spPr>
-          <a:xfrm>
-            <a:off x="5230368" y="3364992"/>
-            <a:ext cx="1554480" cy="475488"/>
+              <a:t>s</a:t>
+            </a:r>
+            <a:endParaRPr lang="en-US" sz="900" dirty="0"/>
+          </a:p>
+        </p:txBody>
+      </p:sp>
+      <p:sp>
+        <p:nvSpPr>
+          <p:cNvPr id="44" name="Shape 42"/>
+          <p:cNvSpPr/>
+          <p:nvPr/>
+        </p:nvSpPr>
+        <p:spPr>
+          <a:xfrm>
+            <a:off x="5254752" y="4169664"/>
+            <a:ext cx="685800" cy="475488"/>
           </a:xfrm>
           <a:prstGeom prst="rect">
             <a:avLst>
-              <a:gd name="adj" fmla="val 9615"/>
+              <a:gd name="adj" fmla="val 7692"/>
             </a:avLst>
           </a:prstGeom>
           <a:solidFill>
@@ -28077,104 +27962,131 @@
           </a:solidFill>
           <a:ln w="12700">
             <a:solidFill>
-              <a:srgbClr val="0D9488"/>
-            </a:solidFill>
-            <a:prstDash val="solid"/>
-          </a:ln>
-        </p:spPr>
-      </p:sp>
-      <p:sp>
-        <p:nvSpPr>
-          <p:cNvPr id="35" name="Text 33"/>
-          <p:cNvSpPr/>
-          <p:nvPr/>
-        </p:nvSpPr>
-        <p:spPr>
-          <a:xfrm>
-            <a:off x="5230368" y="3364992"/>
-            <a:ext cx="1554480" cy="475488"/>
-          </a:xfrm>
-          <a:prstGeom prst="rect">
-            <a:avLst/>
-          </a:prstGeom>
-          <a:noFill/>
-          <a:ln/>
-        </p:spPr>
-        <p:txBody>
-          <a:bodyPr wrap="square" lIns="0" tIns="0" rIns="0" bIns="0" rtlCol="0" anchor="ctr"/>
-          <a:lstStyle/>
-          <a:p>
-            <a:pPr algn="ctr" indent="0" marL="0">
-              <a:buNone/>
-            </a:pPr>
-            <a:r>
-              <a:rPr lang="en-US" sz="1400" b="1" dirty="0">
-                <a:solidFill>
-                  <a:srgbClr val="0D9488"/>
+              <a:srgbClr val="DB2777"/>
+            </a:solidFill>
+            <a:prstDash val="solid"/>
+          </a:ln>
+        </p:spPr>
+      </p:sp>
+      <p:sp>
+        <p:nvSpPr>
+          <p:cNvPr id="45" name="Text 43"/>
+          <p:cNvSpPr/>
+          <p:nvPr/>
+        </p:nvSpPr>
+        <p:spPr>
+          <a:xfrm>
+            <a:off x="5254752" y="4169664"/>
+            <a:ext cx="685800" cy="475488"/>
+          </a:xfrm>
+          <a:prstGeom prst="rect">
+            <a:avLst/>
+          </a:prstGeom>
+          <a:noFill/>
+          <a:ln/>
+        </p:spPr>
+        <p:txBody>
+          <a:bodyPr wrap="square" lIns="0" tIns="0" rIns="0" bIns="0" rtlCol="0" anchor="ctr"/>
+          <a:lstStyle/>
+          <a:p>
+            <a:pPr algn="ctr" indent="0" marL="0">
+              <a:buNone/>
+            </a:pPr>
+            <a:r>
+              <a:rPr lang="en-US" sz="900" b="1" dirty="0">
+                <a:solidFill>
+                  <a:srgbClr val="9D174D"/>
                 </a:solidFill>
                 <a:latin typeface="Trebuchet MS" pitchFamily="34" charset="0"/>
                 <a:ea typeface="Trebuchet MS" pitchFamily="34" charset="-122"/>
                 <a:cs typeface="Trebuchet MS" pitchFamily="34" charset="-120"/>
               </a:rPr>
-              <a:t>sis</a:t>
-            </a:r>
-            <a:endParaRPr lang="en-US" sz="1400" dirty="0"/>
-          </a:p>
-        </p:txBody>
-      </p:sp>
-      <p:sp>
-        <p:nvSpPr>
-          <p:cNvPr id="36" name="Text 34"/>
-          <p:cNvSpPr/>
-          <p:nvPr/>
-        </p:nvSpPr>
-        <p:spPr>
-          <a:xfrm>
-            <a:off x="6784848" y="3364992"/>
-            <a:ext cx="73152" cy="475488"/>
-          </a:xfrm>
-          <a:prstGeom prst="rect">
-            <a:avLst/>
-          </a:prstGeom>
-          <a:noFill/>
-          <a:ln/>
-        </p:spPr>
-        <p:txBody>
-          <a:bodyPr wrap="square" lIns="0" tIns="0" rIns="0" bIns="0" rtlCol="0" anchor="ctr"/>
-          <a:lstStyle/>
-          <a:p>
-            <a:pPr algn="ctr" indent="0" marL="0">
-              <a:buNone/>
-            </a:pPr>
-            <a:r>
-              <a:rPr lang="en-US" sz="1600" b="1" dirty="0">
-                <a:solidFill>
-                  <a:srgbClr val="0D9488"/>
+              <a:t>t</a:t>
+            </a:r>
+            <a:endParaRPr lang="en-US" sz="900" dirty="0"/>
+          </a:p>
+        </p:txBody>
+      </p:sp>
+      <p:sp>
+        <p:nvSpPr>
+          <p:cNvPr id="46" name="Shape 44"/>
+          <p:cNvSpPr/>
+          <p:nvPr/>
+        </p:nvSpPr>
+        <p:spPr>
+          <a:xfrm>
+            <a:off x="6062472" y="4169664"/>
+            <a:ext cx="685800" cy="475488"/>
+          </a:xfrm>
+          <a:prstGeom prst="rect">
+            <a:avLst>
+              <a:gd name="adj" fmla="val 7692"/>
+            </a:avLst>
+          </a:prstGeom>
+          <a:solidFill>
+            <a:srgbClr val="FFFFFF"/>
+          </a:solidFill>
+          <a:ln w="12700">
+            <a:solidFill>
+              <a:srgbClr val="DB2777"/>
+            </a:solidFill>
+            <a:prstDash val="solid"/>
+          </a:ln>
+        </p:spPr>
+      </p:sp>
+      <p:sp>
+        <p:nvSpPr>
+          <p:cNvPr id="47" name="Text 45"/>
+          <p:cNvSpPr/>
+          <p:nvPr/>
+        </p:nvSpPr>
+        <p:spPr>
+          <a:xfrm>
+            <a:off x="6062472" y="4169664"/>
+            <a:ext cx="685800" cy="475488"/>
+          </a:xfrm>
+          <a:prstGeom prst="rect">
+            <a:avLst/>
+          </a:prstGeom>
+          <a:noFill/>
+          <a:ln/>
+        </p:spPr>
+        <p:txBody>
+          <a:bodyPr wrap="square" lIns="0" tIns="0" rIns="0" bIns="0" rtlCol="0" anchor="ctr"/>
+          <a:lstStyle/>
+          <a:p>
+            <a:pPr algn="ctr" indent="0" marL="0">
+              <a:buNone/>
+            </a:pPr>
+            <a:r>
+              <a:rPr lang="en-US" sz="900" b="1" dirty="0">
+                <a:solidFill>
+                  <a:srgbClr val="9D174D"/>
                 </a:solidFill>
                 <a:latin typeface="Trebuchet MS" pitchFamily="34" charset="0"/>
                 <a:ea typeface="Trebuchet MS" pitchFamily="34" charset="-122"/>
                 <a:cs typeface="Trebuchet MS" pitchFamily="34" charset="-120"/>
               </a:rPr>
-              <a:t>·</a:t>
-            </a:r>
-            <a:endParaRPr lang="en-US" sz="1600" dirty="0"/>
-          </a:p>
-        </p:txBody>
-      </p:sp>
-      <p:sp>
-        <p:nvSpPr>
-          <p:cNvPr id="37" name="Shape 35"/>
-          <p:cNvSpPr/>
-          <p:nvPr/>
-        </p:nvSpPr>
-        <p:spPr>
-          <a:xfrm>
-            <a:off x="6858000" y="3364992"/>
-            <a:ext cx="1554480" cy="475488"/>
+              <a:t>i</a:t>
+            </a:r>
+            <a:endParaRPr lang="en-US" sz="900" dirty="0"/>
+          </a:p>
+        </p:txBody>
+      </p:sp>
+      <p:sp>
+        <p:nvSpPr>
+          <p:cNvPr id="48" name="Shape 46"/>
+          <p:cNvSpPr/>
+          <p:nvPr/>
+        </p:nvSpPr>
+        <p:spPr>
+          <a:xfrm>
+            <a:off x="6870192" y="4169664"/>
+            <a:ext cx="685800" cy="475488"/>
           </a:xfrm>
           <a:prstGeom prst="rect">
             <a:avLst>
-              <a:gd name="adj" fmla="val 9615"/>
+              <a:gd name="adj" fmla="val 7692"/>
             </a:avLst>
           </a:prstGeom>
           <a:solidFill>
@@ -28182,733 +28094,112 @@
           </a:solidFill>
           <a:ln w="12700">
             <a:solidFill>
-              <a:srgbClr val="0D9488"/>
-            </a:solidFill>
-            <a:prstDash val="solid"/>
-          </a:ln>
-        </p:spPr>
-      </p:sp>
-      <p:sp>
-        <p:nvSpPr>
-          <p:cNvPr id="38" name="Text 36"/>
-          <p:cNvSpPr/>
-          <p:nvPr/>
-        </p:nvSpPr>
-        <p:spPr>
-          <a:xfrm>
-            <a:off x="6858000" y="3364992"/>
-            <a:ext cx="1554480" cy="475488"/>
-          </a:xfrm>
-          <a:prstGeom prst="rect">
-            <a:avLst/>
-          </a:prstGeom>
-          <a:noFill/>
-          <a:ln/>
-        </p:spPr>
-        <p:txBody>
-          <a:bodyPr wrap="square" lIns="0" tIns="0" rIns="0" bIns="0" rtlCol="0" anchor="ctr"/>
-          <a:lstStyle/>
-          <a:p>
-            <a:pPr algn="ctr" indent="0" marL="0">
-              <a:buNone/>
-            </a:pPr>
-            <a:r>
-              <a:rPr lang="en-US" sz="1400" b="1" dirty="0">
-                <a:solidFill>
-                  <a:srgbClr val="0D9488"/>
+              <a:srgbClr val="DB2777"/>
+            </a:solidFill>
+            <a:prstDash val="solid"/>
+          </a:ln>
+        </p:spPr>
+      </p:sp>
+      <p:sp>
+        <p:nvSpPr>
+          <p:cNvPr id="49" name="Text 47"/>
+          <p:cNvSpPr/>
+          <p:nvPr/>
+        </p:nvSpPr>
+        <p:spPr>
+          <a:xfrm>
+            <a:off x="6870192" y="4169664"/>
+            <a:ext cx="685800" cy="475488"/>
+          </a:xfrm>
+          <a:prstGeom prst="rect">
+            <a:avLst/>
+          </a:prstGeom>
+          <a:noFill/>
+          <a:ln/>
+        </p:spPr>
+        <p:txBody>
+          <a:bodyPr wrap="square" lIns="0" tIns="0" rIns="0" bIns="0" rtlCol="0" anchor="ctr"/>
+          <a:lstStyle/>
+          <a:p>
+            <a:pPr algn="ctr" indent="0" marL="0">
+              <a:buNone/>
+            </a:pPr>
+            <a:r>
+              <a:rPr lang="en-US" sz="900" b="1" dirty="0">
+                <a:solidFill>
+                  <a:srgbClr val="9D174D"/>
                 </a:solidFill>
                 <a:latin typeface="Trebuchet MS" pitchFamily="34" charset="0"/>
                 <a:ea typeface="Trebuchet MS" pitchFamily="34" charset="-122"/>
                 <a:cs typeface="Trebuchet MS" pitchFamily="34" charset="-120"/>
               </a:rPr>
-              <a:t>ted</a:t>
-            </a:r>
-            <a:endParaRPr lang="en-US" sz="1400" dirty="0"/>
-          </a:p>
-        </p:txBody>
-      </p:sp>
-      <p:sp>
-        <p:nvSpPr>
-          <p:cNvPr id="39" name="Shape 37"/>
-          <p:cNvSpPr/>
-          <p:nvPr/>
-        </p:nvSpPr>
-        <p:spPr>
-          <a:xfrm>
-            <a:off x="365760" y="4096512"/>
-            <a:ext cx="1371600" cy="804672"/>
+              <a:t>v</a:t>
+            </a:r>
+            <a:endParaRPr lang="en-US" sz="900" dirty="0"/>
+          </a:p>
+        </p:txBody>
+      </p:sp>
+      <p:sp>
+        <p:nvSpPr>
+          <p:cNvPr id="50" name="Shape 48"/>
+          <p:cNvSpPr/>
+          <p:nvPr/>
+        </p:nvSpPr>
+        <p:spPr>
+          <a:xfrm>
+            <a:off x="7677912" y="4169664"/>
+            <a:ext cx="685800" cy="475488"/>
           </a:xfrm>
           <a:prstGeom prst="rect">
             <a:avLst>
-              <a:gd name="adj" fmla="val 6818"/>
+              <a:gd name="adj" fmla="val 7692"/>
             </a:avLst>
           </a:prstGeom>
           <a:solidFill>
-            <a:srgbClr val="E2E8F0"/>
-          </a:solidFill>
-          <a:ln w="12700">
-            <a:solidFill>
-              <a:srgbClr val="E2E8F0"/>
-            </a:solidFill>
-            <a:prstDash val="solid"/>
-          </a:ln>
-        </p:spPr>
-      </p:sp>
-      <p:sp>
-        <p:nvSpPr>
-          <p:cNvPr id="40" name="Text 38"/>
-          <p:cNvSpPr/>
-          <p:nvPr/>
-        </p:nvSpPr>
-        <p:spPr>
-          <a:xfrm>
-            <a:off x="365760" y="4096512"/>
-            <a:ext cx="1371600" cy="804672"/>
-          </a:xfrm>
-          <a:prstGeom prst="rect">
-            <a:avLst/>
-          </a:prstGeom>
-          <a:noFill/>
-          <a:ln/>
-        </p:spPr>
-        <p:txBody>
-          <a:bodyPr wrap="square" lIns="0" tIns="0" rIns="0" bIns="0" rtlCol="0" anchor="ctr"/>
-          <a:lstStyle/>
-          <a:p>
-            <a:pPr algn="ctr" indent="0" marL="0">
-              <a:buNone/>
-            </a:pPr>
-            <a:r>
-              <a:rPr lang="en-US" sz="1100" b="1" dirty="0">
-                <a:solidFill>
-                  <a:srgbClr val="475569"/>
+            <a:srgbClr val="FFFFFF"/>
+          </a:solidFill>
+          <a:ln w="12700">
+            <a:solidFill>
+              <a:srgbClr val="DB2777"/>
+            </a:solidFill>
+            <a:prstDash val="solid"/>
+          </a:ln>
+        </p:spPr>
+      </p:sp>
+      <p:sp>
+        <p:nvSpPr>
+          <p:cNvPr id="51" name="Text 49"/>
+          <p:cNvSpPr/>
+          <p:nvPr/>
+        </p:nvSpPr>
+        <p:spPr>
+          <a:xfrm>
+            <a:off x="7677912" y="4169664"/>
+            <a:ext cx="685800" cy="475488"/>
+          </a:xfrm>
+          <a:prstGeom prst="rect">
+            <a:avLst/>
+          </a:prstGeom>
+          <a:noFill/>
+          <a:ln/>
+        </p:spPr>
+        <p:txBody>
+          <a:bodyPr wrap="square" lIns="0" tIns="0" rIns="0" bIns="0" rtlCol="0" anchor="ctr"/>
+          <a:lstStyle/>
+          <a:p>
+            <a:pPr algn="ctr" indent="0" marL="0">
+              <a:buNone/>
+            </a:pPr>
+            <a:r>
+              <a:rPr lang="en-US" sz="900" b="1" dirty="0">
+                <a:solidFill>
+                  <a:srgbClr val="9D174D"/>
                 </a:solidFill>
                 <a:latin typeface="Trebuchet MS" pitchFamily="34" charset="0"/>
                 <a:ea typeface="Trebuchet MS" pitchFamily="34" charset="-122"/>
                 <a:cs typeface="Trebuchet MS" pitchFamily="34" charset="-120"/>
               </a:rPr>
-              <a:t>Phonemes</a:t>
-            </a:r>
-            <a:endParaRPr lang="en-US" sz="1100" dirty="0"/>
-          </a:p>
-        </p:txBody>
-      </p:sp>
-      <p:sp>
-        <p:nvSpPr>
-          <p:cNvPr id="41" name="Shape 39"/>
-          <p:cNvSpPr/>
-          <p:nvPr/>
-        </p:nvSpPr>
-        <p:spPr>
-          <a:xfrm>
-            <a:off x="1874520" y="4096512"/>
-            <a:ext cx="6903720" cy="658368"/>
-          </a:xfrm>
-          <a:prstGeom prst="rect">
-            <a:avLst>
-              <a:gd name="adj" fmla="val 8333"/>
-            </a:avLst>
-          </a:prstGeom>
-          <a:solidFill>
-            <a:srgbClr val="FCE7F3"/>
-          </a:solidFill>
-          <a:ln w="12700">
-            <a:solidFill>
-              <a:srgbClr val="DB2777"/>
-            </a:solidFill>
-            <a:prstDash val="solid"/>
-          </a:ln>
-        </p:spPr>
-      </p:sp>
-      <p:sp>
-        <p:nvSpPr>
-          <p:cNvPr id="42" name="Shape 40"/>
-          <p:cNvSpPr/>
-          <p:nvPr/>
-        </p:nvSpPr>
-        <p:spPr>
-          <a:xfrm>
-            <a:off x="1951330" y="4169664"/>
-            <a:ext cx="676656" cy="475488"/>
-          </a:xfrm>
-          <a:prstGeom prst="rect">
-            <a:avLst>
-              <a:gd name="adj" fmla="val 7692"/>
-            </a:avLst>
-          </a:prstGeom>
-          <a:solidFill>
-            <a:srgbClr val="FFFFFF"/>
-          </a:solidFill>
-          <a:ln w="12700">
-            <a:solidFill>
-              <a:srgbClr val="DB2777"/>
-            </a:solidFill>
-            <a:prstDash val="solid"/>
-          </a:ln>
-        </p:spPr>
-      </p:sp>
-      <p:sp>
-        <p:nvSpPr>
-          <p:cNvPr id="43" name="Text 41"/>
-          <p:cNvSpPr/>
-          <p:nvPr/>
-        </p:nvSpPr>
-        <p:spPr>
-          <a:xfrm>
-            <a:off x="1951330" y="4169664"/>
-            <a:ext cx="676656" cy="475488"/>
-          </a:xfrm>
-          <a:prstGeom prst="rect">
-            <a:avLst/>
-          </a:prstGeom>
-          <a:noFill/>
-          <a:ln/>
-        </p:spPr>
-        <p:txBody>
-          <a:bodyPr wrap="square" lIns="0" tIns="0" rIns="0" bIns="0" rtlCol="0" anchor="ctr"/>
-          <a:lstStyle/>
-          <a:p>
-            <a:pPr algn="ctr" indent="0" marL="0">
-              <a:buNone/>
-            </a:pPr>
-            <a:r>
-              <a:rPr lang="en-US" sz="900" b="1" dirty="0">
-                <a:solidFill>
-                  <a:srgbClr val="9D174D"/>
-                </a:solidFill>
-                <a:latin typeface="Trebuchet MS" pitchFamily="34" charset="0"/>
-                <a:ea typeface="Trebuchet MS" pitchFamily="34" charset="-122"/>
-                <a:cs typeface="Trebuchet MS" pitchFamily="34" charset="-120"/>
-              </a:rPr>
-              <a:t>u</a:t>
-            </a:r>
-            <a:endParaRPr lang="en-US" sz="900" dirty="0"/>
-          </a:p>
-        </p:txBody>
-      </p:sp>
-      <p:sp>
-        <p:nvSpPr>
-          <p:cNvPr id="44" name="Shape 42"/>
-          <p:cNvSpPr/>
-          <p:nvPr/>
-        </p:nvSpPr>
-        <p:spPr>
-          <a:xfrm>
-            <a:off x="2677363" y="4169664"/>
-            <a:ext cx="676656" cy="475488"/>
-          </a:xfrm>
-          <a:prstGeom prst="rect">
-            <a:avLst>
-              <a:gd name="adj" fmla="val 7692"/>
-            </a:avLst>
-          </a:prstGeom>
-          <a:solidFill>
-            <a:srgbClr val="FFFFFF"/>
-          </a:solidFill>
-          <a:ln w="12700">
-            <a:solidFill>
-              <a:srgbClr val="DB2777"/>
-            </a:solidFill>
-            <a:prstDash val="solid"/>
-          </a:ln>
-        </p:spPr>
-      </p:sp>
-      <p:sp>
-        <p:nvSpPr>
-          <p:cNvPr id="45" name="Text 43"/>
-          <p:cNvSpPr/>
-          <p:nvPr/>
-        </p:nvSpPr>
-        <p:spPr>
-          <a:xfrm>
-            <a:off x="2677363" y="4169664"/>
-            <a:ext cx="676656" cy="475488"/>
-          </a:xfrm>
-          <a:prstGeom prst="rect">
-            <a:avLst/>
-          </a:prstGeom>
-          <a:noFill/>
-          <a:ln/>
-        </p:spPr>
-        <p:txBody>
-          <a:bodyPr wrap="square" lIns="0" tIns="0" rIns="0" bIns="0" rtlCol="0" anchor="ctr"/>
-          <a:lstStyle/>
-          <a:p>
-            <a:pPr algn="ctr" indent="0" marL="0">
-              <a:buNone/>
-            </a:pPr>
-            <a:r>
-              <a:rPr lang="en-US" sz="900" b="1" dirty="0">
-                <a:solidFill>
-                  <a:srgbClr val="9D174D"/>
-                </a:solidFill>
-                <a:latin typeface="Trebuchet MS" pitchFamily="34" charset="0"/>
-                <a:ea typeface="Trebuchet MS" pitchFamily="34" charset="-122"/>
-                <a:cs typeface="Trebuchet MS" pitchFamily="34" charset="-120"/>
-              </a:rPr>
-              <a:t>n</a:t>
-            </a:r>
-            <a:endParaRPr lang="en-US" sz="900" dirty="0"/>
-          </a:p>
-        </p:txBody>
-      </p:sp>
-      <p:sp>
-        <p:nvSpPr>
-          <p:cNvPr id="46" name="Shape 44"/>
-          <p:cNvSpPr/>
-          <p:nvPr/>
-        </p:nvSpPr>
-        <p:spPr>
-          <a:xfrm>
-            <a:off x="3403397" y="4169664"/>
-            <a:ext cx="676656" cy="475488"/>
-          </a:xfrm>
-          <a:prstGeom prst="rect">
-            <a:avLst>
-              <a:gd name="adj" fmla="val 7692"/>
-            </a:avLst>
-          </a:prstGeom>
-          <a:solidFill>
-            <a:srgbClr val="FFFFFF"/>
-          </a:solidFill>
-          <a:ln w="12700">
-            <a:solidFill>
-              <a:srgbClr val="DB2777"/>
-            </a:solidFill>
-            <a:prstDash val="solid"/>
-          </a:ln>
-        </p:spPr>
-      </p:sp>
-      <p:sp>
-        <p:nvSpPr>
-          <p:cNvPr id="47" name="Text 45"/>
-          <p:cNvSpPr/>
-          <p:nvPr/>
-        </p:nvSpPr>
-        <p:spPr>
-          <a:xfrm>
-            <a:off x="3403397" y="4169664"/>
-            <a:ext cx="676656" cy="475488"/>
-          </a:xfrm>
-          <a:prstGeom prst="rect">
-            <a:avLst/>
-          </a:prstGeom>
-          <a:noFill/>
-          <a:ln/>
-        </p:spPr>
-        <p:txBody>
-          <a:bodyPr wrap="square" lIns="0" tIns="0" rIns="0" bIns="0" rtlCol="0" anchor="ctr"/>
-          <a:lstStyle/>
-          <a:p>
-            <a:pPr algn="ctr" indent="0" marL="0">
-              <a:buNone/>
-            </a:pPr>
-            <a:r>
-              <a:rPr lang="en-US" sz="900" b="1" dirty="0">
-                <a:solidFill>
-                  <a:srgbClr val="9D174D"/>
-                </a:solidFill>
-                <a:latin typeface="Trebuchet MS" pitchFamily="34" charset="0"/>
-                <a:ea typeface="Trebuchet MS" pitchFamily="34" charset="-122"/>
-                <a:cs typeface="Trebuchet MS" pitchFamily="34" charset="-120"/>
-              </a:rPr>
-              <a:t>a</a:t>
-            </a:r>
-            <a:endParaRPr lang="en-US" sz="900" dirty="0"/>
-          </a:p>
-        </p:txBody>
-      </p:sp>
-      <p:sp>
-        <p:nvSpPr>
-          <p:cNvPr id="48" name="Shape 46"/>
-          <p:cNvSpPr/>
-          <p:nvPr/>
-        </p:nvSpPr>
-        <p:spPr>
-          <a:xfrm>
-            <a:off x="4129430" y="4169664"/>
-            <a:ext cx="676656" cy="475488"/>
-          </a:xfrm>
-          <a:prstGeom prst="rect">
-            <a:avLst>
-              <a:gd name="adj" fmla="val 7692"/>
-            </a:avLst>
-          </a:prstGeom>
-          <a:solidFill>
-            <a:srgbClr val="FFFFFF"/>
-          </a:solidFill>
-          <a:ln w="12700">
-            <a:solidFill>
-              <a:srgbClr val="DB2777"/>
-            </a:solidFill>
-            <a:prstDash val="solid"/>
-          </a:ln>
-        </p:spPr>
-      </p:sp>
-      <p:sp>
-        <p:nvSpPr>
-          <p:cNvPr id="49" name="Text 47"/>
-          <p:cNvSpPr/>
-          <p:nvPr/>
-        </p:nvSpPr>
-        <p:spPr>
-          <a:xfrm>
-            <a:off x="4129430" y="4169664"/>
-            <a:ext cx="676656" cy="475488"/>
-          </a:xfrm>
-          <a:prstGeom prst="rect">
-            <a:avLst/>
-          </a:prstGeom>
-          <a:noFill/>
-          <a:ln/>
-        </p:spPr>
-        <p:txBody>
-          <a:bodyPr wrap="square" lIns="0" tIns="0" rIns="0" bIns="0" rtlCol="0" anchor="ctr"/>
-          <a:lstStyle/>
-          <a:p>
-            <a:pPr algn="ctr" indent="0" marL="0">
-              <a:buNone/>
-            </a:pPr>
-            <a:r>
-              <a:rPr lang="en-US" sz="900" b="1" dirty="0">
-                <a:solidFill>
-                  <a:srgbClr val="9D174D"/>
-                </a:solidFill>
-                <a:latin typeface="Trebuchet MS" pitchFamily="34" charset="0"/>
-                <a:ea typeface="Trebuchet MS" pitchFamily="34" charset="-122"/>
-                <a:cs typeface="Trebuchet MS" pitchFamily="34" charset="-120"/>
-              </a:rPr>
-              <a:t>ss</a:t>
-            </a:r>
-            <a:endParaRPr lang="en-US" sz="900" dirty="0"/>
-          </a:p>
-        </p:txBody>
-      </p:sp>
-      <p:sp>
-        <p:nvSpPr>
-          <p:cNvPr id="50" name="Shape 48"/>
-          <p:cNvSpPr/>
-          <p:nvPr/>
-        </p:nvSpPr>
-        <p:spPr>
-          <a:xfrm>
-            <a:off x="4855464" y="4169664"/>
-            <a:ext cx="676656" cy="475488"/>
-          </a:xfrm>
-          <a:prstGeom prst="rect">
-            <a:avLst>
-              <a:gd name="adj" fmla="val 7692"/>
-            </a:avLst>
-          </a:prstGeom>
-          <a:solidFill>
-            <a:srgbClr val="FFFFFF"/>
-          </a:solidFill>
-          <a:ln w="12700">
-            <a:solidFill>
-              <a:srgbClr val="DB2777"/>
-            </a:solidFill>
-            <a:prstDash val="solid"/>
-          </a:ln>
-        </p:spPr>
-      </p:sp>
-      <p:sp>
-        <p:nvSpPr>
-          <p:cNvPr id="51" name="Text 49"/>
-          <p:cNvSpPr/>
-          <p:nvPr/>
-        </p:nvSpPr>
-        <p:spPr>
-          <a:xfrm>
-            <a:off x="4855464" y="4169664"/>
-            <a:ext cx="676656" cy="475488"/>
-          </a:xfrm>
-          <a:prstGeom prst="rect">
-            <a:avLst/>
-          </a:prstGeom>
-          <a:noFill/>
-          <a:ln/>
-        </p:spPr>
-        <p:txBody>
-          <a:bodyPr wrap="square" lIns="0" tIns="0" rIns="0" bIns="0" rtlCol="0" anchor="ctr"/>
-          <a:lstStyle/>
-          <a:p>
-            <a:pPr algn="ctr" indent="0" marL="0">
-              <a:buNone/>
-            </a:pPr>
-            <a:r>
-              <a:rPr lang="en-US" sz="900" b="1" dirty="0">
-                <a:solidFill>
-                  <a:srgbClr val="9D174D"/>
-                </a:solidFill>
-                <a:latin typeface="Trebuchet MS" pitchFamily="34" charset="0"/>
-                <a:ea typeface="Trebuchet MS" pitchFamily="34" charset="-122"/>
-                <a:cs typeface="Trebuchet MS" pitchFamily="34" charset="-120"/>
-              </a:rPr>
-              <a:t>i</a:t>
-            </a:r>
-            <a:endParaRPr lang="en-US" sz="900" dirty="0"/>
-          </a:p>
-        </p:txBody>
-      </p:sp>
-      <p:sp>
-        <p:nvSpPr>
-          <p:cNvPr id="52" name="Shape 50"/>
-          <p:cNvSpPr/>
-          <p:nvPr/>
-        </p:nvSpPr>
-        <p:spPr>
-          <a:xfrm>
-            <a:off x="5581498" y="4169664"/>
-            <a:ext cx="676656" cy="475488"/>
-          </a:xfrm>
-          <a:prstGeom prst="rect">
-            <a:avLst>
-              <a:gd name="adj" fmla="val 7692"/>
-            </a:avLst>
-          </a:prstGeom>
-          <a:solidFill>
-            <a:srgbClr val="FFFFFF"/>
-          </a:solidFill>
-          <a:ln w="12700">
-            <a:solidFill>
-              <a:srgbClr val="DB2777"/>
-            </a:solidFill>
-            <a:prstDash val="solid"/>
-          </a:ln>
-        </p:spPr>
-      </p:sp>
-      <p:sp>
-        <p:nvSpPr>
-          <p:cNvPr id="53" name="Text 51"/>
-          <p:cNvSpPr/>
-          <p:nvPr/>
-        </p:nvSpPr>
-        <p:spPr>
-          <a:xfrm>
-            <a:off x="5581498" y="4169664"/>
-            <a:ext cx="676656" cy="475488"/>
-          </a:xfrm>
-          <a:prstGeom prst="rect">
-            <a:avLst/>
-          </a:prstGeom>
-          <a:noFill/>
-          <a:ln/>
-        </p:spPr>
-        <p:txBody>
-          <a:bodyPr wrap="square" lIns="0" tIns="0" rIns="0" bIns="0" rtlCol="0" anchor="ctr"/>
-          <a:lstStyle/>
-          <a:p>
-            <a:pPr algn="ctr" indent="0" marL="0">
-              <a:buNone/>
-            </a:pPr>
-            <a:r>
-              <a:rPr lang="en-US" sz="900" b="1" dirty="0">
-                <a:solidFill>
-                  <a:srgbClr val="9D174D"/>
-                </a:solidFill>
-                <a:latin typeface="Trebuchet MS" pitchFamily="34" charset="0"/>
-                <a:ea typeface="Trebuchet MS" pitchFamily="34" charset="-122"/>
-                <a:cs typeface="Trebuchet MS" pitchFamily="34" charset="-120"/>
-              </a:rPr>
-              <a:t>s</a:t>
-            </a:r>
-            <a:endParaRPr lang="en-US" sz="900" dirty="0"/>
-          </a:p>
-        </p:txBody>
-      </p:sp>
-      <p:sp>
-        <p:nvSpPr>
-          <p:cNvPr id="54" name="Shape 52"/>
-          <p:cNvSpPr/>
-          <p:nvPr/>
-        </p:nvSpPr>
-        <p:spPr>
-          <a:xfrm>
-            <a:off x="6307531" y="4169664"/>
-            <a:ext cx="676656" cy="475488"/>
-          </a:xfrm>
-          <a:prstGeom prst="rect">
-            <a:avLst>
-              <a:gd name="adj" fmla="val 7692"/>
-            </a:avLst>
-          </a:prstGeom>
-          <a:solidFill>
-            <a:srgbClr val="FFFFFF"/>
-          </a:solidFill>
-          <a:ln w="12700">
-            <a:solidFill>
-              <a:srgbClr val="DB2777"/>
-            </a:solidFill>
-            <a:prstDash val="solid"/>
-          </a:ln>
-        </p:spPr>
-      </p:sp>
-      <p:sp>
-        <p:nvSpPr>
-          <p:cNvPr id="55" name="Text 53"/>
-          <p:cNvSpPr/>
-          <p:nvPr/>
-        </p:nvSpPr>
-        <p:spPr>
-          <a:xfrm>
-            <a:off x="6307531" y="4169664"/>
-            <a:ext cx="676656" cy="475488"/>
-          </a:xfrm>
-          <a:prstGeom prst="rect">
-            <a:avLst/>
-          </a:prstGeom>
-          <a:noFill/>
-          <a:ln/>
-        </p:spPr>
-        <p:txBody>
-          <a:bodyPr wrap="square" lIns="0" tIns="0" rIns="0" bIns="0" rtlCol="0" anchor="ctr"/>
-          <a:lstStyle/>
-          <a:p>
-            <a:pPr algn="ctr" indent="0" marL="0">
-              <a:buNone/>
-            </a:pPr>
-            <a:r>
-              <a:rPr lang="en-US" sz="900" b="1" dirty="0">
-                <a:solidFill>
-                  <a:srgbClr val="9D174D"/>
-                </a:solidFill>
-                <a:latin typeface="Trebuchet MS" pitchFamily="34" charset="0"/>
-                <a:ea typeface="Trebuchet MS" pitchFamily="34" charset="-122"/>
-                <a:cs typeface="Trebuchet MS" pitchFamily="34" charset="-120"/>
-              </a:rPr>
-              <a:t>t</a:t>
-            </a:r>
-            <a:endParaRPr lang="en-US" sz="900" dirty="0"/>
-          </a:p>
-        </p:txBody>
-      </p:sp>
-      <p:sp>
-        <p:nvSpPr>
-          <p:cNvPr id="56" name="Shape 54"/>
-          <p:cNvSpPr/>
-          <p:nvPr/>
-        </p:nvSpPr>
-        <p:spPr>
-          <a:xfrm>
-            <a:off x="7033565" y="4169664"/>
-            <a:ext cx="676656" cy="475488"/>
-          </a:xfrm>
-          <a:prstGeom prst="rect">
-            <a:avLst>
-              <a:gd name="adj" fmla="val 7692"/>
-            </a:avLst>
-          </a:prstGeom>
-          <a:solidFill>
-            <a:srgbClr val="FFFFFF"/>
-          </a:solidFill>
-          <a:ln w="12700">
-            <a:solidFill>
-              <a:srgbClr val="DB2777"/>
-            </a:solidFill>
-            <a:prstDash val="solid"/>
-          </a:ln>
-        </p:spPr>
-      </p:sp>
-      <p:sp>
-        <p:nvSpPr>
-          <p:cNvPr id="57" name="Text 55"/>
-          <p:cNvSpPr/>
-          <p:nvPr/>
-        </p:nvSpPr>
-        <p:spPr>
-          <a:xfrm>
-            <a:off x="7033565" y="4169664"/>
-            <a:ext cx="676656" cy="475488"/>
-          </a:xfrm>
-          <a:prstGeom prst="rect">
-            <a:avLst/>
-          </a:prstGeom>
-          <a:noFill/>
-          <a:ln/>
-        </p:spPr>
-        <p:txBody>
-          <a:bodyPr wrap="square" lIns="0" tIns="0" rIns="0" bIns="0" rtlCol="0" anchor="ctr"/>
-          <a:lstStyle/>
-          <a:p>
-            <a:pPr algn="ctr" indent="0" marL="0">
-              <a:buNone/>
-            </a:pPr>
-            <a:r>
-              <a:rPr lang="en-US" sz="900" b="1" dirty="0">
-                <a:solidFill>
-                  <a:srgbClr val="9D174D"/>
-                </a:solidFill>
-                <a:latin typeface="Trebuchet MS" pitchFamily="34" charset="0"/>
-                <a:ea typeface="Trebuchet MS" pitchFamily="34" charset="-122"/>
-                <a:cs typeface="Trebuchet MS" pitchFamily="34" charset="-120"/>
-              </a:rPr>
               <a:t>e</a:t>
-            </a:r>
-            <a:endParaRPr lang="en-US" sz="900" dirty="0"/>
-          </a:p>
-        </p:txBody>
-      </p:sp>
-      <p:sp>
-        <p:nvSpPr>
-          <p:cNvPr id="58" name="Shape 56"/>
-          <p:cNvSpPr/>
-          <p:nvPr/>
-        </p:nvSpPr>
-        <p:spPr>
-          <a:xfrm>
-            <a:off x="7759598" y="4169664"/>
-            <a:ext cx="676656" cy="475488"/>
-          </a:xfrm>
-          <a:prstGeom prst="rect">
-            <a:avLst>
-              <a:gd name="adj" fmla="val 7692"/>
-            </a:avLst>
-          </a:prstGeom>
-          <a:solidFill>
-            <a:srgbClr val="FFFFFF"/>
-          </a:solidFill>
-          <a:ln w="12700">
-            <a:solidFill>
-              <a:srgbClr val="DB2777"/>
-            </a:solidFill>
-            <a:prstDash val="solid"/>
-          </a:ln>
-        </p:spPr>
-      </p:sp>
-      <p:sp>
-        <p:nvSpPr>
-          <p:cNvPr id="59" name="Text 57"/>
-          <p:cNvSpPr/>
-          <p:nvPr/>
-        </p:nvSpPr>
-        <p:spPr>
-          <a:xfrm>
-            <a:off x="7759598" y="4169664"/>
-            <a:ext cx="676656" cy="475488"/>
-          </a:xfrm>
-          <a:prstGeom prst="rect">
-            <a:avLst/>
-          </a:prstGeom>
-          <a:noFill/>
-          <a:ln/>
-        </p:spPr>
-        <p:txBody>
-          <a:bodyPr wrap="square" lIns="0" tIns="0" rIns="0" bIns="0" rtlCol="0" anchor="ctr"/>
-          <a:lstStyle/>
-          <a:p>
-            <a:pPr algn="ctr" indent="0" marL="0">
-              <a:buNone/>
-            </a:pPr>
-            <a:r>
-              <a:rPr lang="en-US" sz="900" b="1" dirty="0">
-                <a:solidFill>
-                  <a:srgbClr val="9D174D"/>
-                </a:solidFill>
-                <a:latin typeface="Trebuchet MS" pitchFamily="34" charset="0"/>
-                <a:ea typeface="Trebuchet MS" pitchFamily="34" charset="-122"/>
-                <a:cs typeface="Trebuchet MS" pitchFamily="34" charset="-120"/>
-              </a:rPr>
-              <a:t>d</a:t>
             </a:r>
             <a:endParaRPr lang="en-US" sz="900" dirty="0"/>
           </a:p>
@@ -30456,7 +29747,7 @@
                 <a:ea typeface="Calibri" pitchFamily="34" charset="-122"/>
                 <a:cs typeface="Calibri" pitchFamily="34" charset="-120"/>
               </a:rPr>
-              <a:t>ongoing action</a:t>
+              <a:t>action happening now</a:t>
             </a:r>
             <a:endParaRPr lang="en-US" sz="850" dirty="0"/>
           </a:p>
@@ -31441,7 +30732,7 @@
                 <a:ea typeface="Calibri" pitchFamily="34" charset="-122"/>
                 <a:cs typeface="Calibri" pitchFamily="34" charset="-120"/>
               </a:rPr>
-              <a:t>ongoing action</a:t>
+              <a:t>action happening now</a:t>
             </a:r>
             <a:endParaRPr lang="en-US" sz="850" dirty="0"/>
           </a:p>
@@ -32663,7 +31954,7 @@
                 <a:ea typeface="Calibri" pitchFamily="34" charset="-122"/>
                 <a:cs typeface="Calibri" pitchFamily="34" charset="-120"/>
               </a:rPr>
-              <a:t>ongoing action</a:t>
+              <a:t>action happening now</a:t>
             </a:r>
             <a:endParaRPr lang="en-US" sz="850" dirty="0"/>
           </a:p>
@@ -35349,7 +34640,7 @@
                 <a:ea typeface="Trebuchet MS" pitchFamily="34" charset="-122"/>
                 <a:cs typeface="Trebuchet MS" pitchFamily="34" charset="-120"/>
               </a:rPr>
-              <a:t>un-</a:t>
+              <a:t>re-</a:t>
             </a:r>
             <a:endParaRPr lang="en-US" sz="1300" dirty="0"/>
           </a:p>
@@ -35541,7 +34832,7 @@
                 <a:ea typeface="Trebuchet MS" pitchFamily="34" charset="-122"/>
                 <a:cs typeface="Trebuchet MS" pitchFamily="34" charset="-120"/>
               </a:rPr>
-              <a:t>re-</a:t>
+              <a:t>co-</a:t>
             </a:r>
             <a:endParaRPr lang="en-US" sz="1300" dirty="0"/>
           </a:p>
@@ -35694,7 +34985,7 @@
                 <a:ea typeface="Trebuchet MS" pitchFamily="34" charset="-122"/>
                 <a:cs typeface="Trebuchet MS" pitchFamily="34" charset="-120"/>
               </a:rPr>
-              <a:t>co-</a:t>
+              <a:t>un-</a:t>
             </a:r>
             <a:endParaRPr lang="en-US" sz="1300" dirty="0"/>
           </a:p>
@@ -37844,7 +37135,7 @@
                 <a:ea typeface="Calibri" pitchFamily="34" charset="-122"/>
                 <a:cs typeface="Calibri" pitchFamily="34" charset="-120"/>
               </a:rPr>
-              <a:t>1.  The root 'assist' comes from a Latin word meaning to help or stand by.</a:t>
+              <a:t>1.  The word 'unassisted' means doing something without any help.</a:t>
             </a:r>
             <a:endParaRPr lang="en-US" sz="1300" dirty="0"/>
           </a:p>
@@ -37983,7 +37274,7 @@
                 <a:ea typeface="Calibri" pitchFamily="34" charset="-122"/>
                 <a:cs typeface="Calibri" pitchFamily="34" charset="-120"/>
               </a:rPr>
-              <a:t>2.  The word 'assistant' means someone who works completely alone.</a:t>
+              <a:t>2.  The root 'assist' comes from the Greek language.</a:t>
             </a:r>
             <a:endParaRPr lang="en-US" sz="1300" dirty="0"/>
           </a:p>
@@ -38122,7 +37413,7 @@
                 <a:ea typeface="Calibri" pitchFamily="34" charset="-122"/>
                 <a:cs typeface="Calibri" pitchFamily="34" charset="-120"/>
               </a:rPr>
-              <a:t>3.  Adding the suffix '-ance' to 'assist' makes the noun 'assistance', meaning the act of helping.</a:t>
+              <a:t>3.  The suffix '-ance' in 'assistance' turns the verb into a noun.</a:t>
             </a:r>
             <a:endParaRPr lang="en-US" sz="1300" dirty="0"/>
           </a:p>
@@ -38261,7 +37552,7 @@
                 <a:ea typeface="Calibri" pitchFamily="34" charset="-122"/>
                 <a:cs typeface="Calibri" pitchFamily="34" charset="-120"/>
               </a:rPr>
-              <a:t>4.  The prefix 'un-' in 'unassisted' means without or not, so 'unassisted' means done without help.</a:t>
+              <a:t>4.  The word 'assistant' contains the root 'assist'.</a:t>
             </a:r>
             <a:endParaRPr lang="en-US" sz="1300" dirty="0"/>
           </a:p>
@@ -38400,7 +37691,7 @@
                 <a:ea typeface="Calibri" pitchFamily="34" charset="-122"/>
                 <a:cs typeface="Calibri" pitchFamily="34" charset="-120"/>
               </a:rPr>
-              <a:t>5.  The word 'assisting' is a noun that names a type of helper.</a:t>
+              <a:t>5.  The root 'assist' means to block or prevent something.</a:t>
             </a:r>
             <a:endParaRPr lang="en-US" sz="1300" dirty="0"/>
           </a:p>
@@ -40028,7 +39319,7 @@
                 <a:ea typeface="Trebuchet MS" pitchFamily="34" charset="-122"/>
                 <a:cs typeface="Trebuchet MS" pitchFamily="34" charset="-120"/>
               </a:rPr>
-              <a:t>un-</a:t>
+              <a:t>re-</a:t>
             </a:r>
             <a:endParaRPr lang="en-US" sz="1300" dirty="0"/>
           </a:p>
@@ -40220,7 +39511,7 @@
                 <a:ea typeface="Trebuchet MS" pitchFamily="34" charset="-122"/>
                 <a:cs typeface="Trebuchet MS" pitchFamily="34" charset="-120"/>
               </a:rPr>
-              <a:t>re-</a:t>
+              <a:t>co-</a:t>
             </a:r>
             <a:endParaRPr lang="en-US" sz="1300" dirty="0"/>
           </a:p>
@@ -40373,7 +39664,7 @@
                 <a:ea typeface="Trebuchet MS" pitchFamily="34" charset="-122"/>
                 <a:cs typeface="Trebuchet MS" pitchFamily="34" charset="-120"/>
               </a:rPr>
-              <a:t>co-</a:t>
+              <a:t>un-</a:t>
             </a:r>
             <a:endParaRPr lang="en-US" sz="1300" dirty="0"/>
           </a:p>
@@ -40880,7 +40171,7 @@
                 <a:ea typeface="Trebuchet MS" pitchFamily="34" charset="-122"/>
                 <a:cs typeface="Trebuchet MS" pitchFamily="34" charset="-120"/>
               </a:rPr>
-              <a:t>un-</a:t>
+              <a:t>re-</a:t>
             </a:r>
             <a:endParaRPr lang="en-US" sz="1300" dirty="0"/>
           </a:p>
@@ -41818,7 +41109,7 @@
                 <a:ea typeface="Calibri" pitchFamily="34" charset="-122"/>
                 <a:cs typeface="Calibri" pitchFamily="34" charset="-120"/>
               </a:rPr>
-              <a:t>Helped by someone or something else.</a:t>
+              <a:t>Helped or supported by someone or something.</a:t>
             </a:r>
             <a:endParaRPr lang="en-US" sz="1200" dirty="0"/>
           </a:p>
@@ -41957,7 +41248,7 @@
                 <a:ea typeface="Calibri" pitchFamily="34" charset="-122"/>
                 <a:cs typeface="Calibri" pitchFamily="34" charset="-120"/>
               </a:rPr>
-              <a:t>Describing something designed to help people, especially with a disability.</a:t>
+              <a:t>Designed to help people, especially those with disabilities.</a:t>
             </a:r>
             <a:endParaRPr lang="en-US" sz="1200" dirty="0"/>
           </a:p>
@@ -42096,7 +41387,7 @@
                 <a:ea typeface="Calibri" pitchFamily="34" charset="-122"/>
                 <a:cs typeface="Calibri" pitchFamily="34" charset="-120"/>
               </a:rPr>
-              <a:t>A person whose job is to help someone else with their work.</a:t>
+              <a:t>A person who helps someone else with their work.</a:t>
             </a:r>
             <a:endParaRPr lang="en-US" sz="1200" dirty="0"/>
           </a:p>
@@ -42235,7 +41526,7 @@
                 <a:ea typeface="Calibri" pitchFamily="34" charset="-122"/>
                 <a:cs typeface="Calibri" pitchFamily="34" charset="-120"/>
               </a:rPr>
-              <a:t>Done on your own, without any help from others.</a:t>
+              <a:t>Done without any help from others.</a:t>
             </a:r>
             <a:endParaRPr lang="en-US" sz="1200" dirty="0"/>
           </a:p>
@@ -42374,7 +41665,7 @@
                 <a:ea typeface="Calibri" pitchFamily="34" charset="-122"/>
                 <a:cs typeface="Calibri" pitchFamily="34" charset="-120"/>
               </a:rPr>
-              <a:t>To help someone do something they need done.</a:t>
+              <a:t>To help someone do something.</a:t>
             </a:r>
             <a:endParaRPr lang="en-US" sz="1200" dirty="0"/>
           </a:p>
@@ -42513,7 +41804,7 @@
                 <a:ea typeface="Calibri" pitchFamily="34" charset="-122"/>
                 <a:cs typeface="Calibri" pitchFamily="34" charset="-120"/>
               </a:rPr>
-              <a:t>The help or support that someone gives to another person.</a:t>
+              <a:t>Help or support given to someone who needs it.</a:t>
             </a:r>
             <a:endParaRPr lang="en-US" sz="1200" dirty="0"/>
           </a:p>
@@ -43008,7 +42299,7 @@
                 <a:ea typeface="Calibri" pitchFamily="34" charset="-122"/>
                 <a:cs typeface="Calibri" pitchFamily="34" charset="-120"/>
               </a:rPr>
-              <a:t>The classroom assistant helped the students with their maths problems during the lesson.</a:t>
+              <a:t>The teaching assistant helped the students with their maths problems during class.</a:t>
             </a:r>
             <a:endParaRPr lang="en-US" sz="1500" dirty="0"/>
           </a:p>
@@ -43172,7 +42463,7 @@
                 <a:ea typeface="Calibri" pitchFamily="34" charset="-122"/>
                 <a:cs typeface="Calibri" pitchFamily="34" charset="-120"/>
               </a:rPr>
-              <a:t>Mia asked her older brother for assistance when she could not open the jar.</a:t>
+              <a:t>The nurse provided assistance to the patient who needed help walking down the corridor.</a:t>
             </a:r>
             <a:endParaRPr lang="en-US" sz="1500" dirty="0"/>
           </a:p>
@@ -43336,7 +42627,7 @@
                 <a:ea typeface="Calibri" pitchFamily="34" charset="-122"/>
                 <a:cs typeface="Calibri" pitchFamily="34" charset="-120"/>
               </a:rPr>
-              <a:t>The rescue team worked quickly, assisting the injured hiker down the mountain.</a:t>
+              <a:t>Sam completed the science experiment unassisted, which made his teacher very proud.</a:t>
             </a:r>
             <a:endParaRPr lang="en-US" sz="1500" dirty="0"/>
           </a:p>

--- a/output/wordlabs-assist-3day.pptx
+++ b/output/wordlabs-assist-3day.pptx
@@ -4240,7 +4240,7 @@
                 <a:ea typeface="Calibri" pitchFamily="34" charset="-122"/>
                 <a:cs typeface="Calibri" pitchFamily="34" charset="-120"/>
               </a:rPr>
-              <a:t>"to help or support someone"</a:t>
+              <a:t>"help"</a:t>
             </a:r>
             <a:endParaRPr lang="en-US" sz="2200" dirty="0"/>
           </a:p>
@@ -4279,7 +4279,7 @@
                 <a:ea typeface="Calibri" pitchFamily="34" charset="-122"/>
                 <a:cs typeface="Calibri" pitchFamily="34" charset="-120"/>
               </a:rPr>
-              <a:t>Origin: Latin: assistere</a:t>
+              <a:t>Origin: Core English root</a:t>
             </a:r>
             <a:endParaRPr lang="en-US" sz="1300" dirty="0"/>
           </a:p>
@@ -5288,7 +5288,7 @@
                 <a:ea typeface="Calibri" pitchFamily="34" charset="-122"/>
                 <a:cs typeface="Calibri" pitchFamily="34" charset="-120"/>
               </a:rPr>
-              <a:t>Word Labs  •  wordlabs.app  •  Root: 'assist' = to help or support someone</a:t>
+              <a:t>Word Labs  •  wordlabs.app  •  Root: 'assist' = help</a:t>
             </a:r>
             <a:endParaRPr lang="en-US" sz="800" dirty="0"/>
           </a:p>
@@ -5928,7 +5928,7 @@
                 <a:ea typeface="Calibri" pitchFamily="34" charset="-122"/>
                 <a:cs typeface="Calibri" pitchFamily="34" charset="-120"/>
               </a:rPr>
-              <a:t>Word Labs  •  wordlabs.app  •  Root: 'assist' = to help or support someone</a:t>
+              <a:t>Word Labs  •  wordlabs.app  •  Root: 'assist' = help</a:t>
             </a:r>
             <a:endParaRPr lang="en-US" sz="800" dirty="0"/>
           </a:p>
@@ -6040,7 +6040,7 @@
                 <a:ea typeface="Calibri" pitchFamily="34" charset="-122"/>
                 <a:cs typeface="Calibri" pitchFamily="34" charset="-120"/>
               </a:rPr>
-              <a:t>The </a:t>
+              <a:t>The nurse </a:t>
             </a:r>
             <a:pPr algn="l" indent="0" marL="0">
               <a:buNone/>
@@ -6057,7 +6057,7 @@
                 <a:ea typeface="Calibri" pitchFamily="34" charset="-122"/>
                 <a:cs typeface="Calibri" pitchFamily="34" charset="-120"/>
               </a:rPr>
-              <a:t>assistant</a:t>
+              <a:t>assisted</a:t>
             </a:r>
             <a:pPr algn="l" indent="0" marL="0">
               <a:buNone/>
@@ -6071,7 +6071,7 @@
                 <a:ea typeface="Calibri" pitchFamily="34" charset="-122"/>
                 <a:cs typeface="Calibri" pitchFamily="34" charset="-120"/>
               </a:rPr>
-              <a:t> offered her </a:t>
+              <a:t> the doctor during the operation. The teacher's </a:t>
             </a:r>
             <a:pPr algn="l" indent="0" marL="0">
               <a:buNone/>
@@ -6088,7 +6088,7 @@
                 <a:ea typeface="Calibri" pitchFamily="34" charset="-122"/>
                 <a:cs typeface="Calibri" pitchFamily="34" charset="-120"/>
               </a:rPr>
-              <a:t>assistance</a:t>
+              <a:t>assistant</a:t>
             </a:r>
             <a:pPr algn="l" indent="0" marL="0">
               <a:buNone/>
@@ -6102,7 +6102,7 @@
                 <a:ea typeface="Calibri" pitchFamily="34" charset="-122"/>
                 <a:cs typeface="Calibri" pitchFamily="34" charset="-120"/>
               </a:rPr>
-              <a:t> to the new student on the first day of school.</a:t>
+              <a:t> helped the younger children with their reading.</a:t>
             </a:r>
             <a:endParaRPr lang="en-US" sz="1800" dirty="0"/>
           </a:p>
@@ -6257,7 +6257,7 @@
                 <a:ea typeface="Trebuchet MS" pitchFamily="34" charset="-122"/>
                 <a:cs typeface="Trebuchet MS" pitchFamily="34" charset="-120"/>
               </a:rPr>
-              <a:t>assistant</a:t>
+              <a:t>assisted</a:t>
             </a:r>
             <a:endParaRPr lang="en-US" sz="1400" dirty="0"/>
           </a:p>
@@ -6385,7 +6385,7 @@
                 <a:ea typeface="Trebuchet MS" pitchFamily="34" charset="-122"/>
                 <a:cs typeface="Trebuchet MS" pitchFamily="34" charset="-120"/>
               </a:rPr>
-              <a:t>assistance</a:t>
+              <a:t>assistant</a:t>
             </a:r>
             <a:endParaRPr lang="en-US" sz="1400" dirty="0"/>
           </a:p>
@@ -6716,7 +6716,7 @@
                 <a:ea typeface="Calibri" pitchFamily="34" charset="-122"/>
                 <a:cs typeface="Calibri" pitchFamily="34" charset="-120"/>
               </a:rPr>
-              <a:t>Word Labs  •  wordlabs.app  •  Root: 'assist' = to help or support someone</a:t>
+              <a:t>Word Labs  •  wordlabs.app  •  Root: 'assist' = help</a:t>
             </a:r>
             <a:endParaRPr lang="en-US" sz="800" dirty="0"/>
           </a:p>
@@ -6855,7 +6855,7 @@
                 <a:ea typeface="Trebuchet MS" pitchFamily="34" charset="-122"/>
                 <a:cs typeface="Trebuchet MS" pitchFamily="34" charset="-120"/>
               </a:rPr>
-              <a:t>assistant</a:t>
+              <a:t>assisted</a:t>
             </a:r>
             <a:endParaRPr lang="en-US" sz="2800" dirty="0"/>
           </a:p>
@@ -7543,7 +7543,7 @@
                 <a:ea typeface="Calibri" pitchFamily="34" charset="-122"/>
                 <a:cs typeface="Calibri" pitchFamily="34" charset="-120"/>
               </a:rPr>
-              <a:t>Word Labs  •  wordlabs.app  •  Root: 'assist' = to help or support someone</a:t>
+              <a:t>Word Labs  •  wordlabs.app  •  Root: 'assist' = help</a:t>
             </a:r>
             <a:endParaRPr lang="en-US" sz="800" dirty="0"/>
           </a:p>
@@ -7682,7 +7682,7 @@
                 <a:ea typeface="Trebuchet MS" pitchFamily="34" charset="-122"/>
                 <a:cs typeface="Trebuchet MS" pitchFamily="34" charset="-120"/>
               </a:rPr>
-              <a:t>assistant</a:t>
+              <a:t>assisted</a:t>
             </a:r>
             <a:endParaRPr lang="en-US" sz="2800" dirty="0"/>
           </a:p>
@@ -7860,7 +7860,7 @@
                 <a:ea typeface="Calibri" pitchFamily="34" charset="-122"/>
                 <a:cs typeface="Calibri" pitchFamily="34" charset="-120"/>
               </a:rPr>
-              <a:t>to help or support</a:t>
+              <a:t>help</a:t>
             </a:r>
             <a:endParaRPr lang="en-US" sz="850" dirty="0"/>
           </a:p>
@@ -7933,7 +7933,7 @@
                 <a:ea typeface="Trebuchet MS" pitchFamily="34" charset="-122"/>
                 <a:cs typeface="Trebuchet MS" pitchFamily="34" charset="-120"/>
               </a:rPr>
-              <a:t>ant</a:t>
+              <a:t>ed</a:t>
             </a:r>
             <a:endParaRPr lang="en-US" sz="1300" dirty="0"/>
           </a:p>
@@ -7972,7 +7972,7 @@
                 <a:ea typeface="Calibri" pitchFamily="34" charset="-122"/>
                 <a:cs typeface="Calibri" pitchFamily="34" charset="-120"/>
               </a:rPr>
-              <a:t>person who does something</a:t>
+              <a:t>past tense</a:t>
             </a:r>
             <a:endParaRPr lang="en-US" sz="850" dirty="0"/>
           </a:p>
@@ -8528,7 +8528,7 @@
                 <a:ea typeface="Calibri" pitchFamily="34" charset="-122"/>
                 <a:cs typeface="Calibri" pitchFamily="34" charset="-120"/>
               </a:rPr>
-              <a:t>Word Labs  •  wordlabs.app  •  Root: 'assist' = to help or support someone</a:t>
+              <a:t>Word Labs  •  wordlabs.app  •  Root: 'assist' = help</a:t>
             </a:r>
             <a:endParaRPr lang="en-US" sz="800" dirty="0"/>
           </a:p>
@@ -8667,7 +8667,7 @@
                 <a:ea typeface="Trebuchet MS" pitchFamily="34" charset="-122"/>
                 <a:cs typeface="Trebuchet MS" pitchFamily="34" charset="-120"/>
               </a:rPr>
-              <a:t>assistant</a:t>
+              <a:t>assisted</a:t>
             </a:r>
             <a:endParaRPr lang="en-US" sz="2800" dirty="0"/>
           </a:p>
@@ -8845,7 +8845,7 @@
                 <a:ea typeface="Calibri" pitchFamily="34" charset="-122"/>
                 <a:cs typeface="Calibri" pitchFamily="34" charset="-120"/>
               </a:rPr>
-              <a:t>to help or support</a:t>
+              <a:t>help</a:t>
             </a:r>
             <a:endParaRPr lang="en-US" sz="850" dirty="0"/>
           </a:p>
@@ -8918,7 +8918,7 @@
                 <a:ea typeface="Trebuchet MS" pitchFamily="34" charset="-122"/>
                 <a:cs typeface="Trebuchet MS" pitchFamily="34" charset="-120"/>
               </a:rPr>
-              <a:t>ant</a:t>
+              <a:t>ed</a:t>
             </a:r>
             <a:endParaRPr lang="en-US" sz="1300" dirty="0"/>
           </a:p>
@@ -8957,7 +8957,7 @@
                 <a:ea typeface="Calibri" pitchFamily="34" charset="-122"/>
                 <a:cs typeface="Calibri" pitchFamily="34" charset="-120"/>
               </a:rPr>
-              <a:t>person who does something</a:t>
+              <a:t>past tense</a:t>
             </a:r>
             <a:endParaRPr lang="en-US" sz="850" dirty="0"/>
           </a:p>
@@ -9064,7 +9064,7 @@
         </p:nvSpPr>
         <p:spPr>
           <a:xfrm>
-            <a:off x="2313432" y="3364992"/>
+            <a:off x="2999232" y="3364992"/>
             <a:ext cx="1645920" cy="475488"/>
           </a:xfrm>
           <a:prstGeom prst="rect">
@@ -9091,7 +9091,7 @@
         </p:nvSpPr>
         <p:spPr>
           <a:xfrm>
-            <a:off x="2313432" y="3364992"/>
+            <a:off x="2999232" y="3364992"/>
             <a:ext cx="1645920" cy="475488"/>
           </a:xfrm>
           <a:prstGeom prst="rect">
@@ -9130,8 +9130,8 @@
         </p:nvSpPr>
         <p:spPr>
           <a:xfrm>
-            <a:off x="3959352" y="3364992"/>
-            <a:ext cx="411480" cy="475488"/>
+            <a:off x="4645152" y="3364992"/>
+            <a:ext cx="1097280" cy="475488"/>
           </a:xfrm>
           <a:prstGeom prst="rect">
             <a:avLst/>
@@ -9169,7 +9169,7 @@
         </p:nvSpPr>
         <p:spPr>
           <a:xfrm>
-            <a:off x="4370832" y="3364992"/>
+            <a:off x="5742432" y="3364992"/>
             <a:ext cx="1645920" cy="475488"/>
           </a:xfrm>
           <a:prstGeom prst="rect">
@@ -9196,7 +9196,7 @@
         </p:nvSpPr>
         <p:spPr>
           <a:xfrm>
-            <a:off x="4370832" y="3364992"/>
+            <a:off x="5742432" y="3364992"/>
             <a:ext cx="1645920" cy="475488"/>
           </a:xfrm>
           <a:prstGeom prst="rect">
@@ -9221,7 +9221,7 @@
                 <a:ea typeface="Trebuchet MS" pitchFamily="34" charset="-122"/>
                 <a:cs typeface="Trebuchet MS" pitchFamily="34" charset="-120"/>
               </a:rPr>
-              <a:t>sis</a:t>
+              <a:t>sisted</a:t>
             </a:r>
             <a:endParaRPr lang="en-US" sz="1400" dirty="0"/>
           </a:p>
@@ -9229,14 +9229,41 @@
       </p:sp>
       <p:sp>
         <p:nvSpPr>
-          <p:cNvPr id="30" name="Text 28"/>
-          <p:cNvSpPr/>
-          <p:nvPr/>
-        </p:nvSpPr>
-        <p:spPr>
-          <a:xfrm>
-            <a:off x="6016752" y="3364992"/>
-            <a:ext cx="411480" cy="475488"/>
+          <p:cNvPr id="30" name="Shape 28"/>
+          <p:cNvSpPr/>
+          <p:nvPr/>
+        </p:nvSpPr>
+        <p:spPr>
+          <a:xfrm>
+            <a:off x="365760" y="4096512"/>
+            <a:ext cx="1371600" cy="804672"/>
+          </a:xfrm>
+          <a:prstGeom prst="rect">
+            <a:avLst>
+              <a:gd name="adj" fmla="val 6818"/>
+            </a:avLst>
+          </a:prstGeom>
+          <a:solidFill>
+            <a:srgbClr val="E2E8F0"/>
+          </a:solidFill>
+          <a:ln w="12700">
+            <a:solidFill>
+              <a:srgbClr val="E2E8F0"/>
+            </a:solidFill>
+            <a:prstDash val="solid"/>
+          </a:ln>
+        </p:spPr>
+      </p:sp>
+      <p:sp>
+        <p:nvSpPr>
+          <p:cNvPr id="31" name="Text 29"/>
+          <p:cNvSpPr/>
+          <p:nvPr/>
+        </p:nvSpPr>
+        <p:spPr>
+          <a:xfrm>
+            <a:off x="365760" y="4096512"/>
+            <a:ext cx="1371600" cy="804672"/>
           </a:xfrm>
           <a:prstGeom prst="rect">
             <a:avLst/>
@@ -9252,96 +9279,30 @@
               <a:buNone/>
             </a:pPr>
             <a:r>
-              <a:rPr lang="en-US" sz="1600" b="1" dirty="0">
-                <a:solidFill>
-                  <a:srgbClr val="0D9488"/>
+              <a:rPr lang="en-US" sz="1100" b="1" dirty="0">
+                <a:solidFill>
+                  <a:srgbClr val="475569"/>
                 </a:solidFill>
                 <a:latin typeface="Trebuchet MS" pitchFamily="34" charset="0"/>
                 <a:ea typeface="Trebuchet MS" pitchFamily="34" charset="-122"/>
                 <a:cs typeface="Trebuchet MS" pitchFamily="34" charset="-120"/>
               </a:rPr>
-              <a:t>·</a:t>
-            </a:r>
-            <a:endParaRPr lang="en-US" sz="1600" dirty="0"/>
-          </a:p>
-        </p:txBody>
-      </p:sp>
-      <p:sp>
-        <p:nvSpPr>
-          <p:cNvPr id="31" name="Shape 29"/>
-          <p:cNvSpPr/>
-          <p:nvPr/>
-        </p:nvSpPr>
-        <p:spPr>
-          <a:xfrm>
-            <a:off x="6428232" y="3364992"/>
-            <a:ext cx="1645920" cy="475488"/>
-          </a:xfrm>
-          <a:prstGeom prst="rect">
-            <a:avLst>
-              <a:gd name="adj" fmla="val 9615"/>
-            </a:avLst>
-          </a:prstGeom>
-          <a:solidFill>
-            <a:srgbClr val="FFFFFF"/>
-          </a:solidFill>
-          <a:ln w="12700">
-            <a:solidFill>
-              <a:srgbClr val="0D9488"/>
-            </a:solidFill>
-            <a:prstDash val="solid"/>
-          </a:ln>
-        </p:spPr>
-      </p:sp>
-      <p:sp>
-        <p:nvSpPr>
-          <p:cNvPr id="32" name="Text 30"/>
-          <p:cNvSpPr/>
-          <p:nvPr/>
-        </p:nvSpPr>
-        <p:spPr>
-          <a:xfrm>
-            <a:off x="6428232" y="3364992"/>
-            <a:ext cx="1645920" cy="475488"/>
-          </a:xfrm>
-          <a:prstGeom prst="rect">
-            <a:avLst/>
-          </a:prstGeom>
-          <a:noFill/>
-          <a:ln/>
-        </p:spPr>
-        <p:txBody>
-          <a:bodyPr wrap="square" lIns="0" tIns="0" rIns="0" bIns="0" rtlCol="0" anchor="ctr"/>
-          <a:lstStyle/>
-          <a:p>
-            <a:pPr algn="ctr" indent="0" marL="0">
-              <a:buNone/>
-            </a:pPr>
-            <a:r>
-              <a:rPr lang="en-US" sz="1400" b="1" dirty="0">
-                <a:solidFill>
-                  <a:srgbClr val="0D9488"/>
-                </a:solidFill>
-                <a:latin typeface="Trebuchet MS" pitchFamily="34" charset="0"/>
-                <a:ea typeface="Trebuchet MS" pitchFamily="34" charset="-122"/>
-                <a:cs typeface="Trebuchet MS" pitchFamily="34" charset="-120"/>
-              </a:rPr>
-              <a:t>tant</a:t>
-            </a:r>
-            <a:endParaRPr lang="en-US" sz="1400" dirty="0"/>
-          </a:p>
-        </p:txBody>
-      </p:sp>
-      <p:sp>
-        <p:nvSpPr>
-          <p:cNvPr id="33" name="Shape 31"/>
-          <p:cNvSpPr/>
-          <p:nvPr/>
-        </p:nvSpPr>
-        <p:spPr>
-          <a:xfrm>
-            <a:off x="365760" y="4096512"/>
-            <a:ext cx="1371600" cy="804672"/>
+              <a:t>Phonemes</a:t>
+            </a:r>
+            <a:endParaRPr lang="en-US" sz="1100" dirty="0"/>
+          </a:p>
+        </p:txBody>
+      </p:sp>
+      <p:sp>
+        <p:nvSpPr>
+          <p:cNvPr id="32" name="Shape 30"/>
+          <p:cNvSpPr/>
+          <p:nvPr/>
+        </p:nvSpPr>
+        <p:spPr>
+          <a:xfrm>
+            <a:off x="1874520" y="4096512"/>
+            <a:ext cx="6903720" cy="804672"/>
           </a:xfrm>
           <a:prstGeom prst="rect">
             <a:avLst>
@@ -9349,85 +9310,19 @@
             </a:avLst>
           </a:prstGeom>
           <a:solidFill>
-            <a:srgbClr val="E2E8F0"/>
+            <a:srgbClr val="F8FAFC"/>
           </a:solidFill>
           <a:ln w="12700">
             <a:solidFill>
               <a:srgbClr val="E2E8F0"/>
             </a:solidFill>
-            <a:prstDash val="solid"/>
-          </a:ln>
-        </p:spPr>
-      </p:sp>
-      <p:sp>
-        <p:nvSpPr>
-          <p:cNvPr id="34" name="Text 32"/>
-          <p:cNvSpPr/>
-          <p:nvPr/>
-        </p:nvSpPr>
-        <p:spPr>
-          <a:xfrm>
-            <a:off x="365760" y="4096512"/>
-            <a:ext cx="1371600" cy="804672"/>
-          </a:xfrm>
-          <a:prstGeom prst="rect">
-            <a:avLst/>
-          </a:prstGeom>
-          <a:noFill/>
-          <a:ln/>
-        </p:spPr>
-        <p:txBody>
-          <a:bodyPr wrap="square" lIns="0" tIns="0" rIns="0" bIns="0" rtlCol="0" anchor="ctr"/>
-          <a:lstStyle/>
-          <a:p>
-            <a:pPr algn="ctr" indent="0" marL="0">
-              <a:buNone/>
-            </a:pPr>
-            <a:r>
-              <a:rPr lang="en-US" sz="1100" b="1" dirty="0">
-                <a:solidFill>
-                  <a:srgbClr val="475569"/>
-                </a:solidFill>
-                <a:latin typeface="Trebuchet MS" pitchFamily="34" charset="0"/>
-                <a:ea typeface="Trebuchet MS" pitchFamily="34" charset="-122"/>
-                <a:cs typeface="Trebuchet MS" pitchFamily="34" charset="-120"/>
-              </a:rPr>
-              <a:t>Phonemes</a:t>
-            </a:r>
-            <a:endParaRPr lang="en-US" sz="1100" dirty="0"/>
-          </a:p>
-        </p:txBody>
-      </p:sp>
-      <p:sp>
-        <p:nvSpPr>
-          <p:cNvPr id="35" name="Shape 33"/>
-          <p:cNvSpPr/>
-          <p:nvPr/>
-        </p:nvSpPr>
-        <p:spPr>
-          <a:xfrm>
-            <a:off x="1874520" y="4096512"/>
-            <a:ext cx="6903720" cy="804672"/>
-          </a:xfrm>
-          <a:prstGeom prst="rect">
-            <a:avLst>
-              <a:gd name="adj" fmla="val 6818"/>
-            </a:avLst>
-          </a:prstGeom>
-          <a:solidFill>
-            <a:srgbClr val="F8FAFC"/>
-          </a:solidFill>
-          <a:ln w="12700">
-            <a:solidFill>
-              <a:srgbClr val="E2E8F0"/>
-            </a:solidFill>
             <a:prstDash val="dash"/>
           </a:ln>
         </p:spPr>
       </p:sp>
       <p:sp>
         <p:nvSpPr>
-          <p:cNvPr id="36" name="Text 34"/>
+          <p:cNvPr id="33" name="Text 31"/>
           <p:cNvSpPr/>
           <p:nvPr/>
         </p:nvSpPr>
@@ -9750,7 +9645,7 @@
                 <a:ea typeface="Calibri" pitchFamily="34" charset="-122"/>
                 <a:cs typeface="Calibri" pitchFamily="34" charset="-120"/>
               </a:rPr>
-              <a:t>Word Labs  •  wordlabs.app  •  Root: 'assist' = to help or support someone</a:t>
+              <a:t>Word Labs  •  wordlabs.app  •  Root: 'assist' = help</a:t>
             </a:r>
             <a:endParaRPr lang="en-US" sz="800" dirty="0"/>
           </a:p>
@@ -9889,7 +9784,7 @@
                 <a:ea typeface="Trebuchet MS" pitchFamily="34" charset="-122"/>
                 <a:cs typeface="Trebuchet MS" pitchFamily="34" charset="-120"/>
               </a:rPr>
-              <a:t>assistant</a:t>
+              <a:t>assisted</a:t>
             </a:r>
             <a:endParaRPr lang="en-US" sz="2800" dirty="0"/>
           </a:p>
@@ -10067,7 +9962,7 @@
                 <a:ea typeface="Calibri" pitchFamily="34" charset="-122"/>
                 <a:cs typeface="Calibri" pitchFamily="34" charset="-120"/>
               </a:rPr>
-              <a:t>to help or support</a:t>
+              <a:t>help</a:t>
             </a:r>
             <a:endParaRPr lang="en-US" sz="850" dirty="0"/>
           </a:p>
@@ -10140,7 +10035,7 @@
                 <a:ea typeface="Trebuchet MS" pitchFamily="34" charset="-122"/>
                 <a:cs typeface="Trebuchet MS" pitchFamily="34" charset="-120"/>
               </a:rPr>
-              <a:t>ant</a:t>
+              <a:t>ed</a:t>
             </a:r>
             <a:endParaRPr lang="en-US" sz="1300" dirty="0"/>
           </a:p>
@@ -10179,7 +10074,7 @@
                 <a:ea typeface="Calibri" pitchFamily="34" charset="-122"/>
                 <a:cs typeface="Calibri" pitchFamily="34" charset="-120"/>
               </a:rPr>
-              <a:t>person who does something</a:t>
+              <a:t>past tense</a:t>
             </a:r>
             <a:endParaRPr lang="en-US" sz="850" dirty="0"/>
           </a:p>
@@ -10286,7 +10181,7 @@
         </p:nvSpPr>
         <p:spPr>
           <a:xfrm>
-            <a:off x="2313432" y="3364992"/>
+            <a:off x="2999232" y="3364992"/>
             <a:ext cx="1645920" cy="475488"/>
           </a:xfrm>
           <a:prstGeom prst="rect">
@@ -10313,7 +10208,7 @@
         </p:nvSpPr>
         <p:spPr>
           <a:xfrm>
-            <a:off x="2313432" y="3364992"/>
+            <a:off x="2999232" y="3364992"/>
             <a:ext cx="1645920" cy="475488"/>
           </a:xfrm>
           <a:prstGeom prst="rect">
@@ -10352,8 +10247,8 @@
         </p:nvSpPr>
         <p:spPr>
           <a:xfrm>
-            <a:off x="3959352" y="3364992"/>
-            <a:ext cx="411480" cy="475488"/>
+            <a:off x="4645152" y="3364992"/>
+            <a:ext cx="1097280" cy="475488"/>
           </a:xfrm>
           <a:prstGeom prst="rect">
             <a:avLst/>
@@ -10391,7 +10286,7 @@
         </p:nvSpPr>
         <p:spPr>
           <a:xfrm>
-            <a:off x="4370832" y="3364992"/>
+            <a:off x="5742432" y="3364992"/>
             <a:ext cx="1645920" cy="475488"/>
           </a:xfrm>
           <a:prstGeom prst="rect">
@@ -10418,7 +10313,7 @@
         </p:nvSpPr>
         <p:spPr>
           <a:xfrm>
-            <a:off x="4370832" y="3364992"/>
+            <a:off x="5742432" y="3364992"/>
             <a:ext cx="1645920" cy="475488"/>
           </a:xfrm>
           <a:prstGeom prst="rect">
@@ -10443,7 +10338,7 @@
                 <a:ea typeface="Trebuchet MS" pitchFamily="34" charset="-122"/>
                 <a:cs typeface="Trebuchet MS" pitchFamily="34" charset="-120"/>
               </a:rPr>
-              <a:t>sis</a:t>
+              <a:t>sisted</a:t>
             </a:r>
             <a:endParaRPr lang="en-US" sz="1400" dirty="0"/>
           </a:p>
@@ -10451,14 +10346,41 @@
       </p:sp>
       <p:sp>
         <p:nvSpPr>
-          <p:cNvPr id="30" name="Text 28"/>
-          <p:cNvSpPr/>
-          <p:nvPr/>
-        </p:nvSpPr>
-        <p:spPr>
-          <a:xfrm>
-            <a:off x="6016752" y="3364992"/>
-            <a:ext cx="411480" cy="475488"/>
+          <p:cNvPr id="30" name="Shape 28"/>
+          <p:cNvSpPr/>
+          <p:nvPr/>
+        </p:nvSpPr>
+        <p:spPr>
+          <a:xfrm>
+            <a:off x="365760" y="4096512"/>
+            <a:ext cx="1371600" cy="804672"/>
+          </a:xfrm>
+          <a:prstGeom prst="rect">
+            <a:avLst>
+              <a:gd name="adj" fmla="val 6818"/>
+            </a:avLst>
+          </a:prstGeom>
+          <a:solidFill>
+            <a:srgbClr val="E2E8F0"/>
+          </a:solidFill>
+          <a:ln w="12700">
+            <a:solidFill>
+              <a:srgbClr val="E2E8F0"/>
+            </a:solidFill>
+            <a:prstDash val="solid"/>
+          </a:ln>
+        </p:spPr>
+      </p:sp>
+      <p:sp>
+        <p:nvSpPr>
+          <p:cNvPr id="31" name="Text 29"/>
+          <p:cNvSpPr/>
+          <p:nvPr/>
+        </p:nvSpPr>
+        <p:spPr>
+          <a:xfrm>
+            <a:off x="365760" y="4096512"/>
+            <a:ext cx="1371600" cy="804672"/>
           </a:xfrm>
           <a:prstGeom prst="rect">
             <a:avLst/>
@@ -10474,57 +10396,84 @@
               <a:buNone/>
             </a:pPr>
             <a:r>
-              <a:rPr lang="en-US" sz="1600" b="1" dirty="0">
-                <a:solidFill>
-                  <a:srgbClr val="0D9488"/>
+              <a:rPr lang="en-US" sz="1100" b="1" dirty="0">
+                <a:solidFill>
+                  <a:srgbClr val="475569"/>
                 </a:solidFill>
                 <a:latin typeface="Trebuchet MS" pitchFamily="34" charset="0"/>
                 <a:ea typeface="Trebuchet MS" pitchFamily="34" charset="-122"/>
                 <a:cs typeface="Trebuchet MS" pitchFamily="34" charset="-120"/>
               </a:rPr>
-              <a:t>·</a:t>
-            </a:r>
-            <a:endParaRPr lang="en-US" sz="1600" dirty="0"/>
-          </a:p>
-        </p:txBody>
-      </p:sp>
-      <p:sp>
-        <p:nvSpPr>
-          <p:cNvPr id="31" name="Shape 29"/>
-          <p:cNvSpPr/>
-          <p:nvPr/>
-        </p:nvSpPr>
-        <p:spPr>
-          <a:xfrm>
-            <a:off x="6428232" y="3364992"/>
-            <a:ext cx="1645920" cy="475488"/>
+              <a:t>Phonemes</a:t>
+            </a:r>
+            <a:endParaRPr lang="en-US" sz="1100" dirty="0"/>
+          </a:p>
+        </p:txBody>
+      </p:sp>
+      <p:sp>
+        <p:nvSpPr>
+          <p:cNvPr id="32" name="Shape 30"/>
+          <p:cNvSpPr/>
+          <p:nvPr/>
+        </p:nvSpPr>
+        <p:spPr>
+          <a:xfrm>
+            <a:off x="1874520" y="4096512"/>
+            <a:ext cx="6903720" cy="658368"/>
           </a:xfrm>
           <a:prstGeom prst="rect">
             <a:avLst>
-              <a:gd name="adj" fmla="val 9615"/>
+              <a:gd name="adj" fmla="val 8333"/>
             </a:avLst>
           </a:prstGeom>
           <a:solidFill>
+            <a:srgbClr val="FCE7F3"/>
+          </a:solidFill>
+          <a:ln w="12700">
+            <a:solidFill>
+              <a:srgbClr val="DB2777"/>
+            </a:solidFill>
+            <a:prstDash val="solid"/>
+          </a:ln>
+        </p:spPr>
+      </p:sp>
+      <p:sp>
+        <p:nvSpPr>
+          <p:cNvPr id="33" name="Shape 31"/>
+          <p:cNvSpPr/>
+          <p:nvPr/>
+        </p:nvSpPr>
+        <p:spPr>
+          <a:xfrm>
+            <a:off x="2254649" y="4169664"/>
+            <a:ext cx="685800" cy="475488"/>
+          </a:xfrm>
+          <a:prstGeom prst="rect">
+            <a:avLst>
+              <a:gd name="adj" fmla="val 7692"/>
+            </a:avLst>
+          </a:prstGeom>
+          <a:solidFill>
             <a:srgbClr val="FFFFFF"/>
           </a:solidFill>
           <a:ln w="12700">
             <a:solidFill>
-              <a:srgbClr val="0D9488"/>
-            </a:solidFill>
-            <a:prstDash val="solid"/>
-          </a:ln>
-        </p:spPr>
-      </p:sp>
-      <p:sp>
-        <p:nvSpPr>
-          <p:cNvPr id="32" name="Text 30"/>
-          <p:cNvSpPr/>
-          <p:nvPr/>
-        </p:nvSpPr>
-        <p:spPr>
-          <a:xfrm>
-            <a:off x="6428232" y="3364992"/>
-            <a:ext cx="1645920" cy="475488"/>
+              <a:srgbClr val="DB2777"/>
+            </a:solidFill>
+            <a:prstDash val="solid"/>
+          </a:ln>
+        </p:spPr>
+      </p:sp>
+      <p:sp>
+        <p:nvSpPr>
+          <p:cNvPr id="34" name="Text 32"/>
+          <p:cNvSpPr/>
+          <p:nvPr/>
+        </p:nvSpPr>
+        <p:spPr>
+          <a:xfrm>
+            <a:off x="2254649" y="4169664"/>
+            <a:ext cx="685800" cy="475488"/>
           </a:xfrm>
           <a:prstGeom prst="rect">
             <a:avLst/>
@@ -10540,57 +10489,57 @@
               <a:buNone/>
             </a:pPr>
             <a:r>
-              <a:rPr lang="en-US" sz="1400" b="1" dirty="0">
-                <a:solidFill>
-                  <a:srgbClr val="0D9488"/>
+              <a:rPr lang="en-US" sz="900" b="1" dirty="0">
+                <a:solidFill>
+                  <a:srgbClr val="9D174D"/>
                 </a:solidFill>
                 <a:latin typeface="Trebuchet MS" pitchFamily="34" charset="0"/>
                 <a:ea typeface="Trebuchet MS" pitchFamily="34" charset="-122"/>
                 <a:cs typeface="Trebuchet MS" pitchFamily="34" charset="-120"/>
               </a:rPr>
-              <a:t>tant</a:t>
-            </a:r>
-            <a:endParaRPr lang="en-US" sz="1400" dirty="0"/>
-          </a:p>
-        </p:txBody>
-      </p:sp>
-      <p:sp>
-        <p:nvSpPr>
-          <p:cNvPr id="33" name="Shape 31"/>
-          <p:cNvSpPr/>
-          <p:nvPr/>
-        </p:nvSpPr>
-        <p:spPr>
-          <a:xfrm>
-            <a:off x="365760" y="4096512"/>
-            <a:ext cx="1371600" cy="804672"/>
+              <a:t>a</a:t>
+            </a:r>
+            <a:endParaRPr lang="en-US" sz="900" dirty="0"/>
+          </a:p>
+        </p:txBody>
+      </p:sp>
+      <p:sp>
+        <p:nvSpPr>
+          <p:cNvPr id="35" name="Shape 33"/>
+          <p:cNvSpPr/>
+          <p:nvPr/>
+        </p:nvSpPr>
+        <p:spPr>
+          <a:xfrm>
+            <a:off x="3293146" y="4169664"/>
+            <a:ext cx="685800" cy="475488"/>
           </a:xfrm>
           <a:prstGeom prst="rect">
             <a:avLst>
-              <a:gd name="adj" fmla="val 6818"/>
+              <a:gd name="adj" fmla="val 7692"/>
             </a:avLst>
           </a:prstGeom>
           <a:solidFill>
-            <a:srgbClr val="E2E8F0"/>
-          </a:solidFill>
-          <a:ln w="12700">
-            <a:solidFill>
-              <a:srgbClr val="E2E8F0"/>
-            </a:solidFill>
-            <a:prstDash val="solid"/>
-          </a:ln>
-        </p:spPr>
-      </p:sp>
-      <p:sp>
-        <p:nvSpPr>
-          <p:cNvPr id="34" name="Text 32"/>
-          <p:cNvSpPr/>
-          <p:nvPr/>
-        </p:nvSpPr>
-        <p:spPr>
-          <a:xfrm>
-            <a:off x="365760" y="4096512"/>
-            <a:ext cx="1371600" cy="804672"/>
+            <a:srgbClr val="FFFFFF"/>
+          </a:solidFill>
+          <a:ln w="12700">
+            <a:solidFill>
+              <a:srgbClr val="DB2777"/>
+            </a:solidFill>
+            <a:prstDash val="solid"/>
+          </a:ln>
+        </p:spPr>
+      </p:sp>
+      <p:sp>
+        <p:nvSpPr>
+          <p:cNvPr id="36" name="Text 34"/>
+          <p:cNvSpPr/>
+          <p:nvPr/>
+        </p:nvSpPr>
+        <p:spPr>
+          <a:xfrm>
+            <a:off x="3293146" y="4169664"/>
+            <a:ext cx="685800" cy="475488"/>
           </a:xfrm>
           <a:prstGeom prst="rect">
             <a:avLst/>
@@ -10606,56 +10555,29 @@
               <a:buNone/>
             </a:pPr>
             <a:r>
-              <a:rPr lang="en-US" sz="1100" b="1" dirty="0">
-                <a:solidFill>
-                  <a:srgbClr val="475569"/>
+              <a:rPr lang="en-US" sz="900" b="1" dirty="0">
+                <a:solidFill>
+                  <a:srgbClr val="9D174D"/>
                 </a:solidFill>
                 <a:latin typeface="Trebuchet MS" pitchFamily="34" charset="0"/>
                 <a:ea typeface="Trebuchet MS" pitchFamily="34" charset="-122"/>
                 <a:cs typeface="Trebuchet MS" pitchFamily="34" charset="-120"/>
               </a:rPr>
-              <a:t>Phonemes</a:t>
-            </a:r>
-            <a:endParaRPr lang="en-US" sz="1100" dirty="0"/>
-          </a:p>
-        </p:txBody>
-      </p:sp>
-      <p:sp>
-        <p:nvSpPr>
-          <p:cNvPr id="35" name="Shape 33"/>
-          <p:cNvSpPr/>
-          <p:nvPr/>
-        </p:nvSpPr>
-        <p:spPr>
-          <a:xfrm>
-            <a:off x="1874520" y="4096512"/>
-            <a:ext cx="6903720" cy="658368"/>
-          </a:xfrm>
-          <a:prstGeom prst="rect">
-            <a:avLst>
-              <a:gd name="adj" fmla="val 8333"/>
-            </a:avLst>
-          </a:prstGeom>
-          <a:solidFill>
-            <a:srgbClr val="FCE7F3"/>
-          </a:solidFill>
-          <a:ln w="12700">
-            <a:solidFill>
-              <a:srgbClr val="DB2777"/>
-            </a:solidFill>
-            <a:prstDash val="solid"/>
-          </a:ln>
-        </p:spPr>
-      </p:sp>
-      <p:sp>
-        <p:nvSpPr>
-          <p:cNvPr id="36" name="Shape 34"/>
-          <p:cNvSpPr/>
-          <p:nvPr/>
-        </p:nvSpPr>
-        <p:spPr>
-          <a:xfrm>
-            <a:off x="2023872" y="4169664"/>
+              <a:t>ss</a:t>
+            </a:r>
+            <a:endParaRPr lang="en-US" sz="900" dirty="0"/>
+          </a:p>
+        </p:txBody>
+      </p:sp>
+      <p:sp>
+        <p:nvSpPr>
+          <p:cNvPr id="37" name="Shape 35"/>
+          <p:cNvSpPr/>
+          <p:nvPr/>
+        </p:nvSpPr>
+        <p:spPr>
+          <a:xfrm>
+            <a:off x="4331643" y="4169664"/>
             <a:ext cx="685800" cy="475488"/>
           </a:xfrm>
           <a:prstGeom prst="rect">
@@ -10676,13 +10598,13 @@
       </p:sp>
       <p:sp>
         <p:nvSpPr>
-          <p:cNvPr id="37" name="Text 35"/>
-          <p:cNvSpPr/>
-          <p:nvPr/>
-        </p:nvSpPr>
-        <p:spPr>
-          <a:xfrm>
-            <a:off x="2023872" y="4169664"/>
+          <p:cNvPr id="38" name="Text 36"/>
+          <p:cNvSpPr/>
+          <p:nvPr/>
+        </p:nvSpPr>
+        <p:spPr>
+          <a:xfrm>
+            <a:off x="4331643" y="4169664"/>
             <a:ext cx="685800" cy="475488"/>
           </a:xfrm>
           <a:prstGeom prst="rect">
@@ -10707,7 +10629,7 @@
                 <a:ea typeface="Trebuchet MS" pitchFamily="34" charset="-122"/>
                 <a:cs typeface="Trebuchet MS" pitchFamily="34" charset="-120"/>
               </a:rPr>
-              <a:t>a</a:t>
+              <a:t>i</a:t>
             </a:r>
             <a:endParaRPr lang="en-US" sz="900" dirty="0"/>
           </a:p>
@@ -10715,13 +10637,13 @@
       </p:sp>
       <p:sp>
         <p:nvSpPr>
-          <p:cNvPr id="38" name="Shape 36"/>
-          <p:cNvSpPr/>
-          <p:nvPr/>
-        </p:nvSpPr>
-        <p:spPr>
-          <a:xfrm>
-            <a:off x="2831592" y="4169664"/>
+          <p:cNvPr id="39" name="Shape 37"/>
+          <p:cNvSpPr/>
+          <p:nvPr/>
+        </p:nvSpPr>
+        <p:spPr>
+          <a:xfrm>
+            <a:off x="5370141" y="4169664"/>
             <a:ext cx="685800" cy="475488"/>
           </a:xfrm>
           <a:prstGeom prst="rect">
@@ -10742,13 +10664,13 @@
       </p:sp>
       <p:sp>
         <p:nvSpPr>
-          <p:cNvPr id="39" name="Text 37"/>
-          <p:cNvSpPr/>
-          <p:nvPr/>
-        </p:nvSpPr>
-        <p:spPr>
-          <a:xfrm>
-            <a:off x="2831592" y="4169664"/>
+          <p:cNvPr id="40" name="Text 38"/>
+          <p:cNvSpPr/>
+          <p:nvPr/>
+        </p:nvSpPr>
+        <p:spPr>
+          <a:xfrm>
+            <a:off x="5370141" y="4169664"/>
             <a:ext cx="685800" cy="475488"/>
           </a:xfrm>
           <a:prstGeom prst="rect">
@@ -10773,7 +10695,7 @@
                 <a:ea typeface="Trebuchet MS" pitchFamily="34" charset="-122"/>
                 <a:cs typeface="Trebuchet MS" pitchFamily="34" charset="-120"/>
               </a:rPr>
-              <a:t>ss</a:t>
+              <a:t>s</a:t>
             </a:r>
             <a:endParaRPr lang="en-US" sz="900" dirty="0"/>
           </a:p>
@@ -10781,13 +10703,13 @@
       </p:sp>
       <p:sp>
         <p:nvSpPr>
-          <p:cNvPr id="40" name="Shape 38"/>
-          <p:cNvSpPr/>
-          <p:nvPr/>
-        </p:nvSpPr>
-        <p:spPr>
-          <a:xfrm>
-            <a:off x="3639312" y="4169664"/>
+          <p:cNvPr id="41" name="Shape 39"/>
+          <p:cNvSpPr/>
+          <p:nvPr/>
+        </p:nvSpPr>
+        <p:spPr>
+          <a:xfrm>
+            <a:off x="6408638" y="4169664"/>
             <a:ext cx="685800" cy="475488"/>
           </a:xfrm>
           <a:prstGeom prst="rect">
@@ -10808,13 +10730,13 @@
       </p:sp>
       <p:sp>
         <p:nvSpPr>
-          <p:cNvPr id="41" name="Text 39"/>
-          <p:cNvSpPr/>
-          <p:nvPr/>
-        </p:nvSpPr>
-        <p:spPr>
-          <a:xfrm>
-            <a:off x="3639312" y="4169664"/>
+          <p:cNvPr id="42" name="Text 40"/>
+          <p:cNvSpPr/>
+          <p:nvPr/>
+        </p:nvSpPr>
+        <p:spPr>
+          <a:xfrm>
+            <a:off x="6408638" y="4169664"/>
             <a:ext cx="685800" cy="475488"/>
           </a:xfrm>
           <a:prstGeom prst="rect">
@@ -10839,7 +10761,7 @@
                 <a:ea typeface="Trebuchet MS" pitchFamily="34" charset="-122"/>
                 <a:cs typeface="Trebuchet MS" pitchFamily="34" charset="-120"/>
               </a:rPr>
-              <a:t>i</a:t>
+              <a:t>t</a:t>
             </a:r>
             <a:endParaRPr lang="en-US" sz="900" dirty="0"/>
           </a:p>
@@ -10847,13 +10769,13 @@
       </p:sp>
       <p:sp>
         <p:nvSpPr>
-          <p:cNvPr id="42" name="Shape 40"/>
-          <p:cNvSpPr/>
-          <p:nvPr/>
-        </p:nvSpPr>
-        <p:spPr>
-          <a:xfrm>
-            <a:off x="4447032" y="4169664"/>
+          <p:cNvPr id="43" name="Shape 41"/>
+          <p:cNvSpPr/>
+          <p:nvPr/>
+        </p:nvSpPr>
+        <p:spPr>
+          <a:xfrm>
+            <a:off x="7447135" y="4169664"/>
             <a:ext cx="685800" cy="475488"/>
           </a:xfrm>
           <a:prstGeom prst="rect">
@@ -10874,13 +10796,13 @@
       </p:sp>
       <p:sp>
         <p:nvSpPr>
-          <p:cNvPr id="43" name="Text 41"/>
-          <p:cNvSpPr/>
-          <p:nvPr/>
-        </p:nvSpPr>
-        <p:spPr>
-          <a:xfrm>
-            <a:off x="4447032" y="4169664"/>
+          <p:cNvPr id="44" name="Text 42"/>
+          <p:cNvSpPr/>
+          <p:nvPr/>
+        </p:nvSpPr>
+        <p:spPr>
+          <a:xfrm>
+            <a:off x="7447135" y="4169664"/>
             <a:ext cx="685800" cy="475488"/>
           </a:xfrm>
           <a:prstGeom prst="rect">
@@ -10905,271 +10827,7 @@
                 <a:ea typeface="Trebuchet MS" pitchFamily="34" charset="-122"/>
                 <a:cs typeface="Trebuchet MS" pitchFamily="34" charset="-120"/>
               </a:rPr>
-              <a:t>s</a:t>
-            </a:r>
-            <a:endParaRPr lang="en-US" sz="900" dirty="0"/>
-          </a:p>
-        </p:txBody>
-      </p:sp>
-      <p:sp>
-        <p:nvSpPr>
-          <p:cNvPr id="44" name="Shape 42"/>
-          <p:cNvSpPr/>
-          <p:nvPr/>
-        </p:nvSpPr>
-        <p:spPr>
-          <a:xfrm>
-            <a:off x="5254752" y="4169664"/>
-            <a:ext cx="685800" cy="475488"/>
-          </a:xfrm>
-          <a:prstGeom prst="rect">
-            <a:avLst>
-              <a:gd name="adj" fmla="val 7692"/>
-            </a:avLst>
-          </a:prstGeom>
-          <a:solidFill>
-            <a:srgbClr val="FFFFFF"/>
-          </a:solidFill>
-          <a:ln w="12700">
-            <a:solidFill>
-              <a:srgbClr val="DB2777"/>
-            </a:solidFill>
-            <a:prstDash val="solid"/>
-          </a:ln>
-        </p:spPr>
-      </p:sp>
-      <p:sp>
-        <p:nvSpPr>
-          <p:cNvPr id="45" name="Text 43"/>
-          <p:cNvSpPr/>
-          <p:nvPr/>
-        </p:nvSpPr>
-        <p:spPr>
-          <a:xfrm>
-            <a:off x="5254752" y="4169664"/>
-            <a:ext cx="685800" cy="475488"/>
-          </a:xfrm>
-          <a:prstGeom prst="rect">
-            <a:avLst/>
-          </a:prstGeom>
-          <a:noFill/>
-          <a:ln/>
-        </p:spPr>
-        <p:txBody>
-          <a:bodyPr wrap="square" lIns="0" tIns="0" rIns="0" bIns="0" rtlCol="0" anchor="ctr"/>
-          <a:lstStyle/>
-          <a:p>
-            <a:pPr algn="ctr" indent="0" marL="0">
-              <a:buNone/>
-            </a:pPr>
-            <a:r>
-              <a:rPr lang="en-US" sz="900" b="1" dirty="0">
-                <a:solidFill>
-                  <a:srgbClr val="9D174D"/>
-                </a:solidFill>
-                <a:latin typeface="Trebuchet MS" pitchFamily="34" charset="0"/>
-                <a:ea typeface="Trebuchet MS" pitchFamily="34" charset="-122"/>
-                <a:cs typeface="Trebuchet MS" pitchFamily="34" charset="-120"/>
-              </a:rPr>
-              <a:t>t</a:t>
-            </a:r>
-            <a:endParaRPr lang="en-US" sz="900" dirty="0"/>
-          </a:p>
-        </p:txBody>
-      </p:sp>
-      <p:sp>
-        <p:nvSpPr>
-          <p:cNvPr id="46" name="Shape 44"/>
-          <p:cNvSpPr/>
-          <p:nvPr/>
-        </p:nvSpPr>
-        <p:spPr>
-          <a:xfrm>
-            <a:off x="6062472" y="4169664"/>
-            <a:ext cx="685800" cy="475488"/>
-          </a:xfrm>
-          <a:prstGeom prst="rect">
-            <a:avLst>
-              <a:gd name="adj" fmla="val 7692"/>
-            </a:avLst>
-          </a:prstGeom>
-          <a:solidFill>
-            <a:srgbClr val="FFFFFF"/>
-          </a:solidFill>
-          <a:ln w="12700">
-            <a:solidFill>
-              <a:srgbClr val="DB2777"/>
-            </a:solidFill>
-            <a:prstDash val="solid"/>
-          </a:ln>
-        </p:spPr>
-      </p:sp>
-      <p:sp>
-        <p:nvSpPr>
-          <p:cNvPr id="47" name="Text 45"/>
-          <p:cNvSpPr/>
-          <p:nvPr/>
-        </p:nvSpPr>
-        <p:spPr>
-          <a:xfrm>
-            <a:off x="6062472" y="4169664"/>
-            <a:ext cx="685800" cy="475488"/>
-          </a:xfrm>
-          <a:prstGeom prst="rect">
-            <a:avLst/>
-          </a:prstGeom>
-          <a:noFill/>
-          <a:ln/>
-        </p:spPr>
-        <p:txBody>
-          <a:bodyPr wrap="square" lIns="0" tIns="0" rIns="0" bIns="0" rtlCol="0" anchor="ctr"/>
-          <a:lstStyle/>
-          <a:p>
-            <a:pPr algn="ctr" indent="0" marL="0">
-              <a:buNone/>
-            </a:pPr>
-            <a:r>
-              <a:rPr lang="en-US" sz="900" b="1" dirty="0">
-                <a:solidFill>
-                  <a:srgbClr val="9D174D"/>
-                </a:solidFill>
-                <a:latin typeface="Trebuchet MS" pitchFamily="34" charset="0"/>
-                <a:ea typeface="Trebuchet MS" pitchFamily="34" charset="-122"/>
-                <a:cs typeface="Trebuchet MS" pitchFamily="34" charset="-120"/>
-              </a:rPr>
-              <a:t>a</a:t>
-            </a:r>
-            <a:endParaRPr lang="en-US" sz="900" dirty="0"/>
-          </a:p>
-        </p:txBody>
-      </p:sp>
-      <p:sp>
-        <p:nvSpPr>
-          <p:cNvPr id="48" name="Shape 46"/>
-          <p:cNvSpPr/>
-          <p:nvPr/>
-        </p:nvSpPr>
-        <p:spPr>
-          <a:xfrm>
-            <a:off x="6870192" y="4169664"/>
-            <a:ext cx="685800" cy="475488"/>
-          </a:xfrm>
-          <a:prstGeom prst="rect">
-            <a:avLst>
-              <a:gd name="adj" fmla="val 7692"/>
-            </a:avLst>
-          </a:prstGeom>
-          <a:solidFill>
-            <a:srgbClr val="FFFFFF"/>
-          </a:solidFill>
-          <a:ln w="12700">
-            <a:solidFill>
-              <a:srgbClr val="DB2777"/>
-            </a:solidFill>
-            <a:prstDash val="solid"/>
-          </a:ln>
-        </p:spPr>
-      </p:sp>
-      <p:sp>
-        <p:nvSpPr>
-          <p:cNvPr id="49" name="Text 47"/>
-          <p:cNvSpPr/>
-          <p:nvPr/>
-        </p:nvSpPr>
-        <p:spPr>
-          <a:xfrm>
-            <a:off x="6870192" y="4169664"/>
-            <a:ext cx="685800" cy="475488"/>
-          </a:xfrm>
-          <a:prstGeom prst="rect">
-            <a:avLst/>
-          </a:prstGeom>
-          <a:noFill/>
-          <a:ln/>
-        </p:spPr>
-        <p:txBody>
-          <a:bodyPr wrap="square" lIns="0" tIns="0" rIns="0" bIns="0" rtlCol="0" anchor="ctr"/>
-          <a:lstStyle/>
-          <a:p>
-            <a:pPr algn="ctr" indent="0" marL="0">
-              <a:buNone/>
-            </a:pPr>
-            <a:r>
-              <a:rPr lang="en-US" sz="900" b="1" dirty="0">
-                <a:solidFill>
-                  <a:srgbClr val="9D174D"/>
-                </a:solidFill>
-                <a:latin typeface="Trebuchet MS" pitchFamily="34" charset="0"/>
-                <a:ea typeface="Trebuchet MS" pitchFamily="34" charset="-122"/>
-                <a:cs typeface="Trebuchet MS" pitchFamily="34" charset="-120"/>
-              </a:rPr>
-              <a:t>n</a:t>
-            </a:r>
-            <a:endParaRPr lang="en-US" sz="900" dirty="0"/>
-          </a:p>
-        </p:txBody>
-      </p:sp>
-      <p:sp>
-        <p:nvSpPr>
-          <p:cNvPr id="50" name="Shape 48"/>
-          <p:cNvSpPr/>
-          <p:nvPr/>
-        </p:nvSpPr>
-        <p:spPr>
-          <a:xfrm>
-            <a:off x="7677912" y="4169664"/>
-            <a:ext cx="685800" cy="475488"/>
-          </a:xfrm>
-          <a:prstGeom prst="rect">
-            <a:avLst>
-              <a:gd name="adj" fmla="val 7692"/>
-            </a:avLst>
-          </a:prstGeom>
-          <a:solidFill>
-            <a:srgbClr val="FFFFFF"/>
-          </a:solidFill>
-          <a:ln w="12700">
-            <a:solidFill>
-              <a:srgbClr val="DB2777"/>
-            </a:solidFill>
-            <a:prstDash val="solid"/>
-          </a:ln>
-        </p:spPr>
-      </p:sp>
-      <p:sp>
-        <p:nvSpPr>
-          <p:cNvPr id="51" name="Text 49"/>
-          <p:cNvSpPr/>
-          <p:nvPr/>
-        </p:nvSpPr>
-        <p:spPr>
-          <a:xfrm>
-            <a:off x="7677912" y="4169664"/>
-            <a:ext cx="685800" cy="475488"/>
-          </a:xfrm>
-          <a:prstGeom prst="rect">
-            <a:avLst/>
-          </a:prstGeom>
-          <a:noFill/>
-          <a:ln/>
-        </p:spPr>
-        <p:txBody>
-          <a:bodyPr wrap="square" lIns="0" tIns="0" rIns="0" bIns="0" rtlCol="0" anchor="ctr"/>
-          <a:lstStyle/>
-          <a:p>
-            <a:pPr algn="ctr" indent="0" marL="0">
-              <a:buNone/>
-            </a:pPr>
-            <a:r>
-              <a:rPr lang="en-US" sz="900" b="1" dirty="0">
-                <a:solidFill>
-                  <a:srgbClr val="9D174D"/>
-                </a:solidFill>
-                <a:latin typeface="Trebuchet MS" pitchFamily="34" charset="0"/>
-                <a:ea typeface="Trebuchet MS" pitchFamily="34" charset="-122"/>
-                <a:cs typeface="Trebuchet MS" pitchFamily="34" charset="-120"/>
-              </a:rPr>
-              <a:t>t</a:t>
+              <a:t>ed</a:t>
             </a:r>
             <a:endParaRPr lang="en-US" sz="900" dirty="0"/>
           </a:p>
@@ -11461,7 +11119,7 @@
                 <a:ea typeface="Calibri" pitchFamily="34" charset="-122"/>
                 <a:cs typeface="Calibri" pitchFamily="34" charset="-120"/>
               </a:rPr>
-              <a:t>Word Labs  •  wordlabs.app  •  Root: 'assist' = to help or support someone</a:t>
+              <a:t>Word Labs  •  wordlabs.app  •  Root: 'assist' = help</a:t>
             </a:r>
             <a:endParaRPr lang="en-US" sz="800" dirty="0"/>
           </a:p>
@@ -11600,7 +11258,7 @@
                 <a:ea typeface="Trebuchet MS" pitchFamily="34" charset="-122"/>
                 <a:cs typeface="Trebuchet MS" pitchFamily="34" charset="-120"/>
               </a:rPr>
-              <a:t>assistance</a:t>
+              <a:t>assistant</a:t>
             </a:r>
             <a:endParaRPr lang="en-US" sz="2800" dirty="0"/>
           </a:p>
@@ -12288,7 +11946,7 @@
                 <a:ea typeface="Calibri" pitchFamily="34" charset="-122"/>
                 <a:cs typeface="Calibri" pitchFamily="34" charset="-120"/>
               </a:rPr>
-              <a:t>Word Labs  •  wordlabs.app  •  Root: 'assist' = to help or support someone</a:t>
+              <a:t>Word Labs  •  wordlabs.app  •  Root: 'assist' = help</a:t>
             </a:r>
             <a:endParaRPr lang="en-US" sz="800" dirty="0"/>
           </a:p>
@@ -12427,7 +12085,7 @@
                 <a:ea typeface="Trebuchet MS" pitchFamily="34" charset="-122"/>
                 <a:cs typeface="Trebuchet MS" pitchFamily="34" charset="-120"/>
               </a:rPr>
-              <a:t>assistance</a:t>
+              <a:t>assistant</a:t>
             </a:r>
             <a:endParaRPr lang="en-US" sz="2800" dirty="0"/>
           </a:p>
@@ -12605,7 +12263,7 @@
                 <a:ea typeface="Calibri" pitchFamily="34" charset="-122"/>
                 <a:cs typeface="Calibri" pitchFamily="34" charset="-120"/>
               </a:rPr>
-              <a:t>to help or support</a:t>
+              <a:t>help</a:t>
             </a:r>
             <a:endParaRPr lang="en-US" sz="850" dirty="0"/>
           </a:p>
@@ -12678,7 +12336,7 @@
                 <a:ea typeface="Trebuchet MS" pitchFamily="34" charset="-122"/>
                 <a:cs typeface="Trebuchet MS" pitchFamily="34" charset="-120"/>
               </a:rPr>
-              <a:t>ance</a:t>
+              <a:t>ant</a:t>
             </a:r>
             <a:endParaRPr lang="en-US" sz="1300" dirty="0"/>
           </a:p>
@@ -12717,7 +12375,7 @@
                 <a:ea typeface="Calibri" pitchFamily="34" charset="-122"/>
                 <a:cs typeface="Calibri" pitchFamily="34" charset="-120"/>
               </a:rPr>
-              <a:t>state or quality of</a:t>
+              <a:t>person or thing that</a:t>
             </a:r>
             <a:endParaRPr lang="en-US" sz="850" dirty="0"/>
           </a:p>
@@ -13273,7 +12931,7 @@
                 <a:ea typeface="Calibri" pitchFamily="34" charset="-122"/>
                 <a:cs typeface="Calibri" pitchFamily="34" charset="-120"/>
               </a:rPr>
-              <a:t>Word Labs  •  wordlabs.app  •  Root: 'assist' = to help or support someone</a:t>
+              <a:t>Word Labs  •  wordlabs.app  •  Root: 'assist' = help</a:t>
             </a:r>
             <a:endParaRPr lang="en-US" sz="800" dirty="0"/>
           </a:p>
@@ -13412,7 +13070,7 @@
                 <a:ea typeface="Trebuchet MS" pitchFamily="34" charset="-122"/>
                 <a:cs typeface="Trebuchet MS" pitchFamily="34" charset="-120"/>
               </a:rPr>
-              <a:t>assistance</a:t>
+              <a:t>assistant</a:t>
             </a:r>
             <a:endParaRPr lang="en-US" sz="2800" dirty="0"/>
           </a:p>
@@ -13590,7 +13248,7 @@
                 <a:ea typeface="Calibri" pitchFamily="34" charset="-122"/>
                 <a:cs typeface="Calibri" pitchFamily="34" charset="-120"/>
               </a:rPr>
-              <a:t>to help or support</a:t>
+              <a:t>help</a:t>
             </a:r>
             <a:endParaRPr lang="en-US" sz="850" dirty="0"/>
           </a:p>
@@ -13663,7 +13321,7 @@
                 <a:ea typeface="Trebuchet MS" pitchFamily="34" charset="-122"/>
                 <a:cs typeface="Trebuchet MS" pitchFamily="34" charset="-120"/>
               </a:rPr>
-              <a:t>ance</a:t>
+              <a:t>ant</a:t>
             </a:r>
             <a:endParaRPr lang="en-US" sz="1300" dirty="0"/>
           </a:p>
@@ -13702,7 +13360,7 @@
                 <a:ea typeface="Calibri" pitchFamily="34" charset="-122"/>
                 <a:cs typeface="Calibri" pitchFamily="34" charset="-120"/>
               </a:rPr>
-              <a:t>state or quality of</a:t>
+              <a:t>person or thing that</a:t>
             </a:r>
             <a:endParaRPr lang="en-US" sz="850" dirty="0"/>
           </a:p>
@@ -14071,7 +13729,7 @@
                 <a:ea typeface="Trebuchet MS" pitchFamily="34" charset="-122"/>
                 <a:cs typeface="Trebuchet MS" pitchFamily="34" charset="-120"/>
               </a:rPr>
-              <a:t>tance</a:t>
+              <a:t>tant</a:t>
             </a:r>
             <a:endParaRPr lang="en-US" sz="1400" dirty="0"/>
           </a:p>
@@ -14404,7 +14062,7 @@
                 <a:ea typeface="Calibri" pitchFamily="34" charset="-122"/>
                 <a:cs typeface="Calibri" pitchFamily="34" charset="-120"/>
               </a:rPr>
-              <a:t>Root 'assist' — to help or support someone</a:t>
+              <a:t>Root 'assist' — help</a:t>
             </a:r>
             <a:endParaRPr lang="en-US" sz="1600" dirty="0"/>
           </a:p>
@@ -14760,7 +14418,7 @@
                 <a:ea typeface="Calibri" pitchFamily="34" charset="-122"/>
                 <a:cs typeface="Calibri" pitchFamily="34" charset="-120"/>
               </a:rPr>
-              <a:t>Word Labs  •  wordlabs.app  •  Root: 'assist' = to help or support someone</a:t>
+              <a:t>Word Labs  •  wordlabs.app  •  Root: 'assist' = help</a:t>
             </a:r>
             <a:endParaRPr lang="en-US" sz="800" dirty="0"/>
           </a:p>
@@ -14899,7 +14557,7 @@
                 <a:ea typeface="Trebuchet MS" pitchFamily="34" charset="-122"/>
                 <a:cs typeface="Trebuchet MS" pitchFamily="34" charset="-120"/>
               </a:rPr>
-              <a:t>assistance</a:t>
+              <a:t>assistant</a:t>
             </a:r>
             <a:endParaRPr lang="en-US" sz="2800" dirty="0"/>
           </a:p>
@@ -15077,7 +14735,7 @@
                 <a:ea typeface="Calibri" pitchFamily="34" charset="-122"/>
                 <a:cs typeface="Calibri" pitchFamily="34" charset="-120"/>
               </a:rPr>
-              <a:t>to help or support</a:t>
+              <a:t>help</a:t>
             </a:r>
             <a:endParaRPr lang="en-US" sz="850" dirty="0"/>
           </a:p>
@@ -15150,7 +14808,7 @@
                 <a:ea typeface="Trebuchet MS" pitchFamily="34" charset="-122"/>
                 <a:cs typeface="Trebuchet MS" pitchFamily="34" charset="-120"/>
               </a:rPr>
-              <a:t>ance</a:t>
+              <a:t>ant</a:t>
             </a:r>
             <a:endParaRPr lang="en-US" sz="1300" dirty="0"/>
           </a:p>
@@ -15189,7 +14847,7 @@
                 <a:ea typeface="Calibri" pitchFamily="34" charset="-122"/>
                 <a:cs typeface="Calibri" pitchFamily="34" charset="-120"/>
               </a:rPr>
-              <a:t>state or quality of</a:t>
+              <a:t>person or thing that</a:t>
             </a:r>
             <a:endParaRPr lang="en-US" sz="850" dirty="0"/>
           </a:p>
@@ -15558,7 +15216,7 @@
                 <a:ea typeface="Trebuchet MS" pitchFamily="34" charset="-122"/>
                 <a:cs typeface="Trebuchet MS" pitchFamily="34" charset="-120"/>
               </a:rPr>
-              <a:t>tance</a:t>
+              <a:t>tant</a:t>
             </a:r>
             <a:endParaRPr lang="en-US" sz="1400" dirty="0"/>
           </a:p>
@@ -15639,11 +15297,11 @@
         <p:spPr>
           <a:xfrm>
             <a:off x="1874520" y="4096512"/>
-            <a:ext cx="6903720" cy="804672"/>
+            <a:ext cx="6903720" cy="658368"/>
           </a:xfrm>
           <a:prstGeom prst="rect">
             <a:avLst>
-              <a:gd name="adj" fmla="val 6818"/>
+              <a:gd name="adj" fmla="val 8333"/>
             </a:avLst>
           </a:prstGeom>
           <a:solidFill>
@@ -15666,11 +15324,11 @@
         <p:spPr>
           <a:xfrm>
             <a:off x="2023872" y="4169664"/>
-            <a:ext cx="685800" cy="384048"/>
+            <a:ext cx="685800" cy="475488"/>
           </a:xfrm>
           <a:prstGeom prst="rect">
             <a:avLst>
-              <a:gd name="adj" fmla="val 9524"/>
+              <a:gd name="adj" fmla="val 7692"/>
             </a:avLst>
           </a:prstGeom>
           <a:solidFill>
@@ -15693,7 +15351,7 @@
         <p:spPr>
           <a:xfrm>
             <a:off x="2023872" y="4169664"/>
-            <a:ext cx="685800" cy="384048"/>
+            <a:ext cx="685800" cy="475488"/>
           </a:xfrm>
           <a:prstGeom prst="rect">
             <a:avLst/>
@@ -15732,11 +15390,11 @@
         <p:spPr>
           <a:xfrm>
             <a:off x="2831592" y="4169664"/>
-            <a:ext cx="685800" cy="384048"/>
+            <a:ext cx="685800" cy="475488"/>
           </a:xfrm>
           <a:prstGeom prst="rect">
             <a:avLst>
-              <a:gd name="adj" fmla="val 9524"/>
+              <a:gd name="adj" fmla="val 7692"/>
             </a:avLst>
           </a:prstGeom>
           <a:solidFill>
@@ -15759,7 +15417,7 @@
         <p:spPr>
           <a:xfrm>
             <a:off x="2831592" y="4169664"/>
-            <a:ext cx="685800" cy="384048"/>
+            <a:ext cx="685800" cy="475488"/>
           </a:xfrm>
           <a:prstGeom prst="rect">
             <a:avLst/>
@@ -15798,11 +15456,11 @@
         <p:spPr>
           <a:xfrm>
             <a:off x="3639312" y="4169664"/>
-            <a:ext cx="685800" cy="384048"/>
+            <a:ext cx="685800" cy="475488"/>
           </a:xfrm>
           <a:prstGeom prst="rect">
             <a:avLst>
-              <a:gd name="adj" fmla="val 9524"/>
+              <a:gd name="adj" fmla="val 7692"/>
             </a:avLst>
           </a:prstGeom>
           <a:solidFill>
@@ -15825,7 +15483,7 @@
         <p:spPr>
           <a:xfrm>
             <a:off x="3639312" y="4169664"/>
-            <a:ext cx="685800" cy="384048"/>
+            <a:ext cx="685800" cy="475488"/>
           </a:xfrm>
           <a:prstGeom prst="rect">
             <a:avLst/>
@@ -15864,11 +15522,11 @@
         <p:spPr>
           <a:xfrm>
             <a:off x="4447032" y="4169664"/>
-            <a:ext cx="685800" cy="384048"/>
+            <a:ext cx="685800" cy="475488"/>
           </a:xfrm>
           <a:prstGeom prst="rect">
             <a:avLst>
-              <a:gd name="adj" fmla="val 9524"/>
+              <a:gd name="adj" fmla="val 7692"/>
             </a:avLst>
           </a:prstGeom>
           <a:solidFill>
@@ -15891,7 +15549,7 @@
         <p:spPr>
           <a:xfrm>
             <a:off x="4447032" y="4169664"/>
-            <a:ext cx="685800" cy="384048"/>
+            <a:ext cx="685800" cy="475488"/>
           </a:xfrm>
           <a:prstGeom prst="rect">
             <a:avLst/>
@@ -15930,11 +15588,11 @@
         <p:spPr>
           <a:xfrm>
             <a:off x="5254752" y="4169664"/>
-            <a:ext cx="685800" cy="384048"/>
+            <a:ext cx="685800" cy="475488"/>
           </a:xfrm>
           <a:prstGeom prst="rect">
             <a:avLst>
-              <a:gd name="adj" fmla="val 9524"/>
+              <a:gd name="adj" fmla="val 7692"/>
             </a:avLst>
           </a:prstGeom>
           <a:solidFill>
@@ -15957,7 +15615,7 @@
         <p:spPr>
           <a:xfrm>
             <a:off x="5254752" y="4169664"/>
-            <a:ext cx="685800" cy="384048"/>
+            <a:ext cx="685800" cy="475488"/>
           </a:xfrm>
           <a:prstGeom prst="rect">
             <a:avLst/>
@@ -15996,11 +15654,11 @@
         <p:spPr>
           <a:xfrm>
             <a:off x="6062472" y="4169664"/>
-            <a:ext cx="685800" cy="384048"/>
+            <a:ext cx="685800" cy="475488"/>
           </a:xfrm>
           <a:prstGeom prst="rect">
             <a:avLst>
-              <a:gd name="adj" fmla="val 9524"/>
+              <a:gd name="adj" fmla="val 7692"/>
             </a:avLst>
           </a:prstGeom>
           <a:solidFill>
@@ -16023,7 +15681,7 @@
         <p:spPr>
           <a:xfrm>
             <a:off x="6062472" y="4169664"/>
-            <a:ext cx="685800" cy="384048"/>
+            <a:ext cx="685800" cy="475488"/>
           </a:xfrm>
           <a:prstGeom prst="rect">
             <a:avLst/>
@@ -16062,11 +15720,11 @@
         <p:spPr>
           <a:xfrm>
             <a:off x="6870192" y="4169664"/>
-            <a:ext cx="685800" cy="384048"/>
+            <a:ext cx="685800" cy="475488"/>
           </a:xfrm>
           <a:prstGeom prst="rect">
             <a:avLst>
-              <a:gd name="adj" fmla="val 9524"/>
+              <a:gd name="adj" fmla="val 7692"/>
             </a:avLst>
           </a:prstGeom>
           <a:solidFill>
@@ -16089,7 +15747,7 @@
         <p:spPr>
           <a:xfrm>
             <a:off x="6870192" y="4169664"/>
-            <a:ext cx="685800" cy="384048"/>
+            <a:ext cx="685800" cy="475488"/>
           </a:xfrm>
           <a:prstGeom prst="rect">
             <a:avLst/>
@@ -16128,11 +15786,11 @@
         <p:spPr>
           <a:xfrm>
             <a:off x="7677912" y="4169664"/>
-            <a:ext cx="685800" cy="384048"/>
+            <a:ext cx="685800" cy="475488"/>
           </a:xfrm>
           <a:prstGeom prst="rect">
             <a:avLst>
-              <a:gd name="adj" fmla="val 9524"/>
+              <a:gd name="adj" fmla="val 7692"/>
             </a:avLst>
           </a:prstGeom>
           <a:solidFill>
@@ -16155,7 +15813,7 @@
         <p:spPr>
           <a:xfrm>
             <a:off x="7677912" y="4169664"/>
-            <a:ext cx="685800" cy="384048"/>
+            <a:ext cx="685800" cy="475488"/>
           </a:xfrm>
           <a:prstGeom prst="rect">
             <a:avLst/>
@@ -16179,48 +15837,9 @@
                 <a:ea typeface="Trebuchet MS" pitchFamily="34" charset="-122"/>
                 <a:cs typeface="Trebuchet MS" pitchFamily="34" charset="-120"/>
               </a:rPr>
-              <a:t>ce</a:t>
+              <a:t>t</a:t>
             </a:r>
             <a:endParaRPr lang="en-US" sz="900" dirty="0"/>
-          </a:p>
-        </p:txBody>
-      </p:sp>
-      <p:sp>
-        <p:nvSpPr>
-          <p:cNvPr id="52" name="Text 50"/>
-          <p:cNvSpPr/>
-          <p:nvPr/>
-        </p:nvSpPr>
-        <p:spPr>
-          <a:xfrm>
-            <a:off x="7677912" y="4572000"/>
-            <a:ext cx="685800" cy="219456"/>
-          </a:xfrm>
-          <a:prstGeom prst="rect">
-            <a:avLst/>
-          </a:prstGeom>
-          <a:noFill/>
-          <a:ln/>
-        </p:spPr>
-        <p:txBody>
-          <a:bodyPr wrap="square" lIns="0" tIns="0" rIns="0" bIns="0" rtlCol="0" anchor="t"/>
-          <a:lstStyle/>
-          <a:p>
-            <a:pPr algn="ctr" indent="0" marL="0">
-              <a:buNone/>
-            </a:pPr>
-            <a:r>
-              <a:rPr lang="en-US" sz="750" i="1" dirty="0">
-                <a:solidFill>
-                  <a:srgbClr val="94A3B8"/>
-                </a:solidFill>
-                <a:latin typeface="Calibri" pitchFamily="34" charset="0"/>
-                <a:ea typeface="Calibri" pitchFamily="34" charset="-122"/>
-                <a:cs typeface="Calibri" pitchFamily="34" charset="-120"/>
-              </a:rPr>
-              <a:t>/s/</a:t>
-            </a:r>
-            <a:endParaRPr lang="en-US" sz="750" dirty="0"/>
           </a:p>
         </p:txBody>
       </p:sp>
@@ -16792,7 +16411,7 @@
                 <a:ea typeface="Calibri" pitchFamily="34" charset="-122"/>
                 <a:cs typeface="Calibri" pitchFamily="34" charset="-120"/>
               </a:rPr>
-              <a:t>Word Labs  •  wordlabs.app  •  Root: 'assist' = to help or support someone</a:t>
+              <a:t>Word Labs  •  wordlabs.app  •  Root: 'assist' = help</a:t>
             </a:r>
             <a:endParaRPr lang="en-US" sz="800" dirty="0"/>
           </a:p>
@@ -17126,7 +16745,7 @@
                 <a:ea typeface="Trebuchet MS" pitchFamily="34" charset="-122"/>
                 <a:cs typeface="Trebuchet MS" pitchFamily="34" charset="-120"/>
               </a:rPr>
-              <a:t>2</a:t>
+              <a:t>0</a:t>
             </a:r>
             <a:pPr algn="ctr" indent="0" marL="0">
               <a:buNone/>
@@ -17140,7 +16759,7 @@
                 <a:ea typeface="Trebuchet MS" pitchFamily="34" charset="-122"/>
                 <a:cs typeface="Trebuchet MS" pitchFamily="34" charset="-120"/>
               </a:rPr>
-              <a:t>  punctuation marks</a:t>
+              <a:t>  punctuation mark</a:t>
             </a:r>
             <a:endParaRPr lang="en-US" sz="2800" dirty="0"/>
           </a:p>
@@ -17432,7 +17051,7 @@
                 <a:ea typeface="Calibri" pitchFamily="34" charset="-122"/>
                 <a:cs typeface="Calibri" pitchFamily="34" charset="-120"/>
               </a:rPr>
-              <a:t>Word Labs  •  wordlabs.app  •  Root: 'assist' = to help or support someone</a:t>
+              <a:t>Word Labs  •  wordlabs.app  •  Root: 'assist' = help</a:t>
             </a:r>
             <a:endParaRPr lang="en-US" sz="800" dirty="0"/>
           </a:p>
@@ -17544,7 +17163,7 @@
                 <a:ea typeface="Calibri" pitchFamily="34" charset="-122"/>
                 <a:cs typeface="Calibri" pitchFamily="34" charset="-120"/>
               </a:rPr>
-              <a:t>The teacher was </a:t>
+              <a:t>She is </a:t>
             </a:r>
             <a:pPr algn="l" indent="0" marL="0">
               <a:buNone/>
@@ -17561,7 +17180,7 @@
                 <a:ea typeface="Calibri" pitchFamily="34" charset="-122"/>
                 <a:cs typeface="Calibri" pitchFamily="34" charset="-120"/>
               </a:rPr>
-              <a:t>assisted</a:t>
+              <a:t>assisting</a:t>
             </a:r>
             <a:pPr algn="l" indent="0" marL="0">
               <a:buNone/>
@@ -17575,7 +17194,7 @@
                 <a:ea typeface="Calibri" pitchFamily="34" charset="-122"/>
                 <a:cs typeface="Calibri" pitchFamily="34" charset="-120"/>
               </a:rPr>
-              <a:t> by a volunteer, and their </a:t>
+              <a:t> her grandmother in the garden this afternoon. The firefighters offered </a:t>
             </a:r>
             <a:pPr algn="l" indent="0" marL="0">
               <a:buNone/>
@@ -17592,7 +17211,7 @@
                 <a:ea typeface="Calibri" pitchFamily="34" charset="-122"/>
                 <a:cs typeface="Calibri" pitchFamily="34" charset="-120"/>
               </a:rPr>
-              <a:t>assistive</a:t>
+              <a:t>assistance</a:t>
             </a:r>
             <a:pPr algn="l" indent="0" marL="0">
               <a:buNone/>
@@ -17606,7 +17225,38 @@
                 <a:ea typeface="Calibri" pitchFamily="34" charset="-122"/>
                 <a:cs typeface="Calibri" pitchFamily="34" charset="-120"/>
               </a:rPr>
-              <a:t> tools helped every student in the room.</a:t>
+              <a:t> to the family after the fire. The two </a:t>
+            </a:r>
+            <a:pPr algn="l" indent="0" marL="0">
+              <a:buNone/>
+            </a:pPr>
+            <a:r>
+              <a:rPr lang="en-US" sz="1800" b="1" dirty="0">
+                <a:solidFill>
+                  <a:srgbClr val="0D9488"/>
+                </a:solidFill>
+                <a:highlight>
+                  <a:srgbClr val="CCFBF1"/>
+                </a:highlight>
+                <a:latin typeface="Calibri" pitchFamily="34" charset="0"/>
+                <a:ea typeface="Calibri" pitchFamily="34" charset="-122"/>
+                <a:cs typeface="Calibri" pitchFamily="34" charset="-120"/>
+              </a:rPr>
+              <a:t>assistants</a:t>
+            </a:r>
+            <a:pPr algn="l" indent="0" marL="0">
+              <a:buNone/>
+            </a:pPr>
+            <a:r>
+              <a:rPr lang="en-US" sz="1800" dirty="0">
+                <a:solidFill>
+                  <a:srgbClr val="0F172A"/>
+                </a:solidFill>
+                <a:latin typeface="Calibri" pitchFamily="34" charset="0"/>
+                <a:ea typeface="Calibri" pitchFamily="34" charset="-122"/>
+                <a:cs typeface="Calibri" pitchFamily="34" charset="-120"/>
+              </a:rPr>
+              <a:t> set up the classroom before school started.</a:t>
             </a:r>
             <a:endParaRPr lang="en-US" sz="1800" dirty="0"/>
           </a:p>
@@ -17761,7 +17411,7 @@
                 <a:ea typeface="Trebuchet MS" pitchFamily="34" charset="-122"/>
                 <a:cs typeface="Trebuchet MS" pitchFamily="34" charset="-120"/>
               </a:rPr>
-              <a:t>assisted</a:t>
+              <a:t>assisting</a:t>
             </a:r>
             <a:endParaRPr lang="en-US" sz="1400" dirty="0"/>
           </a:p>
@@ -17889,7 +17539,7 @@
                 <a:ea typeface="Trebuchet MS" pitchFamily="34" charset="-122"/>
                 <a:cs typeface="Trebuchet MS" pitchFamily="34" charset="-120"/>
               </a:rPr>
-              <a:t>assistive</a:t>
+              <a:t>assistance</a:t>
             </a:r>
             <a:endParaRPr lang="en-US" sz="1400" dirty="0"/>
           </a:p>
@@ -18017,7 +17667,7 @@
                 <a:ea typeface="Trebuchet MS" pitchFamily="34" charset="-122"/>
                 <a:cs typeface="Trebuchet MS" pitchFamily="34" charset="-120"/>
               </a:rPr>
-              <a:t>assisting</a:t>
+              <a:t>assistants</a:t>
             </a:r>
             <a:endParaRPr lang="en-US" sz="1400" dirty="0"/>
           </a:p>
@@ -18348,7 +17998,7 @@
                 <a:ea typeface="Calibri" pitchFamily="34" charset="-122"/>
                 <a:cs typeface="Calibri" pitchFamily="34" charset="-120"/>
               </a:rPr>
-              <a:t>Word Labs  •  wordlabs.app  •  Root: 'assist' = to help or support someone</a:t>
+              <a:t>Word Labs  •  wordlabs.app  •  Root: 'assist' = help</a:t>
             </a:r>
             <a:endParaRPr lang="en-US" sz="800" dirty="0"/>
           </a:p>
@@ -18487,7 +18137,7 @@
                 <a:ea typeface="Trebuchet MS" pitchFamily="34" charset="-122"/>
                 <a:cs typeface="Trebuchet MS" pitchFamily="34" charset="-120"/>
               </a:rPr>
-              <a:t>assisted</a:t>
+              <a:t>assisting</a:t>
             </a:r>
             <a:endParaRPr lang="en-US" sz="2800" dirty="0"/>
           </a:p>
@@ -19175,7 +18825,7 @@
                 <a:ea typeface="Calibri" pitchFamily="34" charset="-122"/>
                 <a:cs typeface="Calibri" pitchFamily="34" charset="-120"/>
               </a:rPr>
-              <a:t>Word Labs  •  wordlabs.app  •  Root: 'assist' = to help or support someone</a:t>
+              <a:t>Word Labs  •  wordlabs.app  •  Root: 'assist' = help</a:t>
             </a:r>
             <a:endParaRPr lang="en-US" sz="800" dirty="0"/>
           </a:p>
@@ -19314,7 +18964,7 @@
                 <a:ea typeface="Trebuchet MS" pitchFamily="34" charset="-122"/>
                 <a:cs typeface="Trebuchet MS" pitchFamily="34" charset="-120"/>
               </a:rPr>
-              <a:t>assisted</a:t>
+              <a:t>assisting</a:t>
             </a:r>
             <a:endParaRPr lang="en-US" sz="2800" dirty="0"/>
           </a:p>
@@ -19492,7 +19142,7 @@
                 <a:ea typeface="Calibri" pitchFamily="34" charset="-122"/>
                 <a:cs typeface="Calibri" pitchFamily="34" charset="-120"/>
               </a:rPr>
-              <a:t>to help or support</a:t>
+              <a:t>help</a:t>
             </a:r>
             <a:endParaRPr lang="en-US" sz="850" dirty="0"/>
           </a:p>
@@ -19565,7 +19215,7 @@
                 <a:ea typeface="Trebuchet MS" pitchFamily="34" charset="-122"/>
                 <a:cs typeface="Trebuchet MS" pitchFamily="34" charset="-120"/>
               </a:rPr>
-              <a:t>ed</a:t>
+              <a:t>ing</a:t>
             </a:r>
             <a:endParaRPr lang="en-US" sz="1300" dirty="0"/>
           </a:p>
@@ -19604,7 +19254,7 @@
                 <a:ea typeface="Calibri" pitchFamily="34" charset="-122"/>
                 <a:cs typeface="Calibri" pitchFamily="34" charset="-120"/>
               </a:rPr>
-              <a:t>past tense</a:t>
+              <a:t>happening now</a:t>
             </a:r>
             <a:endParaRPr lang="en-US" sz="850" dirty="0"/>
           </a:p>
@@ -20160,7 +19810,7 @@
                 <a:ea typeface="Calibri" pitchFamily="34" charset="-122"/>
                 <a:cs typeface="Calibri" pitchFamily="34" charset="-120"/>
               </a:rPr>
-              <a:t>Word Labs  •  wordlabs.app  •  Root: 'assist' = to help or support someone</a:t>
+              <a:t>Word Labs  •  wordlabs.app  •  Root: 'assist' = help</a:t>
             </a:r>
             <a:endParaRPr lang="en-US" sz="800" dirty="0"/>
           </a:p>
@@ -20299,7 +19949,7 @@
                 <a:ea typeface="Trebuchet MS" pitchFamily="34" charset="-122"/>
                 <a:cs typeface="Trebuchet MS" pitchFamily="34" charset="-120"/>
               </a:rPr>
-              <a:t>assisted</a:t>
+              <a:t>assisting</a:t>
             </a:r>
             <a:endParaRPr lang="en-US" sz="2800" dirty="0"/>
           </a:p>
@@ -20477,7 +20127,7 @@
                 <a:ea typeface="Calibri" pitchFamily="34" charset="-122"/>
                 <a:cs typeface="Calibri" pitchFamily="34" charset="-120"/>
               </a:rPr>
-              <a:t>to help or support</a:t>
+              <a:t>help</a:t>
             </a:r>
             <a:endParaRPr lang="en-US" sz="850" dirty="0"/>
           </a:p>
@@ -20550,7 +20200,7 @@
                 <a:ea typeface="Trebuchet MS" pitchFamily="34" charset="-122"/>
                 <a:cs typeface="Trebuchet MS" pitchFamily="34" charset="-120"/>
               </a:rPr>
-              <a:t>ed</a:t>
+              <a:t>ing</a:t>
             </a:r>
             <a:endParaRPr lang="en-US" sz="1300" dirty="0"/>
           </a:p>
@@ -20589,7 +20239,7 @@
                 <a:ea typeface="Calibri" pitchFamily="34" charset="-122"/>
                 <a:cs typeface="Calibri" pitchFamily="34" charset="-120"/>
               </a:rPr>
-              <a:t>past tense</a:t>
+              <a:t>happening now</a:t>
             </a:r>
             <a:endParaRPr lang="en-US" sz="850" dirty="0"/>
           </a:p>
@@ -20853,7 +20503,7 @@
                 <a:ea typeface="Trebuchet MS" pitchFamily="34" charset="-122"/>
                 <a:cs typeface="Trebuchet MS" pitchFamily="34" charset="-120"/>
               </a:rPr>
-              <a:t>sis</a:t>
+              <a:t>sist</a:t>
             </a:r>
             <a:endParaRPr lang="en-US" sz="1400" dirty="0"/>
           </a:p>
@@ -20958,7 +20608,7 @@
                 <a:ea typeface="Trebuchet MS" pitchFamily="34" charset="-122"/>
                 <a:cs typeface="Trebuchet MS" pitchFamily="34" charset="-120"/>
               </a:rPr>
-              <a:t>ted</a:t>
+              <a:t>ing</a:t>
             </a:r>
             <a:endParaRPr lang="en-US" sz="1400" dirty="0"/>
           </a:p>
@@ -21382,7 +21032,7 @@
                 <a:ea typeface="Calibri" pitchFamily="34" charset="-122"/>
                 <a:cs typeface="Calibri" pitchFamily="34" charset="-120"/>
               </a:rPr>
-              <a:t>Word Labs  •  wordlabs.app  •  Root: 'assist' = to help or support someone</a:t>
+              <a:t>Word Labs  •  wordlabs.app  •  Root: 'assist' = help</a:t>
             </a:r>
             <a:endParaRPr lang="en-US" sz="800" dirty="0"/>
           </a:p>
@@ -21521,7 +21171,7 @@
                 <a:ea typeface="Trebuchet MS" pitchFamily="34" charset="-122"/>
                 <a:cs typeface="Trebuchet MS" pitchFamily="34" charset="-120"/>
               </a:rPr>
-              <a:t>assisted</a:t>
+              <a:t>assisting</a:t>
             </a:r>
             <a:endParaRPr lang="en-US" sz="2800" dirty="0"/>
           </a:p>
@@ -21699,7 +21349,7 @@
                 <a:ea typeface="Calibri" pitchFamily="34" charset="-122"/>
                 <a:cs typeface="Calibri" pitchFamily="34" charset="-120"/>
               </a:rPr>
-              <a:t>to help or support</a:t>
+              <a:t>help</a:t>
             </a:r>
             <a:endParaRPr lang="en-US" sz="850" dirty="0"/>
           </a:p>
@@ -21772,7 +21422,7 @@
                 <a:ea typeface="Trebuchet MS" pitchFamily="34" charset="-122"/>
                 <a:cs typeface="Trebuchet MS" pitchFamily="34" charset="-120"/>
               </a:rPr>
-              <a:t>ed</a:t>
+              <a:t>ing</a:t>
             </a:r>
             <a:endParaRPr lang="en-US" sz="1300" dirty="0"/>
           </a:p>
@@ -21811,7 +21461,7 @@
                 <a:ea typeface="Calibri" pitchFamily="34" charset="-122"/>
                 <a:cs typeface="Calibri" pitchFamily="34" charset="-120"/>
               </a:rPr>
-              <a:t>past tense</a:t>
+              <a:t>happening now</a:t>
             </a:r>
             <a:endParaRPr lang="en-US" sz="850" dirty="0"/>
           </a:p>
@@ -22075,7 +21725,7 @@
                 <a:ea typeface="Trebuchet MS" pitchFamily="34" charset="-122"/>
                 <a:cs typeface="Trebuchet MS" pitchFamily="34" charset="-120"/>
               </a:rPr>
-              <a:t>sis</a:t>
+              <a:t>sist</a:t>
             </a:r>
             <a:endParaRPr lang="en-US" sz="1400" dirty="0"/>
           </a:p>
@@ -22180,7 +21830,7 @@
                 <a:ea typeface="Trebuchet MS" pitchFamily="34" charset="-122"/>
                 <a:cs typeface="Trebuchet MS" pitchFamily="34" charset="-120"/>
               </a:rPr>
-              <a:t>ted</a:t>
+              <a:t>ing</a:t>
             </a:r>
             <a:endParaRPr lang="en-US" sz="1400" dirty="0"/>
           </a:p>
@@ -22669,7 +22319,7 @@
                 <a:ea typeface="Trebuchet MS" pitchFamily="34" charset="-122"/>
                 <a:cs typeface="Trebuchet MS" pitchFamily="34" charset="-120"/>
               </a:rPr>
-              <a:t>e</a:t>
+              <a:t>i</a:t>
             </a:r>
             <a:endParaRPr lang="en-US" sz="900" dirty="0"/>
           </a:p>
@@ -22735,7 +22385,7 @@
                 <a:ea typeface="Trebuchet MS" pitchFamily="34" charset="-122"/>
                 <a:cs typeface="Trebuchet MS" pitchFamily="34" charset="-120"/>
               </a:rPr>
-              <a:t>d</a:t>
+              <a:t>ng</a:t>
             </a:r>
             <a:endParaRPr lang="en-US" sz="900" dirty="0"/>
           </a:p>
@@ -23027,7 +22677,7 @@
                 <a:ea typeface="Calibri" pitchFamily="34" charset="-122"/>
                 <a:cs typeface="Calibri" pitchFamily="34" charset="-120"/>
               </a:rPr>
-              <a:t>Word Labs  •  wordlabs.app  •  Root: 'assist' = to help or support someone</a:t>
+              <a:t>Word Labs  •  wordlabs.app  •  Root: 'assist' = help</a:t>
             </a:r>
             <a:endParaRPr lang="en-US" sz="800" dirty="0"/>
           </a:p>
@@ -23166,7 +22816,7 @@
                 <a:ea typeface="Trebuchet MS" pitchFamily="34" charset="-122"/>
                 <a:cs typeface="Trebuchet MS" pitchFamily="34" charset="-120"/>
               </a:rPr>
-              <a:t>assistive</a:t>
+              <a:t>assistance</a:t>
             </a:r>
             <a:endParaRPr lang="en-US" sz="2800" dirty="0"/>
           </a:p>
@@ -23854,7 +23504,7 @@
                 <a:ea typeface="Calibri" pitchFamily="34" charset="-122"/>
                 <a:cs typeface="Calibri" pitchFamily="34" charset="-120"/>
               </a:rPr>
-              <a:t>Word Labs  •  wordlabs.app  •  Root: 'assist' = to help or support someone</a:t>
+              <a:t>Word Labs  •  wordlabs.app  •  Root: 'assist' = help</a:t>
             </a:r>
             <a:endParaRPr lang="en-US" sz="800" dirty="0"/>
           </a:p>
@@ -23993,7 +23643,7 @@
                 <a:ea typeface="Trebuchet MS" pitchFamily="34" charset="-122"/>
                 <a:cs typeface="Trebuchet MS" pitchFamily="34" charset="-120"/>
               </a:rPr>
-              <a:t>assistive</a:t>
+              <a:t>assistance</a:t>
             </a:r>
             <a:endParaRPr lang="en-US" sz="2800" dirty="0"/>
           </a:p>
@@ -24171,7 +23821,7 @@
                 <a:ea typeface="Calibri" pitchFamily="34" charset="-122"/>
                 <a:cs typeface="Calibri" pitchFamily="34" charset="-120"/>
               </a:rPr>
-              <a:t>to help or support</a:t>
+              <a:t>help</a:t>
             </a:r>
             <a:endParaRPr lang="en-US" sz="850" dirty="0"/>
           </a:p>
@@ -24244,7 +23894,7 @@
                 <a:ea typeface="Trebuchet MS" pitchFamily="34" charset="-122"/>
                 <a:cs typeface="Trebuchet MS" pitchFamily="34" charset="-120"/>
               </a:rPr>
-              <a:t>ive</a:t>
+              <a:t>ance</a:t>
             </a:r>
             <a:endParaRPr lang="en-US" sz="1300" dirty="0"/>
           </a:p>
@@ -24283,7 +23933,7 @@
                 <a:ea typeface="Calibri" pitchFamily="34" charset="-122"/>
                 <a:cs typeface="Calibri" pitchFamily="34" charset="-120"/>
               </a:rPr>
-              <a:t>having the quality of</a:t>
+              <a:t>state of</a:t>
             </a:r>
             <a:endParaRPr lang="en-US" sz="850" dirty="0"/>
           </a:p>
@@ -24839,7 +24489,7 @@
                 <a:ea typeface="Calibri" pitchFamily="34" charset="-122"/>
                 <a:cs typeface="Calibri" pitchFamily="34" charset="-120"/>
               </a:rPr>
-              <a:t>Word Labs  •  wordlabs.app  •  Root: 'assist' = to help or support someone</a:t>
+              <a:t>Word Labs  •  wordlabs.app  •  Root: 'assist' = help</a:t>
             </a:r>
             <a:endParaRPr lang="en-US" sz="800" dirty="0"/>
           </a:p>
@@ -24912,7 +24562,7 @@
                 <a:ea typeface="Trebuchet MS" pitchFamily="34" charset="-122"/>
                 <a:cs typeface="Trebuchet MS" pitchFamily="34" charset="-120"/>
               </a:rPr>
-              <a:t>We are learning that the root 'assist' means 'to help or support someone'.</a:t>
+              <a:t>We are learning that the root 'assist' means 'help'.</a:t>
             </a:r>
             <a:endParaRPr lang="en-US" sz="2000" dirty="0"/>
           </a:p>
@@ -25558,7 +25208,7 @@
                 <a:ea typeface="Calibri" pitchFamily="34" charset="-122"/>
                 <a:cs typeface="Calibri" pitchFamily="34" charset="-120"/>
               </a:rPr>
-              <a:t>Word Labs  •  wordlabs.app  •  Root: 'assist' = to help or support someone</a:t>
+              <a:t>Word Labs  •  wordlabs.app  •  Root: 'assist' = help</a:t>
             </a:r>
             <a:endParaRPr lang="en-US" sz="800" dirty="0"/>
           </a:p>
@@ -25697,7 +25347,7 @@
                 <a:ea typeface="Trebuchet MS" pitchFamily="34" charset="-122"/>
                 <a:cs typeface="Trebuchet MS" pitchFamily="34" charset="-120"/>
               </a:rPr>
-              <a:t>assistive</a:t>
+              <a:t>assistance</a:t>
             </a:r>
             <a:endParaRPr lang="en-US" sz="2800" dirty="0"/>
           </a:p>
@@ -25875,7 +25525,7 @@
                 <a:ea typeface="Calibri" pitchFamily="34" charset="-122"/>
                 <a:cs typeface="Calibri" pitchFamily="34" charset="-120"/>
               </a:rPr>
-              <a:t>to help or support</a:t>
+              <a:t>help</a:t>
             </a:r>
             <a:endParaRPr lang="en-US" sz="850" dirty="0"/>
           </a:p>
@@ -25948,7 +25598,7 @@
                 <a:ea typeface="Trebuchet MS" pitchFamily="34" charset="-122"/>
                 <a:cs typeface="Trebuchet MS" pitchFamily="34" charset="-120"/>
               </a:rPr>
-              <a:t>ive</a:t>
+              <a:t>ance</a:t>
             </a:r>
             <a:endParaRPr lang="en-US" sz="1300" dirty="0"/>
           </a:p>
@@ -25987,7 +25637,7 @@
                 <a:ea typeface="Calibri" pitchFamily="34" charset="-122"/>
                 <a:cs typeface="Calibri" pitchFamily="34" charset="-120"/>
               </a:rPr>
-              <a:t>having the quality of</a:t>
+              <a:t>state of</a:t>
             </a:r>
             <a:endParaRPr lang="en-US" sz="850" dirty="0"/>
           </a:p>
@@ -26356,7 +26006,7 @@
                 <a:ea typeface="Trebuchet MS" pitchFamily="34" charset="-122"/>
                 <a:cs typeface="Trebuchet MS" pitchFamily="34" charset="-120"/>
               </a:rPr>
-              <a:t>tive</a:t>
+              <a:t>tance</a:t>
             </a:r>
             <a:endParaRPr lang="en-US" sz="1400" dirty="0"/>
           </a:p>
@@ -26780,7 +26430,7 @@
                 <a:ea typeface="Calibri" pitchFamily="34" charset="-122"/>
                 <a:cs typeface="Calibri" pitchFamily="34" charset="-120"/>
               </a:rPr>
-              <a:t>Word Labs  •  wordlabs.app  •  Root: 'assist' = to help or support someone</a:t>
+              <a:t>Word Labs  •  wordlabs.app  •  Root: 'assist' = help</a:t>
             </a:r>
             <a:endParaRPr lang="en-US" sz="800" dirty="0"/>
           </a:p>
@@ -26919,7 +26569,7 @@
                 <a:ea typeface="Trebuchet MS" pitchFamily="34" charset="-122"/>
                 <a:cs typeface="Trebuchet MS" pitchFamily="34" charset="-120"/>
               </a:rPr>
-              <a:t>assistive</a:t>
+              <a:t>assistance</a:t>
             </a:r>
             <a:endParaRPr lang="en-US" sz="2800" dirty="0"/>
           </a:p>
@@ -27097,7 +26747,7 @@
                 <a:ea typeface="Calibri" pitchFamily="34" charset="-122"/>
                 <a:cs typeface="Calibri" pitchFamily="34" charset="-120"/>
               </a:rPr>
-              <a:t>to help or support</a:t>
+              <a:t>help</a:t>
             </a:r>
             <a:endParaRPr lang="en-US" sz="850" dirty="0"/>
           </a:p>
@@ -27170,7 +26820,7 @@
                 <a:ea typeface="Trebuchet MS" pitchFamily="34" charset="-122"/>
                 <a:cs typeface="Trebuchet MS" pitchFamily="34" charset="-120"/>
               </a:rPr>
-              <a:t>ive</a:t>
+              <a:t>ance</a:t>
             </a:r>
             <a:endParaRPr lang="en-US" sz="1300" dirty="0"/>
           </a:p>
@@ -27209,7 +26859,7 @@
                 <a:ea typeface="Calibri" pitchFamily="34" charset="-122"/>
                 <a:cs typeface="Calibri" pitchFamily="34" charset="-120"/>
               </a:rPr>
-              <a:t>having the quality of</a:t>
+              <a:t>state of</a:t>
             </a:r>
             <a:endParaRPr lang="en-US" sz="850" dirty="0"/>
           </a:p>
@@ -27578,7 +27228,7 @@
                 <a:ea typeface="Trebuchet MS" pitchFamily="34" charset="-122"/>
                 <a:cs typeface="Trebuchet MS" pitchFamily="34" charset="-120"/>
               </a:rPr>
-              <a:t>tive</a:t>
+              <a:t>tance</a:t>
             </a:r>
             <a:endParaRPr lang="en-US" sz="1400" dirty="0"/>
           </a:p>
@@ -28067,7 +27717,7 @@
                 <a:ea typeface="Trebuchet MS" pitchFamily="34" charset="-122"/>
                 <a:cs typeface="Trebuchet MS" pitchFamily="34" charset="-120"/>
               </a:rPr>
-              <a:t>i</a:t>
+              <a:t>a</a:t>
             </a:r>
             <a:endParaRPr lang="en-US" sz="900" dirty="0"/>
           </a:p>
@@ -28133,7 +27783,7 @@
                 <a:ea typeface="Trebuchet MS" pitchFamily="34" charset="-122"/>
                 <a:cs typeface="Trebuchet MS" pitchFamily="34" charset="-120"/>
               </a:rPr>
-              <a:t>v</a:t>
+              <a:t>n</a:t>
             </a:r>
             <a:endParaRPr lang="en-US" sz="900" dirty="0"/>
           </a:p>
@@ -28199,7 +27849,7 @@
                 <a:ea typeface="Trebuchet MS" pitchFamily="34" charset="-122"/>
                 <a:cs typeface="Trebuchet MS" pitchFamily="34" charset="-120"/>
               </a:rPr>
-              <a:t>e</a:t>
+              <a:t>ce</a:t>
             </a:r>
             <a:endParaRPr lang="en-US" sz="900" dirty="0"/>
           </a:p>
@@ -28491,7 +28141,7 @@
                 <a:ea typeface="Calibri" pitchFamily="34" charset="-122"/>
                 <a:cs typeface="Calibri" pitchFamily="34" charset="-120"/>
               </a:rPr>
-              <a:t>Word Labs  •  wordlabs.app  •  Root: 'assist' = to help or support someone</a:t>
+              <a:t>Word Labs  •  wordlabs.app  •  Root: 'assist' = help</a:t>
             </a:r>
             <a:endParaRPr lang="en-US" sz="800" dirty="0"/>
           </a:p>
@@ -28630,7 +28280,7 @@
                 <a:ea typeface="Trebuchet MS" pitchFamily="34" charset="-122"/>
                 <a:cs typeface="Trebuchet MS" pitchFamily="34" charset="-120"/>
               </a:rPr>
-              <a:t>assisting</a:t>
+              <a:t>assistants</a:t>
             </a:r>
             <a:endParaRPr lang="en-US" sz="2800" dirty="0"/>
           </a:p>
@@ -29318,7 +28968,7 @@
                 <a:ea typeface="Calibri" pitchFamily="34" charset="-122"/>
                 <a:cs typeface="Calibri" pitchFamily="34" charset="-120"/>
               </a:rPr>
-              <a:t>Word Labs  •  wordlabs.app  •  Root: 'assist' = to help or support someone</a:t>
+              <a:t>Word Labs  •  wordlabs.app  •  Root: 'assist' = help</a:t>
             </a:r>
             <a:endParaRPr lang="en-US" sz="800" dirty="0"/>
           </a:p>
@@ -29457,7 +29107,7 @@
                 <a:ea typeface="Trebuchet MS" pitchFamily="34" charset="-122"/>
                 <a:cs typeface="Trebuchet MS" pitchFamily="34" charset="-120"/>
               </a:rPr>
-              <a:t>assisting</a:t>
+              <a:t>assistants</a:t>
             </a:r>
             <a:endParaRPr lang="en-US" sz="2800" dirty="0"/>
           </a:p>
@@ -29537,7 +29187,7 @@
         </p:nvSpPr>
         <p:spPr>
           <a:xfrm>
-            <a:off x="2938272" y="2258568"/>
+            <a:off x="2221992" y="2258568"/>
             <a:ext cx="1828800" cy="292608"/>
           </a:xfrm>
           <a:prstGeom prst="rect">
@@ -29571,7 +29221,7 @@
         </p:nvSpPr>
         <p:spPr>
           <a:xfrm>
-            <a:off x="2938272" y="2258568"/>
+            <a:off x="2221992" y="2258568"/>
             <a:ext cx="1828800" cy="292608"/>
           </a:xfrm>
           <a:prstGeom prst="rect">
@@ -29610,7 +29260,7 @@
         </p:nvSpPr>
         <p:spPr>
           <a:xfrm>
-            <a:off x="2938272" y="2569464"/>
+            <a:off x="2221992" y="2569464"/>
             <a:ext cx="1828800" cy="201168"/>
           </a:xfrm>
           <a:prstGeom prst="rect">
@@ -29635,7 +29285,7 @@
                 <a:ea typeface="Calibri" pitchFamily="34" charset="-122"/>
                 <a:cs typeface="Calibri" pitchFamily="34" charset="-120"/>
               </a:rPr>
-              <a:t>to help or support</a:t>
+              <a:t>help</a:t>
             </a:r>
             <a:endParaRPr lang="en-US" sz="850" dirty="0"/>
           </a:p>
@@ -29649,7 +29299,7 @@
         </p:nvSpPr>
         <p:spPr>
           <a:xfrm>
-            <a:off x="5803392" y="2258568"/>
+            <a:off x="4370832" y="2258568"/>
             <a:ext cx="1828800" cy="292608"/>
           </a:xfrm>
           <a:prstGeom prst="rect">
@@ -29683,7 +29333,7 @@
         </p:nvSpPr>
         <p:spPr>
           <a:xfrm>
-            <a:off x="5803392" y="2258568"/>
+            <a:off x="4370832" y="2258568"/>
             <a:ext cx="1828800" cy="292608"/>
           </a:xfrm>
           <a:prstGeom prst="rect">
@@ -29708,7 +29358,7 @@
                 <a:ea typeface="Trebuchet MS" pitchFamily="34" charset="-122"/>
                 <a:cs typeface="Trebuchet MS" pitchFamily="34" charset="-120"/>
               </a:rPr>
-              <a:t>ing</a:t>
+              <a:t>ant</a:t>
             </a:r>
             <a:endParaRPr lang="en-US" sz="1300" dirty="0"/>
           </a:p>
@@ -29722,7 +29372,7 @@
         </p:nvSpPr>
         <p:spPr>
           <a:xfrm>
-            <a:off x="5803392" y="2569464"/>
+            <a:off x="4370832" y="2569464"/>
             <a:ext cx="1828800" cy="201168"/>
           </a:xfrm>
           <a:prstGeom prst="rect">
@@ -29747,7 +29397,7 @@
                 <a:ea typeface="Calibri" pitchFamily="34" charset="-122"/>
                 <a:cs typeface="Calibri" pitchFamily="34" charset="-120"/>
               </a:rPr>
-              <a:t>action happening now</a:t>
+              <a:t>person or thing that</a:t>
             </a:r>
             <a:endParaRPr lang="en-US" sz="850" dirty="0"/>
           </a:p>
@@ -29756,6 +29406,118 @@
       <p:sp>
         <p:nvSpPr>
           <p:cNvPr id="22" name="Shape 20"/>
+          <p:cNvSpPr/>
+          <p:nvPr/>
+        </p:nvSpPr>
+        <p:spPr>
+          <a:xfrm>
+            <a:off x="6519672" y="2258568"/>
+            <a:ext cx="1828800" cy="292608"/>
+          </a:xfrm>
+          <a:prstGeom prst="rect">
+            <a:avLst>
+              <a:gd name="adj" fmla="val 25000"/>
+            </a:avLst>
+          </a:prstGeom>
+          <a:solidFill>
+            <a:srgbClr val="FCE7F3"/>
+          </a:solidFill>
+          <a:ln w="19050">
+            <a:solidFill>
+              <a:srgbClr val="DB2777"/>
+            </a:solidFill>
+            <a:prstDash val="solid"/>
+          </a:ln>
+          <a:effectLst>
+            <a:outerShdw sx="100000" sy="100000" kx="0" ky="0" algn="bl" rotWithShape="0" blurRad="101600" dist="38100" dir="8100000">
+              <a:srgbClr val="000000">
+                <a:alpha val="12000"/>
+              </a:srgbClr>
+            </a:outerShdw>
+          </a:effectLst>
+        </p:spPr>
+      </p:sp>
+      <p:sp>
+        <p:nvSpPr>
+          <p:cNvPr id="23" name="Text 21"/>
+          <p:cNvSpPr/>
+          <p:nvPr/>
+        </p:nvSpPr>
+        <p:spPr>
+          <a:xfrm>
+            <a:off x="6519672" y="2258568"/>
+            <a:ext cx="1828800" cy="292608"/>
+          </a:xfrm>
+          <a:prstGeom prst="rect">
+            <a:avLst/>
+          </a:prstGeom>
+          <a:noFill/>
+          <a:ln/>
+        </p:spPr>
+        <p:txBody>
+          <a:bodyPr wrap="square" lIns="0" tIns="0" rIns="0" bIns="0" rtlCol="0" anchor="ctr"/>
+          <a:lstStyle/>
+          <a:p>
+            <a:pPr algn="ctr" indent="0" marL="0">
+              <a:buNone/>
+            </a:pPr>
+            <a:r>
+              <a:rPr lang="en-US" sz="1300" b="1" dirty="0">
+                <a:solidFill>
+                  <a:srgbClr val="9D174D"/>
+                </a:solidFill>
+                <a:latin typeface="Trebuchet MS" pitchFamily="34" charset="0"/>
+                <a:ea typeface="Trebuchet MS" pitchFamily="34" charset="-122"/>
+                <a:cs typeface="Trebuchet MS" pitchFamily="34" charset="-120"/>
+              </a:rPr>
+              <a:t>s</a:t>
+            </a:r>
+            <a:endParaRPr lang="en-US" sz="1300" dirty="0"/>
+          </a:p>
+        </p:txBody>
+      </p:sp>
+      <p:sp>
+        <p:nvSpPr>
+          <p:cNvPr id="24" name="Text 22"/>
+          <p:cNvSpPr/>
+          <p:nvPr/>
+        </p:nvSpPr>
+        <p:spPr>
+          <a:xfrm>
+            <a:off x="6519672" y="2569464"/>
+            <a:ext cx="1828800" cy="201168"/>
+          </a:xfrm>
+          <a:prstGeom prst="rect">
+            <a:avLst/>
+          </a:prstGeom>
+          <a:noFill/>
+          <a:ln/>
+        </p:spPr>
+        <p:txBody>
+          <a:bodyPr wrap="square" lIns="0" tIns="0" rIns="0" bIns="0" rtlCol="0" anchor="t"/>
+          <a:lstStyle/>
+          <a:p>
+            <a:pPr algn="ctr" indent="0" marL="0">
+              <a:buNone/>
+            </a:pPr>
+            <a:r>
+              <a:rPr lang="en-US" sz="850" dirty="0">
+                <a:solidFill>
+                  <a:srgbClr val="475569"/>
+                </a:solidFill>
+                <a:latin typeface="Calibri" pitchFamily="34" charset="0"/>
+                <a:ea typeface="Calibri" pitchFamily="34" charset="-122"/>
+                <a:cs typeface="Calibri" pitchFamily="34" charset="-120"/>
+              </a:rPr>
+              <a:t>plural or present tense</a:t>
+            </a:r>
+            <a:endParaRPr lang="en-US" sz="850" dirty="0"/>
+          </a:p>
+        </p:txBody>
+      </p:sp>
+      <p:sp>
+        <p:nvSpPr>
+          <p:cNvPr id="25" name="Shape 23"/>
           <p:cNvSpPr/>
           <p:nvPr/>
         </p:nvSpPr>
@@ -29782,7 +29544,7 @@
       </p:sp>
       <p:sp>
         <p:nvSpPr>
-          <p:cNvPr id="23" name="Text 21"/>
+          <p:cNvPr id="26" name="Text 24"/>
           <p:cNvSpPr/>
           <p:nvPr/>
         </p:nvSpPr>
@@ -29821,7 +29583,7 @@
       </p:sp>
       <p:sp>
         <p:nvSpPr>
-          <p:cNvPr id="24" name="Shape 22"/>
+          <p:cNvPr id="27" name="Shape 25"/>
           <p:cNvSpPr/>
           <p:nvPr/>
         </p:nvSpPr>
@@ -29848,7 +29610,7 @@
       </p:sp>
       <p:sp>
         <p:nvSpPr>
-          <p:cNvPr id="25" name="Text 23"/>
+          <p:cNvPr id="28" name="Text 26"/>
           <p:cNvSpPr/>
           <p:nvPr/>
         </p:nvSpPr>
@@ -29887,7 +29649,7 @@
       </p:sp>
       <p:sp>
         <p:nvSpPr>
-          <p:cNvPr id="26" name="Shape 24"/>
+          <p:cNvPr id="29" name="Shape 27"/>
           <p:cNvSpPr/>
           <p:nvPr/>
         </p:nvSpPr>
@@ -29914,7 +29676,7 @@
       </p:sp>
       <p:sp>
         <p:nvSpPr>
-          <p:cNvPr id="27" name="Text 25"/>
+          <p:cNvPr id="30" name="Text 28"/>
           <p:cNvSpPr/>
           <p:nvPr/>
         </p:nvSpPr>
@@ -29953,7 +29715,7 @@
       </p:sp>
       <p:sp>
         <p:nvSpPr>
-          <p:cNvPr id="28" name="Shape 26"/>
+          <p:cNvPr id="31" name="Shape 29"/>
           <p:cNvSpPr/>
           <p:nvPr/>
         </p:nvSpPr>
@@ -29980,7 +29742,7 @@
       </p:sp>
       <p:sp>
         <p:nvSpPr>
-          <p:cNvPr id="29" name="Text 27"/>
+          <p:cNvPr id="32" name="Text 30"/>
           <p:cNvSpPr/>
           <p:nvPr/>
         </p:nvSpPr>
@@ -30303,7 +30065,7 @@
                 <a:ea typeface="Calibri" pitchFamily="34" charset="-122"/>
                 <a:cs typeface="Calibri" pitchFamily="34" charset="-120"/>
               </a:rPr>
-              <a:t>Word Labs  •  wordlabs.app  •  Root: 'assist' = to help or support someone</a:t>
+              <a:t>Word Labs  •  wordlabs.app  •  Root: 'assist' = help</a:t>
             </a:r>
             <a:endParaRPr lang="en-US" sz="800" dirty="0"/>
           </a:p>
@@ -30442,7 +30204,7 @@
                 <a:ea typeface="Trebuchet MS" pitchFamily="34" charset="-122"/>
                 <a:cs typeface="Trebuchet MS" pitchFamily="34" charset="-120"/>
               </a:rPr>
-              <a:t>assisting</a:t>
+              <a:t>assistants</a:t>
             </a:r>
             <a:endParaRPr lang="en-US" sz="2800" dirty="0"/>
           </a:p>
@@ -30522,7 +30284,7 @@
         </p:nvSpPr>
         <p:spPr>
           <a:xfrm>
-            <a:off x="2938272" y="2258568"/>
+            <a:off x="2221992" y="2258568"/>
             <a:ext cx="1828800" cy="292608"/>
           </a:xfrm>
           <a:prstGeom prst="rect">
@@ -30556,7 +30318,7 @@
         </p:nvSpPr>
         <p:spPr>
           <a:xfrm>
-            <a:off x="2938272" y="2258568"/>
+            <a:off x="2221992" y="2258568"/>
             <a:ext cx="1828800" cy="292608"/>
           </a:xfrm>
           <a:prstGeom prst="rect">
@@ -30595,7 +30357,7 @@
         </p:nvSpPr>
         <p:spPr>
           <a:xfrm>
-            <a:off x="2938272" y="2569464"/>
+            <a:off x="2221992" y="2569464"/>
             <a:ext cx="1828800" cy="201168"/>
           </a:xfrm>
           <a:prstGeom prst="rect">
@@ -30620,7 +30382,7 @@
                 <a:ea typeface="Calibri" pitchFamily="34" charset="-122"/>
                 <a:cs typeface="Calibri" pitchFamily="34" charset="-120"/>
               </a:rPr>
-              <a:t>to help or support</a:t>
+              <a:t>help</a:t>
             </a:r>
             <a:endParaRPr lang="en-US" sz="850" dirty="0"/>
           </a:p>
@@ -30634,7 +30396,7 @@
         </p:nvSpPr>
         <p:spPr>
           <a:xfrm>
-            <a:off x="5803392" y="2258568"/>
+            <a:off x="4370832" y="2258568"/>
             <a:ext cx="1828800" cy="292608"/>
           </a:xfrm>
           <a:prstGeom prst="rect">
@@ -30668,7 +30430,7 @@
         </p:nvSpPr>
         <p:spPr>
           <a:xfrm>
-            <a:off x="5803392" y="2258568"/>
+            <a:off x="4370832" y="2258568"/>
             <a:ext cx="1828800" cy="292608"/>
           </a:xfrm>
           <a:prstGeom prst="rect">
@@ -30693,7 +30455,7 @@
                 <a:ea typeface="Trebuchet MS" pitchFamily="34" charset="-122"/>
                 <a:cs typeface="Trebuchet MS" pitchFamily="34" charset="-120"/>
               </a:rPr>
-              <a:t>ing</a:t>
+              <a:t>ant</a:t>
             </a:r>
             <a:endParaRPr lang="en-US" sz="1300" dirty="0"/>
           </a:p>
@@ -30707,7 +30469,7 @@
         </p:nvSpPr>
         <p:spPr>
           <a:xfrm>
-            <a:off x="5803392" y="2569464"/>
+            <a:off x="4370832" y="2569464"/>
             <a:ext cx="1828800" cy="201168"/>
           </a:xfrm>
           <a:prstGeom prst="rect">
@@ -30732,7 +30494,7 @@
                 <a:ea typeface="Calibri" pitchFamily="34" charset="-122"/>
                 <a:cs typeface="Calibri" pitchFamily="34" charset="-120"/>
               </a:rPr>
-              <a:t>action happening now</a:t>
+              <a:t>person or thing that</a:t>
             </a:r>
             <a:endParaRPr lang="en-US" sz="850" dirty="0"/>
           </a:p>
@@ -30741,6 +30503,118 @@
       <p:sp>
         <p:nvSpPr>
           <p:cNvPr id="22" name="Shape 20"/>
+          <p:cNvSpPr/>
+          <p:nvPr/>
+        </p:nvSpPr>
+        <p:spPr>
+          <a:xfrm>
+            <a:off x="6519672" y="2258568"/>
+            <a:ext cx="1828800" cy="292608"/>
+          </a:xfrm>
+          <a:prstGeom prst="rect">
+            <a:avLst>
+              <a:gd name="adj" fmla="val 25000"/>
+            </a:avLst>
+          </a:prstGeom>
+          <a:solidFill>
+            <a:srgbClr val="FCE7F3"/>
+          </a:solidFill>
+          <a:ln w="19050">
+            <a:solidFill>
+              <a:srgbClr val="DB2777"/>
+            </a:solidFill>
+            <a:prstDash val="solid"/>
+          </a:ln>
+          <a:effectLst>
+            <a:outerShdw sx="100000" sy="100000" kx="0" ky="0" algn="bl" rotWithShape="0" blurRad="101600" dist="38100" dir="8100000">
+              <a:srgbClr val="000000">
+                <a:alpha val="12000"/>
+              </a:srgbClr>
+            </a:outerShdw>
+          </a:effectLst>
+        </p:spPr>
+      </p:sp>
+      <p:sp>
+        <p:nvSpPr>
+          <p:cNvPr id="23" name="Text 21"/>
+          <p:cNvSpPr/>
+          <p:nvPr/>
+        </p:nvSpPr>
+        <p:spPr>
+          <a:xfrm>
+            <a:off x="6519672" y="2258568"/>
+            <a:ext cx="1828800" cy="292608"/>
+          </a:xfrm>
+          <a:prstGeom prst="rect">
+            <a:avLst/>
+          </a:prstGeom>
+          <a:noFill/>
+          <a:ln/>
+        </p:spPr>
+        <p:txBody>
+          <a:bodyPr wrap="square" lIns="0" tIns="0" rIns="0" bIns="0" rtlCol="0" anchor="ctr"/>
+          <a:lstStyle/>
+          <a:p>
+            <a:pPr algn="ctr" indent="0" marL="0">
+              <a:buNone/>
+            </a:pPr>
+            <a:r>
+              <a:rPr lang="en-US" sz="1300" b="1" dirty="0">
+                <a:solidFill>
+                  <a:srgbClr val="9D174D"/>
+                </a:solidFill>
+                <a:latin typeface="Trebuchet MS" pitchFamily="34" charset="0"/>
+                <a:ea typeface="Trebuchet MS" pitchFamily="34" charset="-122"/>
+                <a:cs typeface="Trebuchet MS" pitchFamily="34" charset="-120"/>
+              </a:rPr>
+              <a:t>s</a:t>
+            </a:r>
+            <a:endParaRPr lang="en-US" sz="1300" dirty="0"/>
+          </a:p>
+        </p:txBody>
+      </p:sp>
+      <p:sp>
+        <p:nvSpPr>
+          <p:cNvPr id="24" name="Text 22"/>
+          <p:cNvSpPr/>
+          <p:nvPr/>
+        </p:nvSpPr>
+        <p:spPr>
+          <a:xfrm>
+            <a:off x="6519672" y="2569464"/>
+            <a:ext cx="1828800" cy="201168"/>
+          </a:xfrm>
+          <a:prstGeom prst="rect">
+            <a:avLst/>
+          </a:prstGeom>
+          <a:noFill/>
+          <a:ln/>
+        </p:spPr>
+        <p:txBody>
+          <a:bodyPr wrap="square" lIns="0" tIns="0" rIns="0" bIns="0" rtlCol="0" anchor="t"/>
+          <a:lstStyle/>
+          <a:p>
+            <a:pPr algn="ctr" indent="0" marL="0">
+              <a:buNone/>
+            </a:pPr>
+            <a:r>
+              <a:rPr lang="en-US" sz="850" dirty="0">
+                <a:solidFill>
+                  <a:srgbClr val="475569"/>
+                </a:solidFill>
+                <a:latin typeface="Calibri" pitchFamily="34" charset="0"/>
+                <a:ea typeface="Calibri" pitchFamily="34" charset="-122"/>
+                <a:cs typeface="Calibri" pitchFamily="34" charset="-120"/>
+              </a:rPr>
+              <a:t>plural or present tense</a:t>
+            </a:r>
+            <a:endParaRPr lang="en-US" sz="850" dirty="0"/>
+          </a:p>
+        </p:txBody>
+      </p:sp>
+      <p:sp>
+        <p:nvSpPr>
+          <p:cNvPr id="25" name="Shape 23"/>
           <p:cNvSpPr/>
           <p:nvPr/>
         </p:nvSpPr>
@@ -30767,7 +30641,7 @@
       </p:sp>
       <p:sp>
         <p:nvSpPr>
-          <p:cNvPr id="23" name="Text 21"/>
+          <p:cNvPr id="26" name="Text 24"/>
           <p:cNvSpPr/>
           <p:nvPr/>
         </p:nvSpPr>
@@ -30806,7 +30680,7 @@
       </p:sp>
       <p:sp>
         <p:nvSpPr>
-          <p:cNvPr id="24" name="Shape 22"/>
+          <p:cNvPr id="27" name="Shape 25"/>
           <p:cNvSpPr/>
           <p:nvPr/>
         </p:nvSpPr>
@@ -30833,7 +30707,7 @@
       </p:sp>
       <p:sp>
         <p:nvSpPr>
-          <p:cNvPr id="25" name="Shape 23"/>
+          <p:cNvPr id="28" name="Shape 26"/>
           <p:cNvSpPr/>
           <p:nvPr/>
         </p:nvSpPr>
@@ -30860,7 +30734,7 @@
       </p:sp>
       <p:sp>
         <p:nvSpPr>
-          <p:cNvPr id="26" name="Text 24"/>
+          <p:cNvPr id="29" name="Text 27"/>
           <p:cNvSpPr/>
           <p:nvPr/>
         </p:nvSpPr>
@@ -30899,7 +30773,7 @@
       </p:sp>
       <p:sp>
         <p:nvSpPr>
-          <p:cNvPr id="27" name="Text 25"/>
+          <p:cNvPr id="30" name="Text 28"/>
           <p:cNvSpPr/>
           <p:nvPr/>
         </p:nvSpPr>
@@ -30938,7 +30812,7 @@
       </p:sp>
       <p:sp>
         <p:nvSpPr>
-          <p:cNvPr id="28" name="Shape 26"/>
+          <p:cNvPr id="31" name="Shape 29"/>
           <p:cNvSpPr/>
           <p:nvPr/>
         </p:nvSpPr>
@@ -30965,7 +30839,7 @@
       </p:sp>
       <p:sp>
         <p:nvSpPr>
-          <p:cNvPr id="29" name="Text 27"/>
+          <p:cNvPr id="32" name="Text 30"/>
           <p:cNvSpPr/>
           <p:nvPr/>
         </p:nvSpPr>
@@ -31004,7 +30878,7 @@
       </p:sp>
       <p:sp>
         <p:nvSpPr>
-          <p:cNvPr id="30" name="Text 28"/>
+          <p:cNvPr id="33" name="Text 31"/>
           <p:cNvSpPr/>
           <p:nvPr/>
         </p:nvSpPr>
@@ -31043,7 +30917,7 @@
       </p:sp>
       <p:sp>
         <p:nvSpPr>
-          <p:cNvPr id="31" name="Shape 29"/>
+          <p:cNvPr id="34" name="Shape 32"/>
           <p:cNvSpPr/>
           <p:nvPr/>
         </p:nvSpPr>
@@ -31070,7 +30944,7 @@
       </p:sp>
       <p:sp>
         <p:nvSpPr>
-          <p:cNvPr id="32" name="Text 30"/>
+          <p:cNvPr id="35" name="Text 33"/>
           <p:cNvSpPr/>
           <p:nvPr/>
         </p:nvSpPr>
@@ -31101,7 +30975,7 @@
                 <a:ea typeface="Trebuchet MS" pitchFamily="34" charset="-122"/>
                 <a:cs typeface="Trebuchet MS" pitchFamily="34" charset="-120"/>
               </a:rPr>
-              <a:t>ting</a:t>
+              <a:t>tants</a:t>
             </a:r>
             <a:endParaRPr lang="en-US" sz="1400" dirty="0"/>
           </a:p>
@@ -31109,7 +30983,7 @@
       </p:sp>
       <p:sp>
         <p:nvSpPr>
-          <p:cNvPr id="33" name="Shape 31"/>
+          <p:cNvPr id="36" name="Shape 34"/>
           <p:cNvSpPr/>
           <p:nvPr/>
         </p:nvSpPr>
@@ -31136,7 +31010,7 @@
       </p:sp>
       <p:sp>
         <p:nvSpPr>
-          <p:cNvPr id="34" name="Text 32"/>
+          <p:cNvPr id="37" name="Text 35"/>
           <p:cNvSpPr/>
           <p:nvPr/>
         </p:nvSpPr>
@@ -31175,7 +31049,7 @@
       </p:sp>
       <p:sp>
         <p:nvSpPr>
-          <p:cNvPr id="35" name="Shape 33"/>
+          <p:cNvPr id="38" name="Shape 36"/>
           <p:cNvSpPr/>
           <p:nvPr/>
         </p:nvSpPr>
@@ -31202,7 +31076,7 @@
       </p:sp>
       <p:sp>
         <p:nvSpPr>
-          <p:cNvPr id="36" name="Text 34"/>
+          <p:cNvPr id="39" name="Text 37"/>
           <p:cNvSpPr/>
           <p:nvPr/>
         </p:nvSpPr>
@@ -31525,7 +31399,7 @@
                 <a:ea typeface="Calibri" pitchFamily="34" charset="-122"/>
                 <a:cs typeface="Calibri" pitchFamily="34" charset="-120"/>
               </a:rPr>
-              <a:t>Word Labs  •  wordlabs.app  •  Root: 'assist' = to help or support someone</a:t>
+              <a:t>Word Labs  •  wordlabs.app  •  Root: 'assist' = help</a:t>
             </a:r>
             <a:endParaRPr lang="en-US" sz="800" dirty="0"/>
           </a:p>
@@ -31664,7 +31538,7 @@
                 <a:ea typeface="Trebuchet MS" pitchFamily="34" charset="-122"/>
                 <a:cs typeface="Trebuchet MS" pitchFamily="34" charset="-120"/>
               </a:rPr>
-              <a:t>assisting</a:t>
+              <a:t>assistants</a:t>
             </a:r>
             <a:endParaRPr lang="en-US" sz="2800" dirty="0"/>
           </a:p>
@@ -31744,7 +31618,7 @@
         </p:nvSpPr>
         <p:spPr>
           <a:xfrm>
-            <a:off x="2938272" y="2258568"/>
+            <a:off x="2221992" y="2258568"/>
             <a:ext cx="1828800" cy="292608"/>
           </a:xfrm>
           <a:prstGeom prst="rect">
@@ -31778,7 +31652,7 @@
         </p:nvSpPr>
         <p:spPr>
           <a:xfrm>
-            <a:off x="2938272" y="2258568"/>
+            <a:off x="2221992" y="2258568"/>
             <a:ext cx="1828800" cy="292608"/>
           </a:xfrm>
           <a:prstGeom prst="rect">
@@ -31817,7 +31691,7 @@
         </p:nvSpPr>
         <p:spPr>
           <a:xfrm>
-            <a:off x="2938272" y="2569464"/>
+            <a:off x="2221992" y="2569464"/>
             <a:ext cx="1828800" cy="201168"/>
           </a:xfrm>
           <a:prstGeom prst="rect">
@@ -31842,7 +31716,7 @@
                 <a:ea typeface="Calibri" pitchFamily="34" charset="-122"/>
                 <a:cs typeface="Calibri" pitchFamily="34" charset="-120"/>
               </a:rPr>
-              <a:t>to help or support</a:t>
+              <a:t>help</a:t>
             </a:r>
             <a:endParaRPr lang="en-US" sz="850" dirty="0"/>
           </a:p>
@@ -31856,7 +31730,7 @@
         </p:nvSpPr>
         <p:spPr>
           <a:xfrm>
-            <a:off x="5803392" y="2258568"/>
+            <a:off x="4370832" y="2258568"/>
             <a:ext cx="1828800" cy="292608"/>
           </a:xfrm>
           <a:prstGeom prst="rect">
@@ -31890,7 +31764,7 @@
         </p:nvSpPr>
         <p:spPr>
           <a:xfrm>
-            <a:off x="5803392" y="2258568"/>
+            <a:off x="4370832" y="2258568"/>
             <a:ext cx="1828800" cy="292608"/>
           </a:xfrm>
           <a:prstGeom prst="rect">
@@ -31915,7 +31789,7 @@
                 <a:ea typeface="Trebuchet MS" pitchFamily="34" charset="-122"/>
                 <a:cs typeface="Trebuchet MS" pitchFamily="34" charset="-120"/>
               </a:rPr>
-              <a:t>ing</a:t>
+              <a:t>ant</a:t>
             </a:r>
             <a:endParaRPr lang="en-US" sz="1300" dirty="0"/>
           </a:p>
@@ -31929,7 +31803,7 @@
         </p:nvSpPr>
         <p:spPr>
           <a:xfrm>
-            <a:off x="5803392" y="2569464"/>
+            <a:off x="4370832" y="2569464"/>
             <a:ext cx="1828800" cy="201168"/>
           </a:xfrm>
           <a:prstGeom prst="rect">
@@ -31954,7 +31828,7 @@
                 <a:ea typeface="Calibri" pitchFamily="34" charset="-122"/>
                 <a:cs typeface="Calibri" pitchFamily="34" charset="-120"/>
               </a:rPr>
-              <a:t>action happening now</a:t>
+              <a:t>person or thing that</a:t>
             </a:r>
             <a:endParaRPr lang="en-US" sz="850" dirty="0"/>
           </a:p>
@@ -31963,6 +31837,118 @@
       <p:sp>
         <p:nvSpPr>
           <p:cNvPr id="22" name="Shape 20"/>
+          <p:cNvSpPr/>
+          <p:nvPr/>
+        </p:nvSpPr>
+        <p:spPr>
+          <a:xfrm>
+            <a:off x="6519672" y="2258568"/>
+            <a:ext cx="1828800" cy="292608"/>
+          </a:xfrm>
+          <a:prstGeom prst="rect">
+            <a:avLst>
+              <a:gd name="adj" fmla="val 25000"/>
+            </a:avLst>
+          </a:prstGeom>
+          <a:solidFill>
+            <a:srgbClr val="FCE7F3"/>
+          </a:solidFill>
+          <a:ln w="19050">
+            <a:solidFill>
+              <a:srgbClr val="DB2777"/>
+            </a:solidFill>
+            <a:prstDash val="solid"/>
+          </a:ln>
+          <a:effectLst>
+            <a:outerShdw sx="100000" sy="100000" kx="0" ky="0" algn="bl" rotWithShape="0" blurRad="101600" dist="38100" dir="8100000">
+              <a:srgbClr val="000000">
+                <a:alpha val="12000"/>
+              </a:srgbClr>
+            </a:outerShdw>
+          </a:effectLst>
+        </p:spPr>
+      </p:sp>
+      <p:sp>
+        <p:nvSpPr>
+          <p:cNvPr id="23" name="Text 21"/>
+          <p:cNvSpPr/>
+          <p:nvPr/>
+        </p:nvSpPr>
+        <p:spPr>
+          <a:xfrm>
+            <a:off x="6519672" y="2258568"/>
+            <a:ext cx="1828800" cy="292608"/>
+          </a:xfrm>
+          <a:prstGeom prst="rect">
+            <a:avLst/>
+          </a:prstGeom>
+          <a:noFill/>
+          <a:ln/>
+        </p:spPr>
+        <p:txBody>
+          <a:bodyPr wrap="square" lIns="0" tIns="0" rIns="0" bIns="0" rtlCol="0" anchor="ctr"/>
+          <a:lstStyle/>
+          <a:p>
+            <a:pPr algn="ctr" indent="0" marL="0">
+              <a:buNone/>
+            </a:pPr>
+            <a:r>
+              <a:rPr lang="en-US" sz="1300" b="1" dirty="0">
+                <a:solidFill>
+                  <a:srgbClr val="9D174D"/>
+                </a:solidFill>
+                <a:latin typeface="Trebuchet MS" pitchFamily="34" charset="0"/>
+                <a:ea typeface="Trebuchet MS" pitchFamily="34" charset="-122"/>
+                <a:cs typeface="Trebuchet MS" pitchFamily="34" charset="-120"/>
+              </a:rPr>
+              <a:t>s</a:t>
+            </a:r>
+            <a:endParaRPr lang="en-US" sz="1300" dirty="0"/>
+          </a:p>
+        </p:txBody>
+      </p:sp>
+      <p:sp>
+        <p:nvSpPr>
+          <p:cNvPr id="24" name="Text 22"/>
+          <p:cNvSpPr/>
+          <p:nvPr/>
+        </p:nvSpPr>
+        <p:spPr>
+          <a:xfrm>
+            <a:off x="6519672" y="2569464"/>
+            <a:ext cx="1828800" cy="201168"/>
+          </a:xfrm>
+          <a:prstGeom prst="rect">
+            <a:avLst/>
+          </a:prstGeom>
+          <a:noFill/>
+          <a:ln/>
+        </p:spPr>
+        <p:txBody>
+          <a:bodyPr wrap="square" lIns="0" tIns="0" rIns="0" bIns="0" rtlCol="0" anchor="t"/>
+          <a:lstStyle/>
+          <a:p>
+            <a:pPr algn="ctr" indent="0" marL="0">
+              <a:buNone/>
+            </a:pPr>
+            <a:r>
+              <a:rPr lang="en-US" sz="850" dirty="0">
+                <a:solidFill>
+                  <a:srgbClr val="475569"/>
+                </a:solidFill>
+                <a:latin typeface="Calibri" pitchFamily="34" charset="0"/>
+                <a:ea typeface="Calibri" pitchFamily="34" charset="-122"/>
+                <a:cs typeface="Calibri" pitchFamily="34" charset="-120"/>
+              </a:rPr>
+              <a:t>plural or present tense</a:t>
+            </a:r>
+            <a:endParaRPr lang="en-US" sz="850" dirty="0"/>
+          </a:p>
+        </p:txBody>
+      </p:sp>
+      <p:sp>
+        <p:nvSpPr>
+          <p:cNvPr id="25" name="Shape 23"/>
           <p:cNvSpPr/>
           <p:nvPr/>
         </p:nvSpPr>
@@ -31989,7 +31975,7 @@
       </p:sp>
       <p:sp>
         <p:nvSpPr>
-          <p:cNvPr id="23" name="Text 21"/>
+          <p:cNvPr id="26" name="Text 24"/>
           <p:cNvSpPr/>
           <p:nvPr/>
         </p:nvSpPr>
@@ -32028,7 +32014,7 @@
       </p:sp>
       <p:sp>
         <p:nvSpPr>
-          <p:cNvPr id="24" name="Shape 22"/>
+          <p:cNvPr id="27" name="Shape 25"/>
           <p:cNvSpPr/>
           <p:nvPr/>
         </p:nvSpPr>
@@ -32055,7 +32041,7 @@
       </p:sp>
       <p:sp>
         <p:nvSpPr>
-          <p:cNvPr id="25" name="Shape 23"/>
+          <p:cNvPr id="28" name="Shape 26"/>
           <p:cNvSpPr/>
           <p:nvPr/>
         </p:nvSpPr>
@@ -32082,7 +32068,7 @@
       </p:sp>
       <p:sp>
         <p:nvSpPr>
-          <p:cNvPr id="26" name="Text 24"/>
+          <p:cNvPr id="29" name="Text 27"/>
           <p:cNvSpPr/>
           <p:nvPr/>
         </p:nvSpPr>
@@ -32121,7 +32107,7 @@
       </p:sp>
       <p:sp>
         <p:nvSpPr>
-          <p:cNvPr id="27" name="Text 25"/>
+          <p:cNvPr id="30" name="Text 28"/>
           <p:cNvSpPr/>
           <p:nvPr/>
         </p:nvSpPr>
@@ -32160,7 +32146,7 @@
       </p:sp>
       <p:sp>
         <p:nvSpPr>
-          <p:cNvPr id="28" name="Shape 26"/>
+          <p:cNvPr id="31" name="Shape 29"/>
           <p:cNvSpPr/>
           <p:nvPr/>
         </p:nvSpPr>
@@ -32187,7 +32173,7 @@
       </p:sp>
       <p:sp>
         <p:nvSpPr>
-          <p:cNvPr id="29" name="Text 27"/>
+          <p:cNvPr id="32" name="Text 30"/>
           <p:cNvSpPr/>
           <p:nvPr/>
         </p:nvSpPr>
@@ -32226,7 +32212,7 @@
       </p:sp>
       <p:sp>
         <p:nvSpPr>
-          <p:cNvPr id="30" name="Text 28"/>
+          <p:cNvPr id="33" name="Text 31"/>
           <p:cNvSpPr/>
           <p:nvPr/>
         </p:nvSpPr>
@@ -32265,7 +32251,7 @@
       </p:sp>
       <p:sp>
         <p:nvSpPr>
-          <p:cNvPr id="31" name="Shape 29"/>
+          <p:cNvPr id="34" name="Shape 32"/>
           <p:cNvSpPr/>
           <p:nvPr/>
         </p:nvSpPr>
@@ -32292,7 +32278,7 @@
       </p:sp>
       <p:sp>
         <p:nvSpPr>
-          <p:cNvPr id="32" name="Text 30"/>
+          <p:cNvPr id="35" name="Text 33"/>
           <p:cNvSpPr/>
           <p:nvPr/>
         </p:nvSpPr>
@@ -32323,7 +32309,7 @@
                 <a:ea typeface="Trebuchet MS" pitchFamily="34" charset="-122"/>
                 <a:cs typeface="Trebuchet MS" pitchFamily="34" charset="-120"/>
               </a:rPr>
-              <a:t>ting</a:t>
+              <a:t>tants</a:t>
             </a:r>
             <a:endParaRPr lang="en-US" sz="1400" dirty="0"/>
           </a:p>
@@ -32331,7 +32317,7 @@
       </p:sp>
       <p:sp>
         <p:nvSpPr>
-          <p:cNvPr id="33" name="Shape 31"/>
+          <p:cNvPr id="36" name="Shape 34"/>
           <p:cNvSpPr/>
           <p:nvPr/>
         </p:nvSpPr>
@@ -32358,7 +32344,7 @@
       </p:sp>
       <p:sp>
         <p:nvSpPr>
-          <p:cNvPr id="34" name="Text 32"/>
+          <p:cNvPr id="37" name="Text 35"/>
           <p:cNvSpPr/>
           <p:nvPr/>
         </p:nvSpPr>
@@ -32397,7 +32383,7 @@
       </p:sp>
       <p:sp>
         <p:nvSpPr>
-          <p:cNvPr id="35" name="Shape 33"/>
+          <p:cNvPr id="38" name="Shape 36"/>
           <p:cNvSpPr/>
           <p:nvPr/>
         </p:nvSpPr>
@@ -32424,14 +32410,14 @@
       </p:sp>
       <p:sp>
         <p:nvSpPr>
-          <p:cNvPr id="36" name="Shape 34"/>
-          <p:cNvSpPr/>
-          <p:nvPr/>
-        </p:nvSpPr>
-        <p:spPr>
-          <a:xfrm>
-            <a:off x="2124837" y="4169664"/>
-            <a:ext cx="685800" cy="475488"/>
+          <p:cNvPr id="39" name="Shape 37"/>
+          <p:cNvSpPr/>
+          <p:nvPr/>
+        </p:nvSpPr>
+        <p:spPr>
+          <a:xfrm>
+            <a:off x="1951330" y="4169664"/>
+            <a:ext cx="676656" cy="475488"/>
           </a:xfrm>
           <a:prstGeom prst="rect">
             <a:avLst>
@@ -32451,14 +32437,14 @@
       </p:sp>
       <p:sp>
         <p:nvSpPr>
-          <p:cNvPr id="37" name="Text 35"/>
-          <p:cNvSpPr/>
-          <p:nvPr/>
-        </p:nvSpPr>
-        <p:spPr>
-          <a:xfrm>
-            <a:off x="2124837" y="4169664"/>
-            <a:ext cx="685800" cy="475488"/>
+          <p:cNvPr id="40" name="Text 38"/>
+          <p:cNvSpPr/>
+          <p:nvPr/>
+        </p:nvSpPr>
+        <p:spPr>
+          <a:xfrm>
+            <a:off x="1951330" y="4169664"/>
+            <a:ext cx="676656" cy="475488"/>
           </a:xfrm>
           <a:prstGeom prst="rect">
             <a:avLst/>
@@ -32490,14 +32476,14 @@
       </p:sp>
       <p:sp>
         <p:nvSpPr>
-          <p:cNvPr id="38" name="Shape 36"/>
-          <p:cNvSpPr/>
-          <p:nvPr/>
-        </p:nvSpPr>
-        <p:spPr>
-          <a:xfrm>
-            <a:off x="3033522" y="4169664"/>
-            <a:ext cx="685800" cy="475488"/>
+          <p:cNvPr id="41" name="Shape 39"/>
+          <p:cNvSpPr/>
+          <p:nvPr/>
+        </p:nvSpPr>
+        <p:spPr>
+          <a:xfrm>
+            <a:off x="2677363" y="4169664"/>
+            <a:ext cx="676656" cy="475488"/>
           </a:xfrm>
           <a:prstGeom prst="rect">
             <a:avLst>
@@ -32517,14 +32503,14 @@
       </p:sp>
       <p:sp>
         <p:nvSpPr>
-          <p:cNvPr id="39" name="Text 37"/>
-          <p:cNvSpPr/>
-          <p:nvPr/>
-        </p:nvSpPr>
-        <p:spPr>
-          <a:xfrm>
-            <a:off x="3033522" y="4169664"/>
-            <a:ext cx="685800" cy="475488"/>
+          <p:cNvPr id="42" name="Text 40"/>
+          <p:cNvSpPr/>
+          <p:nvPr/>
+        </p:nvSpPr>
+        <p:spPr>
+          <a:xfrm>
+            <a:off x="2677363" y="4169664"/>
+            <a:ext cx="676656" cy="475488"/>
           </a:xfrm>
           <a:prstGeom prst="rect">
             <a:avLst/>
@@ -32556,14 +32542,14 @@
       </p:sp>
       <p:sp>
         <p:nvSpPr>
-          <p:cNvPr id="40" name="Shape 38"/>
-          <p:cNvSpPr/>
-          <p:nvPr/>
-        </p:nvSpPr>
-        <p:spPr>
-          <a:xfrm>
-            <a:off x="3942207" y="4169664"/>
-            <a:ext cx="685800" cy="475488"/>
+          <p:cNvPr id="43" name="Shape 41"/>
+          <p:cNvSpPr/>
+          <p:nvPr/>
+        </p:nvSpPr>
+        <p:spPr>
+          <a:xfrm>
+            <a:off x="3403397" y="4169664"/>
+            <a:ext cx="676656" cy="475488"/>
           </a:xfrm>
           <a:prstGeom prst="rect">
             <a:avLst>
@@ -32583,14 +32569,14 @@
       </p:sp>
       <p:sp>
         <p:nvSpPr>
-          <p:cNvPr id="41" name="Text 39"/>
-          <p:cNvSpPr/>
-          <p:nvPr/>
-        </p:nvSpPr>
-        <p:spPr>
-          <a:xfrm>
-            <a:off x="3942207" y="4169664"/>
-            <a:ext cx="685800" cy="475488"/>
+          <p:cNvPr id="44" name="Text 42"/>
+          <p:cNvSpPr/>
+          <p:nvPr/>
+        </p:nvSpPr>
+        <p:spPr>
+          <a:xfrm>
+            <a:off x="3403397" y="4169664"/>
+            <a:ext cx="676656" cy="475488"/>
           </a:xfrm>
           <a:prstGeom prst="rect">
             <a:avLst/>
@@ -32622,14 +32608,14 @@
       </p:sp>
       <p:sp>
         <p:nvSpPr>
-          <p:cNvPr id="42" name="Shape 40"/>
-          <p:cNvSpPr/>
-          <p:nvPr/>
-        </p:nvSpPr>
-        <p:spPr>
-          <a:xfrm>
-            <a:off x="4850892" y="4169664"/>
-            <a:ext cx="685800" cy="475488"/>
+          <p:cNvPr id="45" name="Shape 43"/>
+          <p:cNvSpPr/>
+          <p:nvPr/>
+        </p:nvSpPr>
+        <p:spPr>
+          <a:xfrm>
+            <a:off x="4129430" y="4169664"/>
+            <a:ext cx="676656" cy="475488"/>
           </a:xfrm>
           <a:prstGeom prst="rect">
             <a:avLst>
@@ -32649,14 +32635,14 @@
       </p:sp>
       <p:sp>
         <p:nvSpPr>
-          <p:cNvPr id="43" name="Text 41"/>
-          <p:cNvSpPr/>
-          <p:nvPr/>
-        </p:nvSpPr>
-        <p:spPr>
-          <a:xfrm>
-            <a:off x="4850892" y="4169664"/>
-            <a:ext cx="685800" cy="475488"/>
+          <p:cNvPr id="46" name="Text 44"/>
+          <p:cNvSpPr/>
+          <p:nvPr/>
+        </p:nvSpPr>
+        <p:spPr>
+          <a:xfrm>
+            <a:off x="4129430" y="4169664"/>
+            <a:ext cx="676656" cy="475488"/>
           </a:xfrm>
           <a:prstGeom prst="rect">
             <a:avLst/>
@@ -32688,14 +32674,14 @@
       </p:sp>
       <p:sp>
         <p:nvSpPr>
-          <p:cNvPr id="44" name="Shape 42"/>
-          <p:cNvSpPr/>
-          <p:nvPr/>
-        </p:nvSpPr>
-        <p:spPr>
-          <a:xfrm>
-            <a:off x="5759577" y="4169664"/>
-            <a:ext cx="685800" cy="475488"/>
+          <p:cNvPr id="47" name="Shape 45"/>
+          <p:cNvSpPr/>
+          <p:nvPr/>
+        </p:nvSpPr>
+        <p:spPr>
+          <a:xfrm>
+            <a:off x="4855464" y="4169664"/>
+            <a:ext cx="676656" cy="475488"/>
           </a:xfrm>
           <a:prstGeom prst="rect">
             <a:avLst>
@@ -32715,14 +32701,14 @@
       </p:sp>
       <p:sp>
         <p:nvSpPr>
-          <p:cNvPr id="45" name="Text 43"/>
-          <p:cNvSpPr/>
-          <p:nvPr/>
-        </p:nvSpPr>
-        <p:spPr>
-          <a:xfrm>
-            <a:off x="5759577" y="4169664"/>
-            <a:ext cx="685800" cy="475488"/>
+          <p:cNvPr id="48" name="Text 46"/>
+          <p:cNvSpPr/>
+          <p:nvPr/>
+        </p:nvSpPr>
+        <p:spPr>
+          <a:xfrm>
+            <a:off x="4855464" y="4169664"/>
+            <a:ext cx="676656" cy="475488"/>
           </a:xfrm>
           <a:prstGeom prst="rect">
             <a:avLst/>
@@ -32754,14 +32740,14 @@
       </p:sp>
       <p:sp>
         <p:nvSpPr>
-          <p:cNvPr id="46" name="Shape 44"/>
-          <p:cNvSpPr/>
-          <p:nvPr/>
-        </p:nvSpPr>
-        <p:spPr>
-          <a:xfrm>
-            <a:off x="6668262" y="4169664"/>
-            <a:ext cx="685800" cy="475488"/>
+          <p:cNvPr id="49" name="Shape 47"/>
+          <p:cNvSpPr/>
+          <p:nvPr/>
+        </p:nvSpPr>
+        <p:spPr>
+          <a:xfrm>
+            <a:off x="5581498" y="4169664"/>
+            <a:ext cx="676656" cy="475488"/>
           </a:xfrm>
           <a:prstGeom prst="rect">
             <a:avLst>
@@ -32781,14 +32767,14 @@
       </p:sp>
       <p:sp>
         <p:nvSpPr>
-          <p:cNvPr id="47" name="Text 45"/>
-          <p:cNvSpPr/>
-          <p:nvPr/>
-        </p:nvSpPr>
-        <p:spPr>
-          <a:xfrm>
-            <a:off x="6668262" y="4169664"/>
-            <a:ext cx="685800" cy="475488"/>
+          <p:cNvPr id="50" name="Text 48"/>
+          <p:cNvSpPr/>
+          <p:nvPr/>
+        </p:nvSpPr>
+        <p:spPr>
+          <a:xfrm>
+            <a:off x="5581498" y="4169664"/>
+            <a:ext cx="676656" cy="475488"/>
           </a:xfrm>
           <a:prstGeom prst="rect">
             <a:avLst/>
@@ -32812,7 +32798,7 @@
                 <a:ea typeface="Trebuchet MS" pitchFamily="34" charset="-122"/>
                 <a:cs typeface="Trebuchet MS" pitchFamily="34" charset="-120"/>
               </a:rPr>
-              <a:t>i</a:t>
+              <a:t>a</a:t>
             </a:r>
             <a:endParaRPr lang="en-US" sz="900" dirty="0"/>
           </a:p>
@@ -32820,14 +32806,14 @@
       </p:sp>
       <p:sp>
         <p:nvSpPr>
-          <p:cNvPr id="48" name="Shape 46"/>
-          <p:cNvSpPr/>
-          <p:nvPr/>
-        </p:nvSpPr>
-        <p:spPr>
-          <a:xfrm>
-            <a:off x="7576947" y="4169664"/>
-            <a:ext cx="685800" cy="475488"/>
+          <p:cNvPr id="51" name="Shape 49"/>
+          <p:cNvSpPr/>
+          <p:nvPr/>
+        </p:nvSpPr>
+        <p:spPr>
+          <a:xfrm>
+            <a:off x="6307531" y="4169664"/>
+            <a:ext cx="676656" cy="475488"/>
           </a:xfrm>
           <a:prstGeom prst="rect">
             <a:avLst>
@@ -32847,14 +32833,14 @@
       </p:sp>
       <p:sp>
         <p:nvSpPr>
-          <p:cNvPr id="49" name="Text 47"/>
-          <p:cNvSpPr/>
-          <p:nvPr/>
-        </p:nvSpPr>
-        <p:spPr>
-          <a:xfrm>
-            <a:off x="7576947" y="4169664"/>
-            <a:ext cx="685800" cy="475488"/>
+          <p:cNvPr id="52" name="Text 50"/>
+          <p:cNvSpPr/>
+          <p:nvPr/>
+        </p:nvSpPr>
+        <p:spPr>
+          <a:xfrm>
+            <a:off x="6307531" y="4169664"/>
+            <a:ext cx="676656" cy="475488"/>
           </a:xfrm>
           <a:prstGeom prst="rect">
             <a:avLst/>
@@ -32878,7 +32864,139 @@
                 <a:ea typeface="Trebuchet MS" pitchFamily="34" charset="-122"/>
                 <a:cs typeface="Trebuchet MS" pitchFamily="34" charset="-120"/>
               </a:rPr>
-              <a:t>ng</a:t>
+              <a:t>n</a:t>
+            </a:r>
+            <a:endParaRPr lang="en-US" sz="900" dirty="0"/>
+          </a:p>
+        </p:txBody>
+      </p:sp>
+      <p:sp>
+        <p:nvSpPr>
+          <p:cNvPr id="53" name="Shape 51"/>
+          <p:cNvSpPr/>
+          <p:nvPr/>
+        </p:nvSpPr>
+        <p:spPr>
+          <a:xfrm>
+            <a:off x="7033565" y="4169664"/>
+            <a:ext cx="676656" cy="475488"/>
+          </a:xfrm>
+          <a:prstGeom prst="rect">
+            <a:avLst>
+              <a:gd name="adj" fmla="val 7692"/>
+            </a:avLst>
+          </a:prstGeom>
+          <a:solidFill>
+            <a:srgbClr val="FFFFFF"/>
+          </a:solidFill>
+          <a:ln w="12700">
+            <a:solidFill>
+              <a:srgbClr val="DB2777"/>
+            </a:solidFill>
+            <a:prstDash val="solid"/>
+          </a:ln>
+        </p:spPr>
+      </p:sp>
+      <p:sp>
+        <p:nvSpPr>
+          <p:cNvPr id="54" name="Text 52"/>
+          <p:cNvSpPr/>
+          <p:nvPr/>
+        </p:nvSpPr>
+        <p:spPr>
+          <a:xfrm>
+            <a:off x="7033565" y="4169664"/>
+            <a:ext cx="676656" cy="475488"/>
+          </a:xfrm>
+          <a:prstGeom prst="rect">
+            <a:avLst/>
+          </a:prstGeom>
+          <a:noFill/>
+          <a:ln/>
+        </p:spPr>
+        <p:txBody>
+          <a:bodyPr wrap="square" lIns="0" tIns="0" rIns="0" bIns="0" rtlCol="0" anchor="ctr"/>
+          <a:lstStyle/>
+          <a:p>
+            <a:pPr algn="ctr" indent="0" marL="0">
+              <a:buNone/>
+            </a:pPr>
+            <a:r>
+              <a:rPr lang="en-US" sz="900" b="1" dirty="0">
+                <a:solidFill>
+                  <a:srgbClr val="9D174D"/>
+                </a:solidFill>
+                <a:latin typeface="Trebuchet MS" pitchFamily="34" charset="0"/>
+                <a:ea typeface="Trebuchet MS" pitchFamily="34" charset="-122"/>
+                <a:cs typeface="Trebuchet MS" pitchFamily="34" charset="-120"/>
+              </a:rPr>
+              <a:t>t</a:t>
+            </a:r>
+            <a:endParaRPr lang="en-US" sz="900" dirty="0"/>
+          </a:p>
+        </p:txBody>
+      </p:sp>
+      <p:sp>
+        <p:nvSpPr>
+          <p:cNvPr id="55" name="Shape 53"/>
+          <p:cNvSpPr/>
+          <p:nvPr/>
+        </p:nvSpPr>
+        <p:spPr>
+          <a:xfrm>
+            <a:off x="7759598" y="4169664"/>
+            <a:ext cx="676656" cy="475488"/>
+          </a:xfrm>
+          <a:prstGeom prst="rect">
+            <a:avLst>
+              <a:gd name="adj" fmla="val 7692"/>
+            </a:avLst>
+          </a:prstGeom>
+          <a:solidFill>
+            <a:srgbClr val="FFFFFF"/>
+          </a:solidFill>
+          <a:ln w="12700">
+            <a:solidFill>
+              <a:srgbClr val="DB2777"/>
+            </a:solidFill>
+            <a:prstDash val="solid"/>
+          </a:ln>
+        </p:spPr>
+      </p:sp>
+      <p:sp>
+        <p:nvSpPr>
+          <p:cNvPr id="56" name="Text 54"/>
+          <p:cNvSpPr/>
+          <p:nvPr/>
+        </p:nvSpPr>
+        <p:spPr>
+          <a:xfrm>
+            <a:off x="7759598" y="4169664"/>
+            <a:ext cx="676656" cy="475488"/>
+          </a:xfrm>
+          <a:prstGeom prst="rect">
+            <a:avLst/>
+          </a:prstGeom>
+          <a:noFill/>
+          <a:ln/>
+        </p:spPr>
+        <p:txBody>
+          <a:bodyPr wrap="square" lIns="0" tIns="0" rIns="0" bIns="0" rtlCol="0" anchor="ctr"/>
+          <a:lstStyle/>
+          <a:p>
+            <a:pPr algn="ctr" indent="0" marL="0">
+              <a:buNone/>
+            </a:pPr>
+            <a:r>
+              <a:rPr lang="en-US" sz="900" b="1" dirty="0">
+                <a:solidFill>
+                  <a:srgbClr val="9D174D"/>
+                </a:solidFill>
+                <a:latin typeface="Trebuchet MS" pitchFamily="34" charset="0"/>
+                <a:ea typeface="Trebuchet MS" pitchFamily="34" charset="-122"/>
+                <a:cs typeface="Trebuchet MS" pitchFamily="34" charset="-120"/>
+              </a:rPr>
+              <a:t>s</a:t>
             </a:r>
             <a:endParaRPr lang="en-US" sz="900" dirty="0"/>
           </a:p>
@@ -33170,7 +33288,7 @@
                 <a:ea typeface="Calibri" pitchFamily="34" charset="-122"/>
                 <a:cs typeface="Calibri" pitchFamily="34" charset="-120"/>
               </a:rPr>
-              <a:t>Word Labs  •  wordlabs.app  •  Root: 'assist' = to help or support someone</a:t>
+              <a:t>Word Labs  •  wordlabs.app  •  Root: 'assist' = help</a:t>
             </a:r>
             <a:endParaRPr lang="en-US" sz="800" dirty="0"/>
           </a:p>
@@ -34339,7 +34457,7 @@
                 <a:ea typeface="Calibri" pitchFamily="34" charset="-122"/>
                 <a:cs typeface="Calibri" pitchFamily="34" charset="-120"/>
               </a:rPr>
-              <a:t>Word Labs  •  wordlabs.app  •  Root: 'assist' = to help or support someone</a:t>
+              <a:t>Word Labs  •  wordlabs.app  •  Root: 'assist' = help</a:t>
             </a:r>
             <a:endParaRPr lang="en-US" sz="800" dirty="0"/>
           </a:p>
@@ -34597,7 +34715,7 @@
             <a:avLst/>
           </a:prstGeom>
           <a:solidFill>
-            <a:srgbClr val="DDD6FE"/>
+            <a:srgbClr val="F8FAFC"/>
           </a:solidFill>
           <a:ln w="12700">
             <a:solidFill>
@@ -34609,14 +34727,39 @@
       </p:sp>
       <p:sp>
         <p:nvSpPr>
-          <p:cNvPr id="18" name="Text 16"/>
-          <p:cNvSpPr/>
-          <p:nvPr/>
-        </p:nvSpPr>
-        <p:spPr>
-          <a:xfrm>
-            <a:off x="365760" y="1563624"/>
-            <a:ext cx="2468880" cy="402336"/>
+          <p:cNvPr id="18" name="Shape 16"/>
+          <p:cNvSpPr/>
+          <p:nvPr/>
+        </p:nvSpPr>
+        <p:spPr>
+          <a:xfrm>
+            <a:off x="2971800" y="1563624"/>
+            <a:ext cx="2834640" cy="402336"/>
+          </a:xfrm>
+          <a:prstGeom prst="rect">
+            <a:avLst/>
+          </a:prstGeom>
+          <a:solidFill>
+            <a:srgbClr val="CCFBF1"/>
+          </a:solidFill>
+          <a:ln w="12700">
+            <a:solidFill>
+              <a:srgbClr val="E2E8F0"/>
+            </a:solidFill>
+            <a:prstDash val="solid"/>
+          </a:ln>
+        </p:spPr>
+      </p:sp>
+      <p:sp>
+        <p:nvSpPr>
+          <p:cNvPr id="19" name="Text 17"/>
+          <p:cNvSpPr/>
+          <p:nvPr/>
+        </p:nvSpPr>
+        <p:spPr>
+          <a:xfrm>
+            <a:off x="2971800" y="1563624"/>
+            <a:ext cx="2834640" cy="402336"/>
           </a:xfrm>
           <a:prstGeom prst="rect">
             <a:avLst/>
@@ -34634,13 +34777,13 @@
             <a:r>
               <a:rPr lang="en-US" sz="1300" b="1" dirty="0">
                 <a:solidFill>
-                  <a:srgbClr val="4C1D95"/>
+                  <a:srgbClr val="0F766E"/>
                 </a:solidFill>
                 <a:latin typeface="Trebuchet MS" pitchFamily="34" charset="0"/>
                 <a:ea typeface="Trebuchet MS" pitchFamily="34" charset="-122"/>
                 <a:cs typeface="Trebuchet MS" pitchFamily="34" charset="-120"/>
               </a:rPr>
-              <a:t>re-</a:t>
+              <a:t>assist</a:t>
             </a:r>
             <a:endParaRPr lang="en-US" sz="1300" dirty="0"/>
           </a:p>
@@ -34648,20 +34791,20 @@
       </p:sp>
       <p:sp>
         <p:nvSpPr>
-          <p:cNvPr id="19" name="Shape 17"/>
-          <p:cNvSpPr/>
-          <p:nvPr/>
-        </p:nvSpPr>
-        <p:spPr>
-          <a:xfrm>
-            <a:off x="2971800" y="1563624"/>
+          <p:cNvPr id="20" name="Shape 18"/>
+          <p:cNvSpPr/>
+          <p:nvPr/>
+        </p:nvSpPr>
+        <p:spPr>
+          <a:xfrm>
+            <a:off x="5943600" y="1563624"/>
             <a:ext cx="2834640" cy="402336"/>
           </a:xfrm>
           <a:prstGeom prst="rect">
             <a:avLst/>
           </a:prstGeom>
           <a:solidFill>
-            <a:srgbClr val="CCFBF1"/>
+            <a:srgbClr val="FCE7F3"/>
           </a:solidFill>
           <a:ln w="12700">
             <a:solidFill>
@@ -34673,13 +34816,13 @@
       </p:sp>
       <p:sp>
         <p:nvSpPr>
-          <p:cNvPr id="20" name="Text 18"/>
-          <p:cNvSpPr/>
-          <p:nvPr/>
-        </p:nvSpPr>
-        <p:spPr>
-          <a:xfrm>
-            <a:off x="2971800" y="1563624"/>
+          <p:cNvPr id="21" name="Text 19"/>
+          <p:cNvSpPr/>
+          <p:nvPr/>
+        </p:nvSpPr>
+        <p:spPr>
+          <a:xfrm>
+            <a:off x="5943600" y="1563624"/>
             <a:ext cx="2834640" cy="402336"/>
           </a:xfrm>
           <a:prstGeom prst="rect">
@@ -34698,13 +34841,13 @@
             <a:r>
               <a:rPr lang="en-US" sz="1300" b="1" dirty="0">
                 <a:solidFill>
-                  <a:srgbClr val="0F766E"/>
+                  <a:srgbClr val="9D174D"/>
                 </a:solidFill>
                 <a:latin typeface="Trebuchet MS" pitchFamily="34" charset="0"/>
                 <a:ea typeface="Trebuchet MS" pitchFamily="34" charset="-122"/>
                 <a:cs typeface="Trebuchet MS" pitchFamily="34" charset="-120"/>
               </a:rPr>
-              <a:t>assist</a:t>
+              <a:t>-ance</a:t>
             </a:r>
             <a:endParaRPr lang="en-US" sz="1300" dirty="0"/>
           </a:p>
@@ -34712,19 +34855,69 @@
       </p:sp>
       <p:sp>
         <p:nvSpPr>
-          <p:cNvPr id="21" name="Shape 19"/>
-          <p:cNvSpPr/>
-          <p:nvPr/>
-        </p:nvSpPr>
-        <p:spPr>
-          <a:xfrm>
-            <a:off x="5943600" y="1563624"/>
+          <p:cNvPr id="22" name="Shape 20"/>
+          <p:cNvSpPr/>
+          <p:nvPr/>
+        </p:nvSpPr>
+        <p:spPr>
+          <a:xfrm>
+            <a:off x="365760" y="1984248"/>
+            <a:ext cx="2468880" cy="402336"/>
+          </a:xfrm>
+          <a:prstGeom prst="rect">
+            <a:avLst/>
+          </a:prstGeom>
+          <a:solidFill>
+            <a:srgbClr val="F1F5F9"/>
+          </a:solidFill>
+          <a:ln w="12700">
+            <a:solidFill>
+              <a:srgbClr val="E2E8F0"/>
+            </a:solidFill>
+            <a:prstDash val="solid"/>
+          </a:ln>
+        </p:spPr>
+      </p:sp>
+      <p:sp>
+        <p:nvSpPr>
+          <p:cNvPr id="23" name="Shape 21"/>
+          <p:cNvSpPr/>
+          <p:nvPr/>
+        </p:nvSpPr>
+        <p:spPr>
+          <a:xfrm>
+            <a:off x="2971800" y="1984248"/>
             <a:ext cx="2834640" cy="402336"/>
           </a:xfrm>
           <a:prstGeom prst="rect">
             <a:avLst/>
           </a:prstGeom>
           <a:solidFill>
+            <a:srgbClr val="F1F5F9"/>
+          </a:solidFill>
+          <a:ln w="12700">
+            <a:solidFill>
+              <a:srgbClr val="E2E8F0"/>
+            </a:solidFill>
+            <a:prstDash val="solid"/>
+          </a:ln>
+        </p:spPr>
+      </p:sp>
+      <p:sp>
+        <p:nvSpPr>
+          <p:cNvPr id="24" name="Shape 22"/>
+          <p:cNvSpPr/>
+          <p:nvPr/>
+        </p:nvSpPr>
+        <p:spPr>
+          <a:xfrm>
+            <a:off x="5943600" y="1984248"/>
+            <a:ext cx="2834640" cy="402336"/>
+          </a:xfrm>
+          <a:prstGeom prst="rect">
+            <a:avLst/>
+          </a:prstGeom>
+          <a:solidFill>
             <a:srgbClr val="FCE7F3"/>
           </a:solidFill>
           <a:ln w="12700">
@@ -34737,13 +34930,13 @@
       </p:sp>
       <p:sp>
         <p:nvSpPr>
-          <p:cNvPr id="22" name="Text 20"/>
-          <p:cNvSpPr/>
-          <p:nvPr/>
-        </p:nvSpPr>
-        <p:spPr>
-          <a:xfrm>
-            <a:off x="5943600" y="1563624"/>
+          <p:cNvPr id="25" name="Text 23"/>
+          <p:cNvSpPr/>
+          <p:nvPr/>
+        </p:nvSpPr>
+        <p:spPr>
+          <a:xfrm>
+            <a:off x="5943600" y="1984248"/>
             <a:ext cx="2834640" cy="402336"/>
           </a:xfrm>
           <a:prstGeom prst="rect">
@@ -34768,7 +34961,7 @@
                 <a:ea typeface="Trebuchet MS" pitchFamily="34" charset="-122"/>
                 <a:cs typeface="Trebuchet MS" pitchFamily="34" charset="-120"/>
               </a:rPr>
-              <a:t>-ance</a:t>
+              <a:t>-ant</a:t>
             </a:r>
             <a:endParaRPr lang="en-US" sz="1300" dirty="0"/>
           </a:p>
@@ -34776,20 +34969,20 @@
       </p:sp>
       <p:sp>
         <p:nvSpPr>
-          <p:cNvPr id="23" name="Shape 21"/>
-          <p:cNvSpPr/>
-          <p:nvPr/>
-        </p:nvSpPr>
-        <p:spPr>
-          <a:xfrm>
-            <a:off x="365760" y="1984248"/>
+          <p:cNvPr id="26" name="Shape 24"/>
+          <p:cNvSpPr/>
+          <p:nvPr/>
+        </p:nvSpPr>
+        <p:spPr>
+          <a:xfrm>
+            <a:off x="365760" y="2404872"/>
             <a:ext cx="2468880" cy="402336"/>
           </a:xfrm>
           <a:prstGeom prst="rect">
             <a:avLst/>
           </a:prstGeom>
           <a:solidFill>
-            <a:srgbClr val="DDD6FE"/>
+            <a:srgbClr val="F8FAFC"/>
           </a:solidFill>
           <a:ln w="12700">
             <a:solidFill>
@@ -34801,14 +34994,64 @@
       </p:sp>
       <p:sp>
         <p:nvSpPr>
-          <p:cNvPr id="24" name="Text 22"/>
-          <p:cNvSpPr/>
-          <p:nvPr/>
-        </p:nvSpPr>
-        <p:spPr>
-          <a:xfrm>
-            <a:off x="365760" y="1984248"/>
-            <a:ext cx="2468880" cy="402336"/>
+          <p:cNvPr id="27" name="Shape 25"/>
+          <p:cNvSpPr/>
+          <p:nvPr/>
+        </p:nvSpPr>
+        <p:spPr>
+          <a:xfrm>
+            <a:off x="2971800" y="2404872"/>
+            <a:ext cx="2834640" cy="402336"/>
+          </a:xfrm>
+          <a:prstGeom prst="rect">
+            <a:avLst/>
+          </a:prstGeom>
+          <a:solidFill>
+            <a:srgbClr val="F8FAFC"/>
+          </a:solidFill>
+          <a:ln w="12700">
+            <a:solidFill>
+              <a:srgbClr val="E2E8F0"/>
+            </a:solidFill>
+            <a:prstDash val="solid"/>
+          </a:ln>
+        </p:spPr>
+      </p:sp>
+      <p:sp>
+        <p:nvSpPr>
+          <p:cNvPr id="28" name="Shape 26"/>
+          <p:cNvSpPr/>
+          <p:nvPr/>
+        </p:nvSpPr>
+        <p:spPr>
+          <a:xfrm>
+            <a:off x="5943600" y="2404872"/>
+            <a:ext cx="2834640" cy="402336"/>
+          </a:xfrm>
+          <a:prstGeom prst="rect">
+            <a:avLst/>
+          </a:prstGeom>
+          <a:solidFill>
+            <a:srgbClr val="FCE7F3"/>
+          </a:solidFill>
+          <a:ln w="12700">
+            <a:solidFill>
+              <a:srgbClr val="E2E8F0"/>
+            </a:solidFill>
+            <a:prstDash val="solid"/>
+          </a:ln>
+        </p:spPr>
+      </p:sp>
+      <p:sp>
+        <p:nvSpPr>
+          <p:cNvPr id="29" name="Text 27"/>
+          <p:cNvSpPr/>
+          <p:nvPr/>
+        </p:nvSpPr>
+        <p:spPr>
+          <a:xfrm>
+            <a:off x="5943600" y="2404872"/>
+            <a:ext cx="2834640" cy="402336"/>
           </a:xfrm>
           <a:prstGeom prst="rect">
             <a:avLst/>
@@ -34826,13 +35069,13 @@
             <a:r>
               <a:rPr lang="en-US" sz="1300" b="1" dirty="0">
                 <a:solidFill>
-                  <a:srgbClr val="4C1D95"/>
+                  <a:srgbClr val="9D174D"/>
                 </a:solidFill>
                 <a:latin typeface="Trebuchet MS" pitchFamily="34" charset="0"/>
                 <a:ea typeface="Trebuchet MS" pitchFamily="34" charset="-122"/>
                 <a:cs typeface="Trebuchet MS" pitchFamily="34" charset="-120"/>
               </a:rPr>
-              <a:t>co-</a:t>
+              <a:t>-ed</a:t>
             </a:r>
             <a:endParaRPr lang="en-US" sz="1300" dirty="0"/>
           </a:p>
@@ -34840,13 +35083,38 @@
       </p:sp>
       <p:sp>
         <p:nvSpPr>
-          <p:cNvPr id="25" name="Shape 23"/>
-          <p:cNvSpPr/>
-          <p:nvPr/>
-        </p:nvSpPr>
-        <p:spPr>
-          <a:xfrm>
-            <a:off x="2971800" y="1984248"/>
+          <p:cNvPr id="30" name="Shape 28"/>
+          <p:cNvSpPr/>
+          <p:nvPr/>
+        </p:nvSpPr>
+        <p:spPr>
+          <a:xfrm>
+            <a:off x="365760" y="2825496"/>
+            <a:ext cx="2468880" cy="402336"/>
+          </a:xfrm>
+          <a:prstGeom prst="rect">
+            <a:avLst/>
+          </a:prstGeom>
+          <a:solidFill>
+            <a:srgbClr val="F1F5F9"/>
+          </a:solidFill>
+          <a:ln w="12700">
+            <a:solidFill>
+              <a:srgbClr val="E2E8F0"/>
+            </a:solidFill>
+            <a:prstDash val="solid"/>
+          </a:ln>
+        </p:spPr>
+      </p:sp>
+      <p:sp>
+        <p:nvSpPr>
+          <p:cNvPr id="31" name="Shape 29"/>
+          <p:cNvSpPr/>
+          <p:nvPr/>
+        </p:nvSpPr>
+        <p:spPr>
+          <a:xfrm>
+            <a:off x="2971800" y="2825496"/>
             <a:ext cx="2834640" cy="402336"/>
           </a:xfrm>
           <a:prstGeom prst="rect">
@@ -34865,13 +35133,13 @@
       </p:sp>
       <p:sp>
         <p:nvSpPr>
-          <p:cNvPr id="26" name="Shape 24"/>
-          <p:cNvSpPr/>
-          <p:nvPr/>
-        </p:nvSpPr>
-        <p:spPr>
-          <a:xfrm>
-            <a:off x="5943600" y="1984248"/>
+          <p:cNvPr id="32" name="Shape 30"/>
+          <p:cNvSpPr/>
+          <p:nvPr/>
+        </p:nvSpPr>
+        <p:spPr>
+          <a:xfrm>
+            <a:off x="5943600" y="2825496"/>
             <a:ext cx="2834640" cy="402336"/>
           </a:xfrm>
           <a:prstGeom prst="rect">
@@ -34890,13 +35158,13 @@
       </p:sp>
       <p:sp>
         <p:nvSpPr>
-          <p:cNvPr id="27" name="Text 25"/>
-          <p:cNvSpPr/>
-          <p:nvPr/>
-        </p:nvSpPr>
-        <p:spPr>
-          <a:xfrm>
-            <a:off x="5943600" y="1984248"/>
+          <p:cNvPr id="33" name="Text 31"/>
+          <p:cNvSpPr/>
+          <p:nvPr/>
+        </p:nvSpPr>
+        <p:spPr>
+          <a:xfrm>
+            <a:off x="5943600" y="2825496"/>
             <a:ext cx="2834640" cy="402336"/>
           </a:xfrm>
           <a:prstGeom prst="rect">
@@ -34921,7 +35189,7 @@
                 <a:ea typeface="Trebuchet MS" pitchFamily="34" charset="-122"/>
                 <a:cs typeface="Trebuchet MS" pitchFamily="34" charset="-120"/>
               </a:rPr>
-              <a:t>-ant</a:t>
+              <a:t>-ing</a:t>
             </a:r>
             <a:endParaRPr lang="en-US" sz="1300" dirty="0"/>
           </a:p>
@@ -34929,20 +35197,20 @@
       </p:sp>
       <p:sp>
         <p:nvSpPr>
-          <p:cNvPr id="28" name="Shape 26"/>
-          <p:cNvSpPr/>
-          <p:nvPr/>
-        </p:nvSpPr>
-        <p:spPr>
-          <a:xfrm>
-            <a:off x="365760" y="2404872"/>
+          <p:cNvPr id="34" name="Shape 32"/>
+          <p:cNvSpPr/>
+          <p:nvPr/>
+        </p:nvSpPr>
+        <p:spPr>
+          <a:xfrm>
+            <a:off x="365760" y="3246120"/>
             <a:ext cx="2468880" cy="402336"/>
           </a:xfrm>
           <a:prstGeom prst="rect">
             <a:avLst/>
           </a:prstGeom>
           <a:solidFill>
-            <a:srgbClr val="DDD6FE"/>
+            <a:srgbClr val="F8FAFC"/>
           </a:solidFill>
           <a:ln w="12700">
             <a:solidFill>
@@ -34954,14 +35222,64 @@
       </p:sp>
       <p:sp>
         <p:nvSpPr>
-          <p:cNvPr id="29" name="Text 27"/>
-          <p:cNvSpPr/>
-          <p:nvPr/>
-        </p:nvSpPr>
-        <p:spPr>
-          <a:xfrm>
-            <a:off x="365760" y="2404872"/>
-            <a:ext cx="2468880" cy="402336"/>
+          <p:cNvPr id="35" name="Shape 33"/>
+          <p:cNvSpPr/>
+          <p:nvPr/>
+        </p:nvSpPr>
+        <p:spPr>
+          <a:xfrm>
+            <a:off x="2971800" y="3246120"/>
+            <a:ext cx="2834640" cy="402336"/>
+          </a:xfrm>
+          <a:prstGeom prst="rect">
+            <a:avLst/>
+          </a:prstGeom>
+          <a:solidFill>
+            <a:srgbClr val="F8FAFC"/>
+          </a:solidFill>
+          <a:ln w="12700">
+            <a:solidFill>
+              <a:srgbClr val="E2E8F0"/>
+            </a:solidFill>
+            <a:prstDash val="solid"/>
+          </a:ln>
+        </p:spPr>
+      </p:sp>
+      <p:sp>
+        <p:nvSpPr>
+          <p:cNvPr id="36" name="Shape 34"/>
+          <p:cNvSpPr/>
+          <p:nvPr/>
+        </p:nvSpPr>
+        <p:spPr>
+          <a:xfrm>
+            <a:off x="5943600" y="3246120"/>
+            <a:ext cx="2834640" cy="402336"/>
+          </a:xfrm>
+          <a:prstGeom prst="rect">
+            <a:avLst/>
+          </a:prstGeom>
+          <a:solidFill>
+            <a:srgbClr val="FCE7F3"/>
+          </a:solidFill>
+          <a:ln w="12700">
+            <a:solidFill>
+              <a:srgbClr val="E2E8F0"/>
+            </a:solidFill>
+            <a:prstDash val="solid"/>
+          </a:ln>
+        </p:spPr>
+      </p:sp>
+      <p:sp>
+        <p:nvSpPr>
+          <p:cNvPr id="37" name="Text 35"/>
+          <p:cNvSpPr/>
+          <p:nvPr/>
+        </p:nvSpPr>
+        <p:spPr>
+          <a:xfrm>
+            <a:off x="5943600" y="3246120"/>
+            <a:ext cx="2834640" cy="402336"/>
           </a:xfrm>
           <a:prstGeom prst="rect">
             <a:avLst/>
@@ -34979,13 +35297,13 @@
             <a:r>
               <a:rPr lang="en-US" sz="1300" b="1" dirty="0">
                 <a:solidFill>
-                  <a:srgbClr val="4C1D95"/>
+                  <a:srgbClr val="9D174D"/>
                 </a:solidFill>
                 <a:latin typeface="Trebuchet MS" pitchFamily="34" charset="0"/>
                 <a:ea typeface="Trebuchet MS" pitchFamily="34" charset="-122"/>
                 <a:cs typeface="Trebuchet MS" pitchFamily="34" charset="-120"/>
               </a:rPr>
-              <a:t>un-</a:t>
+              <a:t>-s</a:t>
             </a:r>
             <a:endParaRPr lang="en-US" sz="1300" dirty="0"/>
           </a:p>
@@ -34993,64 +35311,14 @@
       </p:sp>
       <p:sp>
         <p:nvSpPr>
-          <p:cNvPr id="30" name="Shape 28"/>
-          <p:cNvSpPr/>
-          <p:nvPr/>
-        </p:nvSpPr>
-        <p:spPr>
-          <a:xfrm>
-            <a:off x="2971800" y="2404872"/>
-            <a:ext cx="2834640" cy="402336"/>
-          </a:xfrm>
-          <a:prstGeom prst="rect">
-            <a:avLst/>
-          </a:prstGeom>
-          <a:solidFill>
-            <a:srgbClr val="F8FAFC"/>
-          </a:solidFill>
-          <a:ln w="12700">
-            <a:solidFill>
-              <a:srgbClr val="E2E8F0"/>
-            </a:solidFill>
-            <a:prstDash val="solid"/>
-          </a:ln>
-        </p:spPr>
-      </p:sp>
-      <p:sp>
-        <p:nvSpPr>
-          <p:cNvPr id="31" name="Shape 29"/>
-          <p:cNvSpPr/>
-          <p:nvPr/>
-        </p:nvSpPr>
-        <p:spPr>
-          <a:xfrm>
-            <a:off x="5943600" y="2404872"/>
-            <a:ext cx="2834640" cy="402336"/>
-          </a:xfrm>
-          <a:prstGeom prst="rect">
-            <a:avLst/>
-          </a:prstGeom>
-          <a:solidFill>
-            <a:srgbClr val="FCE7F3"/>
-          </a:solidFill>
-          <a:ln w="12700">
-            <a:solidFill>
-              <a:srgbClr val="E2E8F0"/>
-            </a:solidFill>
-            <a:prstDash val="solid"/>
-          </a:ln>
-        </p:spPr>
-      </p:sp>
-      <p:sp>
-        <p:nvSpPr>
-          <p:cNvPr id="32" name="Text 30"/>
-          <p:cNvSpPr/>
-          <p:nvPr/>
-        </p:nvSpPr>
-        <p:spPr>
-          <a:xfrm>
-            <a:off x="5943600" y="2404872"/>
-            <a:ext cx="2834640" cy="402336"/>
+          <p:cNvPr id="38" name="Text 36"/>
+          <p:cNvSpPr/>
+          <p:nvPr/>
+        </p:nvSpPr>
+        <p:spPr>
+          <a:xfrm>
+            <a:off x="365760" y="3611880"/>
+            <a:ext cx="1828800" cy="347472"/>
           </a:xfrm>
           <a:prstGeom prst="rect">
             <a:avLst/>
@@ -35062,59 +35330,61 @@
           <a:bodyPr wrap="square" lIns="0" tIns="0" rIns="0" bIns="0" rtlCol="0" anchor="ctr"/>
           <a:lstStyle/>
           <a:p>
-            <a:pPr algn="ctr" indent="0" marL="0">
-              <a:buNone/>
-            </a:pPr>
-            <a:r>
-              <a:rPr lang="en-US" sz="1300" b="1" dirty="0">
-                <a:solidFill>
-                  <a:srgbClr val="9D174D"/>
+            <a:pPr algn="l" indent="0" marL="0">
+              <a:buNone/>
+            </a:pPr>
+            <a:r>
+              <a:rPr lang="en-US" sz="1200" b="1" dirty="0">
+                <a:solidFill>
+                  <a:srgbClr val="0F172A"/>
                 </a:solidFill>
                 <a:latin typeface="Trebuchet MS" pitchFamily="34" charset="0"/>
                 <a:ea typeface="Trebuchet MS" pitchFamily="34" charset="-122"/>
                 <a:cs typeface="Trebuchet MS" pitchFamily="34" charset="-120"/>
               </a:rPr>
-              <a:t>-ed</a:t>
-            </a:r>
-            <a:endParaRPr lang="en-US" sz="1300" dirty="0"/>
-          </a:p>
-        </p:txBody>
-      </p:sp>
-      <p:sp>
-        <p:nvSpPr>
-          <p:cNvPr id="33" name="Shape 31"/>
-          <p:cNvSpPr/>
-          <p:nvPr/>
-        </p:nvSpPr>
-        <p:spPr>
-          <a:xfrm>
-            <a:off x="365760" y="2825496"/>
-            <a:ext cx="2468880" cy="402336"/>
-          </a:xfrm>
-          <a:prstGeom prst="rect">
-            <a:avLst/>
-          </a:prstGeom>
-          <a:solidFill>
-            <a:srgbClr val="DDD6FE"/>
-          </a:solidFill>
-          <a:ln w="12700">
-            <a:solidFill>
-              <a:srgbClr val="E2E8F0"/>
-            </a:solidFill>
-            <a:prstDash val="solid"/>
-          </a:ln>
-        </p:spPr>
-      </p:sp>
-      <p:sp>
-        <p:nvSpPr>
-          <p:cNvPr id="34" name="Text 32"/>
-          <p:cNvSpPr/>
-          <p:nvPr/>
-        </p:nvSpPr>
-        <p:spPr>
-          <a:xfrm>
-            <a:off x="365760" y="2825496"/>
-            <a:ext cx="2468880" cy="402336"/>
+              <a:t>Sample words:</a:t>
+            </a:r>
+            <a:endParaRPr lang="en-US" sz="1200" dirty="0"/>
+          </a:p>
+        </p:txBody>
+      </p:sp>
+      <p:sp>
+        <p:nvSpPr>
+          <p:cNvPr id="39" name="Shape 37"/>
+          <p:cNvSpPr/>
+          <p:nvPr/>
+        </p:nvSpPr>
+        <p:spPr>
+          <a:xfrm>
+            <a:off x="365760" y="4023360"/>
+            <a:ext cx="2011680" cy="402336"/>
+          </a:xfrm>
+          <a:prstGeom prst="rect">
+            <a:avLst>
+              <a:gd name="adj" fmla="val 13636"/>
+            </a:avLst>
+          </a:prstGeom>
+          <a:solidFill>
+            <a:srgbClr val="EEF2FF"/>
+          </a:solidFill>
+          <a:ln w="12700">
+            <a:solidFill>
+              <a:srgbClr val="6366F1"/>
+            </a:solidFill>
+            <a:prstDash val="solid"/>
+          </a:ln>
+        </p:spPr>
+      </p:sp>
+      <p:sp>
+        <p:nvSpPr>
+          <p:cNvPr id="40" name="Text 38"/>
+          <p:cNvSpPr/>
+          <p:nvPr/>
+        </p:nvSpPr>
+        <p:spPr>
+          <a:xfrm>
+            <a:off x="365760" y="4023360"/>
+            <a:ext cx="2011680" cy="402336"/>
           </a:xfrm>
           <a:prstGeom prst="rect">
             <a:avLst/>
@@ -35130,80 +35400,57 @@
               <a:buNone/>
             </a:pPr>
             <a:r>
-              <a:rPr lang="en-US" sz="1300" b="1" dirty="0">
-                <a:solidFill>
-                  <a:srgbClr val="4C1D95"/>
+              <a:rPr lang="en-US" sz="1200" b="1" dirty="0">
+                <a:solidFill>
+                  <a:srgbClr val="4338CA"/>
                 </a:solidFill>
                 <a:latin typeface="Trebuchet MS" pitchFamily="34" charset="0"/>
                 <a:ea typeface="Trebuchet MS" pitchFamily="34" charset="-122"/>
                 <a:cs typeface="Trebuchet MS" pitchFamily="34" charset="-120"/>
               </a:rPr>
-              <a:t>self-</a:t>
-            </a:r>
-            <a:endParaRPr lang="en-US" sz="1300" dirty="0"/>
-          </a:p>
-        </p:txBody>
-      </p:sp>
-      <p:sp>
-        <p:nvSpPr>
-          <p:cNvPr id="35" name="Shape 33"/>
-          <p:cNvSpPr/>
-          <p:nvPr/>
-        </p:nvSpPr>
-        <p:spPr>
-          <a:xfrm>
-            <a:off x="2971800" y="2825496"/>
-            <a:ext cx="2834640" cy="402336"/>
-          </a:xfrm>
-          <a:prstGeom prst="rect">
-            <a:avLst/>
-          </a:prstGeom>
-          <a:solidFill>
-            <a:srgbClr val="F1F5F9"/>
-          </a:solidFill>
-          <a:ln w="12700">
-            <a:solidFill>
-              <a:srgbClr val="E2E8F0"/>
-            </a:solidFill>
-            <a:prstDash val="solid"/>
-          </a:ln>
-        </p:spPr>
-      </p:sp>
-      <p:sp>
-        <p:nvSpPr>
-          <p:cNvPr id="36" name="Shape 34"/>
-          <p:cNvSpPr/>
-          <p:nvPr/>
-        </p:nvSpPr>
-        <p:spPr>
-          <a:xfrm>
-            <a:off x="5943600" y="2825496"/>
-            <a:ext cx="2834640" cy="402336"/>
-          </a:xfrm>
-          <a:prstGeom prst="rect">
-            <a:avLst/>
-          </a:prstGeom>
-          <a:solidFill>
-            <a:srgbClr val="FCE7F3"/>
-          </a:solidFill>
-          <a:ln w="12700">
-            <a:solidFill>
-              <a:srgbClr val="E2E8F0"/>
-            </a:solidFill>
-            <a:prstDash val="solid"/>
-          </a:ln>
-        </p:spPr>
-      </p:sp>
-      <p:sp>
-        <p:nvSpPr>
-          <p:cNvPr id="37" name="Text 35"/>
-          <p:cNvSpPr/>
-          <p:nvPr/>
-        </p:nvSpPr>
-        <p:spPr>
-          <a:xfrm>
-            <a:off x="5943600" y="2825496"/>
-            <a:ext cx="2834640" cy="402336"/>
+              <a:t>assist</a:t>
+            </a:r>
+            <a:endParaRPr lang="en-US" sz="1200" dirty="0"/>
+          </a:p>
+        </p:txBody>
+      </p:sp>
+      <p:sp>
+        <p:nvSpPr>
+          <p:cNvPr id="41" name="Shape 39"/>
+          <p:cNvSpPr/>
+          <p:nvPr/>
+        </p:nvSpPr>
+        <p:spPr>
+          <a:xfrm>
+            <a:off x="2542032" y="4023360"/>
+            <a:ext cx="2011680" cy="402336"/>
+          </a:xfrm>
+          <a:prstGeom prst="rect">
+            <a:avLst>
+              <a:gd name="adj" fmla="val 13636"/>
+            </a:avLst>
+          </a:prstGeom>
+          <a:solidFill>
+            <a:srgbClr val="EEF2FF"/>
+          </a:solidFill>
+          <a:ln w="12700">
+            <a:solidFill>
+              <a:srgbClr val="6366F1"/>
+            </a:solidFill>
+            <a:prstDash val="solid"/>
+          </a:ln>
+        </p:spPr>
+      </p:sp>
+      <p:sp>
+        <p:nvSpPr>
+          <p:cNvPr id="42" name="Text 40"/>
+          <p:cNvSpPr/>
+          <p:nvPr/>
+        </p:nvSpPr>
+        <p:spPr>
+          <a:xfrm>
+            <a:off x="2542032" y="4023360"/>
+            <a:ext cx="2011680" cy="402336"/>
           </a:xfrm>
           <a:prstGeom prst="rect">
             <a:avLst/>
@@ -35219,735 +35466,15 @@
               <a:buNone/>
             </a:pPr>
             <a:r>
-              <a:rPr lang="en-US" sz="1300" b="1" dirty="0">
-                <a:solidFill>
-                  <a:srgbClr val="9D174D"/>
+              <a:rPr lang="en-US" sz="1200" b="1" dirty="0">
+                <a:solidFill>
+                  <a:srgbClr val="4338CA"/>
                 </a:solidFill>
                 <a:latin typeface="Trebuchet MS" pitchFamily="34" charset="0"/>
                 <a:ea typeface="Trebuchet MS" pitchFamily="34" charset="-122"/>
                 <a:cs typeface="Trebuchet MS" pitchFamily="34" charset="-120"/>
               </a:rPr>
-              <a:t>-ing</a:t>
-            </a:r>
-            <a:endParaRPr lang="en-US" sz="1300" dirty="0"/>
-          </a:p>
-        </p:txBody>
-      </p:sp>
-      <p:sp>
-        <p:nvSpPr>
-          <p:cNvPr id="38" name="Shape 36"/>
-          <p:cNvSpPr/>
-          <p:nvPr/>
-        </p:nvSpPr>
-        <p:spPr>
-          <a:xfrm>
-            <a:off x="365760" y="3246120"/>
-            <a:ext cx="2468880" cy="402336"/>
-          </a:xfrm>
-          <a:prstGeom prst="rect">
-            <a:avLst/>
-          </a:prstGeom>
-          <a:solidFill>
-            <a:srgbClr val="DDD6FE"/>
-          </a:solidFill>
-          <a:ln w="12700">
-            <a:solidFill>
-              <a:srgbClr val="E2E8F0"/>
-            </a:solidFill>
-            <a:prstDash val="solid"/>
-          </a:ln>
-        </p:spPr>
-      </p:sp>
-      <p:sp>
-        <p:nvSpPr>
-          <p:cNvPr id="39" name="Text 37"/>
-          <p:cNvSpPr/>
-          <p:nvPr/>
-        </p:nvSpPr>
-        <p:spPr>
-          <a:xfrm>
-            <a:off x="365760" y="3246120"/>
-            <a:ext cx="2468880" cy="402336"/>
-          </a:xfrm>
-          <a:prstGeom prst="rect">
-            <a:avLst/>
-          </a:prstGeom>
-          <a:noFill/>
-          <a:ln/>
-        </p:spPr>
-        <p:txBody>
-          <a:bodyPr wrap="square" lIns="0" tIns="0" rIns="0" bIns="0" rtlCol="0" anchor="ctr"/>
-          <a:lstStyle/>
-          <a:p>
-            <a:pPr algn="ctr" indent="0" marL="0">
-              <a:buNone/>
-            </a:pPr>
-            <a:r>
-              <a:rPr lang="en-US" sz="1300" b="1" dirty="0">
-                <a:solidFill>
-                  <a:srgbClr val="4C1D95"/>
-                </a:solidFill>
-                <a:latin typeface="Trebuchet MS" pitchFamily="34" charset="0"/>
-                <a:ea typeface="Trebuchet MS" pitchFamily="34" charset="-122"/>
-                <a:cs typeface="Trebuchet MS" pitchFamily="34" charset="-120"/>
-              </a:rPr>
-              <a:t>non-</a:t>
-            </a:r>
-            <a:endParaRPr lang="en-US" sz="1300" dirty="0"/>
-          </a:p>
-        </p:txBody>
-      </p:sp>
-      <p:sp>
-        <p:nvSpPr>
-          <p:cNvPr id="40" name="Shape 38"/>
-          <p:cNvSpPr/>
-          <p:nvPr/>
-        </p:nvSpPr>
-        <p:spPr>
-          <a:xfrm>
-            <a:off x="2971800" y="3246120"/>
-            <a:ext cx="2834640" cy="402336"/>
-          </a:xfrm>
-          <a:prstGeom prst="rect">
-            <a:avLst/>
-          </a:prstGeom>
-          <a:solidFill>
-            <a:srgbClr val="F8FAFC"/>
-          </a:solidFill>
-          <a:ln w="12700">
-            <a:solidFill>
-              <a:srgbClr val="E2E8F0"/>
-            </a:solidFill>
-            <a:prstDash val="solid"/>
-          </a:ln>
-        </p:spPr>
-      </p:sp>
-      <p:sp>
-        <p:nvSpPr>
-          <p:cNvPr id="41" name="Shape 39"/>
-          <p:cNvSpPr/>
-          <p:nvPr/>
-        </p:nvSpPr>
-        <p:spPr>
-          <a:xfrm>
-            <a:off x="5943600" y="3246120"/>
-            <a:ext cx="2834640" cy="402336"/>
-          </a:xfrm>
-          <a:prstGeom prst="rect">
-            <a:avLst/>
-          </a:prstGeom>
-          <a:solidFill>
-            <a:srgbClr val="FCE7F3"/>
-          </a:solidFill>
-          <a:ln w="12700">
-            <a:solidFill>
-              <a:srgbClr val="E2E8F0"/>
-            </a:solidFill>
-            <a:prstDash val="solid"/>
-          </a:ln>
-        </p:spPr>
-      </p:sp>
-      <p:sp>
-        <p:nvSpPr>
-          <p:cNvPr id="42" name="Text 40"/>
-          <p:cNvSpPr/>
-          <p:nvPr/>
-        </p:nvSpPr>
-        <p:spPr>
-          <a:xfrm>
-            <a:off x="5943600" y="3246120"/>
-            <a:ext cx="2834640" cy="402336"/>
-          </a:xfrm>
-          <a:prstGeom prst="rect">
-            <a:avLst/>
-          </a:prstGeom>
-          <a:noFill/>
-          <a:ln/>
-        </p:spPr>
-        <p:txBody>
-          <a:bodyPr wrap="square" lIns="0" tIns="0" rIns="0" bIns="0" rtlCol="0" anchor="ctr"/>
-          <a:lstStyle/>
-          <a:p>
-            <a:pPr algn="ctr" indent="0" marL="0">
-              <a:buNone/>
-            </a:pPr>
-            <a:r>
-              <a:rPr lang="en-US" sz="1300" b="1" dirty="0">
-                <a:solidFill>
-                  <a:srgbClr val="9D174D"/>
-                </a:solidFill>
-                <a:latin typeface="Trebuchet MS" pitchFamily="34" charset="0"/>
-                <a:ea typeface="Trebuchet MS" pitchFamily="34" charset="-122"/>
-                <a:cs typeface="Trebuchet MS" pitchFamily="34" charset="-120"/>
-              </a:rPr>
-              <a:t>-ive</a:t>
-            </a:r>
-            <a:endParaRPr lang="en-US" sz="1300" dirty="0"/>
-          </a:p>
-        </p:txBody>
-      </p:sp>
-      <p:sp>
-        <p:nvSpPr>
-          <p:cNvPr id="43" name="Text 41"/>
-          <p:cNvSpPr/>
-          <p:nvPr/>
-        </p:nvSpPr>
-        <p:spPr>
-          <a:xfrm>
-            <a:off x="365760" y="3611880"/>
-            <a:ext cx="1828800" cy="347472"/>
-          </a:xfrm>
-          <a:prstGeom prst="rect">
-            <a:avLst/>
-          </a:prstGeom>
-          <a:noFill/>
-          <a:ln/>
-        </p:spPr>
-        <p:txBody>
-          <a:bodyPr wrap="square" lIns="0" tIns="0" rIns="0" bIns="0" rtlCol="0" anchor="ctr"/>
-          <a:lstStyle/>
-          <a:p>
-            <a:pPr algn="l" indent="0" marL="0">
-              <a:buNone/>
-            </a:pPr>
-            <a:r>
-              <a:rPr lang="en-US" sz="1200" b="1" dirty="0">
-                <a:solidFill>
-                  <a:srgbClr val="0F172A"/>
-                </a:solidFill>
-                <a:latin typeface="Trebuchet MS" pitchFamily="34" charset="0"/>
-                <a:ea typeface="Trebuchet MS" pitchFamily="34" charset="-122"/>
-                <a:cs typeface="Trebuchet MS" pitchFamily="34" charset="-120"/>
-              </a:rPr>
-              <a:t>Sample words:</a:t>
-            </a:r>
-            <a:endParaRPr lang="en-US" sz="1200" dirty="0"/>
-          </a:p>
-        </p:txBody>
-      </p:sp>
-      <p:sp>
-        <p:nvSpPr>
-          <p:cNvPr id="44" name="Shape 42"/>
-          <p:cNvSpPr/>
-          <p:nvPr/>
-        </p:nvSpPr>
-        <p:spPr>
-          <a:xfrm>
-            <a:off x="365760" y="4023360"/>
-            <a:ext cx="2011680" cy="402336"/>
-          </a:xfrm>
-          <a:prstGeom prst="rect">
-            <a:avLst>
-              <a:gd name="adj" fmla="val 13636"/>
-            </a:avLst>
-          </a:prstGeom>
-          <a:solidFill>
-            <a:srgbClr val="EEF2FF"/>
-          </a:solidFill>
-          <a:ln w="12700">
-            <a:solidFill>
-              <a:srgbClr val="6366F1"/>
-            </a:solidFill>
-            <a:prstDash val="solid"/>
-          </a:ln>
-        </p:spPr>
-      </p:sp>
-      <p:sp>
-        <p:nvSpPr>
-          <p:cNvPr id="45" name="Text 43"/>
-          <p:cNvSpPr/>
-          <p:nvPr/>
-        </p:nvSpPr>
-        <p:spPr>
-          <a:xfrm>
-            <a:off x="365760" y="4023360"/>
-            <a:ext cx="2011680" cy="402336"/>
-          </a:xfrm>
-          <a:prstGeom prst="rect">
-            <a:avLst/>
-          </a:prstGeom>
-          <a:noFill/>
-          <a:ln/>
-        </p:spPr>
-        <p:txBody>
-          <a:bodyPr wrap="square" lIns="0" tIns="0" rIns="0" bIns="0" rtlCol="0" anchor="ctr"/>
-          <a:lstStyle/>
-          <a:p>
-            <a:pPr algn="ctr" indent="0" marL="0">
-              <a:buNone/>
-            </a:pPr>
-            <a:r>
-              <a:rPr lang="en-US" sz="1200" b="1" dirty="0">
-                <a:solidFill>
-                  <a:srgbClr val="4338CA"/>
-                </a:solidFill>
-                <a:latin typeface="Trebuchet MS" pitchFamily="34" charset="0"/>
-                <a:ea typeface="Trebuchet MS" pitchFamily="34" charset="-122"/>
-                <a:cs typeface="Trebuchet MS" pitchFamily="34" charset="-120"/>
-              </a:rPr>
-              <a:t>assist</a:t>
-            </a:r>
-            <a:endParaRPr lang="en-US" sz="1200" dirty="0"/>
-          </a:p>
-        </p:txBody>
-      </p:sp>
-      <p:sp>
-        <p:nvSpPr>
-          <p:cNvPr id="46" name="Shape 44"/>
-          <p:cNvSpPr/>
-          <p:nvPr/>
-        </p:nvSpPr>
-        <p:spPr>
-          <a:xfrm>
-            <a:off x="2542032" y="4023360"/>
-            <a:ext cx="2011680" cy="402336"/>
-          </a:xfrm>
-          <a:prstGeom prst="rect">
-            <a:avLst>
-              <a:gd name="adj" fmla="val 13636"/>
-            </a:avLst>
-          </a:prstGeom>
-          <a:solidFill>
-            <a:srgbClr val="EEF2FF"/>
-          </a:solidFill>
-          <a:ln w="12700">
-            <a:solidFill>
-              <a:srgbClr val="6366F1"/>
-            </a:solidFill>
-            <a:prstDash val="solid"/>
-          </a:ln>
-        </p:spPr>
-      </p:sp>
-      <p:sp>
-        <p:nvSpPr>
-          <p:cNvPr id="47" name="Text 45"/>
-          <p:cNvSpPr/>
-          <p:nvPr/>
-        </p:nvSpPr>
-        <p:spPr>
-          <a:xfrm>
-            <a:off x="2542032" y="4023360"/>
-            <a:ext cx="2011680" cy="402336"/>
-          </a:xfrm>
-          <a:prstGeom prst="rect">
-            <a:avLst/>
-          </a:prstGeom>
-          <a:noFill/>
-          <a:ln/>
-        </p:spPr>
-        <p:txBody>
-          <a:bodyPr wrap="square" lIns="0" tIns="0" rIns="0" bIns="0" rtlCol="0" anchor="ctr"/>
-          <a:lstStyle/>
-          <a:p>
-            <a:pPr algn="ctr" indent="0" marL="0">
-              <a:buNone/>
-            </a:pPr>
-            <a:r>
-              <a:rPr lang="en-US" sz="1200" b="1" dirty="0">
-                <a:solidFill>
-                  <a:srgbClr val="4338CA"/>
-                </a:solidFill>
-                <a:latin typeface="Trebuchet MS" pitchFamily="34" charset="0"/>
-                <a:ea typeface="Trebuchet MS" pitchFamily="34" charset="-122"/>
-                <a:cs typeface="Trebuchet MS" pitchFamily="34" charset="-120"/>
-              </a:rPr>
-              <a:t>assistance</a:t>
-            </a:r>
-            <a:endParaRPr lang="en-US" sz="1200" dirty="0"/>
-          </a:p>
-        </p:txBody>
-      </p:sp>
-      <p:sp>
-        <p:nvSpPr>
-          <p:cNvPr id="48" name="Shape 46"/>
-          <p:cNvSpPr/>
-          <p:nvPr/>
-        </p:nvSpPr>
-        <p:spPr>
-          <a:xfrm>
-            <a:off x="4718304" y="4023360"/>
-            <a:ext cx="2011680" cy="402336"/>
-          </a:xfrm>
-          <a:prstGeom prst="rect">
-            <a:avLst>
-              <a:gd name="adj" fmla="val 13636"/>
-            </a:avLst>
-          </a:prstGeom>
-          <a:solidFill>
-            <a:srgbClr val="EEF2FF"/>
-          </a:solidFill>
-          <a:ln w="12700">
-            <a:solidFill>
-              <a:srgbClr val="6366F1"/>
-            </a:solidFill>
-            <a:prstDash val="solid"/>
-          </a:ln>
-        </p:spPr>
-      </p:sp>
-      <p:sp>
-        <p:nvSpPr>
-          <p:cNvPr id="49" name="Text 47"/>
-          <p:cNvSpPr/>
-          <p:nvPr/>
-        </p:nvSpPr>
-        <p:spPr>
-          <a:xfrm>
-            <a:off x="4718304" y="4023360"/>
-            <a:ext cx="2011680" cy="402336"/>
-          </a:xfrm>
-          <a:prstGeom prst="rect">
-            <a:avLst/>
-          </a:prstGeom>
-          <a:noFill/>
-          <a:ln/>
-        </p:spPr>
-        <p:txBody>
-          <a:bodyPr wrap="square" lIns="0" tIns="0" rIns="0" bIns="0" rtlCol="0" anchor="ctr"/>
-          <a:lstStyle/>
-          <a:p>
-            <a:pPr algn="ctr" indent="0" marL="0">
-              <a:buNone/>
-            </a:pPr>
-            <a:r>
-              <a:rPr lang="en-US" sz="1200" b="1" dirty="0">
-                <a:solidFill>
-                  <a:srgbClr val="4338CA"/>
-                </a:solidFill>
-                <a:latin typeface="Trebuchet MS" pitchFamily="34" charset="0"/>
-                <a:ea typeface="Trebuchet MS" pitchFamily="34" charset="-122"/>
-                <a:cs typeface="Trebuchet MS" pitchFamily="34" charset="-120"/>
-              </a:rPr>
-              <a:t>assistant</a:t>
-            </a:r>
-            <a:endParaRPr lang="en-US" sz="1200" dirty="0"/>
-          </a:p>
-        </p:txBody>
-      </p:sp>
-      <p:sp>
-        <p:nvSpPr>
-          <p:cNvPr id="50" name="Shape 48"/>
-          <p:cNvSpPr/>
-          <p:nvPr/>
-        </p:nvSpPr>
-        <p:spPr>
-          <a:xfrm>
-            <a:off x="6894576" y="4023360"/>
-            <a:ext cx="2011680" cy="402336"/>
-          </a:xfrm>
-          <a:prstGeom prst="rect">
-            <a:avLst>
-              <a:gd name="adj" fmla="val 13636"/>
-            </a:avLst>
-          </a:prstGeom>
-          <a:solidFill>
-            <a:srgbClr val="EEF2FF"/>
-          </a:solidFill>
-          <a:ln w="12700">
-            <a:solidFill>
-              <a:srgbClr val="6366F1"/>
-            </a:solidFill>
-            <a:prstDash val="solid"/>
-          </a:ln>
-        </p:spPr>
-      </p:sp>
-      <p:sp>
-        <p:nvSpPr>
-          <p:cNvPr id="51" name="Text 49"/>
-          <p:cNvSpPr/>
-          <p:nvPr/>
-        </p:nvSpPr>
-        <p:spPr>
-          <a:xfrm>
-            <a:off x="6894576" y="4023360"/>
-            <a:ext cx="2011680" cy="402336"/>
-          </a:xfrm>
-          <a:prstGeom prst="rect">
-            <a:avLst/>
-          </a:prstGeom>
-          <a:noFill/>
-          <a:ln/>
-        </p:spPr>
-        <p:txBody>
-          <a:bodyPr wrap="square" lIns="0" tIns="0" rIns="0" bIns="0" rtlCol="0" anchor="ctr"/>
-          <a:lstStyle/>
-          <a:p>
-            <a:pPr algn="ctr" indent="0" marL="0">
-              <a:buNone/>
-            </a:pPr>
-            <a:r>
-              <a:rPr lang="en-US" sz="1200" b="1" dirty="0">
-                <a:solidFill>
-                  <a:srgbClr val="4338CA"/>
-                </a:solidFill>
-                <a:latin typeface="Trebuchet MS" pitchFamily="34" charset="0"/>
-                <a:ea typeface="Trebuchet MS" pitchFamily="34" charset="-122"/>
-                <a:cs typeface="Trebuchet MS" pitchFamily="34" charset="-120"/>
-              </a:rPr>
-              <a:t>assisted</a:t>
-            </a:r>
-            <a:endParaRPr lang="en-US" sz="1200" dirty="0"/>
-          </a:p>
-        </p:txBody>
-      </p:sp>
-      <p:sp>
-        <p:nvSpPr>
-          <p:cNvPr id="52" name="Shape 50"/>
-          <p:cNvSpPr/>
-          <p:nvPr/>
-        </p:nvSpPr>
-        <p:spPr>
-          <a:xfrm>
-            <a:off x="365760" y="4498848"/>
-            <a:ext cx="2011680" cy="402336"/>
-          </a:xfrm>
-          <a:prstGeom prst="rect">
-            <a:avLst>
-              <a:gd name="adj" fmla="val 13636"/>
-            </a:avLst>
-          </a:prstGeom>
-          <a:solidFill>
-            <a:srgbClr val="EEF2FF"/>
-          </a:solidFill>
-          <a:ln w="12700">
-            <a:solidFill>
-              <a:srgbClr val="6366F1"/>
-            </a:solidFill>
-            <a:prstDash val="solid"/>
-          </a:ln>
-        </p:spPr>
-      </p:sp>
-      <p:sp>
-        <p:nvSpPr>
-          <p:cNvPr id="53" name="Text 51"/>
-          <p:cNvSpPr/>
-          <p:nvPr/>
-        </p:nvSpPr>
-        <p:spPr>
-          <a:xfrm>
-            <a:off x="365760" y="4498848"/>
-            <a:ext cx="2011680" cy="402336"/>
-          </a:xfrm>
-          <a:prstGeom prst="rect">
-            <a:avLst/>
-          </a:prstGeom>
-          <a:noFill/>
-          <a:ln/>
-        </p:spPr>
-        <p:txBody>
-          <a:bodyPr wrap="square" lIns="0" tIns="0" rIns="0" bIns="0" rtlCol="0" anchor="ctr"/>
-          <a:lstStyle/>
-          <a:p>
-            <a:pPr algn="ctr" indent="0" marL="0">
-              <a:buNone/>
-            </a:pPr>
-            <a:r>
-              <a:rPr lang="en-US" sz="1200" b="1" dirty="0">
-                <a:solidFill>
-                  <a:srgbClr val="4338CA"/>
-                </a:solidFill>
-                <a:latin typeface="Trebuchet MS" pitchFamily="34" charset="0"/>
-                <a:ea typeface="Trebuchet MS" pitchFamily="34" charset="-122"/>
-                <a:cs typeface="Trebuchet MS" pitchFamily="34" charset="-120"/>
-              </a:rPr>
-              <a:t>assisting</a:t>
-            </a:r>
-            <a:endParaRPr lang="en-US" sz="1200" dirty="0"/>
-          </a:p>
-        </p:txBody>
-      </p:sp>
-      <p:sp>
-        <p:nvSpPr>
-          <p:cNvPr id="54" name="Shape 52"/>
-          <p:cNvSpPr/>
-          <p:nvPr/>
-        </p:nvSpPr>
-        <p:spPr>
-          <a:xfrm>
-            <a:off x="2542032" y="4498848"/>
-            <a:ext cx="2011680" cy="402336"/>
-          </a:xfrm>
-          <a:prstGeom prst="rect">
-            <a:avLst>
-              <a:gd name="adj" fmla="val 13636"/>
-            </a:avLst>
-          </a:prstGeom>
-          <a:solidFill>
-            <a:srgbClr val="EEF2FF"/>
-          </a:solidFill>
-          <a:ln w="12700">
-            <a:solidFill>
-              <a:srgbClr val="6366F1"/>
-            </a:solidFill>
-            <a:prstDash val="solid"/>
-          </a:ln>
-        </p:spPr>
-      </p:sp>
-      <p:sp>
-        <p:nvSpPr>
-          <p:cNvPr id="55" name="Text 53"/>
-          <p:cNvSpPr/>
-          <p:nvPr/>
-        </p:nvSpPr>
-        <p:spPr>
-          <a:xfrm>
-            <a:off x="2542032" y="4498848"/>
-            <a:ext cx="2011680" cy="402336"/>
-          </a:xfrm>
-          <a:prstGeom prst="rect">
-            <a:avLst/>
-          </a:prstGeom>
-          <a:noFill/>
-          <a:ln/>
-        </p:spPr>
-        <p:txBody>
-          <a:bodyPr wrap="square" lIns="0" tIns="0" rIns="0" bIns="0" rtlCol="0" anchor="ctr"/>
-          <a:lstStyle/>
-          <a:p>
-            <a:pPr algn="ctr" indent="0" marL="0">
-              <a:buNone/>
-            </a:pPr>
-            <a:r>
-              <a:rPr lang="en-US" sz="1200" b="1" dirty="0">
-                <a:solidFill>
-                  <a:srgbClr val="4338CA"/>
-                </a:solidFill>
-                <a:latin typeface="Trebuchet MS" pitchFamily="34" charset="0"/>
-                <a:ea typeface="Trebuchet MS" pitchFamily="34" charset="-122"/>
-                <a:cs typeface="Trebuchet MS" pitchFamily="34" charset="-120"/>
-              </a:rPr>
-              <a:t>assistive</a:t>
-            </a:r>
-            <a:endParaRPr lang="en-US" sz="1200" dirty="0"/>
-          </a:p>
-        </p:txBody>
-      </p:sp>
-      <p:sp>
-        <p:nvSpPr>
-          <p:cNvPr id="56" name="Shape 54"/>
-          <p:cNvSpPr/>
-          <p:nvPr/>
-        </p:nvSpPr>
-        <p:spPr>
-          <a:xfrm>
-            <a:off x="4718304" y="4498848"/>
-            <a:ext cx="2011680" cy="402336"/>
-          </a:xfrm>
-          <a:prstGeom prst="rect">
-            <a:avLst>
-              <a:gd name="adj" fmla="val 13636"/>
-            </a:avLst>
-          </a:prstGeom>
-          <a:solidFill>
-            <a:srgbClr val="EEF2FF"/>
-          </a:solidFill>
-          <a:ln w="12700">
-            <a:solidFill>
-              <a:srgbClr val="6366F1"/>
-            </a:solidFill>
-            <a:prstDash val="solid"/>
-          </a:ln>
-        </p:spPr>
-      </p:sp>
-      <p:sp>
-        <p:nvSpPr>
-          <p:cNvPr id="57" name="Text 55"/>
-          <p:cNvSpPr/>
-          <p:nvPr/>
-        </p:nvSpPr>
-        <p:spPr>
-          <a:xfrm>
-            <a:off x="4718304" y="4498848"/>
-            <a:ext cx="2011680" cy="402336"/>
-          </a:xfrm>
-          <a:prstGeom prst="rect">
-            <a:avLst/>
-          </a:prstGeom>
-          <a:noFill/>
-          <a:ln/>
-        </p:spPr>
-        <p:txBody>
-          <a:bodyPr wrap="square" lIns="0" tIns="0" rIns="0" bIns="0" rtlCol="0" anchor="ctr"/>
-          <a:lstStyle/>
-          <a:p>
-            <a:pPr algn="ctr" indent="0" marL="0">
-              <a:buNone/>
-            </a:pPr>
-            <a:r>
-              <a:rPr lang="en-US" sz="1200" b="1" dirty="0">
-                <a:solidFill>
-                  <a:srgbClr val="4338CA"/>
-                </a:solidFill>
-                <a:latin typeface="Trebuchet MS" pitchFamily="34" charset="0"/>
-                <a:ea typeface="Trebuchet MS" pitchFamily="34" charset="-122"/>
-                <a:cs typeface="Trebuchet MS" pitchFamily="34" charset="-120"/>
-              </a:rPr>
-              <a:t>unassisted</a:t>
-            </a:r>
-            <a:endParaRPr lang="en-US" sz="1200" dirty="0"/>
-          </a:p>
-        </p:txBody>
-      </p:sp>
-      <p:sp>
-        <p:nvSpPr>
-          <p:cNvPr id="58" name="Shape 56"/>
-          <p:cNvSpPr/>
-          <p:nvPr/>
-        </p:nvSpPr>
-        <p:spPr>
-          <a:xfrm>
-            <a:off x="6894576" y="4498848"/>
-            <a:ext cx="2011680" cy="402336"/>
-          </a:xfrm>
-          <a:prstGeom prst="rect">
-            <a:avLst>
-              <a:gd name="adj" fmla="val 13636"/>
-            </a:avLst>
-          </a:prstGeom>
-          <a:solidFill>
-            <a:srgbClr val="EEF2FF"/>
-          </a:solidFill>
-          <a:ln w="12700">
-            <a:solidFill>
-              <a:srgbClr val="6366F1"/>
-            </a:solidFill>
-            <a:prstDash val="solid"/>
-          </a:ln>
-        </p:spPr>
-      </p:sp>
-      <p:sp>
-        <p:nvSpPr>
-          <p:cNvPr id="59" name="Text 57"/>
-          <p:cNvSpPr/>
-          <p:nvPr/>
-        </p:nvSpPr>
-        <p:spPr>
-          <a:xfrm>
-            <a:off x="6894576" y="4498848"/>
-            <a:ext cx="2011680" cy="402336"/>
-          </a:xfrm>
-          <a:prstGeom prst="rect">
-            <a:avLst/>
-          </a:prstGeom>
-          <a:noFill/>
-          <a:ln/>
-        </p:spPr>
-        <p:txBody>
-          <a:bodyPr wrap="square" lIns="0" tIns="0" rIns="0" bIns="0" rtlCol="0" anchor="ctr"/>
-          <a:lstStyle/>
-          <a:p>
-            <a:pPr algn="ctr" indent="0" marL="0">
-              <a:buNone/>
-            </a:pPr>
-            <a:r>
-              <a:rPr lang="en-US" sz="1200" b="1" dirty="0">
-                <a:solidFill>
-                  <a:srgbClr val="4338CA"/>
-                </a:solidFill>
-                <a:latin typeface="Trebuchet MS" pitchFamily="34" charset="0"/>
-                <a:ea typeface="Trebuchet MS" pitchFamily="34" charset="-122"/>
-                <a:cs typeface="Trebuchet MS" pitchFamily="34" charset="-120"/>
-              </a:rPr>
-              <a:t>co-assistant</a:t>
+              <a:t>assists</a:t>
             </a:r>
             <a:endParaRPr lang="en-US" sz="1200" dirty="0"/>
           </a:p>
@@ -36239,7 +35766,7 @@
                 <a:ea typeface="Calibri" pitchFamily="34" charset="-122"/>
                 <a:cs typeface="Calibri" pitchFamily="34" charset="-120"/>
               </a:rPr>
-              <a:t>Word Labs  •  wordlabs.app  •  Root: 'assist' = to help or support someone</a:t>
+              <a:t>Word Labs  •  wordlabs.app  •  Root: 'assist' = help</a:t>
             </a:r>
             <a:endParaRPr lang="en-US" sz="800" dirty="0"/>
           </a:p>
@@ -36403,7 +35930,7 @@
                 <a:ea typeface="Calibri" pitchFamily="34" charset="-122"/>
                 <a:cs typeface="Calibri" pitchFamily="34" charset="-120"/>
               </a:rPr>
-              <a:t>The core part of a word carrying its basic meaning. For example, 'assist' means 'to help or support someone'.</a:t>
+              <a:t>The core part of a word carrying its basic meaning. For example, 'assist' means 'help'.</a:t>
             </a:r>
             <a:endParaRPr lang="en-US" sz="1350" dirty="0"/>
           </a:p>
@@ -37023,7 +36550,7 @@
                 <a:ea typeface="Calibri" pitchFamily="34" charset="-122"/>
                 <a:cs typeface="Calibri" pitchFamily="34" charset="-120"/>
               </a:rPr>
-              <a:t>Word Labs  •  wordlabs.app  •  Root: 'assist' = to help or support someone</a:t>
+              <a:t>Word Labs  •  wordlabs.app  •  Root: 'assist' = help</a:t>
             </a:r>
             <a:endParaRPr lang="en-US" sz="800" dirty="0"/>
           </a:p>
@@ -37135,7 +36662,7 @@
                 <a:ea typeface="Calibri" pitchFamily="34" charset="-122"/>
                 <a:cs typeface="Calibri" pitchFamily="34" charset="-120"/>
               </a:rPr>
-              <a:t>1.  The word 'unassisted' means doing something without any help.</a:t>
+              <a:t>1.  'assists' means 'blocks someone from doing something'.</a:t>
             </a:r>
             <a:endParaRPr lang="en-US" sz="1300" dirty="0"/>
           </a:p>
@@ -37158,11 +36685,11 @@
             </a:avLst>
           </a:prstGeom>
           <a:solidFill>
-            <a:srgbClr val="DCFCE7"/>
-          </a:solidFill>
-          <a:ln w="12700">
-            <a:solidFill>
-              <a:srgbClr val="16A34A"/>
+            <a:srgbClr val="FEE2E2"/>
+          </a:solidFill>
+          <a:ln w="12700">
+            <a:solidFill>
+              <a:srgbClr val="DC2626"/>
             </a:solidFill>
             <a:prstDash val="solid"/>
           </a:ln>
@@ -37195,13 +36722,13 @@
             <a:r>
               <a:rPr lang="en-US" sz="1100" b="1" dirty="0">
                 <a:solidFill>
-                  <a:srgbClr val="16A34A"/>
+                  <a:srgbClr val="DC2626"/>
                 </a:solidFill>
                 <a:latin typeface="Trebuchet MS" pitchFamily="34" charset="0"/>
                 <a:ea typeface="Trebuchet MS" pitchFamily="34" charset="-122"/>
                 <a:cs typeface="Trebuchet MS" pitchFamily="34" charset="-120"/>
               </a:rPr>
-              <a:t>TRUE</a:t>
+              <a:t>FALSE</a:t>
             </a:r>
             <a:endParaRPr lang="en-US" sz="1100" dirty="0"/>
           </a:p>
@@ -37274,7 +36801,7 @@
                 <a:ea typeface="Calibri" pitchFamily="34" charset="-122"/>
                 <a:cs typeface="Calibri" pitchFamily="34" charset="-120"/>
               </a:rPr>
-              <a:t>2.  The root 'assist' comes from the Greek language.</a:t>
+              <a:t>2.  'assists' means 'helps someone with something'.</a:t>
             </a:r>
             <a:endParaRPr lang="en-US" sz="1300" dirty="0"/>
           </a:p>
@@ -37297,11 +36824,11 @@
             </a:avLst>
           </a:prstGeom>
           <a:solidFill>
-            <a:srgbClr val="FEE2E2"/>
-          </a:solidFill>
-          <a:ln w="12700">
-            <a:solidFill>
-              <a:srgbClr val="DC2626"/>
+            <a:srgbClr val="DCFCE7"/>
+          </a:solidFill>
+          <a:ln w="12700">
+            <a:solidFill>
+              <a:srgbClr val="16A34A"/>
             </a:solidFill>
             <a:prstDash val="solid"/>
           </a:ln>
@@ -37334,13 +36861,13 @@
             <a:r>
               <a:rPr lang="en-US" sz="1100" b="1" dirty="0">
                 <a:solidFill>
-                  <a:srgbClr val="DC2626"/>
+                  <a:srgbClr val="16A34A"/>
                 </a:solidFill>
                 <a:latin typeface="Trebuchet MS" pitchFamily="34" charset="0"/>
                 <a:ea typeface="Trebuchet MS" pitchFamily="34" charset="-122"/>
                 <a:cs typeface="Trebuchet MS" pitchFamily="34" charset="-120"/>
               </a:rPr>
-              <a:t>FALSE</a:t>
+              <a:t>TRUE</a:t>
             </a:r>
             <a:endParaRPr lang="en-US" sz="1100" dirty="0"/>
           </a:p>
@@ -37413,7 +36940,7 @@
                 <a:ea typeface="Calibri" pitchFamily="34" charset="-122"/>
                 <a:cs typeface="Calibri" pitchFamily="34" charset="-120"/>
               </a:rPr>
-              <a:t>3.  The suffix '-ance' in 'assistance' turns the verb into a noun.</a:t>
+              <a:t>3.  'assist' means 'help'.</a:t>
             </a:r>
             <a:endParaRPr lang="en-US" sz="1300" dirty="0"/>
           </a:p>
@@ -37552,7 +37079,7 @@
                 <a:ea typeface="Calibri" pitchFamily="34" charset="-122"/>
                 <a:cs typeface="Calibri" pitchFamily="34" charset="-120"/>
               </a:rPr>
-              <a:t>4.  The word 'assistant' contains the root 'assist'.</a:t>
+              <a:t>4.  'assist' means 'to stop someone from doing something'.</a:t>
             </a:r>
             <a:endParaRPr lang="en-US" sz="1300" dirty="0"/>
           </a:p>
@@ -37575,11 +37102,11 @@
             </a:avLst>
           </a:prstGeom>
           <a:solidFill>
-            <a:srgbClr val="DCFCE7"/>
-          </a:solidFill>
-          <a:ln w="12700">
-            <a:solidFill>
-              <a:srgbClr val="16A34A"/>
+            <a:srgbClr val="FEE2E2"/>
+          </a:solidFill>
+          <a:ln w="12700">
+            <a:solidFill>
+              <a:srgbClr val="DC2626"/>
             </a:solidFill>
             <a:prstDash val="solid"/>
           </a:ln>
@@ -37612,13 +37139,13 @@
             <a:r>
               <a:rPr lang="en-US" sz="1100" b="1" dirty="0">
                 <a:solidFill>
-                  <a:srgbClr val="16A34A"/>
+                  <a:srgbClr val="DC2626"/>
                 </a:solidFill>
                 <a:latin typeface="Trebuchet MS" pitchFamily="34" charset="0"/>
                 <a:ea typeface="Trebuchet MS" pitchFamily="34" charset="-122"/>
                 <a:cs typeface="Trebuchet MS" pitchFamily="34" charset="-120"/>
               </a:rPr>
-              <a:t>TRUE</a:t>
+              <a:t>FALSE</a:t>
             </a:r>
             <a:endParaRPr lang="en-US" sz="1100" dirty="0"/>
           </a:p>
@@ -37691,7 +37218,7 @@
                 <a:ea typeface="Calibri" pitchFamily="34" charset="-122"/>
                 <a:cs typeface="Calibri" pitchFamily="34" charset="-120"/>
               </a:rPr>
-              <a:t>5.  The root 'assist' means to block or prevent something.</a:t>
+              <a:t>5.  'assist' means 'to help someone do something'.</a:t>
             </a:r>
             <a:endParaRPr lang="en-US" sz="1300" dirty="0"/>
           </a:p>
@@ -37714,11 +37241,11 @@
             </a:avLst>
           </a:prstGeom>
           <a:solidFill>
-            <a:srgbClr val="FEE2E2"/>
-          </a:solidFill>
-          <a:ln w="12700">
-            <a:solidFill>
-              <a:srgbClr val="DC2626"/>
+            <a:srgbClr val="DCFCE7"/>
+          </a:solidFill>
+          <a:ln w="12700">
+            <a:solidFill>
+              <a:srgbClr val="16A34A"/>
             </a:solidFill>
             <a:prstDash val="solid"/>
           </a:ln>
@@ -37751,13 +37278,13 @@
             <a:r>
               <a:rPr lang="en-US" sz="1100" b="1" dirty="0">
                 <a:solidFill>
-                  <a:srgbClr val="DC2626"/>
+                  <a:srgbClr val="16A34A"/>
                 </a:solidFill>
                 <a:latin typeface="Trebuchet MS" pitchFamily="34" charset="0"/>
                 <a:ea typeface="Trebuchet MS" pitchFamily="34" charset="-122"/>
                 <a:cs typeface="Trebuchet MS" pitchFamily="34" charset="-120"/>
               </a:rPr>
-              <a:t>FALSE</a:t>
+              <a:t>TRUE</a:t>
             </a:r>
             <a:endParaRPr lang="en-US" sz="1100" dirty="0"/>
           </a:p>
@@ -38049,7 +37576,7 @@
                 <a:ea typeface="Calibri" pitchFamily="34" charset="-122"/>
                 <a:cs typeface="Calibri" pitchFamily="34" charset="-120"/>
               </a:rPr>
-              <a:t>Word Labs  •  wordlabs.app  •  Root: 'assist' = to help or support someone</a:t>
+              <a:t>Word Labs  •  wordlabs.app  •  Root: 'assist' = help</a:t>
             </a:r>
             <a:endParaRPr lang="en-US" sz="800" dirty="0"/>
           </a:p>
@@ -38186,7 +37713,7 @@
                 <a:ea typeface="Trebuchet MS" pitchFamily="34" charset="-122"/>
                 <a:cs typeface="Trebuchet MS" pitchFamily="34" charset="-120"/>
               </a:rPr>
-              <a:t>to help or support someone</a:t>
+              <a:t>help</a:t>
             </a:r>
             <a:endParaRPr lang="en-US" sz="2000" dirty="0"/>
           </a:p>
@@ -38225,7 +37752,7 @@
                 <a:ea typeface="Calibri" pitchFamily="34" charset="-122"/>
                 <a:cs typeface="Calibri" pitchFamily="34" charset="-120"/>
               </a:rPr>
-              <a:t>Origin: Latin: assistere</a:t>
+              <a:t>Origin: Core English root</a:t>
             </a:r>
             <a:endParaRPr lang="en-US" sz="1100" dirty="0"/>
           </a:p>
@@ -38396,337 +37923,7 @@
                 <a:ea typeface="Trebuchet MS" pitchFamily="34" charset="-122"/>
                 <a:cs typeface="Trebuchet MS" pitchFamily="34" charset="-120"/>
               </a:rPr>
-              <a:t>assistance</a:t>
-            </a:r>
-            <a:endParaRPr lang="en-US" sz="1300" dirty="0"/>
-          </a:p>
-        </p:txBody>
-      </p:sp>
-      <p:sp>
-        <p:nvSpPr>
-          <p:cNvPr id="20" name="Shape 18"/>
-          <p:cNvSpPr/>
-          <p:nvPr/>
-        </p:nvSpPr>
-        <p:spPr>
-          <a:xfrm>
-            <a:off x="4663440" y="2743200"/>
-            <a:ext cx="2011680" cy="502920"/>
-          </a:xfrm>
-          <a:prstGeom prst="rect">
-            <a:avLst>
-              <a:gd name="adj" fmla="val 14545"/>
-            </a:avLst>
-          </a:prstGeom>
-          <a:solidFill>
-            <a:srgbClr val="EEF2FF"/>
-          </a:solidFill>
-          <a:ln w="12700">
-            <a:solidFill>
-              <a:srgbClr val="6366F1"/>
-            </a:solidFill>
-            <a:prstDash val="solid"/>
-          </a:ln>
-        </p:spPr>
-      </p:sp>
-      <p:sp>
-        <p:nvSpPr>
-          <p:cNvPr id="21" name="Text 19"/>
-          <p:cNvSpPr/>
-          <p:nvPr/>
-        </p:nvSpPr>
-        <p:spPr>
-          <a:xfrm>
-            <a:off x="4663440" y="2743200"/>
-            <a:ext cx="2011680" cy="502920"/>
-          </a:xfrm>
-          <a:prstGeom prst="rect">
-            <a:avLst/>
-          </a:prstGeom>
-          <a:noFill/>
-          <a:ln/>
-        </p:spPr>
-        <p:txBody>
-          <a:bodyPr wrap="square" lIns="0" tIns="0" rIns="0" bIns="0" rtlCol="0" anchor="ctr"/>
-          <a:lstStyle/>
-          <a:p>
-            <a:pPr algn="ctr" indent="0" marL="0">
-              <a:buNone/>
-            </a:pPr>
-            <a:r>
-              <a:rPr lang="en-US" sz="1300" b="1" dirty="0">
-                <a:solidFill>
-                  <a:srgbClr val="4338CA"/>
-                </a:solidFill>
-                <a:latin typeface="Trebuchet MS" pitchFamily="34" charset="0"/>
-                <a:ea typeface="Trebuchet MS" pitchFamily="34" charset="-122"/>
-                <a:cs typeface="Trebuchet MS" pitchFamily="34" charset="-120"/>
-              </a:rPr>
-              <a:t>assistant</a:t>
-            </a:r>
-            <a:endParaRPr lang="en-US" sz="1300" dirty="0"/>
-          </a:p>
-        </p:txBody>
-      </p:sp>
-      <p:sp>
-        <p:nvSpPr>
-          <p:cNvPr id="22" name="Shape 20"/>
-          <p:cNvSpPr/>
-          <p:nvPr/>
-        </p:nvSpPr>
-        <p:spPr>
-          <a:xfrm>
-            <a:off x="6812280" y="2743200"/>
-            <a:ext cx="2011680" cy="502920"/>
-          </a:xfrm>
-          <a:prstGeom prst="rect">
-            <a:avLst>
-              <a:gd name="adj" fmla="val 14545"/>
-            </a:avLst>
-          </a:prstGeom>
-          <a:solidFill>
-            <a:srgbClr val="EEF2FF"/>
-          </a:solidFill>
-          <a:ln w="12700">
-            <a:solidFill>
-              <a:srgbClr val="6366F1"/>
-            </a:solidFill>
-            <a:prstDash val="solid"/>
-          </a:ln>
-        </p:spPr>
-      </p:sp>
-      <p:sp>
-        <p:nvSpPr>
-          <p:cNvPr id="23" name="Text 21"/>
-          <p:cNvSpPr/>
-          <p:nvPr/>
-        </p:nvSpPr>
-        <p:spPr>
-          <a:xfrm>
-            <a:off x="6812280" y="2743200"/>
-            <a:ext cx="2011680" cy="502920"/>
-          </a:xfrm>
-          <a:prstGeom prst="rect">
-            <a:avLst/>
-          </a:prstGeom>
-          <a:noFill/>
-          <a:ln/>
-        </p:spPr>
-        <p:txBody>
-          <a:bodyPr wrap="square" lIns="0" tIns="0" rIns="0" bIns="0" rtlCol="0" anchor="ctr"/>
-          <a:lstStyle/>
-          <a:p>
-            <a:pPr algn="ctr" indent="0" marL="0">
-              <a:buNone/>
-            </a:pPr>
-            <a:r>
-              <a:rPr lang="en-US" sz="1300" b="1" dirty="0">
-                <a:solidFill>
-                  <a:srgbClr val="4338CA"/>
-                </a:solidFill>
-                <a:latin typeface="Trebuchet MS" pitchFamily="34" charset="0"/>
-                <a:ea typeface="Trebuchet MS" pitchFamily="34" charset="-122"/>
-                <a:cs typeface="Trebuchet MS" pitchFamily="34" charset="-120"/>
-              </a:rPr>
-              <a:t>assisted</a:t>
-            </a:r>
-            <a:endParaRPr lang="en-US" sz="1300" dirty="0"/>
-          </a:p>
-        </p:txBody>
-      </p:sp>
-      <p:sp>
-        <p:nvSpPr>
-          <p:cNvPr id="24" name="Shape 22"/>
-          <p:cNvSpPr/>
-          <p:nvPr/>
-        </p:nvSpPr>
-        <p:spPr>
-          <a:xfrm>
-            <a:off x="365760" y="3401568"/>
-            <a:ext cx="2011680" cy="502920"/>
-          </a:xfrm>
-          <a:prstGeom prst="rect">
-            <a:avLst>
-              <a:gd name="adj" fmla="val 14545"/>
-            </a:avLst>
-          </a:prstGeom>
-          <a:solidFill>
-            <a:srgbClr val="EEF2FF"/>
-          </a:solidFill>
-          <a:ln w="12700">
-            <a:solidFill>
-              <a:srgbClr val="6366F1"/>
-            </a:solidFill>
-            <a:prstDash val="solid"/>
-          </a:ln>
-        </p:spPr>
-      </p:sp>
-      <p:sp>
-        <p:nvSpPr>
-          <p:cNvPr id="25" name="Text 23"/>
-          <p:cNvSpPr/>
-          <p:nvPr/>
-        </p:nvSpPr>
-        <p:spPr>
-          <a:xfrm>
-            <a:off x="365760" y="3401568"/>
-            <a:ext cx="2011680" cy="502920"/>
-          </a:xfrm>
-          <a:prstGeom prst="rect">
-            <a:avLst/>
-          </a:prstGeom>
-          <a:noFill/>
-          <a:ln/>
-        </p:spPr>
-        <p:txBody>
-          <a:bodyPr wrap="square" lIns="0" tIns="0" rIns="0" bIns="0" rtlCol="0" anchor="ctr"/>
-          <a:lstStyle/>
-          <a:p>
-            <a:pPr algn="ctr" indent="0" marL="0">
-              <a:buNone/>
-            </a:pPr>
-            <a:r>
-              <a:rPr lang="en-US" sz="1300" b="1" dirty="0">
-                <a:solidFill>
-                  <a:srgbClr val="4338CA"/>
-                </a:solidFill>
-                <a:latin typeface="Trebuchet MS" pitchFamily="34" charset="0"/>
-                <a:ea typeface="Trebuchet MS" pitchFamily="34" charset="-122"/>
-                <a:cs typeface="Trebuchet MS" pitchFamily="34" charset="-120"/>
-              </a:rPr>
-              <a:t>assisting</a:t>
-            </a:r>
-            <a:endParaRPr lang="en-US" sz="1300" dirty="0"/>
-          </a:p>
-        </p:txBody>
-      </p:sp>
-      <p:sp>
-        <p:nvSpPr>
-          <p:cNvPr id="26" name="Shape 24"/>
-          <p:cNvSpPr/>
-          <p:nvPr/>
-        </p:nvSpPr>
-        <p:spPr>
-          <a:xfrm>
-            <a:off x="2514600" y="3401568"/>
-            <a:ext cx="2011680" cy="502920"/>
-          </a:xfrm>
-          <a:prstGeom prst="rect">
-            <a:avLst>
-              <a:gd name="adj" fmla="val 14545"/>
-            </a:avLst>
-          </a:prstGeom>
-          <a:solidFill>
-            <a:srgbClr val="EEF2FF"/>
-          </a:solidFill>
-          <a:ln w="12700">
-            <a:solidFill>
-              <a:srgbClr val="6366F1"/>
-            </a:solidFill>
-            <a:prstDash val="solid"/>
-          </a:ln>
-        </p:spPr>
-      </p:sp>
-      <p:sp>
-        <p:nvSpPr>
-          <p:cNvPr id="27" name="Text 25"/>
-          <p:cNvSpPr/>
-          <p:nvPr/>
-        </p:nvSpPr>
-        <p:spPr>
-          <a:xfrm>
-            <a:off x="2514600" y="3401568"/>
-            <a:ext cx="2011680" cy="502920"/>
-          </a:xfrm>
-          <a:prstGeom prst="rect">
-            <a:avLst/>
-          </a:prstGeom>
-          <a:noFill/>
-          <a:ln/>
-        </p:spPr>
-        <p:txBody>
-          <a:bodyPr wrap="square" lIns="0" tIns="0" rIns="0" bIns="0" rtlCol="0" anchor="ctr"/>
-          <a:lstStyle/>
-          <a:p>
-            <a:pPr algn="ctr" indent="0" marL="0">
-              <a:buNone/>
-            </a:pPr>
-            <a:r>
-              <a:rPr lang="en-US" sz="1300" b="1" dirty="0">
-                <a:solidFill>
-                  <a:srgbClr val="4338CA"/>
-                </a:solidFill>
-                <a:latin typeface="Trebuchet MS" pitchFamily="34" charset="0"/>
-                <a:ea typeface="Trebuchet MS" pitchFamily="34" charset="-122"/>
-                <a:cs typeface="Trebuchet MS" pitchFamily="34" charset="-120"/>
-              </a:rPr>
-              <a:t>assistive</a:t>
-            </a:r>
-            <a:endParaRPr lang="en-US" sz="1300" dirty="0"/>
-          </a:p>
-        </p:txBody>
-      </p:sp>
-      <p:sp>
-        <p:nvSpPr>
-          <p:cNvPr id="28" name="Shape 26"/>
-          <p:cNvSpPr/>
-          <p:nvPr/>
-        </p:nvSpPr>
-        <p:spPr>
-          <a:xfrm>
-            <a:off x="4663440" y="3401568"/>
-            <a:ext cx="2011680" cy="502920"/>
-          </a:xfrm>
-          <a:prstGeom prst="rect">
-            <a:avLst>
-              <a:gd name="adj" fmla="val 14545"/>
-            </a:avLst>
-          </a:prstGeom>
-          <a:solidFill>
-            <a:srgbClr val="EEF2FF"/>
-          </a:solidFill>
-          <a:ln w="12700">
-            <a:solidFill>
-              <a:srgbClr val="6366F1"/>
-            </a:solidFill>
-            <a:prstDash val="solid"/>
-          </a:ln>
-        </p:spPr>
-      </p:sp>
-      <p:sp>
-        <p:nvSpPr>
-          <p:cNvPr id="29" name="Text 27"/>
-          <p:cNvSpPr/>
-          <p:nvPr/>
-        </p:nvSpPr>
-        <p:spPr>
-          <a:xfrm>
-            <a:off x="4663440" y="3401568"/>
-            <a:ext cx="2011680" cy="502920"/>
-          </a:xfrm>
-          <a:prstGeom prst="rect">
-            <a:avLst/>
-          </a:prstGeom>
-          <a:noFill/>
-          <a:ln/>
-        </p:spPr>
-        <p:txBody>
-          <a:bodyPr wrap="square" lIns="0" tIns="0" rIns="0" bIns="0" rtlCol="0" anchor="ctr"/>
-          <a:lstStyle/>
-          <a:p>
-            <a:pPr algn="ctr" indent="0" marL="0">
-              <a:buNone/>
-            </a:pPr>
-            <a:r>
-              <a:rPr lang="en-US" sz="1300" b="1" dirty="0">
-                <a:solidFill>
-                  <a:srgbClr val="4338CA"/>
-                </a:solidFill>
-                <a:latin typeface="Trebuchet MS" pitchFamily="34" charset="0"/>
-                <a:ea typeface="Trebuchet MS" pitchFamily="34" charset="-122"/>
-                <a:cs typeface="Trebuchet MS" pitchFamily="34" charset="-120"/>
-              </a:rPr>
-              <a:t>unassisted</a:t>
+              <a:t>assists</a:t>
             </a:r>
             <a:endParaRPr lang="en-US" sz="1300" dirty="0"/>
           </a:p>
@@ -39018,7 +38215,7 @@
                 <a:ea typeface="Calibri" pitchFamily="34" charset="-122"/>
                 <a:cs typeface="Calibri" pitchFamily="34" charset="-120"/>
               </a:rPr>
-              <a:t>Word Labs  •  wordlabs.app  •  Root: 'assist' = to help or support someone</a:t>
+              <a:t>Word Labs  •  wordlabs.app  •  Root: 'assist' = help</a:t>
             </a:r>
             <a:endParaRPr lang="en-US" sz="800" dirty="0"/>
           </a:p>
@@ -39276,7 +38473,7 @@
             <a:avLst/>
           </a:prstGeom>
           <a:solidFill>
-            <a:srgbClr val="DDD6FE"/>
+            <a:srgbClr val="F8FAFC"/>
           </a:solidFill>
           <a:ln w="12700">
             <a:solidFill>
@@ -39288,14 +38485,39 @@
       </p:sp>
       <p:sp>
         <p:nvSpPr>
-          <p:cNvPr id="18" name="Text 16"/>
-          <p:cNvSpPr/>
-          <p:nvPr/>
-        </p:nvSpPr>
-        <p:spPr>
-          <a:xfrm>
-            <a:off x="640080" y="1755648"/>
-            <a:ext cx="1463040" cy="420624"/>
+          <p:cNvPr id="18" name="Shape 16"/>
+          <p:cNvSpPr/>
+          <p:nvPr/>
+        </p:nvSpPr>
+        <p:spPr>
+          <a:xfrm>
+            <a:off x="3291840" y="1755648"/>
+            <a:ext cx="1645920" cy="420624"/>
+          </a:xfrm>
+          <a:prstGeom prst="rect">
+            <a:avLst/>
+          </a:prstGeom>
+          <a:solidFill>
+            <a:srgbClr val="CCFBF1"/>
+          </a:solidFill>
+          <a:ln w="12700">
+            <a:solidFill>
+              <a:srgbClr val="E5E7EB"/>
+            </a:solidFill>
+            <a:prstDash val="solid"/>
+          </a:ln>
+        </p:spPr>
+      </p:sp>
+      <p:sp>
+        <p:nvSpPr>
+          <p:cNvPr id="19" name="Text 17"/>
+          <p:cNvSpPr/>
+          <p:nvPr/>
+        </p:nvSpPr>
+        <p:spPr>
+          <a:xfrm>
+            <a:off x="3291840" y="1755648"/>
+            <a:ext cx="1645920" cy="420624"/>
           </a:xfrm>
           <a:prstGeom prst="rect">
             <a:avLst/>
@@ -39313,13 +38535,13 @@
             <a:r>
               <a:rPr lang="en-US" sz="1300" b="1" dirty="0">
                 <a:solidFill>
-                  <a:srgbClr val="4C1D95"/>
+                  <a:srgbClr val="0F766E"/>
                 </a:solidFill>
                 <a:latin typeface="Trebuchet MS" pitchFamily="34" charset="0"/>
                 <a:ea typeface="Trebuchet MS" pitchFamily="34" charset="-122"/>
                 <a:cs typeface="Trebuchet MS" pitchFamily="34" charset="-120"/>
               </a:rPr>
-              <a:t>re-</a:t>
+              <a:t>assist</a:t>
             </a:r>
             <a:endParaRPr lang="en-US" sz="1300" dirty="0"/>
           </a:p>
@@ -39327,20 +38549,20 @@
       </p:sp>
       <p:sp>
         <p:nvSpPr>
-          <p:cNvPr id="19" name="Shape 17"/>
-          <p:cNvSpPr/>
-          <p:nvPr/>
-        </p:nvSpPr>
-        <p:spPr>
-          <a:xfrm>
-            <a:off x="3291840" y="1755648"/>
-            <a:ext cx="1645920" cy="420624"/>
-          </a:xfrm>
-          <a:prstGeom prst="rect">
-            <a:avLst/>
-          </a:prstGeom>
-          <a:solidFill>
-            <a:srgbClr val="CCFBF1"/>
+          <p:cNvPr id="20" name="Shape 18"/>
+          <p:cNvSpPr/>
+          <p:nvPr/>
+        </p:nvSpPr>
+        <p:spPr>
+          <a:xfrm>
+            <a:off x="5943600" y="1755648"/>
+            <a:ext cx="1463040" cy="420624"/>
+          </a:xfrm>
+          <a:prstGeom prst="rect">
+            <a:avLst/>
+          </a:prstGeom>
+          <a:solidFill>
+            <a:srgbClr val="FCE7F3"/>
           </a:solidFill>
           <a:ln w="12700">
             <a:solidFill>
@@ -39352,14 +38574,14 @@
       </p:sp>
       <p:sp>
         <p:nvSpPr>
-          <p:cNvPr id="20" name="Text 18"/>
-          <p:cNvSpPr/>
-          <p:nvPr/>
-        </p:nvSpPr>
-        <p:spPr>
-          <a:xfrm>
-            <a:off x="3291840" y="1755648"/>
-            <a:ext cx="1645920" cy="420624"/>
+          <p:cNvPr id="21" name="Text 19"/>
+          <p:cNvSpPr/>
+          <p:nvPr/>
+        </p:nvSpPr>
+        <p:spPr>
+          <a:xfrm>
+            <a:off x="5943600" y="1755648"/>
+            <a:ext cx="1463040" cy="420624"/>
           </a:xfrm>
           <a:prstGeom prst="rect">
             <a:avLst/>
@@ -39377,13 +38599,13 @@
             <a:r>
               <a:rPr lang="en-US" sz="1300" b="1" dirty="0">
                 <a:solidFill>
-                  <a:srgbClr val="0F766E"/>
+                  <a:srgbClr val="9D174D"/>
                 </a:solidFill>
                 <a:latin typeface="Trebuchet MS" pitchFamily="34" charset="0"/>
                 <a:ea typeface="Trebuchet MS" pitchFamily="34" charset="-122"/>
                 <a:cs typeface="Trebuchet MS" pitchFamily="34" charset="-120"/>
               </a:rPr>
-              <a:t>assist</a:t>
+              <a:t>-ance</a:t>
             </a:r>
             <a:endParaRPr lang="en-US" sz="1300" dirty="0"/>
           </a:p>
@@ -39391,19 +38613,69 @@
       </p:sp>
       <p:sp>
         <p:nvSpPr>
-          <p:cNvPr id="21" name="Shape 19"/>
-          <p:cNvSpPr/>
-          <p:nvPr/>
-        </p:nvSpPr>
-        <p:spPr>
-          <a:xfrm>
-            <a:off x="5943600" y="1755648"/>
+          <p:cNvPr id="22" name="Shape 20"/>
+          <p:cNvSpPr/>
+          <p:nvPr/>
+        </p:nvSpPr>
+        <p:spPr>
+          <a:xfrm>
+            <a:off x="640080" y="2212848"/>
             <a:ext cx="1463040" cy="420624"/>
           </a:xfrm>
           <a:prstGeom prst="rect">
             <a:avLst/>
           </a:prstGeom>
           <a:solidFill>
+            <a:srgbClr val="F1F5F9"/>
+          </a:solidFill>
+          <a:ln w="12700">
+            <a:solidFill>
+              <a:srgbClr val="E5E7EB"/>
+            </a:solidFill>
+            <a:prstDash val="solid"/>
+          </a:ln>
+        </p:spPr>
+      </p:sp>
+      <p:sp>
+        <p:nvSpPr>
+          <p:cNvPr id="23" name="Shape 21"/>
+          <p:cNvSpPr/>
+          <p:nvPr/>
+        </p:nvSpPr>
+        <p:spPr>
+          <a:xfrm>
+            <a:off x="3291840" y="2212848"/>
+            <a:ext cx="1645920" cy="420624"/>
+          </a:xfrm>
+          <a:prstGeom prst="rect">
+            <a:avLst/>
+          </a:prstGeom>
+          <a:solidFill>
+            <a:srgbClr val="F1F5F9"/>
+          </a:solidFill>
+          <a:ln w="12700">
+            <a:solidFill>
+              <a:srgbClr val="E5E7EB"/>
+            </a:solidFill>
+            <a:prstDash val="solid"/>
+          </a:ln>
+        </p:spPr>
+      </p:sp>
+      <p:sp>
+        <p:nvSpPr>
+          <p:cNvPr id="24" name="Shape 22"/>
+          <p:cNvSpPr/>
+          <p:nvPr/>
+        </p:nvSpPr>
+        <p:spPr>
+          <a:xfrm>
+            <a:off x="5943600" y="2212848"/>
+            <a:ext cx="1463040" cy="420624"/>
+          </a:xfrm>
+          <a:prstGeom prst="rect">
+            <a:avLst/>
+          </a:prstGeom>
+          <a:solidFill>
             <a:srgbClr val="FCE7F3"/>
           </a:solidFill>
           <a:ln w="12700">
@@ -39416,13 +38688,13 @@
       </p:sp>
       <p:sp>
         <p:nvSpPr>
-          <p:cNvPr id="22" name="Text 20"/>
-          <p:cNvSpPr/>
-          <p:nvPr/>
-        </p:nvSpPr>
-        <p:spPr>
-          <a:xfrm>
-            <a:off x="5943600" y="1755648"/>
+          <p:cNvPr id="25" name="Text 23"/>
+          <p:cNvSpPr/>
+          <p:nvPr/>
+        </p:nvSpPr>
+        <p:spPr>
+          <a:xfrm>
+            <a:off x="5943600" y="2212848"/>
             <a:ext cx="1463040" cy="420624"/>
           </a:xfrm>
           <a:prstGeom prst="rect">
@@ -39447,7 +38719,7 @@
                 <a:ea typeface="Trebuchet MS" pitchFamily="34" charset="-122"/>
                 <a:cs typeface="Trebuchet MS" pitchFamily="34" charset="-120"/>
               </a:rPr>
-              <a:t>-ance</a:t>
+              <a:t>-ant</a:t>
             </a:r>
             <a:endParaRPr lang="en-US" sz="1300" dirty="0"/>
           </a:p>
@@ -39455,20 +38727,20 @@
       </p:sp>
       <p:sp>
         <p:nvSpPr>
-          <p:cNvPr id="23" name="Shape 21"/>
-          <p:cNvSpPr/>
-          <p:nvPr/>
-        </p:nvSpPr>
-        <p:spPr>
-          <a:xfrm>
-            <a:off x="640080" y="2212848"/>
+          <p:cNvPr id="26" name="Shape 24"/>
+          <p:cNvSpPr/>
+          <p:nvPr/>
+        </p:nvSpPr>
+        <p:spPr>
+          <a:xfrm>
+            <a:off x="640080" y="2670048"/>
             <a:ext cx="1463040" cy="420624"/>
           </a:xfrm>
           <a:prstGeom prst="rect">
             <a:avLst/>
           </a:prstGeom>
           <a:solidFill>
-            <a:srgbClr val="DDD6FE"/>
+            <a:srgbClr val="F8FAFC"/>
           </a:solidFill>
           <a:ln w="12700">
             <a:solidFill>
@@ -39480,18 +38752,68 @@
       </p:sp>
       <p:sp>
         <p:nvSpPr>
-          <p:cNvPr id="24" name="Text 22"/>
-          <p:cNvSpPr/>
-          <p:nvPr/>
-        </p:nvSpPr>
-        <p:spPr>
-          <a:xfrm>
-            <a:off x="640080" y="2212848"/>
+          <p:cNvPr id="27" name="Shape 25"/>
+          <p:cNvSpPr/>
+          <p:nvPr/>
+        </p:nvSpPr>
+        <p:spPr>
+          <a:xfrm>
+            <a:off x="3291840" y="2670048"/>
+            <a:ext cx="1645920" cy="420624"/>
+          </a:xfrm>
+          <a:prstGeom prst="rect">
+            <a:avLst/>
+          </a:prstGeom>
+          <a:solidFill>
+            <a:srgbClr val="F8FAFC"/>
+          </a:solidFill>
+          <a:ln w="12700">
+            <a:solidFill>
+              <a:srgbClr val="E5E7EB"/>
+            </a:solidFill>
+            <a:prstDash val="solid"/>
+          </a:ln>
+        </p:spPr>
+      </p:sp>
+      <p:sp>
+        <p:nvSpPr>
+          <p:cNvPr id="28" name="Shape 26"/>
+          <p:cNvSpPr/>
+          <p:nvPr/>
+        </p:nvSpPr>
+        <p:spPr>
+          <a:xfrm>
+            <a:off x="5943600" y="2670048"/>
             <a:ext cx="1463040" cy="420624"/>
           </a:xfrm>
           <a:prstGeom prst="rect">
             <a:avLst/>
           </a:prstGeom>
+          <a:solidFill>
+            <a:srgbClr val="FCE7F3"/>
+          </a:solidFill>
+          <a:ln w="12700">
+            <a:solidFill>
+              <a:srgbClr val="E5E7EB"/>
+            </a:solidFill>
+            <a:prstDash val="solid"/>
+          </a:ln>
+        </p:spPr>
+      </p:sp>
+      <p:sp>
+        <p:nvSpPr>
+          <p:cNvPr id="29" name="Text 27"/>
+          <p:cNvSpPr/>
+          <p:nvPr/>
+        </p:nvSpPr>
+        <p:spPr>
+          <a:xfrm>
+            <a:off x="5943600" y="2670048"/>
+            <a:ext cx="1463040" cy="420624"/>
+          </a:xfrm>
+          <a:prstGeom prst="rect">
+            <a:avLst/>
+          </a:prstGeom>
           <a:noFill/>
           <a:ln/>
         </p:spPr>
@@ -39505,13 +38827,13 @@
             <a:r>
               <a:rPr lang="en-US" sz="1300" b="1" dirty="0">
                 <a:solidFill>
-                  <a:srgbClr val="4C1D95"/>
+                  <a:srgbClr val="9D174D"/>
                 </a:solidFill>
                 <a:latin typeface="Trebuchet MS" pitchFamily="34" charset="0"/>
                 <a:ea typeface="Trebuchet MS" pitchFamily="34" charset="-122"/>
                 <a:cs typeface="Trebuchet MS" pitchFamily="34" charset="-120"/>
               </a:rPr>
-              <a:t>co-</a:t>
+              <a:t>-ed</a:t>
             </a:r>
             <a:endParaRPr lang="en-US" sz="1300" dirty="0"/>
           </a:p>
@@ -39519,13 +38841,38 @@
       </p:sp>
       <p:sp>
         <p:nvSpPr>
-          <p:cNvPr id="25" name="Shape 23"/>
-          <p:cNvSpPr/>
-          <p:nvPr/>
-        </p:nvSpPr>
-        <p:spPr>
-          <a:xfrm>
-            <a:off x="3291840" y="2212848"/>
+          <p:cNvPr id="30" name="Shape 28"/>
+          <p:cNvSpPr/>
+          <p:nvPr/>
+        </p:nvSpPr>
+        <p:spPr>
+          <a:xfrm>
+            <a:off x="640080" y="3127248"/>
+            <a:ext cx="1463040" cy="420624"/>
+          </a:xfrm>
+          <a:prstGeom prst="rect">
+            <a:avLst/>
+          </a:prstGeom>
+          <a:solidFill>
+            <a:srgbClr val="F1F5F9"/>
+          </a:solidFill>
+          <a:ln w="12700">
+            <a:solidFill>
+              <a:srgbClr val="E5E7EB"/>
+            </a:solidFill>
+            <a:prstDash val="solid"/>
+          </a:ln>
+        </p:spPr>
+      </p:sp>
+      <p:sp>
+        <p:nvSpPr>
+          <p:cNvPr id="31" name="Shape 29"/>
+          <p:cNvSpPr/>
+          <p:nvPr/>
+        </p:nvSpPr>
+        <p:spPr>
+          <a:xfrm>
+            <a:off x="3291840" y="3127248"/>
             <a:ext cx="1645920" cy="420624"/>
           </a:xfrm>
           <a:prstGeom prst="rect">
@@ -39544,13 +38891,13 @@
       </p:sp>
       <p:sp>
         <p:nvSpPr>
-          <p:cNvPr id="26" name="Shape 24"/>
-          <p:cNvSpPr/>
-          <p:nvPr/>
-        </p:nvSpPr>
-        <p:spPr>
-          <a:xfrm>
-            <a:off x="5943600" y="2212848"/>
+          <p:cNvPr id="32" name="Shape 30"/>
+          <p:cNvSpPr/>
+          <p:nvPr/>
+        </p:nvSpPr>
+        <p:spPr>
+          <a:xfrm>
+            <a:off x="5943600" y="3127248"/>
             <a:ext cx="1463040" cy="420624"/>
           </a:xfrm>
           <a:prstGeom prst="rect">
@@ -39569,13 +38916,13 @@
       </p:sp>
       <p:sp>
         <p:nvSpPr>
-          <p:cNvPr id="27" name="Text 25"/>
-          <p:cNvSpPr/>
-          <p:nvPr/>
-        </p:nvSpPr>
-        <p:spPr>
-          <a:xfrm>
-            <a:off x="5943600" y="2212848"/>
+          <p:cNvPr id="33" name="Text 31"/>
+          <p:cNvSpPr/>
+          <p:nvPr/>
+        </p:nvSpPr>
+        <p:spPr>
+          <a:xfrm>
+            <a:off x="5943600" y="3127248"/>
             <a:ext cx="1463040" cy="420624"/>
           </a:xfrm>
           <a:prstGeom prst="rect">
@@ -39600,7 +38947,7 @@
                 <a:ea typeface="Trebuchet MS" pitchFamily="34" charset="-122"/>
                 <a:cs typeface="Trebuchet MS" pitchFamily="34" charset="-120"/>
               </a:rPr>
-              <a:t>-ant</a:t>
+              <a:t>-ing</a:t>
             </a:r>
             <a:endParaRPr lang="en-US" sz="1300" dirty="0"/>
           </a:p>
@@ -39608,20 +38955,20 @@
       </p:sp>
       <p:sp>
         <p:nvSpPr>
-          <p:cNvPr id="28" name="Shape 26"/>
-          <p:cNvSpPr/>
-          <p:nvPr/>
-        </p:nvSpPr>
-        <p:spPr>
-          <a:xfrm>
-            <a:off x="640080" y="2670048"/>
+          <p:cNvPr id="34" name="Shape 32"/>
+          <p:cNvSpPr/>
+          <p:nvPr/>
+        </p:nvSpPr>
+        <p:spPr>
+          <a:xfrm>
+            <a:off x="640080" y="3584448"/>
             <a:ext cx="1463040" cy="420624"/>
           </a:xfrm>
           <a:prstGeom prst="rect">
             <a:avLst/>
           </a:prstGeom>
           <a:solidFill>
-            <a:srgbClr val="DDD6FE"/>
+            <a:srgbClr val="F8FAFC"/>
           </a:solidFill>
           <a:ln w="12700">
             <a:solidFill>
@@ -39633,18 +38980,68 @@
       </p:sp>
       <p:sp>
         <p:nvSpPr>
-          <p:cNvPr id="29" name="Text 27"/>
-          <p:cNvSpPr/>
-          <p:nvPr/>
-        </p:nvSpPr>
-        <p:spPr>
-          <a:xfrm>
-            <a:off x="640080" y="2670048"/>
+          <p:cNvPr id="35" name="Shape 33"/>
+          <p:cNvSpPr/>
+          <p:nvPr/>
+        </p:nvSpPr>
+        <p:spPr>
+          <a:xfrm>
+            <a:off x="3291840" y="3584448"/>
+            <a:ext cx="1645920" cy="420624"/>
+          </a:xfrm>
+          <a:prstGeom prst="rect">
+            <a:avLst/>
+          </a:prstGeom>
+          <a:solidFill>
+            <a:srgbClr val="F8FAFC"/>
+          </a:solidFill>
+          <a:ln w="12700">
+            <a:solidFill>
+              <a:srgbClr val="E5E7EB"/>
+            </a:solidFill>
+            <a:prstDash val="solid"/>
+          </a:ln>
+        </p:spPr>
+      </p:sp>
+      <p:sp>
+        <p:nvSpPr>
+          <p:cNvPr id="36" name="Shape 34"/>
+          <p:cNvSpPr/>
+          <p:nvPr/>
+        </p:nvSpPr>
+        <p:spPr>
+          <a:xfrm>
+            <a:off x="5943600" y="3584448"/>
             <a:ext cx="1463040" cy="420624"/>
           </a:xfrm>
           <a:prstGeom prst="rect">
             <a:avLst/>
           </a:prstGeom>
+          <a:solidFill>
+            <a:srgbClr val="FCE7F3"/>
+          </a:solidFill>
+          <a:ln w="12700">
+            <a:solidFill>
+              <a:srgbClr val="E5E7EB"/>
+            </a:solidFill>
+            <a:prstDash val="solid"/>
+          </a:ln>
+        </p:spPr>
+      </p:sp>
+      <p:sp>
+        <p:nvSpPr>
+          <p:cNvPr id="37" name="Text 35"/>
+          <p:cNvSpPr/>
+          <p:nvPr/>
+        </p:nvSpPr>
+        <p:spPr>
+          <a:xfrm>
+            <a:off x="5943600" y="3584448"/>
+            <a:ext cx="1463040" cy="420624"/>
+          </a:xfrm>
+          <a:prstGeom prst="rect">
+            <a:avLst/>
+          </a:prstGeom>
           <a:noFill/>
           <a:ln/>
         </p:spPr>
@@ -39658,13 +39055,13 @@
             <a:r>
               <a:rPr lang="en-US" sz="1300" b="1" dirty="0">
                 <a:solidFill>
-                  <a:srgbClr val="4C1D95"/>
+                  <a:srgbClr val="9D174D"/>
                 </a:solidFill>
                 <a:latin typeface="Trebuchet MS" pitchFamily="34" charset="0"/>
                 <a:ea typeface="Trebuchet MS" pitchFamily="34" charset="-122"/>
                 <a:cs typeface="Trebuchet MS" pitchFamily="34" charset="-120"/>
               </a:rPr>
-              <a:t>un-</a:t>
+              <a:t>-s</a:t>
             </a:r>
             <a:endParaRPr lang="en-US" sz="1300" dirty="0"/>
           </a:p>
@@ -39672,402 +39069,7 @@
       </p:sp>
       <p:sp>
         <p:nvSpPr>
-          <p:cNvPr id="30" name="Shape 28"/>
-          <p:cNvSpPr/>
-          <p:nvPr/>
-        </p:nvSpPr>
-        <p:spPr>
-          <a:xfrm>
-            <a:off x="3291840" y="2670048"/>
-            <a:ext cx="1645920" cy="420624"/>
-          </a:xfrm>
-          <a:prstGeom prst="rect">
-            <a:avLst/>
-          </a:prstGeom>
-          <a:solidFill>
-            <a:srgbClr val="F8FAFC"/>
-          </a:solidFill>
-          <a:ln w="12700">
-            <a:solidFill>
-              <a:srgbClr val="E5E7EB"/>
-            </a:solidFill>
-            <a:prstDash val="solid"/>
-          </a:ln>
-        </p:spPr>
-      </p:sp>
-      <p:sp>
-        <p:nvSpPr>
-          <p:cNvPr id="31" name="Shape 29"/>
-          <p:cNvSpPr/>
-          <p:nvPr/>
-        </p:nvSpPr>
-        <p:spPr>
-          <a:xfrm>
-            <a:off x="5943600" y="2670048"/>
-            <a:ext cx="1463040" cy="420624"/>
-          </a:xfrm>
-          <a:prstGeom prst="rect">
-            <a:avLst/>
-          </a:prstGeom>
-          <a:solidFill>
-            <a:srgbClr val="FCE7F3"/>
-          </a:solidFill>
-          <a:ln w="12700">
-            <a:solidFill>
-              <a:srgbClr val="E5E7EB"/>
-            </a:solidFill>
-            <a:prstDash val="solid"/>
-          </a:ln>
-        </p:spPr>
-      </p:sp>
-      <p:sp>
-        <p:nvSpPr>
-          <p:cNvPr id="32" name="Text 30"/>
-          <p:cNvSpPr/>
-          <p:nvPr/>
-        </p:nvSpPr>
-        <p:spPr>
-          <a:xfrm>
-            <a:off x="5943600" y="2670048"/>
-            <a:ext cx="1463040" cy="420624"/>
-          </a:xfrm>
-          <a:prstGeom prst="rect">
-            <a:avLst/>
-          </a:prstGeom>
-          <a:noFill/>
-          <a:ln/>
-        </p:spPr>
-        <p:txBody>
-          <a:bodyPr wrap="square" lIns="0" tIns="0" rIns="0" bIns="0" rtlCol="0" anchor="ctr"/>
-          <a:lstStyle/>
-          <a:p>
-            <a:pPr algn="ctr" indent="0" marL="0">
-              <a:buNone/>
-            </a:pPr>
-            <a:r>
-              <a:rPr lang="en-US" sz="1300" b="1" dirty="0">
-                <a:solidFill>
-                  <a:srgbClr val="9D174D"/>
-                </a:solidFill>
-                <a:latin typeface="Trebuchet MS" pitchFamily="34" charset="0"/>
-                <a:ea typeface="Trebuchet MS" pitchFamily="34" charset="-122"/>
-                <a:cs typeface="Trebuchet MS" pitchFamily="34" charset="-120"/>
-              </a:rPr>
-              <a:t>-ed</a:t>
-            </a:r>
-            <a:endParaRPr lang="en-US" sz="1300" dirty="0"/>
-          </a:p>
-        </p:txBody>
-      </p:sp>
-      <p:sp>
-        <p:nvSpPr>
-          <p:cNvPr id="33" name="Shape 31"/>
-          <p:cNvSpPr/>
-          <p:nvPr/>
-        </p:nvSpPr>
-        <p:spPr>
-          <a:xfrm>
-            <a:off x="640080" y="3127248"/>
-            <a:ext cx="1463040" cy="420624"/>
-          </a:xfrm>
-          <a:prstGeom prst="rect">
-            <a:avLst/>
-          </a:prstGeom>
-          <a:solidFill>
-            <a:srgbClr val="DDD6FE"/>
-          </a:solidFill>
-          <a:ln w="12700">
-            <a:solidFill>
-              <a:srgbClr val="E5E7EB"/>
-            </a:solidFill>
-            <a:prstDash val="solid"/>
-          </a:ln>
-        </p:spPr>
-      </p:sp>
-      <p:sp>
-        <p:nvSpPr>
-          <p:cNvPr id="34" name="Text 32"/>
-          <p:cNvSpPr/>
-          <p:nvPr/>
-        </p:nvSpPr>
-        <p:spPr>
-          <a:xfrm>
-            <a:off x="640080" y="3127248"/>
-            <a:ext cx="1463040" cy="420624"/>
-          </a:xfrm>
-          <a:prstGeom prst="rect">
-            <a:avLst/>
-          </a:prstGeom>
-          <a:noFill/>
-          <a:ln/>
-        </p:spPr>
-        <p:txBody>
-          <a:bodyPr wrap="square" lIns="0" tIns="0" rIns="0" bIns="0" rtlCol="0" anchor="ctr"/>
-          <a:lstStyle/>
-          <a:p>
-            <a:pPr algn="ctr" indent="0" marL="0">
-              <a:buNone/>
-            </a:pPr>
-            <a:r>
-              <a:rPr lang="en-US" sz="1300" b="1" dirty="0">
-                <a:solidFill>
-                  <a:srgbClr val="4C1D95"/>
-                </a:solidFill>
-                <a:latin typeface="Trebuchet MS" pitchFamily="34" charset="0"/>
-                <a:ea typeface="Trebuchet MS" pitchFamily="34" charset="-122"/>
-                <a:cs typeface="Trebuchet MS" pitchFamily="34" charset="-120"/>
-              </a:rPr>
-              <a:t>self-</a:t>
-            </a:r>
-            <a:endParaRPr lang="en-US" sz="1300" dirty="0"/>
-          </a:p>
-        </p:txBody>
-      </p:sp>
-      <p:sp>
-        <p:nvSpPr>
-          <p:cNvPr id="35" name="Shape 33"/>
-          <p:cNvSpPr/>
-          <p:nvPr/>
-        </p:nvSpPr>
-        <p:spPr>
-          <a:xfrm>
-            <a:off x="3291840" y="3127248"/>
-            <a:ext cx="1645920" cy="420624"/>
-          </a:xfrm>
-          <a:prstGeom prst="rect">
-            <a:avLst/>
-          </a:prstGeom>
-          <a:solidFill>
-            <a:srgbClr val="F1F5F9"/>
-          </a:solidFill>
-          <a:ln w="12700">
-            <a:solidFill>
-              <a:srgbClr val="E5E7EB"/>
-            </a:solidFill>
-            <a:prstDash val="solid"/>
-          </a:ln>
-        </p:spPr>
-      </p:sp>
-      <p:sp>
-        <p:nvSpPr>
-          <p:cNvPr id="36" name="Shape 34"/>
-          <p:cNvSpPr/>
-          <p:nvPr/>
-        </p:nvSpPr>
-        <p:spPr>
-          <a:xfrm>
-            <a:off x="5943600" y="3127248"/>
-            <a:ext cx="1463040" cy="420624"/>
-          </a:xfrm>
-          <a:prstGeom prst="rect">
-            <a:avLst/>
-          </a:prstGeom>
-          <a:solidFill>
-            <a:srgbClr val="FCE7F3"/>
-          </a:solidFill>
-          <a:ln w="12700">
-            <a:solidFill>
-              <a:srgbClr val="E5E7EB"/>
-            </a:solidFill>
-            <a:prstDash val="solid"/>
-          </a:ln>
-        </p:spPr>
-      </p:sp>
-      <p:sp>
-        <p:nvSpPr>
-          <p:cNvPr id="37" name="Text 35"/>
-          <p:cNvSpPr/>
-          <p:nvPr/>
-        </p:nvSpPr>
-        <p:spPr>
-          <a:xfrm>
-            <a:off x="5943600" y="3127248"/>
-            <a:ext cx="1463040" cy="420624"/>
-          </a:xfrm>
-          <a:prstGeom prst="rect">
-            <a:avLst/>
-          </a:prstGeom>
-          <a:noFill/>
-          <a:ln/>
-        </p:spPr>
-        <p:txBody>
-          <a:bodyPr wrap="square" lIns="0" tIns="0" rIns="0" bIns="0" rtlCol="0" anchor="ctr"/>
-          <a:lstStyle/>
-          <a:p>
-            <a:pPr algn="ctr" indent="0" marL="0">
-              <a:buNone/>
-            </a:pPr>
-            <a:r>
-              <a:rPr lang="en-US" sz="1300" b="1" dirty="0">
-                <a:solidFill>
-                  <a:srgbClr val="9D174D"/>
-                </a:solidFill>
-                <a:latin typeface="Trebuchet MS" pitchFamily="34" charset="0"/>
-                <a:ea typeface="Trebuchet MS" pitchFamily="34" charset="-122"/>
-                <a:cs typeface="Trebuchet MS" pitchFamily="34" charset="-120"/>
-              </a:rPr>
-              <a:t>-ing</a:t>
-            </a:r>
-            <a:endParaRPr lang="en-US" sz="1300" dirty="0"/>
-          </a:p>
-        </p:txBody>
-      </p:sp>
-      <p:sp>
-        <p:nvSpPr>
-          <p:cNvPr id="38" name="Shape 36"/>
-          <p:cNvSpPr/>
-          <p:nvPr/>
-        </p:nvSpPr>
-        <p:spPr>
-          <a:xfrm>
-            <a:off x="640080" y="3584448"/>
-            <a:ext cx="1463040" cy="420624"/>
-          </a:xfrm>
-          <a:prstGeom prst="rect">
-            <a:avLst/>
-          </a:prstGeom>
-          <a:solidFill>
-            <a:srgbClr val="DDD6FE"/>
-          </a:solidFill>
-          <a:ln w="12700">
-            <a:solidFill>
-              <a:srgbClr val="E5E7EB"/>
-            </a:solidFill>
-            <a:prstDash val="solid"/>
-          </a:ln>
-        </p:spPr>
-      </p:sp>
-      <p:sp>
-        <p:nvSpPr>
-          <p:cNvPr id="39" name="Text 37"/>
-          <p:cNvSpPr/>
-          <p:nvPr/>
-        </p:nvSpPr>
-        <p:spPr>
-          <a:xfrm>
-            <a:off x="640080" y="3584448"/>
-            <a:ext cx="1463040" cy="420624"/>
-          </a:xfrm>
-          <a:prstGeom prst="rect">
-            <a:avLst/>
-          </a:prstGeom>
-          <a:noFill/>
-          <a:ln/>
-        </p:spPr>
-        <p:txBody>
-          <a:bodyPr wrap="square" lIns="0" tIns="0" rIns="0" bIns="0" rtlCol="0" anchor="ctr"/>
-          <a:lstStyle/>
-          <a:p>
-            <a:pPr algn="ctr" indent="0" marL="0">
-              <a:buNone/>
-            </a:pPr>
-            <a:r>
-              <a:rPr lang="en-US" sz="1300" b="1" dirty="0">
-                <a:solidFill>
-                  <a:srgbClr val="4C1D95"/>
-                </a:solidFill>
-                <a:latin typeface="Trebuchet MS" pitchFamily="34" charset="0"/>
-                <a:ea typeface="Trebuchet MS" pitchFamily="34" charset="-122"/>
-                <a:cs typeface="Trebuchet MS" pitchFamily="34" charset="-120"/>
-              </a:rPr>
-              <a:t>non-</a:t>
-            </a:r>
-            <a:endParaRPr lang="en-US" sz="1300" dirty="0"/>
-          </a:p>
-        </p:txBody>
-      </p:sp>
-      <p:sp>
-        <p:nvSpPr>
-          <p:cNvPr id="40" name="Shape 38"/>
-          <p:cNvSpPr/>
-          <p:nvPr/>
-        </p:nvSpPr>
-        <p:spPr>
-          <a:xfrm>
-            <a:off x="3291840" y="3584448"/>
-            <a:ext cx="1645920" cy="420624"/>
-          </a:xfrm>
-          <a:prstGeom prst="rect">
-            <a:avLst/>
-          </a:prstGeom>
-          <a:solidFill>
-            <a:srgbClr val="F8FAFC"/>
-          </a:solidFill>
-          <a:ln w="12700">
-            <a:solidFill>
-              <a:srgbClr val="E5E7EB"/>
-            </a:solidFill>
-            <a:prstDash val="solid"/>
-          </a:ln>
-        </p:spPr>
-      </p:sp>
-      <p:sp>
-        <p:nvSpPr>
-          <p:cNvPr id="41" name="Shape 39"/>
-          <p:cNvSpPr/>
-          <p:nvPr/>
-        </p:nvSpPr>
-        <p:spPr>
-          <a:xfrm>
-            <a:off x="5943600" y="3584448"/>
-            <a:ext cx="1463040" cy="420624"/>
-          </a:xfrm>
-          <a:prstGeom prst="rect">
-            <a:avLst/>
-          </a:prstGeom>
-          <a:solidFill>
-            <a:srgbClr val="FCE7F3"/>
-          </a:solidFill>
-          <a:ln w="12700">
-            <a:solidFill>
-              <a:srgbClr val="E5E7EB"/>
-            </a:solidFill>
-            <a:prstDash val="solid"/>
-          </a:ln>
-        </p:spPr>
-      </p:sp>
-      <p:sp>
-        <p:nvSpPr>
-          <p:cNvPr id="42" name="Text 40"/>
-          <p:cNvSpPr/>
-          <p:nvPr/>
-        </p:nvSpPr>
-        <p:spPr>
-          <a:xfrm>
-            <a:off x="5943600" y="3584448"/>
-            <a:ext cx="1463040" cy="420624"/>
-          </a:xfrm>
-          <a:prstGeom prst="rect">
-            <a:avLst/>
-          </a:prstGeom>
-          <a:noFill/>
-          <a:ln/>
-        </p:spPr>
-        <p:txBody>
-          <a:bodyPr wrap="square" lIns="0" tIns="0" rIns="0" bIns="0" rtlCol="0" anchor="ctr"/>
-          <a:lstStyle/>
-          <a:p>
-            <a:pPr algn="ctr" indent="0" marL="0">
-              <a:buNone/>
-            </a:pPr>
-            <a:r>
-              <a:rPr lang="en-US" sz="1300" b="1" dirty="0">
-                <a:solidFill>
-                  <a:srgbClr val="9D174D"/>
-                </a:solidFill>
-                <a:latin typeface="Trebuchet MS" pitchFamily="34" charset="0"/>
-                <a:ea typeface="Trebuchet MS" pitchFamily="34" charset="-122"/>
-                <a:cs typeface="Trebuchet MS" pitchFamily="34" charset="-120"/>
-              </a:rPr>
-              <a:t>-ive</a:t>
-            </a:r>
-            <a:endParaRPr lang="en-US" sz="1300" dirty="0"/>
-          </a:p>
-        </p:txBody>
-      </p:sp>
-      <p:sp>
-        <p:nvSpPr>
-          <p:cNvPr id="43" name="Text 41"/>
+          <p:cNvPr id="38" name="Text 36"/>
           <p:cNvSpPr/>
           <p:nvPr/>
         </p:nvSpPr>
@@ -40106,14 +39108,14 @@
       </p:sp>
       <p:sp>
         <p:nvSpPr>
-          <p:cNvPr id="44" name="Shape 42"/>
+          <p:cNvPr id="39" name="Shape 37"/>
           <p:cNvSpPr/>
           <p:nvPr/>
         </p:nvSpPr>
         <p:spPr>
           <a:xfrm>
             <a:off x="1508760" y="4178808"/>
-            <a:ext cx="822960" cy="420624"/>
+            <a:ext cx="1536192" cy="420624"/>
           </a:xfrm>
           <a:prstGeom prst="rect">
             <a:avLst>
@@ -40121,11 +39123,11 @@
             </a:avLst>
           </a:prstGeom>
           <a:solidFill>
-            <a:srgbClr val="DDD6FE"/>
+            <a:srgbClr val="CCFBF1"/>
           </a:solidFill>
           <a:ln w="19050">
             <a:solidFill>
-              <a:srgbClr val="7C3AED"/>
+              <a:srgbClr val="0D9488"/>
             </a:solidFill>
             <a:prstDash val="solid"/>
           </a:ln>
@@ -40140,14 +39142,14 @@
       </p:sp>
       <p:sp>
         <p:nvSpPr>
-          <p:cNvPr id="45" name="Text 43"/>
+          <p:cNvPr id="40" name="Text 38"/>
           <p:cNvSpPr/>
           <p:nvPr/>
         </p:nvSpPr>
         <p:spPr>
           <a:xfrm>
             <a:off x="1508760" y="4178808"/>
-            <a:ext cx="822960" cy="420624"/>
+            <a:ext cx="1536192" cy="420624"/>
           </a:xfrm>
           <a:prstGeom prst="rect">
             <a:avLst/>
@@ -40165,13 +39167,13 @@
             <a:r>
               <a:rPr lang="en-US" sz="1300" b="1" dirty="0">
                 <a:solidFill>
-                  <a:srgbClr val="4C1D95"/>
+                  <a:srgbClr val="0F766E"/>
                 </a:solidFill>
                 <a:latin typeface="Trebuchet MS" pitchFamily="34" charset="0"/>
                 <a:ea typeface="Trebuchet MS" pitchFamily="34" charset="-122"/>
                 <a:cs typeface="Trebuchet MS" pitchFamily="34" charset="-120"/>
               </a:rPr>
-              <a:t>re-</a:t>
+              <a:t>'assist'</a:t>
             </a:r>
             <a:endParaRPr lang="en-US" sz="1300" dirty="0"/>
           </a:p>
@@ -40179,13 +39181,13 @@
       </p:sp>
       <p:sp>
         <p:nvSpPr>
-          <p:cNvPr id="46" name="Text 44"/>
-          <p:cNvSpPr/>
-          <p:nvPr/>
-        </p:nvSpPr>
-        <p:spPr>
-          <a:xfrm>
-            <a:off x="2359152" y="4178808"/>
+          <p:cNvPr id="41" name="Text 39"/>
+          <p:cNvSpPr/>
+          <p:nvPr/>
+        </p:nvSpPr>
+        <p:spPr>
+          <a:xfrm>
+            <a:off x="3072384" y="4178808"/>
             <a:ext cx="320040" cy="420624"/>
           </a:xfrm>
           <a:prstGeom prst="rect">
@@ -40218,14 +39220,14 @@
       </p:sp>
       <p:sp>
         <p:nvSpPr>
-          <p:cNvPr id="47" name="Shape 45"/>
-          <p:cNvSpPr/>
-          <p:nvPr/>
-        </p:nvSpPr>
-        <p:spPr>
-          <a:xfrm>
-            <a:off x="2706624" y="4178808"/>
-            <a:ext cx="1536192" cy="420624"/>
+          <p:cNvPr id="42" name="Shape 40"/>
+          <p:cNvSpPr/>
+          <p:nvPr/>
+        </p:nvSpPr>
+        <p:spPr>
+          <a:xfrm>
+            <a:off x="3419856" y="4178808"/>
+            <a:ext cx="1097280" cy="420624"/>
           </a:xfrm>
           <a:prstGeom prst="rect">
             <a:avLst>
@@ -40233,11 +39235,11 @@
             </a:avLst>
           </a:prstGeom>
           <a:solidFill>
-            <a:srgbClr val="CCFBF1"/>
+            <a:srgbClr val="FCE7F3"/>
           </a:solidFill>
           <a:ln w="19050">
             <a:solidFill>
-              <a:srgbClr val="0D9488"/>
+              <a:srgbClr val="DB2777"/>
             </a:solidFill>
             <a:prstDash val="solid"/>
           </a:ln>
@@ -40252,14 +39254,14 @@
       </p:sp>
       <p:sp>
         <p:nvSpPr>
-          <p:cNvPr id="48" name="Text 46"/>
-          <p:cNvSpPr/>
-          <p:nvPr/>
-        </p:nvSpPr>
-        <p:spPr>
-          <a:xfrm>
-            <a:off x="2706624" y="4178808"/>
-            <a:ext cx="1536192" cy="420624"/>
+          <p:cNvPr id="43" name="Text 41"/>
+          <p:cNvSpPr/>
+          <p:nvPr/>
+        </p:nvSpPr>
+        <p:spPr>
+          <a:xfrm>
+            <a:off x="3419856" y="4178808"/>
+            <a:ext cx="1097280" cy="420624"/>
           </a:xfrm>
           <a:prstGeom prst="rect">
             <a:avLst/>
@@ -40277,13 +39279,13 @@
             <a:r>
               <a:rPr lang="en-US" sz="1300" b="1" dirty="0">
                 <a:solidFill>
-                  <a:srgbClr val="0F766E"/>
+                  <a:srgbClr val="9D174D"/>
                 </a:solidFill>
                 <a:latin typeface="Trebuchet MS" pitchFamily="34" charset="0"/>
                 <a:ea typeface="Trebuchet MS" pitchFamily="34" charset="-122"/>
                 <a:cs typeface="Trebuchet MS" pitchFamily="34" charset="-120"/>
               </a:rPr>
-              <a:t>'assist'</a:t>
+              <a:t>-ance</a:t>
             </a:r>
             <a:endParaRPr lang="en-US" sz="1300" dirty="0"/>
           </a:p>
@@ -40291,14 +39293,14 @@
       </p:sp>
       <p:sp>
         <p:nvSpPr>
-          <p:cNvPr id="49" name="Text 47"/>
-          <p:cNvSpPr/>
-          <p:nvPr/>
-        </p:nvSpPr>
-        <p:spPr>
-          <a:xfrm>
-            <a:off x="4270248" y="4178808"/>
-            <a:ext cx="320040" cy="420624"/>
+          <p:cNvPr id="44" name="Text 42"/>
+          <p:cNvSpPr/>
+          <p:nvPr/>
+        </p:nvSpPr>
+        <p:spPr>
+          <a:xfrm>
+            <a:off x="4590288" y="4178808"/>
+            <a:ext cx="365760" cy="420624"/>
           </a:xfrm>
           <a:prstGeom prst="rect">
             <a:avLst/>
@@ -40314,30 +39316,30 @@
               <a:buNone/>
             </a:pPr>
             <a:r>
-              <a:rPr lang="en-US" sz="1400" dirty="0">
-                <a:solidFill>
-                  <a:srgbClr val="475569"/>
+              <a:rPr lang="en-US" sz="1800" b="1" dirty="0">
+                <a:solidFill>
+                  <a:srgbClr val="0D9488"/>
                 </a:solidFill>
                 <a:latin typeface="Trebuchet MS" pitchFamily="34" charset="0"/>
                 <a:ea typeface="Trebuchet MS" pitchFamily="34" charset="-122"/>
                 <a:cs typeface="Trebuchet MS" pitchFamily="34" charset="-120"/>
               </a:rPr>
-              <a:t>+</a:t>
-            </a:r>
-            <a:endParaRPr lang="en-US" sz="1400" dirty="0"/>
-          </a:p>
-        </p:txBody>
-      </p:sp>
-      <p:sp>
-        <p:nvSpPr>
-          <p:cNvPr id="50" name="Shape 48"/>
-          <p:cNvSpPr/>
-          <p:nvPr/>
-        </p:nvSpPr>
-        <p:spPr>
-          <a:xfrm>
-            <a:off x="4617720" y="4178808"/>
-            <a:ext cx="1097280" cy="420624"/>
+              <a:t>=</a:t>
+            </a:r>
+            <a:endParaRPr lang="en-US" sz="1800" dirty="0"/>
+          </a:p>
+        </p:txBody>
+      </p:sp>
+      <p:sp>
+        <p:nvSpPr>
+          <p:cNvPr id="45" name="Shape 43"/>
+          <p:cNvSpPr/>
+          <p:nvPr/>
+        </p:nvSpPr>
+        <p:spPr>
+          <a:xfrm>
+            <a:off x="5001768" y="4178808"/>
+            <a:ext cx="2194560" cy="420624"/>
           </a:xfrm>
           <a:prstGeom prst="rect">
             <a:avLst>
@@ -40345,118 +39347,6 @@
             </a:avLst>
           </a:prstGeom>
           <a:solidFill>
-            <a:srgbClr val="FCE7F3"/>
-          </a:solidFill>
-          <a:ln w="19050">
-            <a:solidFill>
-              <a:srgbClr val="DB2777"/>
-            </a:solidFill>
-            <a:prstDash val="solid"/>
-          </a:ln>
-          <a:effectLst>
-            <a:outerShdw sx="100000" sy="100000" kx="0" ky="0" algn="bl" rotWithShape="0" blurRad="101600" dist="38100" dir="8100000">
-              <a:srgbClr val="000000">
-                <a:alpha val="12000"/>
-              </a:srgbClr>
-            </a:outerShdw>
-          </a:effectLst>
-        </p:spPr>
-      </p:sp>
-      <p:sp>
-        <p:nvSpPr>
-          <p:cNvPr id="51" name="Text 49"/>
-          <p:cNvSpPr/>
-          <p:nvPr/>
-        </p:nvSpPr>
-        <p:spPr>
-          <a:xfrm>
-            <a:off x="4617720" y="4178808"/>
-            <a:ext cx="1097280" cy="420624"/>
-          </a:xfrm>
-          <a:prstGeom prst="rect">
-            <a:avLst/>
-          </a:prstGeom>
-          <a:noFill/>
-          <a:ln/>
-        </p:spPr>
-        <p:txBody>
-          <a:bodyPr wrap="square" lIns="0" tIns="0" rIns="0" bIns="0" rtlCol="0" anchor="ctr"/>
-          <a:lstStyle/>
-          <a:p>
-            <a:pPr algn="ctr" indent="0" marL="0">
-              <a:buNone/>
-            </a:pPr>
-            <a:r>
-              <a:rPr lang="en-US" sz="1300" b="1" dirty="0">
-                <a:solidFill>
-                  <a:srgbClr val="9D174D"/>
-                </a:solidFill>
-                <a:latin typeface="Trebuchet MS" pitchFamily="34" charset="0"/>
-                <a:ea typeface="Trebuchet MS" pitchFamily="34" charset="-122"/>
-                <a:cs typeface="Trebuchet MS" pitchFamily="34" charset="-120"/>
-              </a:rPr>
-              <a:t>-ance</a:t>
-            </a:r>
-            <a:endParaRPr lang="en-US" sz="1300" dirty="0"/>
-          </a:p>
-        </p:txBody>
-      </p:sp>
-      <p:sp>
-        <p:nvSpPr>
-          <p:cNvPr id="52" name="Text 50"/>
-          <p:cNvSpPr/>
-          <p:nvPr/>
-        </p:nvSpPr>
-        <p:spPr>
-          <a:xfrm>
-            <a:off x="5788152" y="4178808"/>
-            <a:ext cx="365760" cy="420624"/>
-          </a:xfrm>
-          <a:prstGeom prst="rect">
-            <a:avLst/>
-          </a:prstGeom>
-          <a:noFill/>
-          <a:ln/>
-        </p:spPr>
-        <p:txBody>
-          <a:bodyPr wrap="square" lIns="0" tIns="0" rIns="0" bIns="0" rtlCol="0" anchor="ctr"/>
-          <a:lstStyle/>
-          <a:p>
-            <a:pPr algn="ctr" indent="0" marL="0">
-              <a:buNone/>
-            </a:pPr>
-            <a:r>
-              <a:rPr lang="en-US" sz="1800" b="1" dirty="0">
-                <a:solidFill>
-                  <a:srgbClr val="0D9488"/>
-                </a:solidFill>
-                <a:latin typeface="Trebuchet MS" pitchFamily="34" charset="0"/>
-                <a:ea typeface="Trebuchet MS" pitchFamily="34" charset="-122"/>
-                <a:cs typeface="Trebuchet MS" pitchFamily="34" charset="-120"/>
-              </a:rPr>
-              <a:t>=</a:t>
-            </a:r>
-            <a:endParaRPr lang="en-US" sz="1800" dirty="0"/>
-          </a:p>
-        </p:txBody>
-      </p:sp>
-      <p:sp>
-        <p:nvSpPr>
-          <p:cNvPr id="53" name="Shape 51"/>
-          <p:cNvSpPr/>
-          <p:nvPr/>
-        </p:nvSpPr>
-        <p:spPr>
-          <a:xfrm>
-            <a:off x="6199632" y="4178808"/>
-            <a:ext cx="2194560" cy="420624"/>
-          </a:xfrm>
-          <a:prstGeom prst="rect">
-            <a:avLst>
-              <a:gd name="adj" fmla="val 17391"/>
-            </a:avLst>
-          </a:prstGeom>
-          <a:solidFill>
             <a:srgbClr val="0D9488"/>
           </a:solidFill>
           <a:ln w="12700">
@@ -40469,13 +39359,13 @@
       </p:sp>
       <p:sp>
         <p:nvSpPr>
-          <p:cNvPr id="54" name="Text 52"/>
-          <p:cNvSpPr/>
-          <p:nvPr/>
-        </p:nvSpPr>
-        <p:spPr>
-          <a:xfrm>
-            <a:off x="6199632" y="4178808"/>
+          <p:cNvPr id="46" name="Text 44"/>
+          <p:cNvSpPr/>
+          <p:nvPr/>
+        </p:nvSpPr>
+        <p:spPr>
+          <a:xfrm>
+            <a:off x="5001768" y="4178808"/>
             <a:ext cx="2194560" cy="420624"/>
           </a:xfrm>
           <a:prstGeom prst="rect">
@@ -40792,7 +39682,7 @@
                 <a:ea typeface="Calibri" pitchFamily="34" charset="-122"/>
                 <a:cs typeface="Calibri" pitchFamily="34" charset="-120"/>
               </a:rPr>
-              <a:t>Word Labs  •  wordlabs.app  •  Root: 'assist' = to help or support someone</a:t>
+              <a:t>Word Labs  •  wordlabs.app  •  Root: 'assist' = help</a:t>
             </a:r>
             <a:endParaRPr lang="en-US" sz="800" dirty="0"/>
           </a:p>
@@ -40970,7 +39860,7 @@
                 <a:ea typeface="Calibri" pitchFamily="34" charset="-122"/>
                 <a:cs typeface="Calibri" pitchFamily="34" charset="-120"/>
               </a:rPr>
-              <a:t>Currently helping someone with a task.</a:t>
+              <a:t>helps someone with something</a:t>
             </a:r>
             <a:endParaRPr lang="en-US" sz="1200" dirty="0"/>
           </a:p>
@@ -41043,7 +39933,7 @@
                 <a:ea typeface="Trebuchet MS" pitchFamily="34" charset="-122"/>
                 <a:cs typeface="Trebuchet MS" pitchFamily="34" charset="-120"/>
               </a:rPr>
-              <a:t>assistance</a:t>
+              <a:t>assists</a:t>
             </a:r>
             <a:endParaRPr lang="en-US" sz="1200" dirty="0"/>
           </a:p>
@@ -41109,702 +39999,7 @@
                 <a:ea typeface="Calibri" pitchFamily="34" charset="-122"/>
                 <a:cs typeface="Calibri" pitchFamily="34" charset="-120"/>
               </a:rPr>
-              <a:t>Helped or supported by someone or something.</a:t>
-            </a:r>
-            <a:endParaRPr lang="en-US" sz="1200" dirty="0"/>
-          </a:p>
-        </p:txBody>
-      </p:sp>
-      <p:sp>
-        <p:nvSpPr>
-          <p:cNvPr id="19" name="Shape 17"/>
-          <p:cNvSpPr/>
-          <p:nvPr/>
-        </p:nvSpPr>
-        <p:spPr>
-          <a:xfrm>
-            <a:off x="365760" y="2249424"/>
-            <a:ext cx="2011680" cy="457200"/>
-          </a:xfrm>
-          <a:prstGeom prst="rect">
-            <a:avLst>
-              <a:gd name="adj" fmla="val 12000"/>
-            </a:avLst>
-          </a:prstGeom>
-          <a:solidFill>
-            <a:srgbClr val="EEF2FF"/>
-          </a:solidFill>
-          <a:ln w="12700">
-            <a:solidFill>
-              <a:srgbClr val="6366F1"/>
-            </a:solidFill>
-            <a:prstDash val="solid"/>
-          </a:ln>
-          <a:effectLst>
-            <a:outerShdw sx="100000" sy="100000" kx="0" ky="0" algn="bl" rotWithShape="0" blurRad="101600" dist="38100" dir="8100000">
-              <a:srgbClr val="000000">
-                <a:alpha val="12000"/>
-              </a:srgbClr>
-            </a:outerShdw>
-          </a:effectLst>
-        </p:spPr>
-      </p:sp>
-      <p:sp>
-        <p:nvSpPr>
-          <p:cNvPr id="20" name="Text 18"/>
-          <p:cNvSpPr/>
-          <p:nvPr/>
-        </p:nvSpPr>
-        <p:spPr>
-          <a:xfrm>
-            <a:off x="365760" y="2249424"/>
-            <a:ext cx="2011680" cy="457200"/>
-          </a:xfrm>
-          <a:prstGeom prst="rect">
-            <a:avLst/>
-          </a:prstGeom>
-          <a:noFill/>
-          <a:ln/>
-        </p:spPr>
-        <p:txBody>
-          <a:bodyPr wrap="square" lIns="0" tIns="0" rIns="0" bIns="0" rtlCol="0" anchor="ctr"/>
-          <a:lstStyle/>
-          <a:p>
-            <a:pPr algn="ctr" indent="0" marL="0">
-              <a:buNone/>
-            </a:pPr>
-            <a:r>
-              <a:rPr lang="en-US" sz="1200" b="1" dirty="0">
-                <a:solidFill>
-                  <a:srgbClr val="4338CA"/>
-                </a:solidFill>
-                <a:latin typeface="Trebuchet MS" pitchFamily="34" charset="0"/>
-                <a:ea typeface="Trebuchet MS" pitchFamily="34" charset="-122"/>
-                <a:cs typeface="Trebuchet MS" pitchFamily="34" charset="-120"/>
-              </a:rPr>
-              <a:t>assistant</a:t>
-            </a:r>
-            <a:endParaRPr lang="en-US" sz="1200" dirty="0"/>
-          </a:p>
-        </p:txBody>
-      </p:sp>
-      <p:sp>
-        <p:nvSpPr>
-          <p:cNvPr id="21" name="Shape 19"/>
-          <p:cNvSpPr/>
-          <p:nvPr/>
-        </p:nvSpPr>
-        <p:spPr>
-          <a:xfrm>
-            <a:off x="2514600" y="2249424"/>
-            <a:ext cx="6263640" cy="457200"/>
-          </a:xfrm>
-          <a:prstGeom prst="rect">
-            <a:avLst>
-              <a:gd name="adj" fmla="val 12000"/>
-            </a:avLst>
-          </a:prstGeom>
-          <a:solidFill>
-            <a:srgbClr val="F8FAFC"/>
-          </a:solidFill>
-          <a:ln w="12700">
-            <a:solidFill>
-              <a:srgbClr val="E2E8F0"/>
-            </a:solidFill>
-            <a:prstDash val="solid"/>
-          </a:ln>
-        </p:spPr>
-      </p:sp>
-      <p:sp>
-        <p:nvSpPr>
-          <p:cNvPr id="22" name="Text 20"/>
-          <p:cNvSpPr/>
-          <p:nvPr/>
-        </p:nvSpPr>
-        <p:spPr>
-          <a:xfrm>
-            <a:off x="2651760" y="2249424"/>
-            <a:ext cx="6035040" cy="457200"/>
-          </a:xfrm>
-          <a:prstGeom prst="rect">
-            <a:avLst/>
-          </a:prstGeom>
-          <a:noFill/>
-          <a:ln/>
-        </p:spPr>
-        <p:txBody>
-          <a:bodyPr wrap="square" rtlCol="0" anchor="ctr"/>
-          <a:lstStyle/>
-          <a:p>
-            <a:pPr algn="l" indent="0" marL="0">
-              <a:buNone/>
-            </a:pPr>
-            <a:r>
-              <a:rPr lang="en-US" sz="1200" dirty="0">
-                <a:solidFill>
-                  <a:srgbClr val="0F172A"/>
-                </a:solidFill>
-                <a:latin typeface="Calibri" pitchFamily="34" charset="0"/>
-                <a:ea typeface="Calibri" pitchFamily="34" charset="-122"/>
-                <a:cs typeface="Calibri" pitchFamily="34" charset="-120"/>
-              </a:rPr>
-              <a:t>Designed to help people, especially those with disabilities.</a:t>
-            </a:r>
-            <a:endParaRPr lang="en-US" sz="1200" dirty="0"/>
-          </a:p>
-        </p:txBody>
-      </p:sp>
-      <p:sp>
-        <p:nvSpPr>
-          <p:cNvPr id="23" name="Shape 21"/>
-          <p:cNvSpPr/>
-          <p:nvPr/>
-        </p:nvSpPr>
-        <p:spPr>
-          <a:xfrm>
-            <a:off x="365760" y="2779776"/>
-            <a:ext cx="2011680" cy="457200"/>
-          </a:xfrm>
-          <a:prstGeom prst="rect">
-            <a:avLst>
-              <a:gd name="adj" fmla="val 12000"/>
-            </a:avLst>
-          </a:prstGeom>
-          <a:solidFill>
-            <a:srgbClr val="EEF2FF"/>
-          </a:solidFill>
-          <a:ln w="12700">
-            <a:solidFill>
-              <a:srgbClr val="6366F1"/>
-            </a:solidFill>
-            <a:prstDash val="solid"/>
-          </a:ln>
-          <a:effectLst>
-            <a:outerShdw sx="100000" sy="100000" kx="0" ky="0" algn="bl" rotWithShape="0" blurRad="101600" dist="38100" dir="8100000">
-              <a:srgbClr val="000000">
-                <a:alpha val="12000"/>
-              </a:srgbClr>
-            </a:outerShdw>
-          </a:effectLst>
-        </p:spPr>
-      </p:sp>
-      <p:sp>
-        <p:nvSpPr>
-          <p:cNvPr id="24" name="Text 22"/>
-          <p:cNvSpPr/>
-          <p:nvPr/>
-        </p:nvSpPr>
-        <p:spPr>
-          <a:xfrm>
-            <a:off x="365760" y="2779776"/>
-            <a:ext cx="2011680" cy="457200"/>
-          </a:xfrm>
-          <a:prstGeom prst="rect">
-            <a:avLst/>
-          </a:prstGeom>
-          <a:noFill/>
-          <a:ln/>
-        </p:spPr>
-        <p:txBody>
-          <a:bodyPr wrap="square" lIns="0" tIns="0" rIns="0" bIns="0" rtlCol="0" anchor="ctr"/>
-          <a:lstStyle/>
-          <a:p>
-            <a:pPr algn="ctr" indent="0" marL="0">
-              <a:buNone/>
-            </a:pPr>
-            <a:r>
-              <a:rPr lang="en-US" sz="1200" b="1" dirty="0">
-                <a:solidFill>
-                  <a:srgbClr val="4338CA"/>
-                </a:solidFill>
-                <a:latin typeface="Trebuchet MS" pitchFamily="34" charset="0"/>
-                <a:ea typeface="Trebuchet MS" pitchFamily="34" charset="-122"/>
-                <a:cs typeface="Trebuchet MS" pitchFamily="34" charset="-120"/>
-              </a:rPr>
-              <a:t>assisted</a:t>
-            </a:r>
-            <a:endParaRPr lang="en-US" sz="1200" dirty="0"/>
-          </a:p>
-        </p:txBody>
-      </p:sp>
-      <p:sp>
-        <p:nvSpPr>
-          <p:cNvPr id="25" name="Shape 23"/>
-          <p:cNvSpPr/>
-          <p:nvPr/>
-        </p:nvSpPr>
-        <p:spPr>
-          <a:xfrm>
-            <a:off x="2514600" y="2779776"/>
-            <a:ext cx="6263640" cy="457200"/>
-          </a:xfrm>
-          <a:prstGeom prst="rect">
-            <a:avLst>
-              <a:gd name="adj" fmla="val 12000"/>
-            </a:avLst>
-          </a:prstGeom>
-          <a:solidFill>
-            <a:srgbClr val="F8FAFC"/>
-          </a:solidFill>
-          <a:ln w="12700">
-            <a:solidFill>
-              <a:srgbClr val="E2E8F0"/>
-            </a:solidFill>
-            <a:prstDash val="solid"/>
-          </a:ln>
-        </p:spPr>
-      </p:sp>
-      <p:sp>
-        <p:nvSpPr>
-          <p:cNvPr id="26" name="Text 24"/>
-          <p:cNvSpPr/>
-          <p:nvPr/>
-        </p:nvSpPr>
-        <p:spPr>
-          <a:xfrm>
-            <a:off x="2651760" y="2779776"/>
-            <a:ext cx="6035040" cy="457200"/>
-          </a:xfrm>
-          <a:prstGeom prst="rect">
-            <a:avLst/>
-          </a:prstGeom>
-          <a:noFill/>
-          <a:ln/>
-        </p:spPr>
-        <p:txBody>
-          <a:bodyPr wrap="square" rtlCol="0" anchor="ctr"/>
-          <a:lstStyle/>
-          <a:p>
-            <a:pPr algn="l" indent="0" marL="0">
-              <a:buNone/>
-            </a:pPr>
-            <a:r>
-              <a:rPr lang="en-US" sz="1200" dirty="0">
-                <a:solidFill>
-                  <a:srgbClr val="0F172A"/>
-                </a:solidFill>
-                <a:latin typeface="Calibri" pitchFamily="34" charset="0"/>
-                <a:ea typeface="Calibri" pitchFamily="34" charset="-122"/>
-                <a:cs typeface="Calibri" pitchFamily="34" charset="-120"/>
-              </a:rPr>
-              <a:t>A person who helps someone else with their work.</a:t>
-            </a:r>
-            <a:endParaRPr lang="en-US" sz="1200" dirty="0"/>
-          </a:p>
-        </p:txBody>
-      </p:sp>
-      <p:sp>
-        <p:nvSpPr>
-          <p:cNvPr id="27" name="Shape 25"/>
-          <p:cNvSpPr/>
-          <p:nvPr/>
-        </p:nvSpPr>
-        <p:spPr>
-          <a:xfrm>
-            <a:off x="365760" y="3310128"/>
-            <a:ext cx="2011680" cy="457200"/>
-          </a:xfrm>
-          <a:prstGeom prst="rect">
-            <a:avLst>
-              <a:gd name="adj" fmla="val 12000"/>
-            </a:avLst>
-          </a:prstGeom>
-          <a:solidFill>
-            <a:srgbClr val="EEF2FF"/>
-          </a:solidFill>
-          <a:ln w="12700">
-            <a:solidFill>
-              <a:srgbClr val="6366F1"/>
-            </a:solidFill>
-            <a:prstDash val="solid"/>
-          </a:ln>
-          <a:effectLst>
-            <a:outerShdw sx="100000" sy="100000" kx="0" ky="0" algn="bl" rotWithShape="0" blurRad="101600" dist="38100" dir="8100000">
-              <a:srgbClr val="000000">
-                <a:alpha val="12000"/>
-              </a:srgbClr>
-            </a:outerShdw>
-          </a:effectLst>
-        </p:spPr>
-      </p:sp>
-      <p:sp>
-        <p:nvSpPr>
-          <p:cNvPr id="28" name="Text 26"/>
-          <p:cNvSpPr/>
-          <p:nvPr/>
-        </p:nvSpPr>
-        <p:spPr>
-          <a:xfrm>
-            <a:off x="365760" y="3310128"/>
-            <a:ext cx="2011680" cy="457200"/>
-          </a:xfrm>
-          <a:prstGeom prst="rect">
-            <a:avLst/>
-          </a:prstGeom>
-          <a:noFill/>
-          <a:ln/>
-        </p:spPr>
-        <p:txBody>
-          <a:bodyPr wrap="square" lIns="0" tIns="0" rIns="0" bIns="0" rtlCol="0" anchor="ctr"/>
-          <a:lstStyle/>
-          <a:p>
-            <a:pPr algn="ctr" indent="0" marL="0">
-              <a:buNone/>
-            </a:pPr>
-            <a:r>
-              <a:rPr lang="en-US" sz="1200" b="1" dirty="0">
-                <a:solidFill>
-                  <a:srgbClr val="4338CA"/>
-                </a:solidFill>
-                <a:latin typeface="Trebuchet MS" pitchFamily="34" charset="0"/>
-                <a:ea typeface="Trebuchet MS" pitchFamily="34" charset="-122"/>
-                <a:cs typeface="Trebuchet MS" pitchFamily="34" charset="-120"/>
-              </a:rPr>
-              <a:t>assisting</a:t>
-            </a:r>
-            <a:endParaRPr lang="en-US" sz="1200" dirty="0"/>
-          </a:p>
-        </p:txBody>
-      </p:sp>
-      <p:sp>
-        <p:nvSpPr>
-          <p:cNvPr id="29" name="Shape 27"/>
-          <p:cNvSpPr/>
-          <p:nvPr/>
-        </p:nvSpPr>
-        <p:spPr>
-          <a:xfrm>
-            <a:off x="2514600" y="3310128"/>
-            <a:ext cx="6263640" cy="457200"/>
-          </a:xfrm>
-          <a:prstGeom prst="rect">
-            <a:avLst>
-              <a:gd name="adj" fmla="val 12000"/>
-            </a:avLst>
-          </a:prstGeom>
-          <a:solidFill>
-            <a:srgbClr val="F8FAFC"/>
-          </a:solidFill>
-          <a:ln w="12700">
-            <a:solidFill>
-              <a:srgbClr val="E2E8F0"/>
-            </a:solidFill>
-            <a:prstDash val="solid"/>
-          </a:ln>
-        </p:spPr>
-      </p:sp>
-      <p:sp>
-        <p:nvSpPr>
-          <p:cNvPr id="30" name="Text 28"/>
-          <p:cNvSpPr/>
-          <p:nvPr/>
-        </p:nvSpPr>
-        <p:spPr>
-          <a:xfrm>
-            <a:off x="2651760" y="3310128"/>
-            <a:ext cx="6035040" cy="457200"/>
-          </a:xfrm>
-          <a:prstGeom prst="rect">
-            <a:avLst/>
-          </a:prstGeom>
-          <a:noFill/>
-          <a:ln/>
-        </p:spPr>
-        <p:txBody>
-          <a:bodyPr wrap="square" rtlCol="0" anchor="ctr"/>
-          <a:lstStyle/>
-          <a:p>
-            <a:pPr algn="l" indent="0" marL="0">
-              <a:buNone/>
-            </a:pPr>
-            <a:r>
-              <a:rPr lang="en-US" sz="1200" dirty="0">
-                <a:solidFill>
-                  <a:srgbClr val="0F172A"/>
-                </a:solidFill>
-                <a:latin typeface="Calibri" pitchFamily="34" charset="0"/>
-                <a:ea typeface="Calibri" pitchFamily="34" charset="-122"/>
-                <a:cs typeface="Calibri" pitchFamily="34" charset="-120"/>
-              </a:rPr>
-              <a:t>Done without any help from others.</a:t>
-            </a:r>
-            <a:endParaRPr lang="en-US" sz="1200" dirty="0"/>
-          </a:p>
-        </p:txBody>
-      </p:sp>
-      <p:sp>
-        <p:nvSpPr>
-          <p:cNvPr id="31" name="Shape 29"/>
-          <p:cNvSpPr/>
-          <p:nvPr/>
-        </p:nvSpPr>
-        <p:spPr>
-          <a:xfrm>
-            <a:off x="365760" y="3840480"/>
-            <a:ext cx="2011680" cy="457200"/>
-          </a:xfrm>
-          <a:prstGeom prst="rect">
-            <a:avLst>
-              <a:gd name="adj" fmla="val 12000"/>
-            </a:avLst>
-          </a:prstGeom>
-          <a:solidFill>
-            <a:srgbClr val="EEF2FF"/>
-          </a:solidFill>
-          <a:ln w="12700">
-            <a:solidFill>
-              <a:srgbClr val="6366F1"/>
-            </a:solidFill>
-            <a:prstDash val="solid"/>
-          </a:ln>
-          <a:effectLst>
-            <a:outerShdw sx="100000" sy="100000" kx="0" ky="0" algn="bl" rotWithShape="0" blurRad="101600" dist="38100" dir="8100000">
-              <a:srgbClr val="000000">
-                <a:alpha val="12000"/>
-              </a:srgbClr>
-            </a:outerShdw>
-          </a:effectLst>
-        </p:spPr>
-      </p:sp>
-      <p:sp>
-        <p:nvSpPr>
-          <p:cNvPr id="32" name="Text 30"/>
-          <p:cNvSpPr/>
-          <p:nvPr/>
-        </p:nvSpPr>
-        <p:spPr>
-          <a:xfrm>
-            <a:off x="365760" y="3840480"/>
-            <a:ext cx="2011680" cy="457200"/>
-          </a:xfrm>
-          <a:prstGeom prst="rect">
-            <a:avLst/>
-          </a:prstGeom>
-          <a:noFill/>
-          <a:ln/>
-        </p:spPr>
-        <p:txBody>
-          <a:bodyPr wrap="square" lIns="0" tIns="0" rIns="0" bIns="0" rtlCol="0" anchor="ctr"/>
-          <a:lstStyle/>
-          <a:p>
-            <a:pPr algn="ctr" indent="0" marL="0">
-              <a:buNone/>
-            </a:pPr>
-            <a:r>
-              <a:rPr lang="en-US" sz="1200" b="1" dirty="0">
-                <a:solidFill>
-                  <a:srgbClr val="4338CA"/>
-                </a:solidFill>
-                <a:latin typeface="Trebuchet MS" pitchFamily="34" charset="0"/>
-                <a:ea typeface="Trebuchet MS" pitchFamily="34" charset="-122"/>
-                <a:cs typeface="Trebuchet MS" pitchFamily="34" charset="-120"/>
-              </a:rPr>
-              <a:t>assistive</a:t>
-            </a:r>
-            <a:endParaRPr lang="en-US" sz="1200" dirty="0"/>
-          </a:p>
-        </p:txBody>
-      </p:sp>
-      <p:sp>
-        <p:nvSpPr>
-          <p:cNvPr id="33" name="Shape 31"/>
-          <p:cNvSpPr/>
-          <p:nvPr/>
-        </p:nvSpPr>
-        <p:spPr>
-          <a:xfrm>
-            <a:off x="2514600" y="3840480"/>
-            <a:ext cx="6263640" cy="457200"/>
-          </a:xfrm>
-          <a:prstGeom prst="rect">
-            <a:avLst>
-              <a:gd name="adj" fmla="val 12000"/>
-            </a:avLst>
-          </a:prstGeom>
-          <a:solidFill>
-            <a:srgbClr val="F8FAFC"/>
-          </a:solidFill>
-          <a:ln w="12700">
-            <a:solidFill>
-              <a:srgbClr val="E2E8F0"/>
-            </a:solidFill>
-            <a:prstDash val="solid"/>
-          </a:ln>
-        </p:spPr>
-      </p:sp>
-      <p:sp>
-        <p:nvSpPr>
-          <p:cNvPr id="34" name="Text 32"/>
-          <p:cNvSpPr/>
-          <p:nvPr/>
-        </p:nvSpPr>
-        <p:spPr>
-          <a:xfrm>
-            <a:off x="2651760" y="3840480"/>
-            <a:ext cx="6035040" cy="457200"/>
-          </a:xfrm>
-          <a:prstGeom prst="rect">
-            <a:avLst/>
-          </a:prstGeom>
-          <a:noFill/>
-          <a:ln/>
-        </p:spPr>
-        <p:txBody>
-          <a:bodyPr wrap="square" rtlCol="0" anchor="ctr"/>
-          <a:lstStyle/>
-          <a:p>
-            <a:pPr algn="l" indent="0" marL="0">
-              <a:buNone/>
-            </a:pPr>
-            <a:r>
-              <a:rPr lang="en-US" sz="1200" dirty="0">
-                <a:solidFill>
-                  <a:srgbClr val="0F172A"/>
-                </a:solidFill>
-                <a:latin typeface="Calibri" pitchFamily="34" charset="0"/>
-                <a:ea typeface="Calibri" pitchFamily="34" charset="-122"/>
-                <a:cs typeface="Calibri" pitchFamily="34" charset="-120"/>
-              </a:rPr>
-              <a:t>To help someone do something.</a:t>
-            </a:r>
-            <a:endParaRPr lang="en-US" sz="1200" dirty="0"/>
-          </a:p>
-        </p:txBody>
-      </p:sp>
-      <p:sp>
-        <p:nvSpPr>
-          <p:cNvPr id="35" name="Shape 33"/>
-          <p:cNvSpPr/>
-          <p:nvPr/>
-        </p:nvSpPr>
-        <p:spPr>
-          <a:xfrm>
-            <a:off x="365760" y="4370832"/>
-            <a:ext cx="2011680" cy="457200"/>
-          </a:xfrm>
-          <a:prstGeom prst="rect">
-            <a:avLst>
-              <a:gd name="adj" fmla="val 12000"/>
-            </a:avLst>
-          </a:prstGeom>
-          <a:solidFill>
-            <a:srgbClr val="EEF2FF"/>
-          </a:solidFill>
-          <a:ln w="12700">
-            <a:solidFill>
-              <a:srgbClr val="6366F1"/>
-            </a:solidFill>
-            <a:prstDash val="solid"/>
-          </a:ln>
-          <a:effectLst>
-            <a:outerShdw sx="100000" sy="100000" kx="0" ky="0" algn="bl" rotWithShape="0" blurRad="101600" dist="38100" dir="8100000">
-              <a:srgbClr val="000000">
-                <a:alpha val="12000"/>
-              </a:srgbClr>
-            </a:outerShdw>
-          </a:effectLst>
-        </p:spPr>
-      </p:sp>
-      <p:sp>
-        <p:nvSpPr>
-          <p:cNvPr id="36" name="Text 34"/>
-          <p:cNvSpPr/>
-          <p:nvPr/>
-        </p:nvSpPr>
-        <p:spPr>
-          <a:xfrm>
-            <a:off x="365760" y="4370832"/>
-            <a:ext cx="2011680" cy="457200"/>
-          </a:xfrm>
-          <a:prstGeom prst="rect">
-            <a:avLst/>
-          </a:prstGeom>
-          <a:noFill/>
-          <a:ln/>
-        </p:spPr>
-        <p:txBody>
-          <a:bodyPr wrap="square" lIns="0" tIns="0" rIns="0" bIns="0" rtlCol="0" anchor="ctr"/>
-          <a:lstStyle/>
-          <a:p>
-            <a:pPr algn="ctr" indent="0" marL="0">
-              <a:buNone/>
-            </a:pPr>
-            <a:r>
-              <a:rPr lang="en-US" sz="1200" b="1" dirty="0">
-                <a:solidFill>
-                  <a:srgbClr val="4338CA"/>
-                </a:solidFill>
-                <a:latin typeface="Trebuchet MS" pitchFamily="34" charset="0"/>
-                <a:ea typeface="Trebuchet MS" pitchFamily="34" charset="-122"/>
-                <a:cs typeface="Trebuchet MS" pitchFamily="34" charset="-120"/>
-              </a:rPr>
-              <a:t>unassisted</a:t>
-            </a:r>
-            <a:endParaRPr lang="en-US" sz="1200" dirty="0"/>
-          </a:p>
-        </p:txBody>
-      </p:sp>
-      <p:sp>
-        <p:nvSpPr>
-          <p:cNvPr id="37" name="Shape 35"/>
-          <p:cNvSpPr/>
-          <p:nvPr/>
-        </p:nvSpPr>
-        <p:spPr>
-          <a:xfrm>
-            <a:off x="2514600" y="4370832"/>
-            <a:ext cx="6263640" cy="457200"/>
-          </a:xfrm>
-          <a:prstGeom prst="rect">
-            <a:avLst>
-              <a:gd name="adj" fmla="val 12000"/>
-            </a:avLst>
-          </a:prstGeom>
-          <a:solidFill>
-            <a:srgbClr val="F8FAFC"/>
-          </a:solidFill>
-          <a:ln w="12700">
-            <a:solidFill>
-              <a:srgbClr val="E2E8F0"/>
-            </a:solidFill>
-            <a:prstDash val="solid"/>
-          </a:ln>
-        </p:spPr>
-      </p:sp>
-      <p:sp>
-        <p:nvSpPr>
-          <p:cNvPr id="38" name="Text 36"/>
-          <p:cNvSpPr/>
-          <p:nvPr/>
-        </p:nvSpPr>
-        <p:spPr>
-          <a:xfrm>
-            <a:off x="2651760" y="4370832"/>
-            <a:ext cx="6035040" cy="457200"/>
-          </a:xfrm>
-          <a:prstGeom prst="rect">
-            <a:avLst/>
-          </a:prstGeom>
-          <a:noFill/>
-          <a:ln/>
-        </p:spPr>
-        <p:txBody>
-          <a:bodyPr wrap="square" rtlCol="0" anchor="ctr"/>
-          <a:lstStyle/>
-          <a:p>
-            <a:pPr algn="l" indent="0" marL="0">
-              <a:buNone/>
-            </a:pPr>
-            <a:r>
-              <a:rPr lang="en-US" sz="1200" dirty="0">
-                <a:solidFill>
-                  <a:srgbClr val="0F172A"/>
-                </a:solidFill>
-                <a:latin typeface="Calibri" pitchFamily="34" charset="0"/>
-                <a:ea typeface="Calibri" pitchFamily="34" charset="-122"/>
-                <a:cs typeface="Calibri" pitchFamily="34" charset="-120"/>
-              </a:rPr>
-              <a:t>Help or support given to someone who needs it.</a:t>
+              <a:t>to help someone do something</a:t>
             </a:r>
             <a:endParaRPr lang="en-US" sz="1200" dirty="0"/>
           </a:p>
@@ -42096,7 +40291,7 @@
                 <a:ea typeface="Calibri" pitchFamily="34" charset="-122"/>
                 <a:cs typeface="Calibri" pitchFamily="34" charset="-120"/>
               </a:rPr>
-              <a:t>Word Labs  •  wordlabs.app  •  Root: 'assist' = to help or support someone</a:t>
+              <a:t>Word Labs  •  wordlabs.app  •  Root: 'assist' = help</a:t>
             </a:r>
             <a:endParaRPr lang="en-US" sz="800" dirty="0"/>
           </a:p>
@@ -42299,7 +40494,7 @@
                 <a:ea typeface="Calibri" pitchFamily="34" charset="-122"/>
                 <a:cs typeface="Calibri" pitchFamily="34" charset="-120"/>
               </a:rPr>
-              <a:t>The teaching assistant helped the students with their maths problems during class.</a:t>
+              <a:t>Can you assist me with carrying these boxes?</a:t>
             </a:r>
             <a:endParaRPr lang="en-US" sz="1500" dirty="0"/>
           </a:p>
@@ -42463,7 +40658,7 @@
                 <a:ea typeface="Calibri" pitchFamily="34" charset="-122"/>
                 <a:cs typeface="Calibri" pitchFamily="34" charset="-120"/>
               </a:rPr>
-              <a:t>The nurse provided assistance to the patient who needed help walking down the corridor.</a:t>
+              <a:t>The volunteer assists elderly residents with their shopping.</a:t>
             </a:r>
             <a:endParaRPr lang="en-US" sz="1500" dirty="0"/>
           </a:p>
@@ -42627,7 +40822,7 @@
                 <a:ea typeface="Calibri" pitchFamily="34" charset="-122"/>
                 <a:cs typeface="Calibri" pitchFamily="34" charset="-120"/>
               </a:rPr>
-              <a:t>Sam completed the science experiment unassisted, which made his teacher very proud.</a:t>
+              <a:t>The nurse assisted the doctor during the operation.</a:t>
             </a:r>
             <a:endParaRPr lang="en-US" sz="1500" dirty="0"/>
           </a:p>
